--- a/Unit 3 - Business Application in AI.pptx
+++ b/Unit 3 - Business Application in AI.pptx
@@ -4096,7 +4096,7 @@
         </p:nvSpPr>
         <p:spPr>
           <a:xfrm>
-            <a:off x="932688" y="4956048"/>
+            <a:off x="932688" y="4882896"/>
             <a:ext cx="974126" cy="329184"/>
           </a:xfrm>
           <a:prstGeom prst="roundRect">
@@ -4163,7 +4163,7 @@
         </p:nvSpPr>
         <p:spPr>
           <a:xfrm>
-            <a:off x="2034830" y="4956048"/>
+            <a:off x="2034830" y="4882896"/>
             <a:ext cx="815178" cy="329184"/>
           </a:xfrm>
           <a:prstGeom prst="roundRect">
@@ -4230,7 +4230,7 @@
         </p:nvSpPr>
         <p:spPr>
           <a:xfrm>
-            <a:off x="2978024" y="4956048"/>
+            <a:off x="2978024" y="4882896"/>
             <a:ext cx="555225" cy="329184"/>
           </a:xfrm>
           <a:prstGeom prst="roundRect">
@@ -4297,7 +4297,7 @@
         </p:nvSpPr>
         <p:spPr>
           <a:xfrm>
-            <a:off x="3661266" y="4956048"/>
+            <a:off x="3661266" y="4882896"/>
             <a:ext cx="1009647" cy="329184"/>
           </a:xfrm>
           <a:prstGeom prst="roundRect">
@@ -4364,7 +4364,7 @@
         </p:nvSpPr>
         <p:spPr>
           <a:xfrm>
-            <a:off x="4798929" y="4956048"/>
+            <a:off x="4798929" y="4882896"/>
             <a:ext cx="938259" cy="329184"/>
           </a:xfrm>
           <a:prstGeom prst="roundRect">
@@ -4431,7 +4431,7 @@
         </p:nvSpPr>
         <p:spPr>
           <a:xfrm>
-            <a:off x="932688" y="5742432"/>
+            <a:off x="932688" y="5614416"/>
             <a:ext cx="3840480" cy="12700"/>
           </a:xfrm>
           <a:prstGeom prst="rect">
@@ -4475,8 +4475,8 @@
         </p:nvSpPr>
         <p:spPr>
           <a:xfrm>
-            <a:off x="932688" y="5925312"/>
-            <a:ext cx="5486400" cy="640080"/>
+            <a:off x="932688" y="5797296"/>
+            <a:ext cx="4937760" cy="640080"/>
           </a:xfrm>
           <a:prstGeom prst="rect">
             <a:avLst/>
@@ -4491,7 +4491,7 @@
           <a:p>
             <a:pPr algn="l">
               <a:lnSpc>
-                <a:spcPct val="130000"/>
+                <a:spcPct val="122000"/>
               </a:lnSpc>
               <a:spcBef>
                 <a:spcPts val="0"/>
@@ -4501,33 +4501,102 @@
               </a:spcAft>
             </a:pPr>
             <a:r>
-              <a:rPr sz="1050" b="1" i="0">
-                <a:solidFill>
-                  <a:srgbClr val="FFFFFF"/>
-                </a:solidFill>
-                <a:latin typeface="Segoe UI"/>
-                <a:ea typeface="Segoe UI"/>
-                <a:cs typeface="Segoe UI"/>
-              </a:rPr>
-              <a:t>PGPM · Systems Specialisation</a:t>
+              <a:rPr sz="850" b="1" i="0" spc="160">
+                <a:solidFill>
+                  <a:srgbClr val="00B3A4"/>
+                </a:solidFill>
+                <a:latin typeface="Segoe UI"/>
+                <a:ea typeface="Segoe UI"/>
+                <a:cs typeface="Segoe UI"/>
+              </a:rPr>
+              <a:t>PRESENTED BY</a:t>
             </a:r>
           </a:p>
           <a:p>
             <a:pPr algn="l">
               <a:lnSpc>
-                <a:spcPct val="130000"/>
+                <a:spcPct val="122000"/>
               </a:lnSpc>
               <a:spcBef>
-                <a:spcPts val="0"/>
+                <a:spcPts val="400"/>
               </a:spcBef>
               <a:spcAft>
                 <a:spcPts val="0"/>
               </a:spcAft>
             </a:pPr>
             <a:r>
+              <a:rPr sz="1300" b="1" i="0">
+                <a:solidFill>
+                  <a:srgbClr val="FFFFFF"/>
+                </a:solidFill>
+                <a:latin typeface="Segoe UI"/>
+                <a:ea typeface="Segoe UI"/>
+                <a:cs typeface="Segoe UI"/>
+              </a:rPr>
+              <a:t>Lingesh K</a:t>
+            </a:r>
+            <a:r>
               <a:rPr sz="1050" b="0" i="0">
                 <a:solidFill>
-                  <a:srgbClr val="8B9DBE"/>
+                  <a:srgbClr val="7E91B4"/>
+                </a:solidFill>
+                <a:latin typeface="Segoe UI"/>
+                <a:ea typeface="Segoe UI"/>
+                <a:cs typeface="Segoe UI"/>
+              </a:rPr>
+              <a:t>      Register No. </a:t>
+            </a:r>
+            <a:r>
+              <a:rPr sz="1050" b="1" i="0">
+                <a:solidFill>
+                  <a:srgbClr val="C5D2E8"/>
+                </a:solidFill>
+                <a:latin typeface="Segoe UI"/>
+                <a:ea typeface="Segoe UI"/>
+                <a:cs typeface="Segoe UI"/>
+              </a:rPr>
+              <a:t>OSI2509030</a:t>
+            </a:r>
+          </a:p>
+        </p:txBody>
+      </p:sp>
+      <p:sp>
+        <p:nvSpPr>
+          <p:cNvPr id="19" name="TextBox 18"/>
+          <p:cNvSpPr txBox="1"/>
+          <p:nvPr/>
+        </p:nvSpPr>
+        <p:spPr>
+          <a:xfrm>
+            <a:off x="7180783" y="5870448"/>
+            <a:ext cx="4206240" cy="640080"/>
+          </a:xfrm>
+          <a:prstGeom prst="rect">
+            <a:avLst/>
+          </a:prstGeom>
+          <a:noFill/>
+        </p:spPr>
+        <p:txBody>
+          <a:bodyPr wrap="square" lIns="0" rIns="0" tIns="0" bIns="0" anchor="t">
+            <a:spAutoFit/>
+          </a:bodyPr>
+          <a:lstStyle/>
+          <a:p>
+            <a:pPr algn="r">
+              <a:lnSpc>
+                <a:spcPct val="134000"/>
+              </a:lnSpc>
+              <a:spcBef>
+                <a:spcPts val="0"/>
+              </a:spcBef>
+              <a:spcAft>
+                <a:spcPts val="0"/>
+              </a:spcAft>
+            </a:pPr>
+            <a:r>
+              <a:rPr sz="1000" b="1" i="0">
+                <a:solidFill>
+                  <a:srgbClr val="C5D2E8"/>
                 </a:solidFill>
                 <a:latin typeface="Segoe UI"/>
                 <a:ea typeface="Segoe UI"/>
@@ -4609,7 +4678,7 @@
         <p:spPr>
           <a:xfrm>
             <a:off x="713232" y="6272784"/>
-            <a:ext cx="8073923" cy="219456"/>
+            <a:ext cx="5597920" cy="219456"/>
           </a:xfrm>
           <a:prstGeom prst="rect">
             <a:avLst/>
@@ -4677,8 +4746,8 @@
         </p:nvSpPr>
         <p:spPr>
           <a:xfrm>
-            <a:off x="10381183" y="6272784"/>
-            <a:ext cx="1097280" cy="219456"/>
+            <a:off x="8826703" y="6272784"/>
+            <a:ext cx="2651760" cy="219456"/>
           </a:xfrm>
           <a:prstGeom prst="rect">
             <a:avLst/>
@@ -4703,9 +4772,31 @@
               </a:spcAft>
             </a:pPr>
             <a:r>
+              <a:rPr sz="900" b="0" i="0">
+                <a:solidFill>
+                  <a:srgbClr val="636E85"/>
+                </a:solidFill>
+                <a:latin typeface="Segoe UI"/>
+                <a:ea typeface="Segoe UI"/>
+                <a:cs typeface="Segoe UI"/>
+              </a:rPr>
+              <a:t>Lingesh K  ·  OSI2509030</a:t>
+            </a:r>
+            <a:r>
+              <a:rPr sz="900" b="0" i="0">
+                <a:solidFill>
+                  <a:srgbClr val="141C2E"/>
+                </a:solidFill>
+                <a:latin typeface="Segoe UI"/>
+                <a:ea typeface="Segoe UI"/>
+                <a:cs typeface="Segoe UI"/>
+              </a:rPr>
+              <a:t>     </a:t>
+            </a:r>
+            <a:r>
               <a:rPr sz="900" b="1" i="0">
                 <a:solidFill>
-                  <a:srgbClr val="636E85"/>
+                  <a:srgbClr val="0E1E3C"/>
                 </a:solidFill>
                 <a:latin typeface="Segoe UI"/>
                 <a:ea typeface="Segoe UI"/>
@@ -6124,7 +6215,7 @@
         <p:spPr>
           <a:xfrm>
             <a:off x="713232" y="6272784"/>
-            <a:ext cx="8073923" cy="219456"/>
+            <a:ext cx="5597920" cy="219456"/>
           </a:xfrm>
           <a:prstGeom prst="rect">
             <a:avLst/>
@@ -6192,8 +6283,8 @@
         </p:nvSpPr>
         <p:spPr>
           <a:xfrm>
-            <a:off x="10381183" y="6272784"/>
-            <a:ext cx="1097280" cy="219456"/>
+            <a:off x="8826703" y="6272784"/>
+            <a:ext cx="2651760" cy="219456"/>
           </a:xfrm>
           <a:prstGeom prst="rect">
             <a:avLst/>
@@ -6218,9 +6309,31 @@
               </a:spcAft>
             </a:pPr>
             <a:r>
+              <a:rPr sz="900" b="0" i="0">
+                <a:solidFill>
+                  <a:srgbClr val="636E85"/>
+                </a:solidFill>
+                <a:latin typeface="Segoe UI"/>
+                <a:ea typeface="Segoe UI"/>
+                <a:cs typeface="Segoe UI"/>
+              </a:rPr>
+              <a:t>Lingesh K  ·  OSI2509030</a:t>
+            </a:r>
+            <a:r>
+              <a:rPr sz="900" b="0" i="0">
+                <a:solidFill>
+                  <a:srgbClr val="141C2E"/>
+                </a:solidFill>
+                <a:latin typeface="Segoe UI"/>
+                <a:ea typeface="Segoe UI"/>
+                <a:cs typeface="Segoe UI"/>
+              </a:rPr>
+              <a:t>     </a:t>
+            </a:r>
+            <a:r>
               <a:rPr sz="900" b="1" i="0">
                 <a:solidFill>
-                  <a:srgbClr val="636E85"/>
+                  <a:srgbClr val="0E1E3C"/>
                 </a:solidFill>
                 <a:latin typeface="Segoe UI"/>
                 <a:ea typeface="Segoe UI"/>
@@ -8289,7 +8402,7 @@
         <p:spPr>
           <a:xfrm>
             <a:off x="987552" y="5943600"/>
-            <a:ext cx="5486400" cy="274320"/>
+            <a:ext cx="6400800" cy="274320"/>
           </a:xfrm>
           <a:prstGeom prst="rect">
             <a:avLst/>
@@ -8398,7 +8511,7 @@
         <p:spPr>
           <a:xfrm>
             <a:off x="713232" y="6272784"/>
-            <a:ext cx="8073923" cy="219456"/>
+            <a:ext cx="5597920" cy="219456"/>
           </a:xfrm>
           <a:prstGeom prst="rect">
             <a:avLst/>
@@ -8466,8 +8579,8 @@
         </p:nvSpPr>
         <p:spPr>
           <a:xfrm>
-            <a:off x="10381183" y="6272784"/>
-            <a:ext cx="1097280" cy="219456"/>
+            <a:off x="8826703" y="6272784"/>
+            <a:ext cx="2651760" cy="219456"/>
           </a:xfrm>
           <a:prstGeom prst="rect">
             <a:avLst/>
@@ -8492,9 +8605,31 @@
               </a:spcAft>
             </a:pPr>
             <a:r>
+              <a:rPr sz="900" b="0" i="0">
+                <a:solidFill>
+                  <a:srgbClr val="636E85"/>
+                </a:solidFill>
+                <a:latin typeface="Segoe UI"/>
+                <a:ea typeface="Segoe UI"/>
+                <a:cs typeface="Segoe UI"/>
+              </a:rPr>
+              <a:t>Lingesh K  ·  OSI2509030</a:t>
+            </a:r>
+            <a:r>
+              <a:rPr sz="900" b="0" i="0">
+                <a:solidFill>
+                  <a:srgbClr val="141C2E"/>
+                </a:solidFill>
+                <a:latin typeface="Segoe UI"/>
+                <a:ea typeface="Segoe UI"/>
+                <a:cs typeface="Segoe UI"/>
+              </a:rPr>
+              <a:t>     </a:t>
+            </a:r>
+            <a:r>
               <a:rPr sz="900" b="1" i="0">
                 <a:solidFill>
-                  <a:srgbClr val="636E85"/>
+                  <a:srgbClr val="0E1E3C"/>
                 </a:solidFill>
                 <a:latin typeface="Segoe UI"/>
                 <a:ea typeface="Segoe UI"/>
@@ -9866,7 +10001,7 @@
         <p:spPr>
           <a:xfrm>
             <a:off x="713232" y="6272784"/>
-            <a:ext cx="8073923" cy="219456"/>
+            <a:ext cx="5597920" cy="219456"/>
           </a:xfrm>
           <a:prstGeom prst="rect">
             <a:avLst/>
@@ -9934,8 +10069,8 @@
         </p:nvSpPr>
         <p:spPr>
           <a:xfrm>
-            <a:off x="10381183" y="6272784"/>
-            <a:ext cx="1097280" cy="219456"/>
+            <a:off x="8826703" y="6272784"/>
+            <a:ext cx="2651760" cy="219456"/>
           </a:xfrm>
           <a:prstGeom prst="rect">
             <a:avLst/>
@@ -9960,9 +10095,31 @@
               </a:spcAft>
             </a:pPr>
             <a:r>
+              <a:rPr sz="900" b="0" i="0">
+                <a:solidFill>
+                  <a:srgbClr val="636E85"/>
+                </a:solidFill>
+                <a:latin typeface="Segoe UI"/>
+                <a:ea typeface="Segoe UI"/>
+                <a:cs typeface="Segoe UI"/>
+              </a:rPr>
+              <a:t>Lingesh K  ·  OSI2509030</a:t>
+            </a:r>
+            <a:r>
+              <a:rPr sz="900" b="0" i="0">
+                <a:solidFill>
+                  <a:srgbClr val="141C2E"/>
+                </a:solidFill>
+                <a:latin typeface="Segoe UI"/>
+                <a:ea typeface="Segoe UI"/>
+                <a:cs typeface="Segoe UI"/>
+              </a:rPr>
+              <a:t>     </a:t>
+            </a:r>
+            <a:r>
               <a:rPr sz="900" b="1" i="0">
                 <a:solidFill>
-                  <a:srgbClr val="636E85"/>
+                  <a:srgbClr val="0E1E3C"/>
                 </a:solidFill>
                 <a:latin typeface="Segoe UI"/>
                 <a:ea typeface="Segoe UI"/>
@@ -11260,7 +11417,7 @@
         <p:spPr>
           <a:xfrm>
             <a:off x="987552" y="5943600"/>
-            <a:ext cx="5486400" cy="274320"/>
+            <a:ext cx="6400800" cy="274320"/>
           </a:xfrm>
           <a:prstGeom prst="rect">
             <a:avLst/>
@@ -11369,7 +11526,7 @@
         <p:spPr>
           <a:xfrm>
             <a:off x="713232" y="6272784"/>
-            <a:ext cx="8073923" cy="219456"/>
+            <a:ext cx="5597920" cy="219456"/>
           </a:xfrm>
           <a:prstGeom prst="rect">
             <a:avLst/>
@@ -11437,8 +11594,8 @@
         </p:nvSpPr>
         <p:spPr>
           <a:xfrm>
-            <a:off x="10381183" y="6272784"/>
-            <a:ext cx="1097280" cy="219456"/>
+            <a:off x="8826703" y="6272784"/>
+            <a:ext cx="2651760" cy="219456"/>
           </a:xfrm>
           <a:prstGeom prst="rect">
             <a:avLst/>
@@ -11463,9 +11620,31 @@
               </a:spcAft>
             </a:pPr>
             <a:r>
+              <a:rPr sz="900" b="0" i="0">
+                <a:solidFill>
+                  <a:srgbClr val="636E85"/>
+                </a:solidFill>
+                <a:latin typeface="Segoe UI"/>
+                <a:ea typeface="Segoe UI"/>
+                <a:cs typeface="Segoe UI"/>
+              </a:rPr>
+              <a:t>Lingesh K  ·  OSI2509030</a:t>
+            </a:r>
+            <a:r>
+              <a:rPr sz="900" b="0" i="0">
+                <a:solidFill>
+                  <a:srgbClr val="141C2E"/>
+                </a:solidFill>
+                <a:latin typeface="Segoe UI"/>
+                <a:ea typeface="Segoe UI"/>
+                <a:cs typeface="Segoe UI"/>
+              </a:rPr>
+              <a:t>     </a:t>
+            </a:r>
+            <a:r>
               <a:rPr sz="900" b="1" i="0">
                 <a:solidFill>
-                  <a:srgbClr val="636E85"/>
+                  <a:srgbClr val="0E1E3C"/>
                 </a:solidFill>
                 <a:latin typeface="Segoe UI"/>
                 <a:ea typeface="Segoe UI"/>
@@ -12837,7 +13016,7 @@
         <p:spPr>
           <a:xfrm>
             <a:off x="713232" y="6272784"/>
-            <a:ext cx="8073923" cy="219456"/>
+            <a:ext cx="5597920" cy="219456"/>
           </a:xfrm>
           <a:prstGeom prst="rect">
             <a:avLst/>
@@ -12905,8 +13084,8 @@
         </p:nvSpPr>
         <p:spPr>
           <a:xfrm>
-            <a:off x="10381183" y="6272784"/>
-            <a:ext cx="1097280" cy="219456"/>
+            <a:off x="8826703" y="6272784"/>
+            <a:ext cx="2651760" cy="219456"/>
           </a:xfrm>
           <a:prstGeom prst="rect">
             <a:avLst/>
@@ -12931,9 +13110,31 @@
               </a:spcAft>
             </a:pPr>
             <a:r>
+              <a:rPr sz="900" b="0" i="0">
+                <a:solidFill>
+                  <a:srgbClr val="636E85"/>
+                </a:solidFill>
+                <a:latin typeface="Segoe UI"/>
+                <a:ea typeface="Segoe UI"/>
+                <a:cs typeface="Segoe UI"/>
+              </a:rPr>
+              <a:t>Lingesh K  ·  OSI2509030</a:t>
+            </a:r>
+            <a:r>
+              <a:rPr sz="900" b="0" i="0">
+                <a:solidFill>
+                  <a:srgbClr val="141C2E"/>
+                </a:solidFill>
+                <a:latin typeface="Segoe UI"/>
+                <a:ea typeface="Segoe UI"/>
+                <a:cs typeface="Segoe UI"/>
+              </a:rPr>
+              <a:t>     </a:t>
+            </a:r>
+            <a:r>
               <a:rPr sz="900" b="1" i="0">
                 <a:solidFill>
-                  <a:srgbClr val="636E85"/>
+                  <a:srgbClr val="0E1E3C"/>
                 </a:solidFill>
                 <a:latin typeface="Segoe UI"/>
                 <a:ea typeface="Segoe UI"/>
@@ -14331,7 +14532,7 @@
         <p:spPr>
           <a:xfrm>
             <a:off x="987552" y="5943600"/>
-            <a:ext cx="5486400" cy="274320"/>
+            <a:ext cx="6400800" cy="274320"/>
           </a:xfrm>
           <a:prstGeom prst="rect">
             <a:avLst/>
@@ -14440,7 +14641,7 @@
         <p:spPr>
           <a:xfrm>
             <a:off x="713232" y="6272784"/>
-            <a:ext cx="8073923" cy="219456"/>
+            <a:ext cx="5597920" cy="219456"/>
           </a:xfrm>
           <a:prstGeom prst="rect">
             <a:avLst/>
@@ -14508,8 +14709,8 @@
         </p:nvSpPr>
         <p:spPr>
           <a:xfrm>
-            <a:off x="10381183" y="6272784"/>
-            <a:ext cx="1097280" cy="219456"/>
+            <a:off x="8826703" y="6272784"/>
+            <a:ext cx="2651760" cy="219456"/>
           </a:xfrm>
           <a:prstGeom prst="rect">
             <a:avLst/>
@@ -14534,9 +14735,31 @@
               </a:spcAft>
             </a:pPr>
             <a:r>
+              <a:rPr sz="900" b="0" i="0">
+                <a:solidFill>
+                  <a:srgbClr val="636E85"/>
+                </a:solidFill>
+                <a:latin typeface="Segoe UI"/>
+                <a:ea typeface="Segoe UI"/>
+                <a:cs typeface="Segoe UI"/>
+              </a:rPr>
+              <a:t>Lingesh K  ·  OSI2509030</a:t>
+            </a:r>
+            <a:r>
+              <a:rPr sz="900" b="0" i="0">
+                <a:solidFill>
+                  <a:srgbClr val="141C2E"/>
+                </a:solidFill>
+                <a:latin typeface="Segoe UI"/>
+                <a:ea typeface="Segoe UI"/>
+                <a:cs typeface="Segoe UI"/>
+              </a:rPr>
+              <a:t>     </a:t>
+            </a:r>
+            <a:r>
               <a:rPr sz="900" b="1" i="0">
                 <a:solidFill>
-                  <a:srgbClr val="636E85"/>
+                  <a:srgbClr val="0E1E3C"/>
                 </a:solidFill>
                 <a:latin typeface="Segoe UI"/>
                 <a:ea typeface="Segoe UI"/>
@@ -16323,7 +16546,7 @@
         <p:spPr>
           <a:xfrm>
             <a:off x="713232" y="6272784"/>
-            <a:ext cx="8073923" cy="219456"/>
+            <a:ext cx="5597920" cy="219456"/>
           </a:xfrm>
           <a:prstGeom prst="rect">
             <a:avLst/>
@@ -16391,8 +16614,8 @@
         </p:nvSpPr>
         <p:spPr>
           <a:xfrm>
-            <a:off x="10381183" y="6272784"/>
-            <a:ext cx="1097280" cy="219456"/>
+            <a:off x="8826703" y="6272784"/>
+            <a:ext cx="2651760" cy="219456"/>
           </a:xfrm>
           <a:prstGeom prst="rect">
             <a:avLst/>
@@ -16417,9 +16640,31 @@
               </a:spcAft>
             </a:pPr>
             <a:r>
+              <a:rPr sz="900" b="0" i="0">
+                <a:solidFill>
+                  <a:srgbClr val="636E85"/>
+                </a:solidFill>
+                <a:latin typeface="Segoe UI"/>
+                <a:ea typeface="Segoe UI"/>
+                <a:cs typeface="Segoe UI"/>
+              </a:rPr>
+              <a:t>Lingesh K  ·  OSI2509030</a:t>
+            </a:r>
+            <a:r>
+              <a:rPr sz="900" b="0" i="0">
+                <a:solidFill>
+                  <a:srgbClr val="141C2E"/>
+                </a:solidFill>
+                <a:latin typeface="Segoe UI"/>
+                <a:ea typeface="Segoe UI"/>
+                <a:cs typeface="Segoe UI"/>
+              </a:rPr>
+              <a:t>     </a:t>
+            </a:r>
+            <a:r>
               <a:rPr sz="900" b="1" i="0">
                 <a:solidFill>
-                  <a:srgbClr val="636E85"/>
+                  <a:srgbClr val="0E1E3C"/>
                 </a:solidFill>
                 <a:latin typeface="Segoe UI"/>
                 <a:ea typeface="Segoe UI"/>
@@ -17982,7 +18227,7 @@
         <p:spPr>
           <a:xfrm>
             <a:off x="713232" y="6272784"/>
-            <a:ext cx="8073923" cy="219456"/>
+            <a:ext cx="5597920" cy="219456"/>
           </a:xfrm>
           <a:prstGeom prst="rect">
             <a:avLst/>
@@ -18050,8 +18295,8 @@
         </p:nvSpPr>
         <p:spPr>
           <a:xfrm>
-            <a:off x="10381183" y="6272784"/>
-            <a:ext cx="1097280" cy="219456"/>
+            <a:off x="8826703" y="6272784"/>
+            <a:ext cx="2651760" cy="219456"/>
           </a:xfrm>
           <a:prstGeom prst="rect">
             <a:avLst/>
@@ -18076,9 +18321,31 @@
               </a:spcAft>
             </a:pPr>
             <a:r>
+              <a:rPr sz="900" b="0" i="0">
+                <a:solidFill>
+                  <a:srgbClr val="636E85"/>
+                </a:solidFill>
+                <a:latin typeface="Segoe UI"/>
+                <a:ea typeface="Segoe UI"/>
+                <a:cs typeface="Segoe UI"/>
+              </a:rPr>
+              <a:t>Lingesh K  ·  OSI2509030</a:t>
+            </a:r>
+            <a:r>
+              <a:rPr sz="900" b="0" i="0">
+                <a:solidFill>
+                  <a:srgbClr val="141C2E"/>
+                </a:solidFill>
+                <a:latin typeface="Segoe UI"/>
+                <a:ea typeface="Segoe UI"/>
+                <a:cs typeface="Segoe UI"/>
+              </a:rPr>
+              <a:t>     </a:t>
+            </a:r>
+            <a:r>
               <a:rPr sz="900" b="1" i="0">
                 <a:solidFill>
-                  <a:srgbClr val="636E85"/>
+                  <a:srgbClr val="0E1E3C"/>
                 </a:solidFill>
                 <a:latin typeface="Segoe UI"/>
                 <a:ea typeface="Segoe UI"/>
@@ -20043,7 +20310,7 @@
         <p:spPr>
           <a:xfrm>
             <a:off x="713232" y="6272784"/>
-            <a:ext cx="8073923" cy="219456"/>
+            <a:ext cx="5597920" cy="219456"/>
           </a:xfrm>
           <a:prstGeom prst="rect">
             <a:avLst/>
@@ -20111,8 +20378,8 @@
         </p:nvSpPr>
         <p:spPr>
           <a:xfrm>
-            <a:off x="10381183" y="6272784"/>
-            <a:ext cx="1097280" cy="219456"/>
+            <a:off x="8826703" y="6272784"/>
+            <a:ext cx="2651760" cy="219456"/>
           </a:xfrm>
           <a:prstGeom prst="rect">
             <a:avLst/>
@@ -20137,9 +20404,31 @@
               </a:spcAft>
             </a:pPr>
             <a:r>
+              <a:rPr sz="900" b="0" i="0">
+                <a:solidFill>
+                  <a:srgbClr val="636E85"/>
+                </a:solidFill>
+                <a:latin typeface="Segoe UI"/>
+                <a:ea typeface="Segoe UI"/>
+                <a:cs typeface="Segoe UI"/>
+              </a:rPr>
+              <a:t>Lingesh K  ·  OSI2509030</a:t>
+            </a:r>
+            <a:r>
+              <a:rPr sz="900" b="0" i="0">
+                <a:solidFill>
+                  <a:srgbClr val="141C2E"/>
+                </a:solidFill>
+                <a:latin typeface="Segoe UI"/>
+                <a:ea typeface="Segoe UI"/>
+                <a:cs typeface="Segoe UI"/>
+              </a:rPr>
+              <a:t>     </a:t>
+            </a:r>
+            <a:r>
               <a:rPr sz="900" b="1" i="0">
                 <a:solidFill>
-                  <a:srgbClr val="636E85"/>
+                  <a:srgbClr val="0E1E3C"/>
                 </a:solidFill>
                 <a:latin typeface="Segoe UI"/>
                 <a:ea typeface="Segoe UI"/>
@@ -21912,7 +22201,7 @@
         <p:spPr>
           <a:xfrm>
             <a:off x="713232" y="6272784"/>
-            <a:ext cx="8073923" cy="219456"/>
+            <a:ext cx="5597920" cy="219456"/>
           </a:xfrm>
           <a:prstGeom prst="rect">
             <a:avLst/>
@@ -21980,8 +22269,8 @@
         </p:nvSpPr>
         <p:spPr>
           <a:xfrm>
-            <a:off x="10381183" y="6272784"/>
-            <a:ext cx="1097280" cy="219456"/>
+            <a:off x="8826703" y="6272784"/>
+            <a:ext cx="2651760" cy="219456"/>
           </a:xfrm>
           <a:prstGeom prst="rect">
             <a:avLst/>
@@ -22006,9 +22295,31 @@
               </a:spcAft>
             </a:pPr>
             <a:r>
+              <a:rPr sz="900" b="0" i="0">
+                <a:solidFill>
+                  <a:srgbClr val="636E85"/>
+                </a:solidFill>
+                <a:latin typeface="Segoe UI"/>
+                <a:ea typeface="Segoe UI"/>
+                <a:cs typeface="Segoe UI"/>
+              </a:rPr>
+              <a:t>Lingesh K  ·  OSI2509030</a:t>
+            </a:r>
+            <a:r>
+              <a:rPr sz="900" b="0" i="0">
+                <a:solidFill>
+                  <a:srgbClr val="141C2E"/>
+                </a:solidFill>
+                <a:latin typeface="Segoe UI"/>
+                <a:ea typeface="Segoe UI"/>
+                <a:cs typeface="Segoe UI"/>
+              </a:rPr>
+              <a:t>     </a:t>
+            </a:r>
+            <a:r>
               <a:rPr sz="900" b="1" i="0">
                 <a:solidFill>
-                  <a:srgbClr val="636E85"/>
+                  <a:srgbClr val="0E1E3C"/>
                 </a:solidFill>
                 <a:latin typeface="Segoe UI"/>
                 <a:ea typeface="Segoe UI"/>
@@ -23453,7 +23764,7 @@
         <p:spPr>
           <a:xfrm>
             <a:off x="713232" y="6272784"/>
-            <a:ext cx="8073923" cy="219456"/>
+            <a:ext cx="5597920" cy="219456"/>
           </a:xfrm>
           <a:prstGeom prst="rect">
             <a:avLst/>
@@ -23521,8 +23832,8 @@
         </p:nvSpPr>
         <p:spPr>
           <a:xfrm>
-            <a:off x="10381183" y="6272784"/>
-            <a:ext cx="1097280" cy="219456"/>
+            <a:off x="8826703" y="6272784"/>
+            <a:ext cx="2651760" cy="219456"/>
           </a:xfrm>
           <a:prstGeom prst="rect">
             <a:avLst/>
@@ -23547,9 +23858,31 @@
               </a:spcAft>
             </a:pPr>
             <a:r>
+              <a:rPr sz="900" b="0" i="0">
+                <a:solidFill>
+                  <a:srgbClr val="636E85"/>
+                </a:solidFill>
+                <a:latin typeface="Segoe UI"/>
+                <a:ea typeface="Segoe UI"/>
+                <a:cs typeface="Segoe UI"/>
+              </a:rPr>
+              <a:t>Lingesh K  ·  OSI2509030</a:t>
+            </a:r>
+            <a:r>
+              <a:rPr sz="900" b="0" i="0">
+                <a:solidFill>
+                  <a:srgbClr val="141C2E"/>
+                </a:solidFill>
+                <a:latin typeface="Segoe UI"/>
+                <a:ea typeface="Segoe UI"/>
+                <a:cs typeface="Segoe UI"/>
+              </a:rPr>
+              <a:t>     </a:t>
+            </a:r>
+            <a:r>
               <a:rPr sz="900" b="1" i="0">
                 <a:solidFill>
-                  <a:srgbClr val="636E85"/>
+                  <a:srgbClr val="0E1E3C"/>
                 </a:solidFill>
                 <a:latin typeface="Segoe UI"/>
                 <a:ea typeface="Segoe UI"/>
@@ -25512,7 +25845,7 @@
         <p:spPr>
           <a:xfrm>
             <a:off x="713232" y="6272784"/>
-            <a:ext cx="8073923" cy="219456"/>
+            <a:ext cx="5597920" cy="219456"/>
           </a:xfrm>
           <a:prstGeom prst="rect">
             <a:avLst/>
@@ -25580,8 +25913,8 @@
         </p:nvSpPr>
         <p:spPr>
           <a:xfrm>
-            <a:off x="10381183" y="6272784"/>
-            <a:ext cx="1097280" cy="219456"/>
+            <a:off x="8826703" y="6272784"/>
+            <a:ext cx="2651760" cy="219456"/>
           </a:xfrm>
           <a:prstGeom prst="rect">
             <a:avLst/>
@@ -25606,9 +25939,31 @@
               </a:spcAft>
             </a:pPr>
             <a:r>
+              <a:rPr sz="900" b="0" i="0">
+                <a:solidFill>
+                  <a:srgbClr val="636E85"/>
+                </a:solidFill>
+                <a:latin typeface="Segoe UI"/>
+                <a:ea typeface="Segoe UI"/>
+                <a:cs typeface="Segoe UI"/>
+              </a:rPr>
+              <a:t>Lingesh K  ·  OSI2509030</a:t>
+            </a:r>
+            <a:r>
+              <a:rPr sz="900" b="0" i="0">
+                <a:solidFill>
+                  <a:srgbClr val="141C2E"/>
+                </a:solidFill>
+                <a:latin typeface="Segoe UI"/>
+                <a:ea typeface="Segoe UI"/>
+                <a:cs typeface="Segoe UI"/>
+              </a:rPr>
+              <a:t>     </a:t>
+            </a:r>
+            <a:r>
               <a:rPr sz="900" b="1" i="0">
                 <a:solidFill>
-                  <a:srgbClr val="636E85"/>
+                  <a:srgbClr val="0E1E3C"/>
                 </a:solidFill>
                 <a:latin typeface="Segoe UI"/>
                 <a:ea typeface="Segoe UI"/>
@@ -27763,8 +28118,8 @@
         </p:nvSpPr>
         <p:spPr>
           <a:xfrm>
-            <a:off x="987552" y="4882896"/>
-            <a:ext cx="7315200" cy="1572768"/>
+            <a:off x="987552" y="4718304"/>
+            <a:ext cx="7315200" cy="1207008"/>
           </a:xfrm>
           <a:prstGeom prst="rect">
             <a:avLst/>
@@ -27803,10 +28158,10 @@
           <a:p>
             <a:pPr algn="l">
               <a:lnSpc>
-                <a:spcPct val="132000"/>
+                <a:spcPct val="128000"/>
               </a:lnSpc>
               <a:spcBef>
-                <a:spcPts val="500"/>
+                <a:spcPts val="400"/>
               </a:spcBef>
               <a:spcAft>
                 <a:spcPts val="0"/>
@@ -27827,10 +28182,10 @@
           <a:p>
             <a:pPr algn="l">
               <a:lnSpc>
-                <a:spcPct val="132000"/>
+                <a:spcPct val="128000"/>
               </a:lnSpc>
               <a:spcBef>
-                <a:spcPts val="500"/>
+                <a:spcPts val="400"/>
               </a:spcBef>
               <a:spcAft>
                 <a:spcPts val="0"/>
@@ -27851,10 +28206,10 @@
           <a:p>
             <a:pPr algn="l">
               <a:lnSpc>
-                <a:spcPct val="132000"/>
+                <a:spcPct val="128000"/>
               </a:lnSpc>
               <a:spcBef>
-                <a:spcPts val="500"/>
+                <a:spcPts val="400"/>
               </a:spcBef>
               <a:spcAft>
                 <a:spcPts val="0"/>
@@ -27870,6 +28225,141 @@
                 <a:cs typeface="Segoe UI"/>
               </a:rPr>
               <a:t>— What data would you need before any of this could work?</a:t>
+            </a:r>
+          </a:p>
+        </p:txBody>
+      </p:sp>
+      <p:sp>
+        <p:nvSpPr>
+          <p:cNvPr id="11" name="Rectangle 10"/>
+          <p:cNvSpPr/>
+          <p:nvPr/>
+        </p:nvSpPr>
+        <p:spPr>
+          <a:xfrm>
+            <a:off x="987552" y="6035040"/>
+            <a:ext cx="3291840" cy="12700"/>
+          </a:xfrm>
+          <a:prstGeom prst="rect">
+            <a:avLst/>
+          </a:prstGeom>
+          <a:solidFill>
+            <a:srgbClr val="2A3E66"/>
+          </a:solidFill>
+          <a:ln>
+            <a:noFill/>
+          </a:ln>
+          <a:effectLst/>
+        </p:spPr>
+        <p:style>
+          <a:lnRef idx="1">
+            <a:schemeClr val="accent1"/>
+          </a:lnRef>
+          <a:fillRef idx="3">
+            <a:schemeClr val="accent1"/>
+          </a:fillRef>
+          <a:effectRef idx="2">
+            <a:schemeClr val="accent1"/>
+          </a:effectRef>
+          <a:fontRef idx="minor">
+            <a:schemeClr val="lt1"/>
+          </a:fontRef>
+        </p:style>
+        <p:txBody>
+          <a:bodyPr rtlCol="0" anchor="ctr"/>
+          <a:lstStyle/>
+          <a:p>
+            <a:pPr algn="ctr"/>
+          </a:p>
+        </p:txBody>
+      </p:sp>
+      <p:sp>
+        <p:nvSpPr>
+          <p:cNvPr id="12" name="TextBox 11"/>
+          <p:cNvSpPr txBox="1"/>
+          <p:nvPr/>
+        </p:nvSpPr>
+        <p:spPr>
+          <a:xfrm>
+            <a:off x="987552" y="6163056"/>
+            <a:ext cx="5852160" cy="292608"/>
+          </a:xfrm>
+          <a:prstGeom prst="rect">
+            <a:avLst/>
+          </a:prstGeom>
+          <a:noFill/>
+        </p:spPr>
+        <p:txBody>
+          <a:bodyPr wrap="square" lIns="0" rIns="0" tIns="0" bIns="0" anchor="t">
+            <a:spAutoFit/>
+          </a:bodyPr>
+          <a:lstStyle/>
+          <a:p>
+            <a:pPr algn="l">
+              <a:lnSpc>
+                <a:spcPct val="122000"/>
+              </a:lnSpc>
+              <a:spcBef>
+                <a:spcPts val="0"/>
+              </a:spcBef>
+              <a:spcAft>
+                <a:spcPts val="0"/>
+              </a:spcAft>
+            </a:pPr>
+            <a:r>
+              <a:rPr sz="1150" b="1" i="0">
+                <a:solidFill>
+                  <a:srgbClr val="FFFFFF"/>
+                </a:solidFill>
+                <a:latin typeface="Segoe UI"/>
+                <a:ea typeface="Segoe UI"/>
+                <a:cs typeface="Segoe UI"/>
+              </a:rPr>
+              <a:t>Lingesh K</a:t>
+            </a:r>
+            <a:r>
+              <a:rPr sz="1000" b="0" i="0">
+                <a:solidFill>
+                  <a:srgbClr val="7E91B4"/>
+                </a:solidFill>
+                <a:latin typeface="Segoe UI"/>
+                <a:ea typeface="Segoe UI"/>
+                <a:cs typeface="Segoe UI"/>
+              </a:rPr>
+              <a:t>   ·   Register No. </a:t>
+            </a:r>
+            <a:r>
+              <a:rPr sz="1000" b="1" i="0">
+                <a:solidFill>
+                  <a:srgbClr val="C5D2E8"/>
+                </a:solidFill>
+                <a:latin typeface="Segoe UI"/>
+                <a:ea typeface="Segoe UI"/>
+                <a:cs typeface="Segoe UI"/>
+              </a:rPr>
+              <a:t>OSI2509030</a:t>
+            </a:r>
+            <a:r>
+              <a:rPr sz="1000" b="0" i="0">
+                <a:solidFill>
+                  <a:srgbClr val="4A5E86"/>
+                </a:solidFill>
+                <a:latin typeface="Segoe UI"/>
+                <a:ea typeface="Segoe UI"/>
+                <a:cs typeface="Segoe UI"/>
+              </a:rPr>
+              <a:t>   ·   </a:t>
+            </a:r>
+            <a:r>
+              <a:rPr sz="1000" b="0" i="0">
+                <a:solidFill>
+                  <a:srgbClr val="7E91B4"/>
+                </a:solidFill>
+                <a:latin typeface="Segoe UI"/>
+                <a:ea typeface="Segoe UI"/>
+                <a:cs typeface="Segoe UI"/>
+              </a:rPr>
+              <a:t>PGPM · Systems Specialisation</a:t>
             </a:r>
           </a:p>
         </p:txBody>
@@ -28274,7 +28764,7 @@
         <p:spPr>
           <a:xfrm>
             <a:off x="987552" y="5943600"/>
-            <a:ext cx="5486400" cy="274320"/>
+            <a:ext cx="6400800" cy="274320"/>
           </a:xfrm>
           <a:prstGeom prst="rect">
             <a:avLst/>
@@ -28383,7 +28873,7 @@
         <p:spPr>
           <a:xfrm>
             <a:off x="713232" y="6272784"/>
-            <a:ext cx="8073923" cy="219456"/>
+            <a:ext cx="5597920" cy="219456"/>
           </a:xfrm>
           <a:prstGeom prst="rect">
             <a:avLst/>
@@ -28451,8 +28941,8 @@
         </p:nvSpPr>
         <p:spPr>
           <a:xfrm>
-            <a:off x="10381183" y="6272784"/>
-            <a:ext cx="1097280" cy="219456"/>
+            <a:off x="8826703" y="6272784"/>
+            <a:ext cx="2651760" cy="219456"/>
           </a:xfrm>
           <a:prstGeom prst="rect">
             <a:avLst/>
@@ -28477,9 +28967,31 @@
               </a:spcAft>
             </a:pPr>
             <a:r>
+              <a:rPr sz="900" b="0" i="0">
+                <a:solidFill>
+                  <a:srgbClr val="636E85"/>
+                </a:solidFill>
+                <a:latin typeface="Segoe UI"/>
+                <a:ea typeface="Segoe UI"/>
+                <a:cs typeface="Segoe UI"/>
+              </a:rPr>
+              <a:t>Lingesh K  ·  OSI2509030</a:t>
+            </a:r>
+            <a:r>
+              <a:rPr sz="900" b="0" i="0">
+                <a:solidFill>
+                  <a:srgbClr val="141C2E"/>
+                </a:solidFill>
+                <a:latin typeface="Segoe UI"/>
+                <a:ea typeface="Segoe UI"/>
+                <a:cs typeface="Segoe UI"/>
+              </a:rPr>
+              <a:t>     </a:t>
+            </a:r>
+            <a:r>
               <a:rPr sz="900" b="1" i="0">
                 <a:solidFill>
-                  <a:srgbClr val="636E85"/>
+                  <a:srgbClr val="0E1E3C"/>
                 </a:solidFill>
                 <a:latin typeface="Segoe UI"/>
                 <a:ea typeface="Segoe UI"/>
@@ -29482,7 +29994,7 @@
         <p:spPr>
           <a:xfrm>
             <a:off x="713232" y="6272784"/>
-            <a:ext cx="8073923" cy="219456"/>
+            <a:ext cx="5597920" cy="219456"/>
           </a:xfrm>
           <a:prstGeom prst="rect">
             <a:avLst/>
@@ -29550,8 +30062,8 @@
         </p:nvSpPr>
         <p:spPr>
           <a:xfrm>
-            <a:off x="10381183" y="6272784"/>
-            <a:ext cx="1097280" cy="219456"/>
+            <a:off x="8826703" y="6272784"/>
+            <a:ext cx="2651760" cy="219456"/>
           </a:xfrm>
           <a:prstGeom prst="rect">
             <a:avLst/>
@@ -29576,9 +30088,31 @@
               </a:spcAft>
             </a:pPr>
             <a:r>
+              <a:rPr sz="900" b="0" i="0">
+                <a:solidFill>
+                  <a:srgbClr val="636E85"/>
+                </a:solidFill>
+                <a:latin typeface="Segoe UI"/>
+                <a:ea typeface="Segoe UI"/>
+                <a:cs typeface="Segoe UI"/>
+              </a:rPr>
+              <a:t>Lingesh K  ·  OSI2509030</a:t>
+            </a:r>
+            <a:r>
+              <a:rPr sz="900" b="0" i="0">
+                <a:solidFill>
+                  <a:srgbClr val="141C2E"/>
+                </a:solidFill>
+                <a:latin typeface="Segoe UI"/>
+                <a:ea typeface="Segoe UI"/>
+                <a:cs typeface="Segoe UI"/>
+              </a:rPr>
+              <a:t>     </a:t>
+            </a:r>
+            <a:r>
               <a:rPr sz="900" b="1" i="0">
                 <a:solidFill>
-                  <a:srgbClr val="636E85"/>
+                  <a:srgbClr val="0E1E3C"/>
                 </a:solidFill>
                 <a:latin typeface="Segoe UI"/>
                 <a:ea typeface="Segoe UI"/>
@@ -31358,7 +31892,7 @@
         <p:spPr>
           <a:xfrm>
             <a:off x="987552" y="5943600"/>
-            <a:ext cx="5486400" cy="274320"/>
+            <a:ext cx="6400800" cy="274320"/>
           </a:xfrm>
           <a:prstGeom prst="rect">
             <a:avLst/>
@@ -31467,7 +32001,7 @@
         <p:spPr>
           <a:xfrm>
             <a:off x="713232" y="6272784"/>
-            <a:ext cx="8073923" cy="219456"/>
+            <a:ext cx="5597920" cy="219456"/>
           </a:xfrm>
           <a:prstGeom prst="rect">
             <a:avLst/>
@@ -31535,8 +32069,8 @@
         </p:nvSpPr>
         <p:spPr>
           <a:xfrm>
-            <a:off x="10381183" y="6272784"/>
-            <a:ext cx="1097280" cy="219456"/>
+            <a:off x="8826703" y="6272784"/>
+            <a:ext cx="2651760" cy="219456"/>
           </a:xfrm>
           <a:prstGeom prst="rect">
             <a:avLst/>
@@ -31561,9 +32095,31 @@
               </a:spcAft>
             </a:pPr>
             <a:r>
+              <a:rPr sz="900" b="0" i="0">
+                <a:solidFill>
+                  <a:srgbClr val="636E85"/>
+                </a:solidFill>
+                <a:latin typeface="Segoe UI"/>
+                <a:ea typeface="Segoe UI"/>
+                <a:cs typeface="Segoe UI"/>
+              </a:rPr>
+              <a:t>Lingesh K  ·  OSI2509030</a:t>
+            </a:r>
+            <a:r>
+              <a:rPr sz="900" b="0" i="0">
+                <a:solidFill>
+                  <a:srgbClr val="141C2E"/>
+                </a:solidFill>
+                <a:latin typeface="Segoe UI"/>
+                <a:ea typeface="Segoe UI"/>
+                <a:cs typeface="Segoe UI"/>
+              </a:rPr>
+              <a:t>     </a:t>
+            </a:r>
+            <a:r>
               <a:rPr sz="900" b="1" i="0">
                 <a:solidFill>
-                  <a:srgbClr val="636E85"/>
+                  <a:srgbClr val="0E1E3C"/>
                 </a:solidFill>
                 <a:latin typeface="Segoe UI"/>
                 <a:ea typeface="Segoe UI"/>
@@ -32935,7 +33491,7 @@
         <p:spPr>
           <a:xfrm>
             <a:off x="713232" y="6272784"/>
-            <a:ext cx="8073923" cy="219456"/>
+            <a:ext cx="5597920" cy="219456"/>
           </a:xfrm>
           <a:prstGeom prst="rect">
             <a:avLst/>
@@ -33003,8 +33559,8 @@
         </p:nvSpPr>
         <p:spPr>
           <a:xfrm>
-            <a:off x="10381183" y="6272784"/>
-            <a:ext cx="1097280" cy="219456"/>
+            <a:off x="8826703" y="6272784"/>
+            <a:ext cx="2651760" cy="219456"/>
           </a:xfrm>
           <a:prstGeom prst="rect">
             <a:avLst/>
@@ -33029,9 +33585,31 @@
               </a:spcAft>
             </a:pPr>
             <a:r>
+              <a:rPr sz="900" b="0" i="0">
+                <a:solidFill>
+                  <a:srgbClr val="636E85"/>
+                </a:solidFill>
+                <a:latin typeface="Segoe UI"/>
+                <a:ea typeface="Segoe UI"/>
+                <a:cs typeface="Segoe UI"/>
+              </a:rPr>
+              <a:t>Lingesh K  ·  OSI2509030</a:t>
+            </a:r>
+            <a:r>
+              <a:rPr sz="900" b="0" i="0">
+                <a:solidFill>
+                  <a:srgbClr val="141C2E"/>
+                </a:solidFill>
+                <a:latin typeface="Segoe UI"/>
+                <a:ea typeface="Segoe UI"/>
+                <a:cs typeface="Segoe UI"/>
+              </a:rPr>
+              <a:t>     </a:t>
+            </a:r>
+            <a:r>
               <a:rPr sz="900" b="1" i="0">
                 <a:solidFill>
-                  <a:srgbClr val="636E85"/>
+                  <a:srgbClr val="0E1E3C"/>
                 </a:solidFill>
                 <a:latin typeface="Segoe UI"/>
                 <a:ea typeface="Segoe UI"/>
@@ -34411,7 +34989,7 @@
         <p:spPr>
           <a:xfrm>
             <a:off x="987552" y="5943600"/>
-            <a:ext cx="5486400" cy="274320"/>
+            <a:ext cx="6400800" cy="274320"/>
           </a:xfrm>
           <a:prstGeom prst="rect">
             <a:avLst/>

--- a/Unit 3 - Business Application in AI.pptx
+++ b/Unit 3 - Business Application in AI.pptx
@@ -3838,7 +3838,77 @@
       </p:sp>
       <p:sp>
         <p:nvSpPr>
-          <p:cNvPr id="7" name="TextBox 6"/>
+          <p:cNvPr id="7" name="logo-plate"/>
+          <p:cNvSpPr/>
+          <p:nvPr/>
+        </p:nvSpPr>
+        <p:spPr>
+          <a:xfrm>
+            <a:off x="9126735" y="539496"/>
+            <a:ext cx="2379159" cy="1152144"/>
+          </a:xfrm>
+          <a:prstGeom prst="roundRect">
+            <a:avLst>
+              <a:gd name="adj" fmla="val 14000"/>
+            </a:avLst>
+          </a:prstGeom>
+          <a:solidFill>
+            <a:srgbClr val="FFFFFF"/>
+          </a:solidFill>
+          <a:ln>
+            <a:noFill/>
+          </a:ln>
+          <a:effectLst/>
+        </p:spPr>
+        <p:style>
+          <a:lnRef idx="1">
+            <a:schemeClr val="accent1"/>
+          </a:lnRef>
+          <a:fillRef idx="3">
+            <a:schemeClr val="accent1"/>
+          </a:fillRef>
+          <a:effectRef idx="2">
+            <a:schemeClr val="accent1"/>
+          </a:effectRef>
+          <a:fontRef idx="minor">
+            <a:schemeClr val="lt1"/>
+          </a:fontRef>
+        </p:style>
+        <p:txBody>
+          <a:bodyPr rtlCol="0" anchor="ctr" wrap="square"/>
+          <a:lstStyle/>
+          <a:p>
+            <a:pPr algn="ctr"/>
+          </a:p>
+        </p:txBody>
+      </p:sp>
+      <p:pic>
+        <p:nvPicPr>
+          <p:cNvPr id="8" name="college-logo" descr="logo-full.png"/>
+          <p:cNvPicPr>
+            <a:picLocks noChangeAspect="1"/>
+          </p:cNvPicPr>
+          <p:nvPr/>
+        </p:nvPicPr>
+        <p:blipFill>
+          <a:blip r:embed="rId2"/>
+          <a:stretch>
+            <a:fillRect/>
+          </a:stretch>
+        </p:blipFill>
+        <p:spPr>
+          <a:xfrm>
+            <a:off x="9245607" y="658368"/>
+            <a:ext cx="2141415" cy="914400"/>
+          </a:xfrm>
+          <a:prstGeom prst="rect">
+            <a:avLst/>
+          </a:prstGeom>
+        </p:spPr>
+      </p:pic>
+      <p:sp>
+        <p:nvSpPr>
+          <p:cNvPr id="9" name="TextBox 8"/>
           <p:cNvSpPr txBox="1"/>
           <p:nvPr/>
         </p:nvSpPr>
@@ -3885,7 +3955,7 @@
       </p:sp>
       <p:sp>
         <p:nvSpPr>
-          <p:cNvPr id="8" name="Rounded Rectangle 7"/>
+          <p:cNvPr id="10" name="Rounded Rectangle 9"/>
           <p:cNvSpPr/>
           <p:nvPr/>
         </p:nvSpPr>
@@ -3952,7 +4022,7 @@
       </p:sp>
       <p:sp>
         <p:nvSpPr>
-          <p:cNvPr id="9" name="TextBox 8"/>
+          <p:cNvPr id="11" name="TextBox 10"/>
           <p:cNvSpPr txBox="1"/>
           <p:nvPr/>
         </p:nvSpPr>
@@ -3999,7 +4069,7 @@
       </p:sp>
       <p:sp>
         <p:nvSpPr>
-          <p:cNvPr id="10" name="Rectangle 9"/>
+          <p:cNvPr id="12" name="Rectangle 11"/>
           <p:cNvSpPr/>
           <p:nvPr/>
         </p:nvSpPr>
@@ -4043,7 +4113,7 @@
       </p:sp>
       <p:sp>
         <p:nvSpPr>
-          <p:cNvPr id="11" name="TextBox 10"/>
+          <p:cNvPr id="13" name="TextBox 12"/>
           <p:cNvSpPr txBox="1"/>
           <p:nvPr/>
         </p:nvSpPr>
@@ -4090,7 +4160,7 @@
       </p:sp>
       <p:sp>
         <p:nvSpPr>
-          <p:cNvPr id="12" name="Rounded Rectangle 11"/>
+          <p:cNvPr id="14" name="Rounded Rectangle 13"/>
           <p:cNvSpPr/>
           <p:nvPr/>
         </p:nvSpPr>
@@ -4157,7 +4227,7 @@
       </p:sp>
       <p:sp>
         <p:nvSpPr>
-          <p:cNvPr id="13" name="Rounded Rectangle 12"/>
+          <p:cNvPr id="15" name="Rounded Rectangle 14"/>
           <p:cNvSpPr/>
           <p:nvPr/>
         </p:nvSpPr>
@@ -4224,7 +4294,7 @@
       </p:sp>
       <p:sp>
         <p:nvSpPr>
-          <p:cNvPr id="14" name="Rounded Rectangle 13"/>
+          <p:cNvPr id="16" name="Rounded Rectangle 15"/>
           <p:cNvSpPr/>
           <p:nvPr/>
         </p:nvSpPr>
@@ -4291,7 +4361,7 @@
       </p:sp>
       <p:sp>
         <p:nvSpPr>
-          <p:cNvPr id="15" name="Rounded Rectangle 14"/>
+          <p:cNvPr id="17" name="Rounded Rectangle 16"/>
           <p:cNvSpPr/>
           <p:nvPr/>
         </p:nvSpPr>
@@ -4358,7 +4428,7 @@
       </p:sp>
       <p:sp>
         <p:nvSpPr>
-          <p:cNvPr id="16" name="Rounded Rectangle 15"/>
+          <p:cNvPr id="18" name="Rounded Rectangle 17"/>
           <p:cNvSpPr/>
           <p:nvPr/>
         </p:nvSpPr>
@@ -4425,7 +4495,7 @@
       </p:sp>
       <p:sp>
         <p:nvSpPr>
-          <p:cNvPr id="17" name="Rectangle 16"/>
+          <p:cNvPr id="19" name="Rectangle 18"/>
           <p:cNvSpPr/>
           <p:nvPr/>
         </p:nvSpPr>
@@ -4469,7 +4539,7 @@
       </p:sp>
       <p:sp>
         <p:nvSpPr>
-          <p:cNvPr id="18" name="TextBox 17"/>
+          <p:cNvPr id="20" name="TextBox 19"/>
           <p:cNvSpPr txBox="1"/>
           <p:nvPr/>
         </p:nvSpPr>
@@ -4562,7 +4632,7 @@
       </p:sp>
       <p:sp>
         <p:nvSpPr>
-          <p:cNvPr id="19" name="TextBox 18"/>
+          <p:cNvPr id="21" name="TextBox 20"/>
           <p:cNvSpPr txBox="1"/>
           <p:nvPr/>
         </p:nvSpPr>
@@ -4669,9 +4739,33 @@
           </a:p>
         </p:txBody>
       </p:sp>
-      <p:sp>
-        <p:nvSpPr>
-          <p:cNvPr id="3" name="TextBox 2"/>
+      <p:pic>
+        <p:nvPicPr>
+          <p:cNvPr id="3" name="college-logo" descr="logo-mark.png"/>
+          <p:cNvPicPr>
+            <a:picLocks noChangeAspect="1"/>
+          </p:cNvPicPr>
+          <p:nvPr/>
+        </p:nvPicPr>
+        <p:blipFill>
+          <a:blip r:embed="rId2"/>
+          <a:stretch>
+            <a:fillRect/>
+          </a:stretch>
+        </p:blipFill>
+        <p:spPr>
+          <a:xfrm>
+            <a:off x="11203333" y="6199632"/>
+            <a:ext cx="275129" cy="310896"/>
+          </a:xfrm>
+          <a:prstGeom prst="rect">
+            <a:avLst/>
+          </a:prstGeom>
+        </p:spPr>
+      </p:pic>
+      <p:sp>
+        <p:nvSpPr>
+          <p:cNvPr id="4" name="TextBox 3"/>
           <p:cNvSpPr txBox="1"/>
           <p:nvPr/>
         </p:nvSpPr>
@@ -4740,13 +4834,13 @@
       </p:sp>
       <p:sp>
         <p:nvSpPr>
-          <p:cNvPr id="4" name="TextBox 3"/>
+          <p:cNvPr id="5" name="TextBox 4"/>
           <p:cNvSpPr txBox="1"/>
           <p:nvPr/>
         </p:nvSpPr>
         <p:spPr>
           <a:xfrm>
-            <a:off x="8826703" y="6272784"/>
+            <a:off x="8240677" y="6272784"/>
             <a:ext cx="2651760" cy="219456"/>
           </a:xfrm>
           <a:prstGeom prst="rect">
@@ -4809,7 +4903,7 @@
       </p:sp>
       <p:sp>
         <p:nvSpPr>
-          <p:cNvPr id="5" name="TextBox 4"/>
+          <p:cNvPr id="6" name="TextBox 5"/>
           <p:cNvSpPr txBox="1"/>
           <p:nvPr/>
         </p:nvSpPr>
@@ -4856,7 +4950,7 @@
       </p:sp>
       <p:sp>
         <p:nvSpPr>
-          <p:cNvPr id="6" name="TextBox 5"/>
+          <p:cNvPr id="7" name="TextBox 6"/>
           <p:cNvSpPr txBox="1"/>
           <p:nvPr/>
         </p:nvSpPr>
@@ -4903,7 +4997,7 @@
       </p:sp>
       <p:sp>
         <p:nvSpPr>
-          <p:cNvPr id="7" name="Rectangle 6"/>
+          <p:cNvPr id="8" name="Rectangle 7"/>
           <p:cNvSpPr/>
           <p:nvPr/>
         </p:nvSpPr>
@@ -4947,7 +5041,7 @@
       </p:sp>
       <p:sp>
         <p:nvSpPr>
-          <p:cNvPr id="8" name="TextBox 7"/>
+          <p:cNvPr id="9" name="TextBox 8"/>
           <p:cNvSpPr txBox="1"/>
           <p:nvPr/>
         </p:nvSpPr>
@@ -4994,7 +5088,7 @@
       </p:sp>
       <p:sp>
         <p:nvSpPr>
-          <p:cNvPr id="9" name="Rounded Rectangle 8"/>
+          <p:cNvPr id="10" name="Rounded Rectangle 9"/>
           <p:cNvSpPr/>
           <p:nvPr/>
         </p:nvSpPr>
@@ -5048,7 +5142,7 @@
       </p:sp>
       <p:sp>
         <p:nvSpPr>
-          <p:cNvPr id="10" name="Rectangle 9"/>
+          <p:cNvPr id="11" name="Rectangle 10"/>
           <p:cNvSpPr/>
           <p:nvPr/>
         </p:nvSpPr>
@@ -5092,7 +5186,7 @@
       </p:sp>
       <p:sp>
         <p:nvSpPr>
-          <p:cNvPr id="11" name="TextBox 10"/>
+          <p:cNvPr id="12" name="TextBox 11"/>
           <p:cNvSpPr txBox="1"/>
           <p:nvPr/>
         </p:nvSpPr>
@@ -5139,7 +5233,7 @@
       </p:sp>
       <p:sp>
         <p:nvSpPr>
-          <p:cNvPr id="12" name="TextBox 11"/>
+          <p:cNvPr id="13" name="TextBox 12"/>
           <p:cNvSpPr txBox="1"/>
           <p:nvPr/>
         </p:nvSpPr>
@@ -5186,7 +5280,7 @@
       </p:sp>
       <p:sp>
         <p:nvSpPr>
-          <p:cNvPr id="13" name="Rounded Rectangle 12"/>
+          <p:cNvPr id="14" name="Rounded Rectangle 13"/>
           <p:cNvSpPr/>
           <p:nvPr/>
         </p:nvSpPr>
@@ -5240,7 +5334,7 @@
       </p:sp>
       <p:sp>
         <p:nvSpPr>
-          <p:cNvPr id="14" name="Rectangle 13"/>
+          <p:cNvPr id="15" name="Rectangle 14"/>
           <p:cNvSpPr/>
           <p:nvPr/>
         </p:nvSpPr>
@@ -5284,7 +5378,7 @@
       </p:sp>
       <p:sp>
         <p:nvSpPr>
-          <p:cNvPr id="15" name="TextBox 14"/>
+          <p:cNvPr id="16" name="TextBox 15"/>
           <p:cNvSpPr txBox="1"/>
           <p:nvPr/>
         </p:nvSpPr>
@@ -5331,7 +5425,7 @@
       </p:sp>
       <p:sp>
         <p:nvSpPr>
-          <p:cNvPr id="16" name="TextBox 15"/>
+          <p:cNvPr id="17" name="TextBox 16"/>
           <p:cNvSpPr txBox="1"/>
           <p:nvPr/>
         </p:nvSpPr>
@@ -5378,7 +5472,7 @@
       </p:sp>
       <p:sp>
         <p:nvSpPr>
-          <p:cNvPr id="17" name="Rounded Rectangle 16"/>
+          <p:cNvPr id="18" name="Rounded Rectangle 17"/>
           <p:cNvSpPr/>
           <p:nvPr/>
         </p:nvSpPr>
@@ -5432,7 +5526,7 @@
       </p:sp>
       <p:sp>
         <p:nvSpPr>
-          <p:cNvPr id="18" name="Rectangle 17"/>
+          <p:cNvPr id="19" name="Rectangle 18"/>
           <p:cNvSpPr/>
           <p:nvPr/>
         </p:nvSpPr>
@@ -5476,7 +5570,7 @@
       </p:sp>
       <p:sp>
         <p:nvSpPr>
-          <p:cNvPr id="19" name="TextBox 18"/>
+          <p:cNvPr id="20" name="TextBox 19"/>
           <p:cNvSpPr txBox="1"/>
           <p:nvPr/>
         </p:nvSpPr>
@@ -5523,7 +5617,7 @@
       </p:sp>
       <p:sp>
         <p:nvSpPr>
-          <p:cNvPr id="20" name="TextBox 19"/>
+          <p:cNvPr id="21" name="TextBox 20"/>
           <p:cNvSpPr txBox="1"/>
           <p:nvPr/>
         </p:nvSpPr>
@@ -5570,7 +5664,7 @@
       </p:sp>
       <p:sp>
         <p:nvSpPr>
-          <p:cNvPr id="21" name="Rounded Rectangle 20"/>
+          <p:cNvPr id="22" name="Rounded Rectangle 21"/>
           <p:cNvSpPr/>
           <p:nvPr/>
         </p:nvSpPr>
@@ -5624,7 +5718,7 @@
       </p:sp>
       <p:sp>
         <p:nvSpPr>
-          <p:cNvPr id="22" name="Rectangle 21"/>
+          <p:cNvPr id="23" name="Rectangle 22"/>
           <p:cNvSpPr/>
           <p:nvPr/>
         </p:nvSpPr>
@@ -5668,7 +5762,7 @@
       </p:sp>
       <p:sp>
         <p:nvSpPr>
-          <p:cNvPr id="23" name="TextBox 22"/>
+          <p:cNvPr id="24" name="TextBox 23"/>
           <p:cNvSpPr txBox="1"/>
           <p:nvPr/>
         </p:nvSpPr>
@@ -5715,7 +5809,7 @@
       </p:sp>
       <p:sp>
         <p:nvSpPr>
-          <p:cNvPr id="24" name="TextBox 23"/>
+          <p:cNvPr id="25" name="TextBox 24"/>
           <p:cNvSpPr txBox="1"/>
           <p:nvPr/>
         </p:nvSpPr>
@@ -5762,7 +5856,7 @@
       </p:sp>
       <p:sp>
         <p:nvSpPr>
-          <p:cNvPr id="25" name="Rounded Rectangle 24"/>
+          <p:cNvPr id="26" name="Rounded Rectangle 25"/>
           <p:cNvSpPr/>
           <p:nvPr/>
         </p:nvSpPr>
@@ -5816,7 +5910,7 @@
       </p:sp>
       <p:sp>
         <p:nvSpPr>
-          <p:cNvPr id="26" name="Rectangle 25"/>
+          <p:cNvPr id="27" name="Rectangle 26"/>
           <p:cNvSpPr/>
           <p:nvPr/>
         </p:nvSpPr>
@@ -5860,7 +5954,7 @@
       </p:sp>
       <p:sp>
         <p:nvSpPr>
-          <p:cNvPr id="27" name="TextBox 26"/>
+          <p:cNvPr id="28" name="TextBox 27"/>
           <p:cNvSpPr txBox="1"/>
           <p:nvPr/>
         </p:nvSpPr>
@@ -5907,7 +6001,7 @@
       </p:sp>
       <p:sp>
         <p:nvSpPr>
-          <p:cNvPr id="28" name="TextBox 27"/>
+          <p:cNvPr id="29" name="TextBox 28"/>
           <p:cNvSpPr txBox="1"/>
           <p:nvPr/>
         </p:nvSpPr>
@@ -5954,7 +6048,7 @@
       </p:sp>
       <p:sp>
         <p:nvSpPr>
-          <p:cNvPr id="29" name="Rounded Rectangle 28"/>
+          <p:cNvPr id="30" name="Rounded Rectangle 29"/>
           <p:cNvSpPr/>
           <p:nvPr/>
         </p:nvSpPr>
@@ -6008,7 +6102,7 @@
       </p:sp>
       <p:sp>
         <p:nvSpPr>
-          <p:cNvPr id="30" name="Rectangle 29"/>
+          <p:cNvPr id="31" name="Rectangle 30"/>
           <p:cNvSpPr/>
           <p:nvPr/>
         </p:nvSpPr>
@@ -6052,7 +6146,7 @@
       </p:sp>
       <p:sp>
         <p:nvSpPr>
-          <p:cNvPr id="31" name="TextBox 30"/>
+          <p:cNvPr id="32" name="TextBox 31"/>
           <p:cNvSpPr txBox="1"/>
           <p:nvPr/>
         </p:nvSpPr>
@@ -6099,7 +6193,7 @@
       </p:sp>
       <p:sp>
         <p:nvSpPr>
-          <p:cNvPr id="32" name="TextBox 31"/>
+          <p:cNvPr id="33" name="TextBox 32"/>
           <p:cNvSpPr txBox="1"/>
           <p:nvPr/>
         </p:nvSpPr>
@@ -6206,9 +6300,33 @@
           </a:p>
         </p:txBody>
       </p:sp>
-      <p:sp>
-        <p:nvSpPr>
-          <p:cNvPr id="3" name="TextBox 2"/>
+      <p:pic>
+        <p:nvPicPr>
+          <p:cNvPr id="3" name="college-logo" descr="logo-mark.png"/>
+          <p:cNvPicPr>
+            <a:picLocks noChangeAspect="1"/>
+          </p:cNvPicPr>
+          <p:nvPr/>
+        </p:nvPicPr>
+        <p:blipFill>
+          <a:blip r:embed="rId2"/>
+          <a:stretch>
+            <a:fillRect/>
+          </a:stretch>
+        </p:blipFill>
+        <p:spPr>
+          <a:xfrm>
+            <a:off x="11203333" y="6199632"/>
+            <a:ext cx="275129" cy="310896"/>
+          </a:xfrm>
+          <a:prstGeom prst="rect">
+            <a:avLst/>
+          </a:prstGeom>
+        </p:spPr>
+      </p:pic>
+      <p:sp>
+        <p:nvSpPr>
+          <p:cNvPr id="4" name="TextBox 3"/>
           <p:cNvSpPr txBox="1"/>
           <p:nvPr/>
         </p:nvSpPr>
@@ -6277,13 +6395,13 @@
       </p:sp>
       <p:sp>
         <p:nvSpPr>
-          <p:cNvPr id="4" name="TextBox 3"/>
+          <p:cNvPr id="5" name="TextBox 4"/>
           <p:cNvSpPr txBox="1"/>
           <p:nvPr/>
         </p:nvSpPr>
         <p:spPr>
           <a:xfrm>
-            <a:off x="8826703" y="6272784"/>
+            <a:off x="8240677" y="6272784"/>
             <a:ext cx="2651760" cy="219456"/>
           </a:xfrm>
           <a:prstGeom prst="rect">
@@ -6346,7 +6464,7 @@
       </p:sp>
       <p:sp>
         <p:nvSpPr>
-          <p:cNvPr id="5" name="TextBox 4"/>
+          <p:cNvPr id="6" name="TextBox 5"/>
           <p:cNvSpPr txBox="1"/>
           <p:nvPr/>
         </p:nvSpPr>
@@ -6393,7 +6511,7 @@
       </p:sp>
       <p:sp>
         <p:nvSpPr>
-          <p:cNvPr id="6" name="TextBox 5"/>
+          <p:cNvPr id="7" name="TextBox 6"/>
           <p:cNvSpPr txBox="1"/>
           <p:nvPr/>
         </p:nvSpPr>
@@ -6440,7 +6558,7 @@
       </p:sp>
       <p:sp>
         <p:nvSpPr>
-          <p:cNvPr id="7" name="Rectangle 6"/>
+          <p:cNvPr id="8" name="Rectangle 7"/>
           <p:cNvSpPr/>
           <p:nvPr/>
         </p:nvSpPr>
@@ -6484,7 +6602,7 @@
       </p:sp>
       <p:sp>
         <p:nvSpPr>
-          <p:cNvPr id="8" name="Rounded Rectangle 7"/>
+          <p:cNvPr id="9" name="Rounded Rectangle 8"/>
           <p:cNvSpPr/>
           <p:nvPr/>
         </p:nvSpPr>
@@ -6538,7 +6656,7 @@
       </p:sp>
       <p:sp>
         <p:nvSpPr>
-          <p:cNvPr id="9" name="Rectangle 8"/>
+          <p:cNvPr id="10" name="Rectangle 9"/>
           <p:cNvSpPr/>
           <p:nvPr/>
         </p:nvSpPr>
@@ -6582,7 +6700,7 @@
       </p:sp>
       <p:sp>
         <p:nvSpPr>
-          <p:cNvPr id="10" name="Rounded Rectangle 9"/>
+          <p:cNvPr id="11" name="Rounded Rectangle 10"/>
           <p:cNvSpPr/>
           <p:nvPr/>
         </p:nvSpPr>
@@ -6649,7 +6767,7 @@
       </p:sp>
       <p:sp>
         <p:nvSpPr>
-          <p:cNvPr id="11" name="TextBox 10"/>
+          <p:cNvPr id="12" name="TextBox 11"/>
           <p:cNvSpPr txBox="1"/>
           <p:nvPr/>
         </p:nvSpPr>
@@ -6696,7 +6814,7 @@
       </p:sp>
       <p:sp>
         <p:nvSpPr>
-          <p:cNvPr id="12" name="Rectangle 11"/>
+          <p:cNvPr id="13" name="Rectangle 12"/>
           <p:cNvSpPr/>
           <p:nvPr/>
         </p:nvSpPr>
@@ -6740,7 +6858,7 @@
       </p:sp>
       <p:sp>
         <p:nvSpPr>
-          <p:cNvPr id="13" name="Rounded Rectangle 12"/>
+          <p:cNvPr id="14" name="Rounded Rectangle 13"/>
           <p:cNvSpPr/>
           <p:nvPr/>
         </p:nvSpPr>
@@ -6786,7 +6904,7 @@
       </p:sp>
       <p:sp>
         <p:nvSpPr>
-          <p:cNvPr id="14" name="TextBox 13"/>
+          <p:cNvPr id="15" name="TextBox 14"/>
           <p:cNvSpPr txBox="1"/>
           <p:nvPr/>
         </p:nvSpPr>
@@ -6833,7 +6951,7 @@
       </p:sp>
       <p:sp>
         <p:nvSpPr>
-          <p:cNvPr id="15" name="Rounded Rectangle 14"/>
+          <p:cNvPr id="16" name="Rounded Rectangle 15"/>
           <p:cNvSpPr/>
           <p:nvPr/>
         </p:nvSpPr>
@@ -6879,7 +6997,7 @@
       </p:sp>
       <p:sp>
         <p:nvSpPr>
-          <p:cNvPr id="16" name="TextBox 15"/>
+          <p:cNvPr id="17" name="TextBox 16"/>
           <p:cNvSpPr txBox="1"/>
           <p:nvPr/>
         </p:nvSpPr>
@@ -6926,7 +7044,7 @@
       </p:sp>
       <p:sp>
         <p:nvSpPr>
-          <p:cNvPr id="17" name="Rounded Rectangle 16"/>
+          <p:cNvPr id="18" name="Rounded Rectangle 17"/>
           <p:cNvSpPr/>
           <p:nvPr/>
         </p:nvSpPr>
@@ -6972,7 +7090,7 @@
       </p:sp>
       <p:sp>
         <p:nvSpPr>
-          <p:cNvPr id="18" name="TextBox 17"/>
+          <p:cNvPr id="19" name="TextBox 18"/>
           <p:cNvSpPr txBox="1"/>
           <p:nvPr/>
         </p:nvSpPr>
@@ -7019,7 +7137,7 @@
       </p:sp>
       <p:sp>
         <p:nvSpPr>
-          <p:cNvPr id="19" name="Rounded Rectangle 18"/>
+          <p:cNvPr id="20" name="Rounded Rectangle 19"/>
           <p:cNvSpPr/>
           <p:nvPr/>
         </p:nvSpPr>
@@ -7065,7 +7183,7 @@
       </p:sp>
       <p:sp>
         <p:nvSpPr>
-          <p:cNvPr id="20" name="TextBox 19"/>
+          <p:cNvPr id="21" name="TextBox 20"/>
           <p:cNvSpPr txBox="1"/>
           <p:nvPr/>
         </p:nvSpPr>
@@ -7112,7 +7230,7 @@
       </p:sp>
       <p:sp>
         <p:nvSpPr>
-          <p:cNvPr id="21" name="Rounded Rectangle 20"/>
+          <p:cNvPr id="22" name="Rounded Rectangle 21"/>
           <p:cNvSpPr/>
           <p:nvPr/>
         </p:nvSpPr>
@@ -7158,7 +7276,7 @@
       </p:sp>
       <p:sp>
         <p:nvSpPr>
-          <p:cNvPr id="22" name="TextBox 21"/>
+          <p:cNvPr id="23" name="TextBox 22"/>
           <p:cNvSpPr txBox="1"/>
           <p:nvPr/>
         </p:nvSpPr>
@@ -7205,7 +7323,7 @@
       </p:sp>
       <p:sp>
         <p:nvSpPr>
-          <p:cNvPr id="23" name="Rounded Rectangle 22"/>
+          <p:cNvPr id="24" name="Rounded Rectangle 23"/>
           <p:cNvSpPr/>
           <p:nvPr/>
         </p:nvSpPr>
@@ -7259,7 +7377,7 @@
       </p:sp>
       <p:sp>
         <p:nvSpPr>
-          <p:cNvPr id="24" name="Rectangle 23"/>
+          <p:cNvPr id="25" name="Rectangle 24"/>
           <p:cNvSpPr/>
           <p:nvPr/>
         </p:nvSpPr>
@@ -7303,7 +7421,7 @@
       </p:sp>
       <p:sp>
         <p:nvSpPr>
-          <p:cNvPr id="25" name="Rounded Rectangle 24"/>
+          <p:cNvPr id="26" name="Rounded Rectangle 25"/>
           <p:cNvSpPr/>
           <p:nvPr/>
         </p:nvSpPr>
@@ -7370,7 +7488,7 @@
       </p:sp>
       <p:sp>
         <p:nvSpPr>
-          <p:cNvPr id="26" name="TextBox 25"/>
+          <p:cNvPr id="27" name="TextBox 26"/>
           <p:cNvSpPr txBox="1"/>
           <p:nvPr/>
         </p:nvSpPr>
@@ -7417,7 +7535,7 @@
       </p:sp>
       <p:sp>
         <p:nvSpPr>
-          <p:cNvPr id="27" name="Rectangle 26"/>
+          <p:cNvPr id="28" name="Rectangle 27"/>
           <p:cNvSpPr/>
           <p:nvPr/>
         </p:nvSpPr>
@@ -7461,7 +7579,7 @@
       </p:sp>
       <p:sp>
         <p:nvSpPr>
-          <p:cNvPr id="28" name="Rounded Rectangle 27"/>
+          <p:cNvPr id="29" name="Rounded Rectangle 28"/>
           <p:cNvSpPr/>
           <p:nvPr/>
         </p:nvSpPr>
@@ -7507,7 +7625,7 @@
       </p:sp>
       <p:sp>
         <p:nvSpPr>
-          <p:cNvPr id="29" name="TextBox 28"/>
+          <p:cNvPr id="30" name="TextBox 29"/>
           <p:cNvSpPr txBox="1"/>
           <p:nvPr/>
         </p:nvSpPr>
@@ -7554,7 +7672,7 @@
       </p:sp>
       <p:sp>
         <p:nvSpPr>
-          <p:cNvPr id="30" name="Rounded Rectangle 29"/>
+          <p:cNvPr id="31" name="Rounded Rectangle 30"/>
           <p:cNvSpPr/>
           <p:nvPr/>
         </p:nvSpPr>
@@ -7600,7 +7718,7 @@
       </p:sp>
       <p:sp>
         <p:nvSpPr>
-          <p:cNvPr id="31" name="TextBox 30"/>
+          <p:cNvPr id="32" name="TextBox 31"/>
           <p:cNvSpPr txBox="1"/>
           <p:nvPr/>
         </p:nvSpPr>
@@ -7647,7 +7765,7 @@
       </p:sp>
       <p:sp>
         <p:nvSpPr>
-          <p:cNvPr id="32" name="Rounded Rectangle 31"/>
+          <p:cNvPr id="33" name="Rounded Rectangle 32"/>
           <p:cNvSpPr/>
           <p:nvPr/>
         </p:nvSpPr>
@@ -7693,7 +7811,7 @@
       </p:sp>
       <p:sp>
         <p:nvSpPr>
-          <p:cNvPr id="33" name="TextBox 32"/>
+          <p:cNvPr id="34" name="TextBox 33"/>
           <p:cNvSpPr txBox="1"/>
           <p:nvPr/>
         </p:nvSpPr>
@@ -7740,7 +7858,7 @@
       </p:sp>
       <p:sp>
         <p:nvSpPr>
-          <p:cNvPr id="34" name="Rounded Rectangle 33"/>
+          <p:cNvPr id="35" name="Rounded Rectangle 34"/>
           <p:cNvSpPr/>
           <p:nvPr/>
         </p:nvSpPr>
@@ -7786,7 +7904,7 @@
       </p:sp>
       <p:sp>
         <p:nvSpPr>
-          <p:cNvPr id="35" name="TextBox 34"/>
+          <p:cNvPr id="36" name="TextBox 35"/>
           <p:cNvSpPr txBox="1"/>
           <p:nvPr/>
         </p:nvSpPr>
@@ -7833,7 +7951,7 @@
       </p:sp>
       <p:sp>
         <p:nvSpPr>
-          <p:cNvPr id="36" name="Rounded Rectangle 35"/>
+          <p:cNvPr id="37" name="Rounded Rectangle 36"/>
           <p:cNvSpPr/>
           <p:nvPr/>
         </p:nvSpPr>
@@ -7879,7 +7997,7 @@
       </p:sp>
       <p:sp>
         <p:nvSpPr>
-          <p:cNvPr id="37" name="TextBox 36"/>
+          <p:cNvPr id="38" name="TextBox 37"/>
           <p:cNvSpPr txBox="1"/>
           <p:nvPr/>
         </p:nvSpPr>
@@ -7926,7 +8044,7 @@
       </p:sp>
       <p:sp>
         <p:nvSpPr>
-          <p:cNvPr id="38" name="Rounded Rectangle 37"/>
+          <p:cNvPr id="39" name="Rounded Rectangle 38"/>
           <p:cNvSpPr/>
           <p:nvPr/>
         </p:nvSpPr>
@@ -8440,6 +8558,76 @@
           </a:p>
         </p:txBody>
       </p:sp>
+      <p:sp>
+        <p:nvSpPr>
+          <p:cNvPr id="11" name="logo-plate"/>
+          <p:cNvSpPr/>
+          <p:nvPr/>
+        </p:nvSpPr>
+        <p:spPr>
+          <a:xfrm>
+            <a:off x="9512190" y="539496"/>
+            <a:ext cx="1993704" cy="987552"/>
+          </a:xfrm>
+          <a:prstGeom prst="roundRect">
+            <a:avLst>
+              <a:gd name="adj" fmla="val 14000"/>
+            </a:avLst>
+          </a:prstGeom>
+          <a:solidFill>
+            <a:srgbClr val="FFFFFF"/>
+          </a:solidFill>
+          <a:ln>
+            <a:noFill/>
+          </a:ln>
+          <a:effectLst/>
+        </p:spPr>
+        <p:style>
+          <a:lnRef idx="1">
+            <a:schemeClr val="accent1"/>
+          </a:lnRef>
+          <a:fillRef idx="3">
+            <a:schemeClr val="accent1"/>
+          </a:fillRef>
+          <a:effectRef idx="2">
+            <a:schemeClr val="accent1"/>
+          </a:effectRef>
+          <a:fontRef idx="minor">
+            <a:schemeClr val="lt1"/>
+          </a:fontRef>
+        </p:style>
+        <p:txBody>
+          <a:bodyPr rtlCol="0" anchor="ctr" wrap="square"/>
+          <a:lstStyle/>
+          <a:p>
+            <a:pPr algn="ctr"/>
+          </a:p>
+        </p:txBody>
+      </p:sp>
+      <p:pic>
+        <p:nvPicPr>
+          <p:cNvPr id="12" name="college-logo" descr="logo-full.png"/>
+          <p:cNvPicPr>
+            <a:picLocks noChangeAspect="1"/>
+          </p:cNvPicPr>
+          <p:nvPr/>
+        </p:nvPicPr>
+        <p:blipFill>
+          <a:blip r:embed="rId2"/>
+          <a:stretch>
+            <a:fillRect/>
+          </a:stretch>
+        </p:blipFill>
+        <p:spPr>
+          <a:xfrm>
+            <a:off x="9631062" y="658368"/>
+            <a:ext cx="1755961" cy="749808"/>
+          </a:xfrm>
+          <a:prstGeom prst="rect">
+            <a:avLst/>
+          </a:prstGeom>
+        </p:spPr>
+      </p:pic>
     </p:spTree>
   </p:cSld>
   <p:clrMapOvr>
@@ -8502,9 +8690,33 @@
           </a:p>
         </p:txBody>
       </p:sp>
-      <p:sp>
-        <p:nvSpPr>
-          <p:cNvPr id="3" name="TextBox 2"/>
+      <p:pic>
+        <p:nvPicPr>
+          <p:cNvPr id="3" name="college-logo" descr="logo-mark.png"/>
+          <p:cNvPicPr>
+            <a:picLocks noChangeAspect="1"/>
+          </p:cNvPicPr>
+          <p:nvPr/>
+        </p:nvPicPr>
+        <p:blipFill>
+          <a:blip r:embed="rId2"/>
+          <a:stretch>
+            <a:fillRect/>
+          </a:stretch>
+        </p:blipFill>
+        <p:spPr>
+          <a:xfrm>
+            <a:off x="11203333" y="6199632"/>
+            <a:ext cx="275129" cy="310896"/>
+          </a:xfrm>
+          <a:prstGeom prst="rect">
+            <a:avLst/>
+          </a:prstGeom>
+        </p:spPr>
+      </p:pic>
+      <p:sp>
+        <p:nvSpPr>
+          <p:cNvPr id="4" name="TextBox 3"/>
           <p:cNvSpPr txBox="1"/>
           <p:nvPr/>
         </p:nvSpPr>
@@ -8573,13 +8785,13 @@
       </p:sp>
       <p:sp>
         <p:nvSpPr>
-          <p:cNvPr id="4" name="TextBox 3"/>
+          <p:cNvPr id="5" name="TextBox 4"/>
           <p:cNvSpPr txBox="1"/>
           <p:nvPr/>
         </p:nvSpPr>
         <p:spPr>
           <a:xfrm>
-            <a:off x="8826703" y="6272784"/>
+            <a:off x="8240677" y="6272784"/>
             <a:ext cx="2651760" cy="219456"/>
           </a:xfrm>
           <a:prstGeom prst="rect">
@@ -8642,7 +8854,7 @@
       </p:sp>
       <p:sp>
         <p:nvSpPr>
-          <p:cNvPr id="5" name="TextBox 4"/>
+          <p:cNvPr id="6" name="TextBox 5"/>
           <p:cNvSpPr txBox="1"/>
           <p:nvPr/>
         </p:nvSpPr>
@@ -8689,7 +8901,7 @@
       </p:sp>
       <p:sp>
         <p:nvSpPr>
-          <p:cNvPr id="6" name="TextBox 5"/>
+          <p:cNvPr id="7" name="TextBox 6"/>
           <p:cNvSpPr txBox="1"/>
           <p:nvPr/>
         </p:nvSpPr>
@@ -8736,7 +8948,7 @@
       </p:sp>
       <p:sp>
         <p:nvSpPr>
-          <p:cNvPr id="7" name="Rectangle 6"/>
+          <p:cNvPr id="8" name="Rectangle 7"/>
           <p:cNvSpPr/>
           <p:nvPr/>
         </p:nvSpPr>
@@ -8780,7 +8992,7 @@
       </p:sp>
       <p:sp>
         <p:nvSpPr>
-          <p:cNvPr id="8" name="Rounded Rectangle 7"/>
+          <p:cNvPr id="9" name="Rounded Rectangle 8"/>
           <p:cNvSpPr/>
           <p:nvPr/>
         </p:nvSpPr>
@@ -8834,7 +9046,7 @@
       </p:sp>
       <p:sp>
         <p:nvSpPr>
-          <p:cNvPr id="9" name="Rectangle 8"/>
+          <p:cNvPr id="10" name="Rectangle 9"/>
           <p:cNvSpPr/>
           <p:nvPr/>
         </p:nvSpPr>
@@ -8878,7 +9090,7 @@
       </p:sp>
       <p:sp>
         <p:nvSpPr>
-          <p:cNvPr id="10" name="TextBox 9"/>
+          <p:cNvPr id="11" name="TextBox 10"/>
           <p:cNvSpPr txBox="1"/>
           <p:nvPr/>
         </p:nvSpPr>
@@ -8925,7 +9137,7 @@
       </p:sp>
       <p:sp>
         <p:nvSpPr>
-          <p:cNvPr id="11" name="TextBox 10"/>
+          <p:cNvPr id="12" name="TextBox 11"/>
           <p:cNvSpPr txBox="1"/>
           <p:nvPr/>
         </p:nvSpPr>
@@ -8972,7 +9184,7 @@
       </p:sp>
       <p:sp>
         <p:nvSpPr>
-          <p:cNvPr id="12" name="Rounded Rectangle 11"/>
+          <p:cNvPr id="13" name="Rounded Rectangle 12"/>
           <p:cNvSpPr/>
           <p:nvPr/>
         </p:nvSpPr>
@@ -9026,7 +9238,7 @@
       </p:sp>
       <p:sp>
         <p:nvSpPr>
-          <p:cNvPr id="13" name="Rectangle 12"/>
+          <p:cNvPr id="14" name="Rectangle 13"/>
           <p:cNvSpPr/>
           <p:nvPr/>
         </p:nvSpPr>
@@ -9070,7 +9282,7 @@
       </p:sp>
       <p:sp>
         <p:nvSpPr>
-          <p:cNvPr id="14" name="TextBox 13"/>
+          <p:cNvPr id="15" name="TextBox 14"/>
           <p:cNvSpPr txBox="1"/>
           <p:nvPr/>
         </p:nvSpPr>
@@ -9117,7 +9329,7 @@
       </p:sp>
       <p:sp>
         <p:nvSpPr>
-          <p:cNvPr id="15" name="TextBox 14"/>
+          <p:cNvPr id="16" name="TextBox 15"/>
           <p:cNvSpPr txBox="1"/>
           <p:nvPr/>
         </p:nvSpPr>
@@ -9164,7 +9376,7 @@
       </p:sp>
       <p:sp>
         <p:nvSpPr>
-          <p:cNvPr id="16" name="Rounded Rectangle 15"/>
+          <p:cNvPr id="17" name="Rounded Rectangle 16"/>
           <p:cNvSpPr/>
           <p:nvPr/>
         </p:nvSpPr>
@@ -9218,7 +9430,7 @@
       </p:sp>
       <p:sp>
         <p:nvSpPr>
-          <p:cNvPr id="17" name="Rectangle 16"/>
+          <p:cNvPr id="18" name="Rectangle 17"/>
           <p:cNvSpPr/>
           <p:nvPr/>
         </p:nvSpPr>
@@ -9262,7 +9474,7 @@
       </p:sp>
       <p:sp>
         <p:nvSpPr>
-          <p:cNvPr id="18" name="TextBox 17"/>
+          <p:cNvPr id="19" name="TextBox 18"/>
           <p:cNvSpPr txBox="1"/>
           <p:nvPr/>
         </p:nvSpPr>
@@ -9309,7 +9521,7 @@
       </p:sp>
       <p:sp>
         <p:nvSpPr>
-          <p:cNvPr id="19" name="TextBox 18"/>
+          <p:cNvPr id="20" name="TextBox 19"/>
           <p:cNvSpPr txBox="1"/>
           <p:nvPr/>
         </p:nvSpPr>
@@ -9356,7 +9568,7 @@
       </p:sp>
       <p:sp>
         <p:nvSpPr>
-          <p:cNvPr id="20" name="Rounded Rectangle 19"/>
+          <p:cNvPr id="21" name="Rounded Rectangle 20"/>
           <p:cNvSpPr/>
           <p:nvPr/>
         </p:nvSpPr>
@@ -9410,7 +9622,7 @@
       </p:sp>
       <p:sp>
         <p:nvSpPr>
-          <p:cNvPr id="21" name="Rectangle 20"/>
+          <p:cNvPr id="22" name="Rectangle 21"/>
           <p:cNvSpPr/>
           <p:nvPr/>
         </p:nvSpPr>
@@ -9454,7 +9666,7 @@
       </p:sp>
       <p:sp>
         <p:nvSpPr>
-          <p:cNvPr id="22" name="TextBox 21"/>
+          <p:cNvPr id="23" name="TextBox 22"/>
           <p:cNvSpPr txBox="1"/>
           <p:nvPr/>
         </p:nvSpPr>
@@ -9501,7 +9713,7 @@
       </p:sp>
       <p:sp>
         <p:nvSpPr>
-          <p:cNvPr id="23" name="TextBox 22"/>
+          <p:cNvPr id="24" name="TextBox 23"/>
           <p:cNvSpPr txBox="1"/>
           <p:nvPr/>
         </p:nvSpPr>
@@ -9548,7 +9760,7 @@
       </p:sp>
       <p:sp>
         <p:nvSpPr>
-          <p:cNvPr id="24" name="Rounded Rectangle 23"/>
+          <p:cNvPr id="25" name="Rounded Rectangle 24"/>
           <p:cNvSpPr/>
           <p:nvPr/>
         </p:nvSpPr>
@@ -9602,7 +9814,7 @@
       </p:sp>
       <p:sp>
         <p:nvSpPr>
-          <p:cNvPr id="25" name="Rectangle 24"/>
+          <p:cNvPr id="26" name="Rectangle 25"/>
           <p:cNvSpPr/>
           <p:nvPr/>
         </p:nvSpPr>
@@ -9646,7 +9858,7 @@
       </p:sp>
       <p:sp>
         <p:nvSpPr>
-          <p:cNvPr id="26" name="TextBox 25"/>
+          <p:cNvPr id="27" name="TextBox 26"/>
           <p:cNvSpPr txBox="1"/>
           <p:nvPr/>
         </p:nvSpPr>
@@ -9693,7 +9905,7 @@
       </p:sp>
       <p:sp>
         <p:nvSpPr>
-          <p:cNvPr id="27" name="TextBox 26"/>
+          <p:cNvPr id="28" name="TextBox 27"/>
           <p:cNvSpPr txBox="1"/>
           <p:nvPr/>
         </p:nvSpPr>
@@ -9740,7 +9952,7 @@
       </p:sp>
       <p:sp>
         <p:nvSpPr>
-          <p:cNvPr id="28" name="Rounded Rectangle 27"/>
+          <p:cNvPr id="29" name="Rounded Rectangle 28"/>
           <p:cNvSpPr/>
           <p:nvPr/>
         </p:nvSpPr>
@@ -9794,7 +10006,7 @@
       </p:sp>
       <p:sp>
         <p:nvSpPr>
-          <p:cNvPr id="29" name="Rectangle 28"/>
+          <p:cNvPr id="30" name="Rectangle 29"/>
           <p:cNvSpPr/>
           <p:nvPr/>
         </p:nvSpPr>
@@ -9838,7 +10050,7 @@
       </p:sp>
       <p:sp>
         <p:nvSpPr>
-          <p:cNvPr id="30" name="TextBox 29"/>
+          <p:cNvPr id="31" name="TextBox 30"/>
           <p:cNvSpPr txBox="1"/>
           <p:nvPr/>
         </p:nvSpPr>
@@ -9885,7 +10097,7 @@
       </p:sp>
       <p:sp>
         <p:nvSpPr>
-          <p:cNvPr id="31" name="TextBox 30"/>
+          <p:cNvPr id="32" name="TextBox 31"/>
           <p:cNvSpPr txBox="1"/>
           <p:nvPr/>
         </p:nvSpPr>
@@ -9992,9 +10204,33 @@
           </a:p>
         </p:txBody>
       </p:sp>
-      <p:sp>
-        <p:nvSpPr>
-          <p:cNvPr id="3" name="TextBox 2"/>
+      <p:pic>
+        <p:nvPicPr>
+          <p:cNvPr id="3" name="college-logo" descr="logo-mark.png"/>
+          <p:cNvPicPr>
+            <a:picLocks noChangeAspect="1"/>
+          </p:cNvPicPr>
+          <p:nvPr/>
+        </p:nvPicPr>
+        <p:blipFill>
+          <a:blip r:embed="rId2"/>
+          <a:stretch>
+            <a:fillRect/>
+          </a:stretch>
+        </p:blipFill>
+        <p:spPr>
+          <a:xfrm>
+            <a:off x="11203333" y="6199632"/>
+            <a:ext cx="275129" cy="310896"/>
+          </a:xfrm>
+          <a:prstGeom prst="rect">
+            <a:avLst/>
+          </a:prstGeom>
+        </p:spPr>
+      </p:pic>
+      <p:sp>
+        <p:nvSpPr>
+          <p:cNvPr id="4" name="TextBox 3"/>
           <p:cNvSpPr txBox="1"/>
           <p:nvPr/>
         </p:nvSpPr>
@@ -10063,13 +10299,13 @@
       </p:sp>
       <p:sp>
         <p:nvSpPr>
-          <p:cNvPr id="4" name="TextBox 3"/>
+          <p:cNvPr id="5" name="TextBox 4"/>
           <p:cNvSpPr txBox="1"/>
           <p:nvPr/>
         </p:nvSpPr>
         <p:spPr>
           <a:xfrm>
-            <a:off x="8826703" y="6272784"/>
+            <a:off x="8240677" y="6272784"/>
             <a:ext cx="2651760" cy="219456"/>
           </a:xfrm>
           <a:prstGeom prst="rect">
@@ -10132,7 +10368,7 @@
       </p:sp>
       <p:sp>
         <p:nvSpPr>
-          <p:cNvPr id="5" name="TextBox 4"/>
+          <p:cNvPr id="6" name="TextBox 5"/>
           <p:cNvSpPr txBox="1"/>
           <p:nvPr/>
         </p:nvSpPr>
@@ -10179,7 +10415,7 @@
       </p:sp>
       <p:sp>
         <p:nvSpPr>
-          <p:cNvPr id="6" name="TextBox 5"/>
+          <p:cNvPr id="7" name="TextBox 6"/>
           <p:cNvSpPr txBox="1"/>
           <p:nvPr/>
         </p:nvSpPr>
@@ -10226,7 +10462,7 @@
       </p:sp>
       <p:sp>
         <p:nvSpPr>
-          <p:cNvPr id="7" name="Rectangle 6"/>
+          <p:cNvPr id="8" name="Rectangle 7"/>
           <p:cNvSpPr/>
           <p:nvPr/>
         </p:nvSpPr>
@@ -10270,7 +10506,7 @@
       </p:sp>
       <p:sp>
         <p:nvSpPr>
-          <p:cNvPr id="8" name="TextBox 7"/>
+          <p:cNvPr id="9" name="TextBox 8"/>
           <p:cNvSpPr txBox="1"/>
           <p:nvPr/>
         </p:nvSpPr>
@@ -10317,7 +10553,7 @@
       </p:sp>
       <p:sp>
         <p:nvSpPr>
-          <p:cNvPr id="9" name="Rounded Rectangle 8"/>
+          <p:cNvPr id="10" name="Rounded Rectangle 9"/>
           <p:cNvSpPr/>
           <p:nvPr/>
         </p:nvSpPr>
@@ -10363,7 +10599,7 @@
       </p:sp>
       <p:sp>
         <p:nvSpPr>
-          <p:cNvPr id="10" name="TextBox 9"/>
+          <p:cNvPr id="11" name="TextBox 10"/>
           <p:cNvSpPr txBox="1"/>
           <p:nvPr/>
         </p:nvSpPr>
@@ -10434,7 +10670,7 @@
       </p:sp>
       <p:sp>
         <p:nvSpPr>
-          <p:cNvPr id="11" name="Rounded Rectangle 10"/>
+          <p:cNvPr id="12" name="Rounded Rectangle 11"/>
           <p:cNvSpPr/>
           <p:nvPr/>
         </p:nvSpPr>
@@ -10480,7 +10716,7 @@
       </p:sp>
       <p:sp>
         <p:nvSpPr>
-          <p:cNvPr id="12" name="TextBox 11"/>
+          <p:cNvPr id="13" name="TextBox 12"/>
           <p:cNvSpPr txBox="1"/>
           <p:nvPr/>
         </p:nvSpPr>
@@ -10551,7 +10787,7 @@
       </p:sp>
       <p:sp>
         <p:nvSpPr>
-          <p:cNvPr id="13" name="Rounded Rectangle 12"/>
+          <p:cNvPr id="14" name="Rounded Rectangle 13"/>
           <p:cNvSpPr/>
           <p:nvPr/>
         </p:nvSpPr>
@@ -10597,7 +10833,7 @@
       </p:sp>
       <p:sp>
         <p:nvSpPr>
-          <p:cNvPr id="14" name="TextBox 13"/>
+          <p:cNvPr id="15" name="TextBox 14"/>
           <p:cNvSpPr txBox="1"/>
           <p:nvPr/>
         </p:nvSpPr>
@@ -10668,7 +10904,7 @@
       </p:sp>
       <p:sp>
         <p:nvSpPr>
-          <p:cNvPr id="15" name="Rounded Rectangle 14"/>
+          <p:cNvPr id="16" name="Rounded Rectangle 15"/>
           <p:cNvSpPr/>
           <p:nvPr/>
         </p:nvSpPr>
@@ -10714,7 +10950,7 @@
       </p:sp>
       <p:sp>
         <p:nvSpPr>
-          <p:cNvPr id="16" name="TextBox 15"/>
+          <p:cNvPr id="17" name="TextBox 16"/>
           <p:cNvSpPr txBox="1"/>
           <p:nvPr/>
         </p:nvSpPr>
@@ -10785,7 +11021,7 @@
       </p:sp>
       <p:sp>
         <p:nvSpPr>
-          <p:cNvPr id="17" name="Rounded Rectangle 16"/>
+          <p:cNvPr id="18" name="Rounded Rectangle 17"/>
           <p:cNvSpPr/>
           <p:nvPr/>
         </p:nvSpPr>
@@ -10831,7 +11067,7 @@
       </p:sp>
       <p:sp>
         <p:nvSpPr>
-          <p:cNvPr id="18" name="TextBox 17"/>
+          <p:cNvPr id="19" name="TextBox 18"/>
           <p:cNvSpPr txBox="1"/>
           <p:nvPr/>
         </p:nvSpPr>
@@ -10902,7 +11138,7 @@
       </p:sp>
       <p:sp>
         <p:nvSpPr>
-          <p:cNvPr id="19" name="Rounded Rectangle 18"/>
+          <p:cNvPr id="20" name="Rounded Rectangle 19"/>
           <p:cNvSpPr/>
           <p:nvPr/>
         </p:nvSpPr>
@@ -10948,7 +11184,7 @@
       </p:sp>
       <p:sp>
         <p:nvSpPr>
-          <p:cNvPr id="20" name="TextBox 19"/>
+          <p:cNvPr id="21" name="TextBox 20"/>
           <p:cNvSpPr txBox="1"/>
           <p:nvPr/>
         </p:nvSpPr>
@@ -11455,6 +11691,76 @@
           </a:p>
         </p:txBody>
       </p:sp>
+      <p:sp>
+        <p:nvSpPr>
+          <p:cNvPr id="11" name="logo-plate"/>
+          <p:cNvSpPr/>
+          <p:nvPr/>
+        </p:nvSpPr>
+        <p:spPr>
+          <a:xfrm>
+            <a:off x="9512190" y="539496"/>
+            <a:ext cx="1993704" cy="987552"/>
+          </a:xfrm>
+          <a:prstGeom prst="roundRect">
+            <a:avLst>
+              <a:gd name="adj" fmla="val 14000"/>
+            </a:avLst>
+          </a:prstGeom>
+          <a:solidFill>
+            <a:srgbClr val="FFFFFF"/>
+          </a:solidFill>
+          <a:ln>
+            <a:noFill/>
+          </a:ln>
+          <a:effectLst/>
+        </p:spPr>
+        <p:style>
+          <a:lnRef idx="1">
+            <a:schemeClr val="accent1"/>
+          </a:lnRef>
+          <a:fillRef idx="3">
+            <a:schemeClr val="accent1"/>
+          </a:fillRef>
+          <a:effectRef idx="2">
+            <a:schemeClr val="accent1"/>
+          </a:effectRef>
+          <a:fontRef idx="minor">
+            <a:schemeClr val="lt1"/>
+          </a:fontRef>
+        </p:style>
+        <p:txBody>
+          <a:bodyPr rtlCol="0" anchor="ctr" wrap="square"/>
+          <a:lstStyle/>
+          <a:p>
+            <a:pPr algn="ctr"/>
+          </a:p>
+        </p:txBody>
+      </p:sp>
+      <p:pic>
+        <p:nvPicPr>
+          <p:cNvPr id="12" name="college-logo" descr="logo-full.png"/>
+          <p:cNvPicPr>
+            <a:picLocks noChangeAspect="1"/>
+          </p:cNvPicPr>
+          <p:nvPr/>
+        </p:nvPicPr>
+        <p:blipFill>
+          <a:blip r:embed="rId2"/>
+          <a:stretch>
+            <a:fillRect/>
+          </a:stretch>
+        </p:blipFill>
+        <p:spPr>
+          <a:xfrm>
+            <a:off x="9631062" y="658368"/>
+            <a:ext cx="1755961" cy="749808"/>
+          </a:xfrm>
+          <a:prstGeom prst="rect">
+            <a:avLst/>
+          </a:prstGeom>
+        </p:spPr>
+      </p:pic>
     </p:spTree>
   </p:cSld>
   <p:clrMapOvr>
@@ -11517,9 +11823,33 @@
           </a:p>
         </p:txBody>
       </p:sp>
-      <p:sp>
-        <p:nvSpPr>
-          <p:cNvPr id="3" name="TextBox 2"/>
+      <p:pic>
+        <p:nvPicPr>
+          <p:cNvPr id="3" name="college-logo" descr="logo-mark.png"/>
+          <p:cNvPicPr>
+            <a:picLocks noChangeAspect="1"/>
+          </p:cNvPicPr>
+          <p:nvPr/>
+        </p:nvPicPr>
+        <p:blipFill>
+          <a:blip r:embed="rId2"/>
+          <a:stretch>
+            <a:fillRect/>
+          </a:stretch>
+        </p:blipFill>
+        <p:spPr>
+          <a:xfrm>
+            <a:off x="11203333" y="6199632"/>
+            <a:ext cx="275129" cy="310896"/>
+          </a:xfrm>
+          <a:prstGeom prst="rect">
+            <a:avLst/>
+          </a:prstGeom>
+        </p:spPr>
+      </p:pic>
+      <p:sp>
+        <p:nvSpPr>
+          <p:cNvPr id="4" name="TextBox 3"/>
           <p:cNvSpPr txBox="1"/>
           <p:nvPr/>
         </p:nvSpPr>
@@ -11588,13 +11918,13 @@
       </p:sp>
       <p:sp>
         <p:nvSpPr>
-          <p:cNvPr id="4" name="TextBox 3"/>
+          <p:cNvPr id="5" name="TextBox 4"/>
           <p:cNvSpPr txBox="1"/>
           <p:nvPr/>
         </p:nvSpPr>
         <p:spPr>
           <a:xfrm>
-            <a:off x="8826703" y="6272784"/>
+            <a:off x="8240677" y="6272784"/>
             <a:ext cx="2651760" cy="219456"/>
           </a:xfrm>
           <a:prstGeom prst="rect">
@@ -11657,7 +11987,7 @@
       </p:sp>
       <p:sp>
         <p:nvSpPr>
-          <p:cNvPr id="5" name="TextBox 4"/>
+          <p:cNvPr id="6" name="TextBox 5"/>
           <p:cNvSpPr txBox="1"/>
           <p:nvPr/>
         </p:nvSpPr>
@@ -11704,7 +12034,7 @@
       </p:sp>
       <p:sp>
         <p:nvSpPr>
-          <p:cNvPr id="6" name="TextBox 5"/>
+          <p:cNvPr id="7" name="TextBox 6"/>
           <p:cNvSpPr txBox="1"/>
           <p:nvPr/>
         </p:nvSpPr>
@@ -11751,7 +12081,7 @@
       </p:sp>
       <p:sp>
         <p:nvSpPr>
-          <p:cNvPr id="7" name="Rectangle 6"/>
+          <p:cNvPr id="8" name="Rectangle 7"/>
           <p:cNvSpPr/>
           <p:nvPr/>
         </p:nvSpPr>
@@ -11795,7 +12125,7 @@
       </p:sp>
       <p:sp>
         <p:nvSpPr>
-          <p:cNvPr id="8" name="Rounded Rectangle 7"/>
+          <p:cNvPr id="9" name="Rounded Rectangle 8"/>
           <p:cNvSpPr/>
           <p:nvPr/>
         </p:nvSpPr>
@@ -11849,7 +12179,7 @@
       </p:sp>
       <p:sp>
         <p:nvSpPr>
-          <p:cNvPr id="9" name="Rectangle 8"/>
+          <p:cNvPr id="10" name="Rectangle 9"/>
           <p:cNvSpPr/>
           <p:nvPr/>
         </p:nvSpPr>
@@ -11893,7 +12223,7 @@
       </p:sp>
       <p:sp>
         <p:nvSpPr>
-          <p:cNvPr id="10" name="TextBox 9"/>
+          <p:cNvPr id="11" name="TextBox 10"/>
           <p:cNvSpPr txBox="1"/>
           <p:nvPr/>
         </p:nvSpPr>
@@ -11940,7 +12270,7 @@
       </p:sp>
       <p:sp>
         <p:nvSpPr>
-          <p:cNvPr id="11" name="TextBox 10"/>
+          <p:cNvPr id="12" name="TextBox 11"/>
           <p:cNvSpPr txBox="1"/>
           <p:nvPr/>
         </p:nvSpPr>
@@ -11987,7 +12317,7 @@
       </p:sp>
       <p:sp>
         <p:nvSpPr>
-          <p:cNvPr id="12" name="Rounded Rectangle 11"/>
+          <p:cNvPr id="13" name="Rounded Rectangle 12"/>
           <p:cNvSpPr/>
           <p:nvPr/>
         </p:nvSpPr>
@@ -12041,7 +12371,7 @@
       </p:sp>
       <p:sp>
         <p:nvSpPr>
-          <p:cNvPr id="13" name="Rectangle 12"/>
+          <p:cNvPr id="14" name="Rectangle 13"/>
           <p:cNvSpPr/>
           <p:nvPr/>
         </p:nvSpPr>
@@ -12085,7 +12415,7 @@
       </p:sp>
       <p:sp>
         <p:nvSpPr>
-          <p:cNvPr id="14" name="TextBox 13"/>
+          <p:cNvPr id="15" name="TextBox 14"/>
           <p:cNvSpPr txBox="1"/>
           <p:nvPr/>
         </p:nvSpPr>
@@ -12132,7 +12462,7 @@
       </p:sp>
       <p:sp>
         <p:nvSpPr>
-          <p:cNvPr id="15" name="TextBox 14"/>
+          <p:cNvPr id="16" name="TextBox 15"/>
           <p:cNvSpPr txBox="1"/>
           <p:nvPr/>
         </p:nvSpPr>
@@ -12179,7 +12509,7 @@
       </p:sp>
       <p:sp>
         <p:nvSpPr>
-          <p:cNvPr id="16" name="Rounded Rectangle 15"/>
+          <p:cNvPr id="17" name="Rounded Rectangle 16"/>
           <p:cNvSpPr/>
           <p:nvPr/>
         </p:nvSpPr>
@@ -12233,7 +12563,7 @@
       </p:sp>
       <p:sp>
         <p:nvSpPr>
-          <p:cNvPr id="17" name="Rectangle 16"/>
+          <p:cNvPr id="18" name="Rectangle 17"/>
           <p:cNvSpPr/>
           <p:nvPr/>
         </p:nvSpPr>
@@ -12277,7 +12607,7 @@
       </p:sp>
       <p:sp>
         <p:nvSpPr>
-          <p:cNvPr id="18" name="TextBox 17"/>
+          <p:cNvPr id="19" name="TextBox 18"/>
           <p:cNvSpPr txBox="1"/>
           <p:nvPr/>
         </p:nvSpPr>
@@ -12324,7 +12654,7 @@
       </p:sp>
       <p:sp>
         <p:nvSpPr>
-          <p:cNvPr id="19" name="TextBox 18"/>
+          <p:cNvPr id="20" name="TextBox 19"/>
           <p:cNvSpPr txBox="1"/>
           <p:nvPr/>
         </p:nvSpPr>
@@ -12371,7 +12701,7 @@
       </p:sp>
       <p:sp>
         <p:nvSpPr>
-          <p:cNvPr id="20" name="Rounded Rectangle 19"/>
+          <p:cNvPr id="21" name="Rounded Rectangle 20"/>
           <p:cNvSpPr/>
           <p:nvPr/>
         </p:nvSpPr>
@@ -12425,7 +12755,7 @@
       </p:sp>
       <p:sp>
         <p:nvSpPr>
-          <p:cNvPr id="21" name="Rectangle 20"/>
+          <p:cNvPr id="22" name="Rectangle 21"/>
           <p:cNvSpPr/>
           <p:nvPr/>
         </p:nvSpPr>
@@ -12469,7 +12799,7 @@
       </p:sp>
       <p:sp>
         <p:nvSpPr>
-          <p:cNvPr id="22" name="TextBox 21"/>
+          <p:cNvPr id="23" name="TextBox 22"/>
           <p:cNvSpPr txBox="1"/>
           <p:nvPr/>
         </p:nvSpPr>
@@ -12516,7 +12846,7 @@
       </p:sp>
       <p:sp>
         <p:nvSpPr>
-          <p:cNvPr id="23" name="TextBox 22"/>
+          <p:cNvPr id="24" name="TextBox 23"/>
           <p:cNvSpPr txBox="1"/>
           <p:nvPr/>
         </p:nvSpPr>
@@ -12563,7 +12893,7 @@
       </p:sp>
       <p:sp>
         <p:nvSpPr>
-          <p:cNvPr id="24" name="Rounded Rectangle 23"/>
+          <p:cNvPr id="25" name="Rounded Rectangle 24"/>
           <p:cNvSpPr/>
           <p:nvPr/>
         </p:nvSpPr>
@@ -12617,7 +12947,7 @@
       </p:sp>
       <p:sp>
         <p:nvSpPr>
-          <p:cNvPr id="25" name="Rectangle 24"/>
+          <p:cNvPr id="26" name="Rectangle 25"/>
           <p:cNvSpPr/>
           <p:nvPr/>
         </p:nvSpPr>
@@ -12661,7 +12991,7 @@
       </p:sp>
       <p:sp>
         <p:nvSpPr>
-          <p:cNvPr id="26" name="TextBox 25"/>
+          <p:cNvPr id="27" name="TextBox 26"/>
           <p:cNvSpPr txBox="1"/>
           <p:nvPr/>
         </p:nvSpPr>
@@ -12708,7 +13038,7 @@
       </p:sp>
       <p:sp>
         <p:nvSpPr>
-          <p:cNvPr id="27" name="TextBox 26"/>
+          <p:cNvPr id="28" name="TextBox 27"/>
           <p:cNvSpPr txBox="1"/>
           <p:nvPr/>
         </p:nvSpPr>
@@ -12755,7 +13085,7 @@
       </p:sp>
       <p:sp>
         <p:nvSpPr>
-          <p:cNvPr id="28" name="Rounded Rectangle 27"/>
+          <p:cNvPr id="29" name="Rounded Rectangle 28"/>
           <p:cNvSpPr/>
           <p:nvPr/>
         </p:nvSpPr>
@@ -12809,7 +13139,7 @@
       </p:sp>
       <p:sp>
         <p:nvSpPr>
-          <p:cNvPr id="29" name="Rectangle 28"/>
+          <p:cNvPr id="30" name="Rectangle 29"/>
           <p:cNvSpPr/>
           <p:nvPr/>
         </p:nvSpPr>
@@ -12853,7 +13183,7 @@
       </p:sp>
       <p:sp>
         <p:nvSpPr>
-          <p:cNvPr id="30" name="TextBox 29"/>
+          <p:cNvPr id="31" name="TextBox 30"/>
           <p:cNvSpPr txBox="1"/>
           <p:nvPr/>
         </p:nvSpPr>
@@ -12900,7 +13230,7 @@
       </p:sp>
       <p:sp>
         <p:nvSpPr>
-          <p:cNvPr id="31" name="TextBox 30"/>
+          <p:cNvPr id="32" name="TextBox 31"/>
           <p:cNvSpPr txBox="1"/>
           <p:nvPr/>
         </p:nvSpPr>
@@ -13007,9 +13337,33 @@
           </a:p>
         </p:txBody>
       </p:sp>
-      <p:sp>
-        <p:nvSpPr>
-          <p:cNvPr id="3" name="TextBox 2"/>
+      <p:pic>
+        <p:nvPicPr>
+          <p:cNvPr id="3" name="college-logo" descr="logo-mark.png"/>
+          <p:cNvPicPr>
+            <a:picLocks noChangeAspect="1"/>
+          </p:cNvPicPr>
+          <p:nvPr/>
+        </p:nvPicPr>
+        <p:blipFill>
+          <a:blip r:embed="rId2"/>
+          <a:stretch>
+            <a:fillRect/>
+          </a:stretch>
+        </p:blipFill>
+        <p:spPr>
+          <a:xfrm>
+            <a:off x="11203333" y="6199632"/>
+            <a:ext cx="275129" cy="310896"/>
+          </a:xfrm>
+          <a:prstGeom prst="rect">
+            <a:avLst/>
+          </a:prstGeom>
+        </p:spPr>
+      </p:pic>
+      <p:sp>
+        <p:nvSpPr>
+          <p:cNvPr id="4" name="TextBox 3"/>
           <p:cNvSpPr txBox="1"/>
           <p:nvPr/>
         </p:nvSpPr>
@@ -13078,13 +13432,13 @@
       </p:sp>
       <p:sp>
         <p:nvSpPr>
-          <p:cNvPr id="4" name="TextBox 3"/>
+          <p:cNvPr id="5" name="TextBox 4"/>
           <p:cNvSpPr txBox="1"/>
           <p:nvPr/>
         </p:nvSpPr>
         <p:spPr>
           <a:xfrm>
-            <a:off x="8826703" y="6272784"/>
+            <a:off x="8240677" y="6272784"/>
             <a:ext cx="2651760" cy="219456"/>
           </a:xfrm>
           <a:prstGeom prst="rect">
@@ -13147,7 +13501,7 @@
       </p:sp>
       <p:sp>
         <p:nvSpPr>
-          <p:cNvPr id="5" name="TextBox 4"/>
+          <p:cNvPr id="6" name="TextBox 5"/>
           <p:cNvSpPr txBox="1"/>
           <p:nvPr/>
         </p:nvSpPr>
@@ -13194,7 +13548,7 @@
       </p:sp>
       <p:sp>
         <p:nvSpPr>
-          <p:cNvPr id="6" name="TextBox 5"/>
+          <p:cNvPr id="7" name="TextBox 6"/>
           <p:cNvSpPr txBox="1"/>
           <p:nvPr/>
         </p:nvSpPr>
@@ -13241,7 +13595,7 @@
       </p:sp>
       <p:sp>
         <p:nvSpPr>
-          <p:cNvPr id="7" name="Rectangle 6"/>
+          <p:cNvPr id="8" name="Rectangle 7"/>
           <p:cNvSpPr/>
           <p:nvPr/>
         </p:nvSpPr>
@@ -13285,7 +13639,7 @@
       </p:sp>
       <p:graphicFrame>
         <p:nvGraphicFramePr>
-          <p:cNvPr id="8" name="Table 7"/>
+          <p:cNvPr id="9" name="Table 8"/>
           <p:cNvGraphicFramePr>
             <a:graphicFrameLocks noGrp="1"/>
           </p:cNvGraphicFramePr>
@@ -14023,7 +14377,7 @@
       </p:graphicFrame>
       <p:sp>
         <p:nvSpPr>
-          <p:cNvPr id="9" name="Rounded Rectangle 8"/>
+          <p:cNvPr id="10" name="Rounded Rectangle 9"/>
           <p:cNvSpPr/>
           <p:nvPr/>
         </p:nvSpPr>
@@ -14090,7 +14444,7 @@
       </p:sp>
       <p:sp>
         <p:nvSpPr>
-          <p:cNvPr id="10" name="Rectangle 9"/>
+          <p:cNvPr id="11" name="Rectangle 10"/>
           <p:cNvSpPr/>
           <p:nvPr/>
         </p:nvSpPr>
@@ -14570,6 +14924,76 @@
           </a:p>
         </p:txBody>
       </p:sp>
+      <p:sp>
+        <p:nvSpPr>
+          <p:cNvPr id="11" name="logo-plate"/>
+          <p:cNvSpPr/>
+          <p:nvPr/>
+        </p:nvSpPr>
+        <p:spPr>
+          <a:xfrm>
+            <a:off x="9512190" y="539496"/>
+            <a:ext cx="1993704" cy="987552"/>
+          </a:xfrm>
+          <a:prstGeom prst="roundRect">
+            <a:avLst>
+              <a:gd name="adj" fmla="val 14000"/>
+            </a:avLst>
+          </a:prstGeom>
+          <a:solidFill>
+            <a:srgbClr val="FFFFFF"/>
+          </a:solidFill>
+          <a:ln>
+            <a:noFill/>
+          </a:ln>
+          <a:effectLst/>
+        </p:spPr>
+        <p:style>
+          <a:lnRef idx="1">
+            <a:schemeClr val="accent1"/>
+          </a:lnRef>
+          <a:fillRef idx="3">
+            <a:schemeClr val="accent1"/>
+          </a:fillRef>
+          <a:effectRef idx="2">
+            <a:schemeClr val="accent1"/>
+          </a:effectRef>
+          <a:fontRef idx="minor">
+            <a:schemeClr val="lt1"/>
+          </a:fontRef>
+        </p:style>
+        <p:txBody>
+          <a:bodyPr rtlCol="0" anchor="ctr" wrap="square"/>
+          <a:lstStyle/>
+          <a:p>
+            <a:pPr algn="ctr"/>
+          </a:p>
+        </p:txBody>
+      </p:sp>
+      <p:pic>
+        <p:nvPicPr>
+          <p:cNvPr id="12" name="college-logo" descr="logo-full.png"/>
+          <p:cNvPicPr>
+            <a:picLocks noChangeAspect="1"/>
+          </p:cNvPicPr>
+          <p:nvPr/>
+        </p:nvPicPr>
+        <p:blipFill>
+          <a:blip r:embed="rId2"/>
+          <a:stretch>
+            <a:fillRect/>
+          </a:stretch>
+        </p:blipFill>
+        <p:spPr>
+          <a:xfrm>
+            <a:off x="9631062" y="658368"/>
+            <a:ext cx="1755961" cy="749808"/>
+          </a:xfrm>
+          <a:prstGeom prst="rect">
+            <a:avLst/>
+          </a:prstGeom>
+        </p:spPr>
+      </p:pic>
     </p:spTree>
   </p:cSld>
   <p:clrMapOvr>
@@ -14632,9 +15056,33 @@
           </a:p>
         </p:txBody>
       </p:sp>
-      <p:sp>
-        <p:nvSpPr>
-          <p:cNvPr id="3" name="TextBox 2"/>
+      <p:pic>
+        <p:nvPicPr>
+          <p:cNvPr id="3" name="college-logo" descr="logo-mark.png"/>
+          <p:cNvPicPr>
+            <a:picLocks noChangeAspect="1"/>
+          </p:cNvPicPr>
+          <p:nvPr/>
+        </p:nvPicPr>
+        <p:blipFill>
+          <a:blip r:embed="rId2"/>
+          <a:stretch>
+            <a:fillRect/>
+          </a:stretch>
+        </p:blipFill>
+        <p:spPr>
+          <a:xfrm>
+            <a:off x="11203333" y="6199632"/>
+            <a:ext cx="275129" cy="310896"/>
+          </a:xfrm>
+          <a:prstGeom prst="rect">
+            <a:avLst/>
+          </a:prstGeom>
+        </p:spPr>
+      </p:pic>
+      <p:sp>
+        <p:nvSpPr>
+          <p:cNvPr id="4" name="TextBox 3"/>
           <p:cNvSpPr txBox="1"/>
           <p:nvPr/>
         </p:nvSpPr>
@@ -14703,13 +15151,13 @@
       </p:sp>
       <p:sp>
         <p:nvSpPr>
-          <p:cNvPr id="4" name="TextBox 3"/>
+          <p:cNvPr id="5" name="TextBox 4"/>
           <p:cNvSpPr txBox="1"/>
           <p:nvPr/>
         </p:nvSpPr>
         <p:spPr>
           <a:xfrm>
-            <a:off x="8826703" y="6272784"/>
+            <a:off x="8240677" y="6272784"/>
             <a:ext cx="2651760" cy="219456"/>
           </a:xfrm>
           <a:prstGeom prst="rect">
@@ -14772,7 +15220,7 @@
       </p:sp>
       <p:sp>
         <p:nvSpPr>
-          <p:cNvPr id="5" name="TextBox 4"/>
+          <p:cNvPr id="6" name="TextBox 5"/>
           <p:cNvSpPr txBox="1"/>
           <p:nvPr/>
         </p:nvSpPr>
@@ -14819,7 +15267,7 @@
       </p:sp>
       <p:sp>
         <p:nvSpPr>
-          <p:cNvPr id="6" name="TextBox 5"/>
+          <p:cNvPr id="7" name="TextBox 6"/>
           <p:cNvSpPr txBox="1"/>
           <p:nvPr/>
         </p:nvSpPr>
@@ -14866,7 +15314,7 @@
       </p:sp>
       <p:sp>
         <p:nvSpPr>
-          <p:cNvPr id="7" name="Rectangle 6"/>
+          <p:cNvPr id="8" name="Rectangle 7"/>
           <p:cNvSpPr/>
           <p:nvPr/>
         </p:nvSpPr>
@@ -14910,7 +15358,7 @@
       </p:sp>
       <p:sp>
         <p:nvSpPr>
-          <p:cNvPr id="8" name="TextBox 7"/>
+          <p:cNvPr id="9" name="TextBox 8"/>
           <p:cNvSpPr txBox="1"/>
           <p:nvPr/>
         </p:nvSpPr>
@@ -14957,7 +15405,7 @@
       </p:sp>
       <p:sp>
         <p:nvSpPr>
-          <p:cNvPr id="9" name="Rounded Rectangle 8"/>
+          <p:cNvPr id="10" name="Rounded Rectangle 9"/>
           <p:cNvSpPr/>
           <p:nvPr/>
         </p:nvSpPr>
@@ -15011,7 +15459,7 @@
       </p:sp>
       <p:sp>
         <p:nvSpPr>
-          <p:cNvPr id="10" name="Rectangle 9"/>
+          <p:cNvPr id="11" name="Rectangle 10"/>
           <p:cNvSpPr/>
           <p:nvPr/>
         </p:nvSpPr>
@@ -15055,7 +15503,7 @@
       </p:sp>
       <p:sp>
         <p:nvSpPr>
-          <p:cNvPr id="11" name="Rounded Rectangle 10"/>
+          <p:cNvPr id="12" name="Rounded Rectangle 11"/>
           <p:cNvSpPr/>
           <p:nvPr/>
         </p:nvSpPr>
@@ -15122,7 +15570,7 @@
       </p:sp>
       <p:sp>
         <p:nvSpPr>
-          <p:cNvPr id="12" name="TextBox 11"/>
+          <p:cNvPr id="13" name="TextBox 12"/>
           <p:cNvSpPr txBox="1"/>
           <p:nvPr/>
         </p:nvSpPr>
@@ -15169,7 +15617,7 @@
       </p:sp>
       <p:sp>
         <p:nvSpPr>
-          <p:cNvPr id="13" name="Rectangle 12"/>
+          <p:cNvPr id="14" name="Rectangle 13"/>
           <p:cNvSpPr/>
           <p:nvPr/>
         </p:nvSpPr>
@@ -15213,7 +15661,7 @@
       </p:sp>
       <p:sp>
         <p:nvSpPr>
-          <p:cNvPr id="14" name="Rounded Rectangle 13"/>
+          <p:cNvPr id="15" name="Rounded Rectangle 14"/>
           <p:cNvSpPr/>
           <p:nvPr/>
         </p:nvSpPr>
@@ -15259,7 +15707,7 @@
       </p:sp>
       <p:sp>
         <p:nvSpPr>
-          <p:cNvPr id="15" name="TextBox 14"/>
+          <p:cNvPr id="16" name="TextBox 15"/>
           <p:cNvSpPr txBox="1"/>
           <p:nvPr/>
         </p:nvSpPr>
@@ -15306,7 +15754,7 @@
       </p:sp>
       <p:sp>
         <p:nvSpPr>
-          <p:cNvPr id="16" name="Rounded Rectangle 15"/>
+          <p:cNvPr id="17" name="Rounded Rectangle 16"/>
           <p:cNvSpPr/>
           <p:nvPr/>
         </p:nvSpPr>
@@ -15352,7 +15800,7 @@
       </p:sp>
       <p:sp>
         <p:nvSpPr>
-          <p:cNvPr id="17" name="TextBox 16"/>
+          <p:cNvPr id="18" name="TextBox 17"/>
           <p:cNvSpPr txBox="1"/>
           <p:nvPr/>
         </p:nvSpPr>
@@ -15399,7 +15847,7 @@
       </p:sp>
       <p:sp>
         <p:nvSpPr>
-          <p:cNvPr id="18" name="Rounded Rectangle 17"/>
+          <p:cNvPr id="19" name="Rounded Rectangle 18"/>
           <p:cNvSpPr/>
           <p:nvPr/>
         </p:nvSpPr>
@@ -15445,7 +15893,7 @@
       </p:sp>
       <p:sp>
         <p:nvSpPr>
-          <p:cNvPr id="19" name="TextBox 18"/>
+          <p:cNvPr id="20" name="TextBox 19"/>
           <p:cNvSpPr txBox="1"/>
           <p:nvPr/>
         </p:nvSpPr>
@@ -15492,7 +15940,7 @@
       </p:sp>
       <p:sp>
         <p:nvSpPr>
-          <p:cNvPr id="20" name="Rounded Rectangle 19"/>
+          <p:cNvPr id="21" name="Rounded Rectangle 20"/>
           <p:cNvSpPr/>
           <p:nvPr/>
         </p:nvSpPr>
@@ -15538,7 +15986,7 @@
       </p:sp>
       <p:sp>
         <p:nvSpPr>
-          <p:cNvPr id="21" name="TextBox 20"/>
+          <p:cNvPr id="22" name="TextBox 21"/>
           <p:cNvSpPr txBox="1"/>
           <p:nvPr/>
         </p:nvSpPr>
@@ -15585,7 +16033,7 @@
       </p:sp>
       <p:sp>
         <p:nvSpPr>
-          <p:cNvPr id="22" name="Rounded Rectangle 21"/>
+          <p:cNvPr id="23" name="Rounded Rectangle 22"/>
           <p:cNvSpPr/>
           <p:nvPr/>
         </p:nvSpPr>
@@ -15631,7 +16079,7 @@
       </p:sp>
       <p:sp>
         <p:nvSpPr>
-          <p:cNvPr id="23" name="TextBox 22"/>
+          <p:cNvPr id="24" name="TextBox 23"/>
           <p:cNvSpPr txBox="1"/>
           <p:nvPr/>
         </p:nvSpPr>
@@ -15678,7 +16126,7 @@
       </p:sp>
       <p:sp>
         <p:nvSpPr>
-          <p:cNvPr id="24" name="Rounded Rectangle 23"/>
+          <p:cNvPr id="25" name="Rounded Rectangle 24"/>
           <p:cNvSpPr/>
           <p:nvPr/>
         </p:nvSpPr>
@@ -15732,7 +16180,7 @@
       </p:sp>
       <p:sp>
         <p:nvSpPr>
-          <p:cNvPr id="25" name="Rectangle 24"/>
+          <p:cNvPr id="26" name="Rectangle 25"/>
           <p:cNvSpPr/>
           <p:nvPr/>
         </p:nvSpPr>
@@ -15776,7 +16224,7 @@
       </p:sp>
       <p:sp>
         <p:nvSpPr>
-          <p:cNvPr id="26" name="Rounded Rectangle 25"/>
+          <p:cNvPr id="27" name="Rounded Rectangle 26"/>
           <p:cNvSpPr/>
           <p:nvPr/>
         </p:nvSpPr>
@@ -15843,7 +16291,7 @@
       </p:sp>
       <p:sp>
         <p:nvSpPr>
-          <p:cNvPr id="27" name="TextBox 26"/>
+          <p:cNvPr id="28" name="TextBox 27"/>
           <p:cNvSpPr txBox="1"/>
           <p:nvPr/>
         </p:nvSpPr>
@@ -15890,7 +16338,7 @@
       </p:sp>
       <p:sp>
         <p:nvSpPr>
-          <p:cNvPr id="28" name="Rectangle 27"/>
+          <p:cNvPr id="29" name="Rectangle 28"/>
           <p:cNvSpPr/>
           <p:nvPr/>
         </p:nvSpPr>
@@ -15934,7 +16382,7 @@
       </p:sp>
       <p:sp>
         <p:nvSpPr>
-          <p:cNvPr id="29" name="Rounded Rectangle 28"/>
+          <p:cNvPr id="30" name="Rounded Rectangle 29"/>
           <p:cNvSpPr/>
           <p:nvPr/>
         </p:nvSpPr>
@@ -15980,7 +16428,7 @@
       </p:sp>
       <p:sp>
         <p:nvSpPr>
-          <p:cNvPr id="30" name="TextBox 29"/>
+          <p:cNvPr id="31" name="TextBox 30"/>
           <p:cNvSpPr txBox="1"/>
           <p:nvPr/>
         </p:nvSpPr>
@@ -16027,7 +16475,7 @@
       </p:sp>
       <p:sp>
         <p:nvSpPr>
-          <p:cNvPr id="31" name="Rounded Rectangle 30"/>
+          <p:cNvPr id="32" name="Rounded Rectangle 31"/>
           <p:cNvSpPr/>
           <p:nvPr/>
         </p:nvSpPr>
@@ -16073,7 +16521,7 @@
       </p:sp>
       <p:sp>
         <p:nvSpPr>
-          <p:cNvPr id="32" name="TextBox 31"/>
+          <p:cNvPr id="33" name="TextBox 32"/>
           <p:cNvSpPr txBox="1"/>
           <p:nvPr/>
         </p:nvSpPr>
@@ -16120,7 +16568,7 @@
       </p:sp>
       <p:sp>
         <p:nvSpPr>
-          <p:cNvPr id="33" name="Rounded Rectangle 32"/>
+          <p:cNvPr id="34" name="Rounded Rectangle 33"/>
           <p:cNvSpPr/>
           <p:nvPr/>
         </p:nvSpPr>
@@ -16166,7 +16614,7 @@
       </p:sp>
       <p:sp>
         <p:nvSpPr>
-          <p:cNvPr id="34" name="TextBox 33"/>
+          <p:cNvPr id="35" name="TextBox 34"/>
           <p:cNvSpPr txBox="1"/>
           <p:nvPr/>
         </p:nvSpPr>
@@ -16213,7 +16661,7 @@
       </p:sp>
       <p:sp>
         <p:nvSpPr>
-          <p:cNvPr id="35" name="Rounded Rectangle 34"/>
+          <p:cNvPr id="36" name="Rounded Rectangle 35"/>
           <p:cNvSpPr/>
           <p:nvPr/>
         </p:nvSpPr>
@@ -16259,7 +16707,7 @@
       </p:sp>
       <p:sp>
         <p:nvSpPr>
-          <p:cNvPr id="36" name="TextBox 35"/>
+          <p:cNvPr id="37" name="TextBox 36"/>
           <p:cNvSpPr txBox="1"/>
           <p:nvPr/>
         </p:nvSpPr>
@@ -16306,7 +16754,7 @@
       </p:sp>
       <p:sp>
         <p:nvSpPr>
-          <p:cNvPr id="37" name="Rounded Rectangle 36"/>
+          <p:cNvPr id="38" name="Rounded Rectangle 37"/>
           <p:cNvSpPr/>
           <p:nvPr/>
         </p:nvSpPr>
@@ -16352,7 +16800,7 @@
       </p:sp>
       <p:sp>
         <p:nvSpPr>
-          <p:cNvPr id="38" name="TextBox 37"/>
+          <p:cNvPr id="39" name="TextBox 38"/>
           <p:cNvSpPr txBox="1"/>
           <p:nvPr/>
         </p:nvSpPr>
@@ -16399,7 +16847,7 @@
       </p:sp>
       <p:sp>
         <p:nvSpPr>
-          <p:cNvPr id="39" name="Rounded Rectangle 38"/>
+          <p:cNvPr id="40" name="Rounded Rectangle 39"/>
           <p:cNvSpPr/>
           <p:nvPr/>
         </p:nvSpPr>
@@ -16537,9 +16985,33 @@
           </a:p>
         </p:txBody>
       </p:sp>
-      <p:sp>
-        <p:nvSpPr>
-          <p:cNvPr id="3" name="TextBox 2"/>
+      <p:pic>
+        <p:nvPicPr>
+          <p:cNvPr id="3" name="college-logo" descr="logo-mark.png"/>
+          <p:cNvPicPr>
+            <a:picLocks noChangeAspect="1"/>
+          </p:cNvPicPr>
+          <p:nvPr/>
+        </p:nvPicPr>
+        <p:blipFill>
+          <a:blip r:embed="rId2"/>
+          <a:stretch>
+            <a:fillRect/>
+          </a:stretch>
+        </p:blipFill>
+        <p:spPr>
+          <a:xfrm>
+            <a:off x="11203333" y="6199632"/>
+            <a:ext cx="275129" cy="310896"/>
+          </a:xfrm>
+          <a:prstGeom prst="rect">
+            <a:avLst/>
+          </a:prstGeom>
+        </p:spPr>
+      </p:pic>
+      <p:sp>
+        <p:nvSpPr>
+          <p:cNvPr id="4" name="TextBox 3"/>
           <p:cNvSpPr txBox="1"/>
           <p:nvPr/>
         </p:nvSpPr>
@@ -16608,13 +17080,13 @@
       </p:sp>
       <p:sp>
         <p:nvSpPr>
-          <p:cNvPr id="4" name="TextBox 3"/>
+          <p:cNvPr id="5" name="TextBox 4"/>
           <p:cNvSpPr txBox="1"/>
           <p:nvPr/>
         </p:nvSpPr>
         <p:spPr>
           <a:xfrm>
-            <a:off x="8826703" y="6272784"/>
+            <a:off x="8240677" y="6272784"/>
             <a:ext cx="2651760" cy="219456"/>
           </a:xfrm>
           <a:prstGeom prst="rect">
@@ -16677,7 +17149,7 @@
       </p:sp>
       <p:sp>
         <p:nvSpPr>
-          <p:cNvPr id="5" name="TextBox 4"/>
+          <p:cNvPr id="6" name="TextBox 5"/>
           <p:cNvSpPr txBox="1"/>
           <p:nvPr/>
         </p:nvSpPr>
@@ -16724,7 +17196,7 @@
       </p:sp>
       <p:sp>
         <p:nvSpPr>
-          <p:cNvPr id="6" name="TextBox 5"/>
+          <p:cNvPr id="7" name="TextBox 6"/>
           <p:cNvSpPr txBox="1"/>
           <p:nvPr/>
         </p:nvSpPr>
@@ -16771,7 +17243,7 @@
       </p:sp>
       <p:sp>
         <p:nvSpPr>
-          <p:cNvPr id="7" name="Rectangle 6"/>
+          <p:cNvPr id="8" name="Rectangle 7"/>
           <p:cNvSpPr/>
           <p:nvPr/>
         </p:nvSpPr>
@@ -16815,7 +17287,7 @@
       </p:sp>
       <p:sp>
         <p:nvSpPr>
-          <p:cNvPr id="8" name="TextBox 7"/>
+          <p:cNvPr id="9" name="TextBox 8"/>
           <p:cNvSpPr txBox="1"/>
           <p:nvPr/>
         </p:nvSpPr>
@@ -16862,7 +17334,7 @@
       </p:sp>
       <p:sp>
         <p:nvSpPr>
-          <p:cNvPr id="9" name="Rectangle 8"/>
+          <p:cNvPr id="10" name="Rectangle 9"/>
           <p:cNvSpPr/>
           <p:nvPr/>
         </p:nvSpPr>
@@ -16906,7 +17378,7 @@
       </p:sp>
       <p:sp>
         <p:nvSpPr>
-          <p:cNvPr id="10" name="TextBox 9"/>
+          <p:cNvPr id="11" name="TextBox 10"/>
           <p:cNvSpPr txBox="1"/>
           <p:nvPr/>
         </p:nvSpPr>
@@ -16953,7 +17425,7 @@
       </p:sp>
       <p:sp>
         <p:nvSpPr>
-          <p:cNvPr id="11" name="TextBox 10"/>
+          <p:cNvPr id="12" name="TextBox 11"/>
           <p:cNvSpPr txBox="1"/>
           <p:nvPr/>
         </p:nvSpPr>
@@ -17024,7 +17496,7 @@
       </p:sp>
       <p:sp>
         <p:nvSpPr>
-          <p:cNvPr id="12" name="Rectangle 11"/>
+          <p:cNvPr id="13" name="Rectangle 12"/>
           <p:cNvSpPr/>
           <p:nvPr/>
         </p:nvSpPr>
@@ -17068,7 +17540,7 @@
       </p:sp>
       <p:sp>
         <p:nvSpPr>
-          <p:cNvPr id="13" name="TextBox 12"/>
+          <p:cNvPr id="14" name="TextBox 13"/>
           <p:cNvSpPr txBox="1"/>
           <p:nvPr/>
         </p:nvSpPr>
@@ -17115,7 +17587,7 @@
       </p:sp>
       <p:sp>
         <p:nvSpPr>
-          <p:cNvPr id="14" name="TextBox 13"/>
+          <p:cNvPr id="15" name="TextBox 14"/>
           <p:cNvSpPr txBox="1"/>
           <p:nvPr/>
         </p:nvSpPr>
@@ -17186,7 +17658,7 @@
       </p:sp>
       <p:sp>
         <p:nvSpPr>
-          <p:cNvPr id="15" name="Rectangle 14"/>
+          <p:cNvPr id="16" name="Rectangle 15"/>
           <p:cNvSpPr/>
           <p:nvPr/>
         </p:nvSpPr>
@@ -17230,7 +17702,7 @@
       </p:sp>
       <p:sp>
         <p:nvSpPr>
-          <p:cNvPr id="16" name="TextBox 15"/>
+          <p:cNvPr id="17" name="TextBox 16"/>
           <p:cNvSpPr txBox="1"/>
           <p:nvPr/>
         </p:nvSpPr>
@@ -17277,7 +17749,7 @@
       </p:sp>
       <p:sp>
         <p:nvSpPr>
-          <p:cNvPr id="17" name="TextBox 16"/>
+          <p:cNvPr id="18" name="TextBox 17"/>
           <p:cNvSpPr txBox="1"/>
           <p:nvPr/>
         </p:nvSpPr>
@@ -17348,7 +17820,7 @@
       </p:sp>
       <p:sp>
         <p:nvSpPr>
-          <p:cNvPr id="18" name="Rectangle 17"/>
+          <p:cNvPr id="19" name="Rectangle 18"/>
           <p:cNvSpPr/>
           <p:nvPr/>
         </p:nvSpPr>
@@ -17392,7 +17864,7 @@
       </p:sp>
       <p:sp>
         <p:nvSpPr>
-          <p:cNvPr id="19" name="TextBox 18"/>
+          <p:cNvPr id="20" name="TextBox 19"/>
           <p:cNvSpPr txBox="1"/>
           <p:nvPr/>
         </p:nvSpPr>
@@ -17439,7 +17911,7 @@
       </p:sp>
       <p:sp>
         <p:nvSpPr>
-          <p:cNvPr id="20" name="TextBox 19"/>
+          <p:cNvPr id="21" name="TextBox 20"/>
           <p:cNvSpPr txBox="1"/>
           <p:nvPr/>
         </p:nvSpPr>
@@ -17510,7 +17982,7 @@
       </p:sp>
       <p:sp>
         <p:nvSpPr>
-          <p:cNvPr id="21" name="Rectangle 20"/>
+          <p:cNvPr id="22" name="Rectangle 21"/>
           <p:cNvSpPr/>
           <p:nvPr/>
         </p:nvSpPr>
@@ -17554,7 +18026,7 @@
       </p:sp>
       <p:sp>
         <p:nvSpPr>
-          <p:cNvPr id="22" name="TextBox 21"/>
+          <p:cNvPr id="23" name="TextBox 22"/>
           <p:cNvSpPr txBox="1"/>
           <p:nvPr/>
         </p:nvSpPr>
@@ -17601,7 +18073,7 @@
       </p:sp>
       <p:sp>
         <p:nvSpPr>
-          <p:cNvPr id="23" name="TextBox 22"/>
+          <p:cNvPr id="24" name="TextBox 23"/>
           <p:cNvSpPr txBox="1"/>
           <p:nvPr/>
         </p:nvSpPr>
@@ -17672,7 +18144,7 @@
       </p:sp>
       <p:sp>
         <p:nvSpPr>
-          <p:cNvPr id="24" name="Rectangle 23"/>
+          <p:cNvPr id="25" name="Rectangle 24"/>
           <p:cNvSpPr/>
           <p:nvPr/>
         </p:nvSpPr>
@@ -17716,7 +18188,7 @@
       </p:sp>
       <p:sp>
         <p:nvSpPr>
-          <p:cNvPr id="25" name="TextBox 24"/>
+          <p:cNvPr id="26" name="TextBox 25"/>
           <p:cNvSpPr txBox="1"/>
           <p:nvPr/>
         </p:nvSpPr>
@@ -17763,7 +18235,7 @@
       </p:sp>
       <p:sp>
         <p:nvSpPr>
-          <p:cNvPr id="26" name="TextBox 25"/>
+          <p:cNvPr id="27" name="TextBox 26"/>
           <p:cNvSpPr txBox="1"/>
           <p:nvPr/>
         </p:nvSpPr>
@@ -17834,7 +18306,7 @@
       </p:sp>
       <p:sp>
         <p:nvSpPr>
-          <p:cNvPr id="27" name="Rectangle 26"/>
+          <p:cNvPr id="28" name="Rectangle 27"/>
           <p:cNvSpPr/>
           <p:nvPr/>
         </p:nvSpPr>
@@ -17878,7 +18350,7 @@
       </p:sp>
       <p:sp>
         <p:nvSpPr>
-          <p:cNvPr id="28" name="TextBox 27"/>
+          <p:cNvPr id="29" name="TextBox 28"/>
           <p:cNvSpPr txBox="1"/>
           <p:nvPr/>
         </p:nvSpPr>
@@ -17925,7 +18397,7 @@
       </p:sp>
       <p:sp>
         <p:nvSpPr>
-          <p:cNvPr id="29" name="TextBox 28"/>
+          <p:cNvPr id="30" name="TextBox 29"/>
           <p:cNvSpPr txBox="1"/>
           <p:nvPr/>
         </p:nvSpPr>
@@ -17996,7 +18468,7 @@
       </p:sp>
       <p:sp>
         <p:nvSpPr>
-          <p:cNvPr id="30" name="Rectangle 29"/>
+          <p:cNvPr id="31" name="Rectangle 30"/>
           <p:cNvSpPr/>
           <p:nvPr/>
         </p:nvSpPr>
@@ -18040,7 +18512,7 @@
       </p:sp>
       <p:sp>
         <p:nvSpPr>
-          <p:cNvPr id="31" name="TextBox 30"/>
+          <p:cNvPr id="32" name="TextBox 31"/>
           <p:cNvSpPr txBox="1"/>
           <p:nvPr/>
         </p:nvSpPr>
@@ -18087,7 +18559,7 @@
       </p:sp>
       <p:sp>
         <p:nvSpPr>
-          <p:cNvPr id="32" name="TextBox 31"/>
+          <p:cNvPr id="33" name="TextBox 32"/>
           <p:cNvSpPr txBox="1"/>
           <p:nvPr/>
         </p:nvSpPr>
@@ -18218,9 +18690,33 @@
           </a:p>
         </p:txBody>
       </p:sp>
-      <p:sp>
-        <p:nvSpPr>
-          <p:cNvPr id="3" name="TextBox 2"/>
+      <p:pic>
+        <p:nvPicPr>
+          <p:cNvPr id="3" name="college-logo" descr="logo-mark.png"/>
+          <p:cNvPicPr>
+            <a:picLocks noChangeAspect="1"/>
+          </p:cNvPicPr>
+          <p:nvPr/>
+        </p:nvPicPr>
+        <p:blipFill>
+          <a:blip r:embed="rId2"/>
+          <a:stretch>
+            <a:fillRect/>
+          </a:stretch>
+        </p:blipFill>
+        <p:spPr>
+          <a:xfrm>
+            <a:off x="11203333" y="6199632"/>
+            <a:ext cx="275129" cy="310896"/>
+          </a:xfrm>
+          <a:prstGeom prst="rect">
+            <a:avLst/>
+          </a:prstGeom>
+        </p:spPr>
+      </p:pic>
+      <p:sp>
+        <p:nvSpPr>
+          <p:cNvPr id="4" name="TextBox 3"/>
           <p:cNvSpPr txBox="1"/>
           <p:nvPr/>
         </p:nvSpPr>
@@ -18289,13 +18785,13 @@
       </p:sp>
       <p:sp>
         <p:nvSpPr>
-          <p:cNvPr id="4" name="TextBox 3"/>
+          <p:cNvPr id="5" name="TextBox 4"/>
           <p:cNvSpPr txBox="1"/>
           <p:nvPr/>
         </p:nvSpPr>
         <p:spPr>
           <a:xfrm>
-            <a:off x="8826703" y="6272784"/>
+            <a:off x="8240677" y="6272784"/>
             <a:ext cx="2651760" cy="219456"/>
           </a:xfrm>
           <a:prstGeom prst="rect">
@@ -18358,7 +18854,7 @@
       </p:sp>
       <p:sp>
         <p:nvSpPr>
-          <p:cNvPr id="5" name="TextBox 4"/>
+          <p:cNvPr id="6" name="TextBox 5"/>
           <p:cNvSpPr txBox="1"/>
           <p:nvPr/>
         </p:nvSpPr>
@@ -18405,7 +18901,7 @@
       </p:sp>
       <p:sp>
         <p:nvSpPr>
-          <p:cNvPr id="6" name="TextBox 5"/>
+          <p:cNvPr id="7" name="TextBox 6"/>
           <p:cNvSpPr txBox="1"/>
           <p:nvPr/>
         </p:nvSpPr>
@@ -18452,7 +18948,7 @@
       </p:sp>
       <p:sp>
         <p:nvSpPr>
-          <p:cNvPr id="7" name="Rectangle 6"/>
+          <p:cNvPr id="8" name="Rectangle 7"/>
           <p:cNvSpPr/>
           <p:nvPr/>
         </p:nvSpPr>
@@ -18496,7 +18992,7 @@
       </p:sp>
       <p:sp>
         <p:nvSpPr>
-          <p:cNvPr id="8" name="TextBox 7"/>
+          <p:cNvPr id="9" name="TextBox 8"/>
           <p:cNvSpPr txBox="1"/>
           <p:nvPr/>
         </p:nvSpPr>
@@ -18543,7 +19039,7 @@
       </p:sp>
       <p:sp>
         <p:nvSpPr>
-          <p:cNvPr id="9" name="Rounded Rectangle 8"/>
+          <p:cNvPr id="10" name="Rounded Rectangle 9"/>
           <p:cNvSpPr/>
           <p:nvPr/>
         </p:nvSpPr>
@@ -18597,7 +19093,7 @@
       </p:sp>
       <p:sp>
         <p:nvSpPr>
-          <p:cNvPr id="10" name="Rectangle 9"/>
+          <p:cNvPr id="11" name="Rectangle 10"/>
           <p:cNvSpPr/>
           <p:nvPr/>
         </p:nvSpPr>
@@ -18641,7 +19137,7 @@
       </p:sp>
       <p:sp>
         <p:nvSpPr>
-          <p:cNvPr id="11" name="Oval 10"/>
+          <p:cNvPr id="12" name="Oval 11"/>
           <p:cNvSpPr/>
           <p:nvPr/>
         </p:nvSpPr>
@@ -18685,7 +19181,7 @@
       </p:sp>
       <p:sp>
         <p:nvSpPr>
-          <p:cNvPr id="12" name="TextBox 11"/>
+          <p:cNvPr id="13" name="TextBox 12"/>
           <p:cNvSpPr txBox="1"/>
           <p:nvPr/>
         </p:nvSpPr>
@@ -18732,7 +19228,7 @@
       </p:sp>
       <p:sp>
         <p:nvSpPr>
-          <p:cNvPr id="13" name="TextBox 12"/>
+          <p:cNvPr id="14" name="TextBox 13"/>
           <p:cNvSpPr txBox="1"/>
           <p:nvPr/>
         </p:nvSpPr>
@@ -18779,7 +19275,7 @@
       </p:sp>
       <p:sp>
         <p:nvSpPr>
-          <p:cNvPr id="14" name="TextBox 13"/>
+          <p:cNvPr id="15" name="TextBox 14"/>
           <p:cNvSpPr txBox="1"/>
           <p:nvPr/>
         </p:nvSpPr>
@@ -18826,7 +19322,7 @@
       </p:sp>
       <p:sp>
         <p:nvSpPr>
-          <p:cNvPr id="15" name="Rounded Rectangle 14"/>
+          <p:cNvPr id="16" name="Rounded Rectangle 15"/>
           <p:cNvSpPr/>
           <p:nvPr/>
         </p:nvSpPr>
@@ -18880,7 +19376,7 @@
       </p:sp>
       <p:sp>
         <p:nvSpPr>
-          <p:cNvPr id="16" name="Rectangle 15"/>
+          <p:cNvPr id="17" name="Rectangle 16"/>
           <p:cNvSpPr/>
           <p:nvPr/>
         </p:nvSpPr>
@@ -18924,7 +19420,7 @@
       </p:sp>
       <p:sp>
         <p:nvSpPr>
-          <p:cNvPr id="17" name="Oval 16"/>
+          <p:cNvPr id="18" name="Oval 17"/>
           <p:cNvSpPr/>
           <p:nvPr/>
         </p:nvSpPr>
@@ -18968,7 +19464,7 @@
       </p:sp>
       <p:sp>
         <p:nvSpPr>
-          <p:cNvPr id="18" name="TextBox 17"/>
+          <p:cNvPr id="19" name="TextBox 18"/>
           <p:cNvSpPr txBox="1"/>
           <p:nvPr/>
         </p:nvSpPr>
@@ -19015,7 +19511,7 @@
       </p:sp>
       <p:sp>
         <p:nvSpPr>
-          <p:cNvPr id="19" name="TextBox 18"/>
+          <p:cNvPr id="20" name="TextBox 19"/>
           <p:cNvSpPr txBox="1"/>
           <p:nvPr/>
         </p:nvSpPr>
@@ -19062,7 +19558,7 @@
       </p:sp>
       <p:sp>
         <p:nvSpPr>
-          <p:cNvPr id="20" name="TextBox 19"/>
+          <p:cNvPr id="21" name="TextBox 20"/>
           <p:cNvSpPr txBox="1"/>
           <p:nvPr/>
         </p:nvSpPr>
@@ -19109,7 +19605,7 @@
       </p:sp>
       <p:sp>
         <p:nvSpPr>
-          <p:cNvPr id="21" name="Rounded Rectangle 20"/>
+          <p:cNvPr id="22" name="Rounded Rectangle 21"/>
           <p:cNvSpPr/>
           <p:nvPr/>
         </p:nvSpPr>
@@ -19163,7 +19659,7 @@
       </p:sp>
       <p:sp>
         <p:nvSpPr>
-          <p:cNvPr id="22" name="Rectangle 21"/>
+          <p:cNvPr id="23" name="Rectangle 22"/>
           <p:cNvSpPr/>
           <p:nvPr/>
         </p:nvSpPr>
@@ -19207,7 +19703,7 @@
       </p:sp>
       <p:sp>
         <p:nvSpPr>
-          <p:cNvPr id="23" name="Oval 22"/>
+          <p:cNvPr id="24" name="Oval 23"/>
           <p:cNvSpPr/>
           <p:nvPr/>
         </p:nvSpPr>
@@ -19251,7 +19747,7 @@
       </p:sp>
       <p:sp>
         <p:nvSpPr>
-          <p:cNvPr id="24" name="TextBox 23"/>
+          <p:cNvPr id="25" name="TextBox 24"/>
           <p:cNvSpPr txBox="1"/>
           <p:nvPr/>
         </p:nvSpPr>
@@ -19298,7 +19794,7 @@
       </p:sp>
       <p:sp>
         <p:nvSpPr>
-          <p:cNvPr id="25" name="TextBox 24"/>
+          <p:cNvPr id="26" name="TextBox 25"/>
           <p:cNvSpPr txBox="1"/>
           <p:nvPr/>
         </p:nvSpPr>
@@ -19345,7 +19841,7 @@
       </p:sp>
       <p:sp>
         <p:nvSpPr>
-          <p:cNvPr id="26" name="TextBox 25"/>
+          <p:cNvPr id="27" name="TextBox 26"/>
           <p:cNvSpPr txBox="1"/>
           <p:nvPr/>
         </p:nvSpPr>
@@ -19392,7 +19888,7 @@
       </p:sp>
       <p:sp>
         <p:nvSpPr>
-          <p:cNvPr id="27" name="Rounded Rectangle 26"/>
+          <p:cNvPr id="28" name="Rounded Rectangle 27"/>
           <p:cNvSpPr/>
           <p:nvPr/>
         </p:nvSpPr>
@@ -19446,7 +19942,7 @@
       </p:sp>
       <p:sp>
         <p:nvSpPr>
-          <p:cNvPr id="28" name="Rectangle 27"/>
+          <p:cNvPr id="29" name="Rectangle 28"/>
           <p:cNvSpPr/>
           <p:nvPr/>
         </p:nvSpPr>
@@ -19490,7 +19986,7 @@
       </p:sp>
       <p:sp>
         <p:nvSpPr>
-          <p:cNvPr id="29" name="Oval 28"/>
+          <p:cNvPr id="30" name="Oval 29"/>
           <p:cNvSpPr/>
           <p:nvPr/>
         </p:nvSpPr>
@@ -19534,7 +20030,7 @@
       </p:sp>
       <p:sp>
         <p:nvSpPr>
-          <p:cNvPr id="30" name="TextBox 29"/>
+          <p:cNvPr id="31" name="TextBox 30"/>
           <p:cNvSpPr txBox="1"/>
           <p:nvPr/>
         </p:nvSpPr>
@@ -19581,7 +20077,7 @@
       </p:sp>
       <p:sp>
         <p:nvSpPr>
-          <p:cNvPr id="31" name="TextBox 30"/>
+          <p:cNvPr id="32" name="TextBox 31"/>
           <p:cNvSpPr txBox="1"/>
           <p:nvPr/>
         </p:nvSpPr>
@@ -19628,7 +20124,7 @@
       </p:sp>
       <p:sp>
         <p:nvSpPr>
-          <p:cNvPr id="32" name="TextBox 31"/>
+          <p:cNvPr id="33" name="TextBox 32"/>
           <p:cNvSpPr txBox="1"/>
           <p:nvPr/>
         </p:nvSpPr>
@@ -19675,7 +20171,7 @@
       </p:sp>
       <p:sp>
         <p:nvSpPr>
-          <p:cNvPr id="33" name="Rounded Rectangle 32"/>
+          <p:cNvPr id="34" name="Rounded Rectangle 33"/>
           <p:cNvSpPr/>
           <p:nvPr/>
         </p:nvSpPr>
@@ -19729,7 +20225,7 @@
       </p:sp>
       <p:sp>
         <p:nvSpPr>
-          <p:cNvPr id="34" name="Rectangle 33"/>
+          <p:cNvPr id="35" name="Rectangle 34"/>
           <p:cNvSpPr/>
           <p:nvPr/>
         </p:nvSpPr>
@@ -19773,7 +20269,7 @@
       </p:sp>
       <p:sp>
         <p:nvSpPr>
-          <p:cNvPr id="35" name="Oval 34"/>
+          <p:cNvPr id="36" name="Oval 35"/>
           <p:cNvSpPr/>
           <p:nvPr/>
         </p:nvSpPr>
@@ -19817,7 +20313,7 @@
       </p:sp>
       <p:sp>
         <p:nvSpPr>
-          <p:cNvPr id="36" name="TextBox 35"/>
+          <p:cNvPr id="37" name="TextBox 36"/>
           <p:cNvSpPr txBox="1"/>
           <p:nvPr/>
         </p:nvSpPr>
@@ -19864,7 +20360,7 @@
       </p:sp>
       <p:sp>
         <p:nvSpPr>
-          <p:cNvPr id="37" name="TextBox 36"/>
+          <p:cNvPr id="38" name="TextBox 37"/>
           <p:cNvSpPr txBox="1"/>
           <p:nvPr/>
         </p:nvSpPr>
@@ -19911,7 +20407,7 @@
       </p:sp>
       <p:sp>
         <p:nvSpPr>
-          <p:cNvPr id="38" name="TextBox 37"/>
+          <p:cNvPr id="39" name="TextBox 38"/>
           <p:cNvSpPr txBox="1"/>
           <p:nvPr/>
         </p:nvSpPr>
@@ -19958,7 +20454,7 @@
       </p:sp>
       <p:sp>
         <p:nvSpPr>
-          <p:cNvPr id="39" name="Rounded Rectangle 38"/>
+          <p:cNvPr id="40" name="Rounded Rectangle 39"/>
           <p:cNvSpPr/>
           <p:nvPr/>
         </p:nvSpPr>
@@ -20012,7 +20508,7 @@
       </p:sp>
       <p:sp>
         <p:nvSpPr>
-          <p:cNvPr id="40" name="Rectangle 39"/>
+          <p:cNvPr id="41" name="Rectangle 40"/>
           <p:cNvSpPr/>
           <p:nvPr/>
         </p:nvSpPr>
@@ -20056,7 +20552,7 @@
       </p:sp>
       <p:sp>
         <p:nvSpPr>
-          <p:cNvPr id="41" name="Oval 40"/>
+          <p:cNvPr id="42" name="Oval 41"/>
           <p:cNvSpPr/>
           <p:nvPr/>
         </p:nvSpPr>
@@ -20100,7 +20596,7 @@
       </p:sp>
       <p:sp>
         <p:nvSpPr>
-          <p:cNvPr id="42" name="TextBox 41"/>
+          <p:cNvPr id="43" name="TextBox 42"/>
           <p:cNvSpPr txBox="1"/>
           <p:nvPr/>
         </p:nvSpPr>
@@ -20147,7 +20643,7 @@
       </p:sp>
       <p:sp>
         <p:nvSpPr>
-          <p:cNvPr id="43" name="TextBox 42"/>
+          <p:cNvPr id="44" name="TextBox 43"/>
           <p:cNvSpPr txBox="1"/>
           <p:nvPr/>
         </p:nvSpPr>
@@ -20194,7 +20690,7 @@
       </p:sp>
       <p:sp>
         <p:nvSpPr>
-          <p:cNvPr id="44" name="TextBox 43"/>
+          <p:cNvPr id="45" name="TextBox 44"/>
           <p:cNvSpPr txBox="1"/>
           <p:nvPr/>
         </p:nvSpPr>
@@ -20301,9 +20797,33 @@
           </a:p>
         </p:txBody>
       </p:sp>
-      <p:sp>
-        <p:nvSpPr>
-          <p:cNvPr id="3" name="TextBox 2"/>
+      <p:pic>
+        <p:nvPicPr>
+          <p:cNvPr id="3" name="college-logo" descr="logo-mark.png"/>
+          <p:cNvPicPr>
+            <a:picLocks noChangeAspect="1"/>
+          </p:cNvPicPr>
+          <p:nvPr/>
+        </p:nvPicPr>
+        <p:blipFill>
+          <a:blip r:embed="rId2"/>
+          <a:stretch>
+            <a:fillRect/>
+          </a:stretch>
+        </p:blipFill>
+        <p:spPr>
+          <a:xfrm>
+            <a:off x="11203333" y="6199632"/>
+            <a:ext cx="275129" cy="310896"/>
+          </a:xfrm>
+          <a:prstGeom prst="rect">
+            <a:avLst/>
+          </a:prstGeom>
+        </p:spPr>
+      </p:pic>
+      <p:sp>
+        <p:nvSpPr>
+          <p:cNvPr id="4" name="TextBox 3"/>
           <p:cNvSpPr txBox="1"/>
           <p:nvPr/>
         </p:nvSpPr>
@@ -20372,13 +20892,13 @@
       </p:sp>
       <p:sp>
         <p:nvSpPr>
-          <p:cNvPr id="4" name="TextBox 3"/>
+          <p:cNvPr id="5" name="TextBox 4"/>
           <p:cNvSpPr txBox="1"/>
           <p:nvPr/>
         </p:nvSpPr>
         <p:spPr>
           <a:xfrm>
-            <a:off x="8826703" y="6272784"/>
+            <a:off x="8240677" y="6272784"/>
             <a:ext cx="2651760" cy="219456"/>
           </a:xfrm>
           <a:prstGeom prst="rect">
@@ -20441,7 +20961,7 @@
       </p:sp>
       <p:sp>
         <p:nvSpPr>
-          <p:cNvPr id="5" name="TextBox 4"/>
+          <p:cNvPr id="6" name="TextBox 5"/>
           <p:cNvSpPr txBox="1"/>
           <p:nvPr/>
         </p:nvSpPr>
@@ -20488,7 +21008,7 @@
       </p:sp>
       <p:sp>
         <p:nvSpPr>
-          <p:cNvPr id="6" name="TextBox 5"/>
+          <p:cNvPr id="7" name="TextBox 6"/>
           <p:cNvSpPr txBox="1"/>
           <p:nvPr/>
         </p:nvSpPr>
@@ -20535,7 +21055,7 @@
       </p:sp>
       <p:sp>
         <p:nvSpPr>
-          <p:cNvPr id="7" name="Rectangle 6"/>
+          <p:cNvPr id="8" name="Rectangle 7"/>
           <p:cNvSpPr/>
           <p:nvPr/>
         </p:nvSpPr>
@@ -20579,7 +21099,7 @@
       </p:sp>
       <p:sp>
         <p:nvSpPr>
-          <p:cNvPr id="8" name="Rectangle 7"/>
+          <p:cNvPr id="9" name="Rectangle 8"/>
           <p:cNvSpPr/>
           <p:nvPr/>
         </p:nvSpPr>
@@ -20623,7 +21143,7 @@
       </p:sp>
       <p:sp>
         <p:nvSpPr>
-          <p:cNvPr id="9" name="Oval 8"/>
+          <p:cNvPr id="10" name="Oval 9"/>
           <p:cNvSpPr/>
           <p:nvPr/>
         </p:nvSpPr>
@@ -20667,7 +21187,7 @@
       </p:sp>
       <p:sp>
         <p:nvSpPr>
-          <p:cNvPr id="10" name="TextBox 9"/>
+          <p:cNvPr id="11" name="TextBox 10"/>
           <p:cNvSpPr txBox="1"/>
           <p:nvPr/>
         </p:nvSpPr>
@@ -20714,7 +21234,7 @@
       </p:sp>
       <p:sp>
         <p:nvSpPr>
-          <p:cNvPr id="11" name="Rounded Rectangle 10"/>
+          <p:cNvPr id="12" name="Rounded Rectangle 11"/>
           <p:cNvSpPr/>
           <p:nvPr/>
         </p:nvSpPr>
@@ -20762,7 +21282,7 @@
       </p:sp>
       <p:sp>
         <p:nvSpPr>
-          <p:cNvPr id="12" name="TextBox 11"/>
+          <p:cNvPr id="13" name="TextBox 12"/>
           <p:cNvSpPr txBox="1"/>
           <p:nvPr/>
         </p:nvSpPr>
@@ -20809,7 +21329,7 @@
       </p:sp>
       <p:sp>
         <p:nvSpPr>
-          <p:cNvPr id="13" name="TextBox 12"/>
+          <p:cNvPr id="14" name="TextBox 13"/>
           <p:cNvSpPr txBox="1"/>
           <p:nvPr/>
         </p:nvSpPr>
@@ -20856,7 +21376,7 @@
       </p:sp>
       <p:sp>
         <p:nvSpPr>
-          <p:cNvPr id="14" name="Oval 13"/>
+          <p:cNvPr id="15" name="Oval 14"/>
           <p:cNvSpPr/>
           <p:nvPr/>
         </p:nvSpPr>
@@ -20900,7 +21420,7 @@
       </p:sp>
       <p:sp>
         <p:nvSpPr>
-          <p:cNvPr id="15" name="TextBox 14"/>
+          <p:cNvPr id="16" name="TextBox 15"/>
           <p:cNvSpPr txBox="1"/>
           <p:nvPr/>
         </p:nvSpPr>
@@ -20947,7 +21467,7 @@
       </p:sp>
       <p:sp>
         <p:nvSpPr>
-          <p:cNvPr id="16" name="Rounded Rectangle 15"/>
+          <p:cNvPr id="17" name="Rounded Rectangle 16"/>
           <p:cNvSpPr/>
           <p:nvPr/>
         </p:nvSpPr>
@@ -20995,7 +21515,7 @@
       </p:sp>
       <p:sp>
         <p:nvSpPr>
-          <p:cNvPr id="17" name="TextBox 16"/>
+          <p:cNvPr id="18" name="TextBox 17"/>
           <p:cNvSpPr txBox="1"/>
           <p:nvPr/>
         </p:nvSpPr>
@@ -21042,7 +21562,7 @@
       </p:sp>
       <p:sp>
         <p:nvSpPr>
-          <p:cNvPr id="18" name="TextBox 17"/>
+          <p:cNvPr id="19" name="TextBox 18"/>
           <p:cNvSpPr txBox="1"/>
           <p:nvPr/>
         </p:nvSpPr>
@@ -21089,7 +21609,7 @@
       </p:sp>
       <p:sp>
         <p:nvSpPr>
-          <p:cNvPr id="19" name="Oval 18"/>
+          <p:cNvPr id="20" name="Oval 19"/>
           <p:cNvSpPr/>
           <p:nvPr/>
         </p:nvSpPr>
@@ -21133,7 +21653,7 @@
       </p:sp>
       <p:sp>
         <p:nvSpPr>
-          <p:cNvPr id="20" name="TextBox 19"/>
+          <p:cNvPr id="21" name="TextBox 20"/>
           <p:cNvSpPr txBox="1"/>
           <p:nvPr/>
         </p:nvSpPr>
@@ -21180,7 +21700,7 @@
       </p:sp>
       <p:sp>
         <p:nvSpPr>
-          <p:cNvPr id="21" name="Rounded Rectangle 20"/>
+          <p:cNvPr id="22" name="Rounded Rectangle 21"/>
           <p:cNvSpPr/>
           <p:nvPr/>
         </p:nvSpPr>
@@ -21228,7 +21748,7 @@
       </p:sp>
       <p:sp>
         <p:nvSpPr>
-          <p:cNvPr id="22" name="TextBox 21"/>
+          <p:cNvPr id="23" name="TextBox 22"/>
           <p:cNvSpPr txBox="1"/>
           <p:nvPr/>
         </p:nvSpPr>
@@ -21275,7 +21795,7 @@
       </p:sp>
       <p:sp>
         <p:nvSpPr>
-          <p:cNvPr id="23" name="TextBox 22"/>
+          <p:cNvPr id="24" name="TextBox 23"/>
           <p:cNvSpPr txBox="1"/>
           <p:nvPr/>
         </p:nvSpPr>
@@ -21322,7 +21842,7 @@
       </p:sp>
       <p:sp>
         <p:nvSpPr>
-          <p:cNvPr id="24" name="Oval 23"/>
+          <p:cNvPr id="25" name="Oval 24"/>
           <p:cNvSpPr/>
           <p:nvPr/>
         </p:nvSpPr>
@@ -21366,7 +21886,7 @@
       </p:sp>
       <p:sp>
         <p:nvSpPr>
-          <p:cNvPr id="25" name="TextBox 24"/>
+          <p:cNvPr id="26" name="TextBox 25"/>
           <p:cNvSpPr txBox="1"/>
           <p:nvPr/>
         </p:nvSpPr>
@@ -21413,7 +21933,7 @@
       </p:sp>
       <p:sp>
         <p:nvSpPr>
-          <p:cNvPr id="26" name="Rounded Rectangle 25"/>
+          <p:cNvPr id="27" name="Rounded Rectangle 26"/>
           <p:cNvSpPr/>
           <p:nvPr/>
         </p:nvSpPr>
@@ -21461,7 +21981,7 @@
       </p:sp>
       <p:sp>
         <p:nvSpPr>
-          <p:cNvPr id="27" name="TextBox 26"/>
+          <p:cNvPr id="28" name="TextBox 27"/>
           <p:cNvSpPr txBox="1"/>
           <p:nvPr/>
         </p:nvSpPr>
@@ -21508,7 +22028,7 @@
       </p:sp>
       <p:sp>
         <p:nvSpPr>
-          <p:cNvPr id="28" name="TextBox 27"/>
+          <p:cNvPr id="29" name="TextBox 28"/>
           <p:cNvSpPr txBox="1"/>
           <p:nvPr/>
         </p:nvSpPr>
@@ -21555,7 +22075,7 @@
       </p:sp>
       <p:sp>
         <p:nvSpPr>
-          <p:cNvPr id="29" name="Oval 28"/>
+          <p:cNvPr id="30" name="Oval 29"/>
           <p:cNvSpPr/>
           <p:nvPr/>
         </p:nvSpPr>
@@ -21599,7 +22119,7 @@
       </p:sp>
       <p:sp>
         <p:nvSpPr>
-          <p:cNvPr id="30" name="TextBox 29"/>
+          <p:cNvPr id="31" name="TextBox 30"/>
           <p:cNvSpPr txBox="1"/>
           <p:nvPr/>
         </p:nvSpPr>
@@ -21646,7 +22166,7 @@
       </p:sp>
       <p:sp>
         <p:nvSpPr>
-          <p:cNvPr id="31" name="Rounded Rectangle 30"/>
+          <p:cNvPr id="32" name="Rounded Rectangle 31"/>
           <p:cNvSpPr/>
           <p:nvPr/>
         </p:nvSpPr>
@@ -21694,7 +22214,7 @@
       </p:sp>
       <p:sp>
         <p:nvSpPr>
-          <p:cNvPr id="32" name="TextBox 31"/>
+          <p:cNvPr id="33" name="TextBox 32"/>
           <p:cNvSpPr txBox="1"/>
           <p:nvPr/>
         </p:nvSpPr>
@@ -21741,7 +22261,7 @@
       </p:sp>
       <p:sp>
         <p:nvSpPr>
-          <p:cNvPr id="33" name="TextBox 32"/>
+          <p:cNvPr id="34" name="TextBox 33"/>
           <p:cNvSpPr txBox="1"/>
           <p:nvPr/>
         </p:nvSpPr>
@@ -21788,7 +22308,7 @@
       </p:sp>
       <p:sp>
         <p:nvSpPr>
-          <p:cNvPr id="34" name="Oval 33"/>
+          <p:cNvPr id="35" name="Oval 34"/>
           <p:cNvSpPr/>
           <p:nvPr/>
         </p:nvSpPr>
@@ -21832,7 +22352,7 @@
       </p:sp>
       <p:sp>
         <p:nvSpPr>
-          <p:cNvPr id="35" name="TextBox 34"/>
+          <p:cNvPr id="36" name="TextBox 35"/>
           <p:cNvSpPr txBox="1"/>
           <p:nvPr/>
         </p:nvSpPr>
@@ -21879,7 +22399,7 @@
       </p:sp>
       <p:sp>
         <p:nvSpPr>
-          <p:cNvPr id="36" name="Rounded Rectangle 35"/>
+          <p:cNvPr id="37" name="Rounded Rectangle 36"/>
           <p:cNvSpPr/>
           <p:nvPr/>
         </p:nvSpPr>
@@ -21927,7 +22447,7 @@
       </p:sp>
       <p:sp>
         <p:nvSpPr>
-          <p:cNvPr id="37" name="TextBox 36"/>
+          <p:cNvPr id="38" name="TextBox 37"/>
           <p:cNvSpPr txBox="1"/>
           <p:nvPr/>
         </p:nvSpPr>
@@ -21974,7 +22494,7 @@
       </p:sp>
       <p:sp>
         <p:nvSpPr>
-          <p:cNvPr id="38" name="TextBox 37"/>
+          <p:cNvPr id="39" name="TextBox 38"/>
           <p:cNvSpPr txBox="1"/>
           <p:nvPr/>
         </p:nvSpPr>
@@ -22021,7 +22541,7 @@
       </p:sp>
       <p:sp>
         <p:nvSpPr>
-          <p:cNvPr id="39" name="Rounded Rectangle 38"/>
+          <p:cNvPr id="40" name="Rounded Rectangle 39"/>
           <p:cNvSpPr/>
           <p:nvPr/>
         </p:nvSpPr>
@@ -22088,7 +22608,7 @@
       </p:sp>
       <p:sp>
         <p:nvSpPr>
-          <p:cNvPr id="40" name="Rectangle 39"/>
+          <p:cNvPr id="41" name="Rectangle 40"/>
           <p:cNvSpPr/>
           <p:nvPr/>
         </p:nvSpPr>
@@ -22192,9 +22712,33 @@
           </a:p>
         </p:txBody>
       </p:sp>
-      <p:sp>
-        <p:nvSpPr>
-          <p:cNvPr id="3" name="TextBox 2"/>
+      <p:pic>
+        <p:nvPicPr>
+          <p:cNvPr id="3" name="college-logo" descr="logo-mark.png"/>
+          <p:cNvPicPr>
+            <a:picLocks noChangeAspect="1"/>
+          </p:cNvPicPr>
+          <p:nvPr/>
+        </p:nvPicPr>
+        <p:blipFill>
+          <a:blip r:embed="rId2"/>
+          <a:stretch>
+            <a:fillRect/>
+          </a:stretch>
+        </p:blipFill>
+        <p:spPr>
+          <a:xfrm>
+            <a:off x="11203333" y="6199632"/>
+            <a:ext cx="275129" cy="310896"/>
+          </a:xfrm>
+          <a:prstGeom prst="rect">
+            <a:avLst/>
+          </a:prstGeom>
+        </p:spPr>
+      </p:pic>
+      <p:sp>
+        <p:nvSpPr>
+          <p:cNvPr id="4" name="TextBox 3"/>
           <p:cNvSpPr txBox="1"/>
           <p:nvPr/>
         </p:nvSpPr>
@@ -22263,13 +22807,13 @@
       </p:sp>
       <p:sp>
         <p:nvSpPr>
-          <p:cNvPr id="4" name="TextBox 3"/>
+          <p:cNvPr id="5" name="TextBox 4"/>
           <p:cNvSpPr txBox="1"/>
           <p:nvPr/>
         </p:nvSpPr>
         <p:spPr>
           <a:xfrm>
-            <a:off x="8826703" y="6272784"/>
+            <a:off x="8240677" y="6272784"/>
             <a:ext cx="2651760" cy="219456"/>
           </a:xfrm>
           <a:prstGeom prst="rect">
@@ -22332,7 +22876,7 @@
       </p:sp>
       <p:sp>
         <p:nvSpPr>
-          <p:cNvPr id="5" name="TextBox 4"/>
+          <p:cNvPr id="6" name="TextBox 5"/>
           <p:cNvSpPr txBox="1"/>
           <p:nvPr/>
         </p:nvSpPr>
@@ -22379,7 +22923,7 @@
       </p:sp>
       <p:sp>
         <p:nvSpPr>
-          <p:cNvPr id="6" name="TextBox 5"/>
+          <p:cNvPr id="7" name="TextBox 6"/>
           <p:cNvSpPr txBox="1"/>
           <p:nvPr/>
         </p:nvSpPr>
@@ -22426,7 +22970,7 @@
       </p:sp>
       <p:sp>
         <p:nvSpPr>
-          <p:cNvPr id="7" name="Rectangle 6"/>
+          <p:cNvPr id="8" name="Rectangle 7"/>
           <p:cNvSpPr/>
           <p:nvPr/>
         </p:nvSpPr>
@@ -22470,7 +23014,7 @@
       </p:sp>
       <p:sp>
         <p:nvSpPr>
-          <p:cNvPr id="8" name="TextBox 7"/>
+          <p:cNvPr id="9" name="TextBox 8"/>
           <p:cNvSpPr txBox="1"/>
           <p:nvPr/>
         </p:nvSpPr>
@@ -22517,7 +23061,7 @@
       </p:sp>
       <p:sp>
         <p:nvSpPr>
-          <p:cNvPr id="9" name="Rectangle 8"/>
+          <p:cNvPr id="10" name="Rectangle 9"/>
           <p:cNvSpPr/>
           <p:nvPr/>
         </p:nvSpPr>
@@ -22561,7 +23105,7 @@
       </p:sp>
       <p:sp>
         <p:nvSpPr>
-          <p:cNvPr id="10" name="Rounded Rectangle 9"/>
+          <p:cNvPr id="11" name="Rounded Rectangle 10"/>
           <p:cNvSpPr/>
           <p:nvPr/>
         </p:nvSpPr>
@@ -22607,7 +23151,7 @@
       </p:sp>
       <p:sp>
         <p:nvSpPr>
-          <p:cNvPr id="11" name="TextBox 10"/>
+          <p:cNvPr id="12" name="TextBox 11"/>
           <p:cNvSpPr txBox="1"/>
           <p:nvPr/>
         </p:nvSpPr>
@@ -22654,7 +23198,7 @@
       </p:sp>
       <p:sp>
         <p:nvSpPr>
-          <p:cNvPr id="12" name="Rounded Rectangle 11"/>
+          <p:cNvPr id="13" name="Rounded Rectangle 12"/>
           <p:cNvSpPr/>
           <p:nvPr/>
         </p:nvSpPr>
@@ -22700,7 +23244,7 @@
       </p:sp>
       <p:sp>
         <p:nvSpPr>
-          <p:cNvPr id="13" name="TextBox 12"/>
+          <p:cNvPr id="14" name="TextBox 13"/>
           <p:cNvSpPr txBox="1"/>
           <p:nvPr/>
         </p:nvSpPr>
@@ -22747,7 +23291,7 @@
       </p:sp>
       <p:sp>
         <p:nvSpPr>
-          <p:cNvPr id="14" name="Rounded Rectangle 13"/>
+          <p:cNvPr id="15" name="Rounded Rectangle 14"/>
           <p:cNvSpPr/>
           <p:nvPr/>
         </p:nvSpPr>
@@ -22793,7 +23337,7 @@
       </p:sp>
       <p:sp>
         <p:nvSpPr>
-          <p:cNvPr id="15" name="TextBox 14"/>
+          <p:cNvPr id="16" name="TextBox 15"/>
           <p:cNvSpPr txBox="1"/>
           <p:nvPr/>
         </p:nvSpPr>
@@ -22840,7 +23384,7 @@
       </p:sp>
       <p:sp>
         <p:nvSpPr>
-          <p:cNvPr id="16" name="Rounded Rectangle 15"/>
+          <p:cNvPr id="17" name="Rounded Rectangle 16"/>
           <p:cNvSpPr/>
           <p:nvPr/>
         </p:nvSpPr>
@@ -22886,7 +23430,7 @@
       </p:sp>
       <p:sp>
         <p:nvSpPr>
-          <p:cNvPr id="17" name="TextBox 16"/>
+          <p:cNvPr id="18" name="TextBox 17"/>
           <p:cNvSpPr txBox="1"/>
           <p:nvPr/>
         </p:nvSpPr>
@@ -22933,7 +23477,7 @@
       </p:sp>
       <p:sp>
         <p:nvSpPr>
-          <p:cNvPr id="18" name="Rounded Rectangle 17"/>
+          <p:cNvPr id="19" name="Rounded Rectangle 18"/>
           <p:cNvSpPr/>
           <p:nvPr/>
         </p:nvSpPr>
@@ -22979,7 +23523,7 @@
       </p:sp>
       <p:sp>
         <p:nvSpPr>
-          <p:cNvPr id="19" name="TextBox 18"/>
+          <p:cNvPr id="20" name="TextBox 19"/>
           <p:cNvSpPr txBox="1"/>
           <p:nvPr/>
         </p:nvSpPr>
@@ -23026,7 +23570,7 @@
       </p:sp>
       <p:sp>
         <p:nvSpPr>
-          <p:cNvPr id="20" name="Rounded Rectangle 19"/>
+          <p:cNvPr id="21" name="Rounded Rectangle 20"/>
           <p:cNvSpPr/>
           <p:nvPr/>
         </p:nvSpPr>
@@ -23072,7 +23616,7 @@
       </p:sp>
       <p:sp>
         <p:nvSpPr>
-          <p:cNvPr id="21" name="TextBox 20"/>
+          <p:cNvPr id="22" name="TextBox 21"/>
           <p:cNvSpPr txBox="1"/>
           <p:nvPr/>
         </p:nvSpPr>
@@ -23119,7 +23663,7 @@
       </p:sp>
       <p:sp>
         <p:nvSpPr>
-          <p:cNvPr id="22" name="Rounded Rectangle 21"/>
+          <p:cNvPr id="23" name="Rounded Rectangle 22"/>
           <p:cNvSpPr/>
           <p:nvPr/>
         </p:nvSpPr>
@@ -23173,7 +23717,7 @@
       </p:sp>
       <p:sp>
         <p:nvSpPr>
-          <p:cNvPr id="23" name="Rectangle 22"/>
+          <p:cNvPr id="24" name="Rectangle 23"/>
           <p:cNvSpPr/>
           <p:nvPr/>
         </p:nvSpPr>
@@ -23217,7 +23761,7 @@
       </p:sp>
       <p:sp>
         <p:nvSpPr>
-          <p:cNvPr id="24" name="TextBox 23"/>
+          <p:cNvPr id="25" name="TextBox 24"/>
           <p:cNvSpPr txBox="1"/>
           <p:nvPr/>
         </p:nvSpPr>
@@ -23264,7 +23808,7 @@
       </p:sp>
       <p:sp>
         <p:nvSpPr>
-          <p:cNvPr id="25" name="TextBox 24"/>
+          <p:cNvPr id="26" name="TextBox 25"/>
           <p:cNvSpPr txBox="1"/>
           <p:nvPr/>
         </p:nvSpPr>
@@ -23311,7 +23855,7 @@
       </p:sp>
       <p:sp>
         <p:nvSpPr>
-          <p:cNvPr id="26" name="Rounded Rectangle 25"/>
+          <p:cNvPr id="27" name="Rounded Rectangle 26"/>
           <p:cNvSpPr/>
           <p:nvPr/>
         </p:nvSpPr>
@@ -23365,7 +23909,7 @@
       </p:sp>
       <p:sp>
         <p:nvSpPr>
-          <p:cNvPr id="27" name="Rectangle 26"/>
+          <p:cNvPr id="28" name="Rectangle 27"/>
           <p:cNvSpPr/>
           <p:nvPr/>
         </p:nvSpPr>
@@ -23409,7 +23953,7 @@
       </p:sp>
       <p:sp>
         <p:nvSpPr>
-          <p:cNvPr id="28" name="TextBox 27"/>
+          <p:cNvPr id="29" name="TextBox 28"/>
           <p:cNvSpPr txBox="1"/>
           <p:nvPr/>
         </p:nvSpPr>
@@ -23456,7 +24000,7 @@
       </p:sp>
       <p:sp>
         <p:nvSpPr>
-          <p:cNvPr id="29" name="TextBox 28"/>
+          <p:cNvPr id="30" name="TextBox 29"/>
           <p:cNvSpPr txBox="1"/>
           <p:nvPr/>
         </p:nvSpPr>
@@ -23503,7 +24047,7 @@
       </p:sp>
       <p:sp>
         <p:nvSpPr>
-          <p:cNvPr id="30" name="Rounded Rectangle 29"/>
+          <p:cNvPr id="31" name="Rounded Rectangle 30"/>
           <p:cNvSpPr/>
           <p:nvPr/>
         </p:nvSpPr>
@@ -23557,7 +24101,7 @@
       </p:sp>
       <p:sp>
         <p:nvSpPr>
-          <p:cNvPr id="31" name="Rectangle 30"/>
+          <p:cNvPr id="32" name="Rectangle 31"/>
           <p:cNvSpPr/>
           <p:nvPr/>
         </p:nvSpPr>
@@ -23601,7 +24145,7 @@
       </p:sp>
       <p:sp>
         <p:nvSpPr>
-          <p:cNvPr id="32" name="TextBox 31"/>
+          <p:cNvPr id="33" name="TextBox 32"/>
           <p:cNvSpPr txBox="1"/>
           <p:nvPr/>
         </p:nvSpPr>
@@ -23648,7 +24192,7 @@
       </p:sp>
       <p:sp>
         <p:nvSpPr>
-          <p:cNvPr id="33" name="TextBox 32"/>
+          <p:cNvPr id="34" name="TextBox 33"/>
           <p:cNvSpPr txBox="1"/>
           <p:nvPr/>
         </p:nvSpPr>
@@ -23755,9 +24299,33 @@
           </a:p>
         </p:txBody>
       </p:sp>
-      <p:sp>
-        <p:nvSpPr>
-          <p:cNvPr id="3" name="TextBox 2"/>
+      <p:pic>
+        <p:nvPicPr>
+          <p:cNvPr id="3" name="college-logo" descr="logo-mark.png"/>
+          <p:cNvPicPr>
+            <a:picLocks noChangeAspect="1"/>
+          </p:cNvPicPr>
+          <p:nvPr/>
+        </p:nvPicPr>
+        <p:blipFill>
+          <a:blip r:embed="rId2"/>
+          <a:stretch>
+            <a:fillRect/>
+          </a:stretch>
+        </p:blipFill>
+        <p:spPr>
+          <a:xfrm>
+            <a:off x="11203333" y="6199632"/>
+            <a:ext cx="275129" cy="310896"/>
+          </a:xfrm>
+          <a:prstGeom prst="rect">
+            <a:avLst/>
+          </a:prstGeom>
+        </p:spPr>
+      </p:pic>
+      <p:sp>
+        <p:nvSpPr>
+          <p:cNvPr id="4" name="TextBox 3"/>
           <p:cNvSpPr txBox="1"/>
           <p:nvPr/>
         </p:nvSpPr>
@@ -23826,13 +24394,13 @@
       </p:sp>
       <p:sp>
         <p:nvSpPr>
-          <p:cNvPr id="4" name="TextBox 3"/>
+          <p:cNvPr id="5" name="TextBox 4"/>
           <p:cNvSpPr txBox="1"/>
           <p:nvPr/>
         </p:nvSpPr>
         <p:spPr>
           <a:xfrm>
-            <a:off x="8826703" y="6272784"/>
+            <a:off x="8240677" y="6272784"/>
             <a:ext cx="2651760" cy="219456"/>
           </a:xfrm>
           <a:prstGeom prst="rect">
@@ -23895,7 +24463,7 @@
       </p:sp>
       <p:sp>
         <p:nvSpPr>
-          <p:cNvPr id="5" name="TextBox 4"/>
+          <p:cNvPr id="6" name="TextBox 5"/>
           <p:cNvSpPr txBox="1"/>
           <p:nvPr/>
         </p:nvSpPr>
@@ -23942,7 +24510,7 @@
       </p:sp>
       <p:sp>
         <p:nvSpPr>
-          <p:cNvPr id="6" name="TextBox 5"/>
+          <p:cNvPr id="7" name="TextBox 6"/>
           <p:cNvSpPr txBox="1"/>
           <p:nvPr/>
         </p:nvSpPr>
@@ -23989,7 +24557,7 @@
       </p:sp>
       <p:sp>
         <p:nvSpPr>
-          <p:cNvPr id="7" name="Rectangle 6"/>
+          <p:cNvPr id="8" name="Rectangle 7"/>
           <p:cNvSpPr/>
           <p:nvPr/>
         </p:nvSpPr>
@@ -24033,7 +24601,7 @@
       </p:sp>
       <p:sp>
         <p:nvSpPr>
-          <p:cNvPr id="8" name="TextBox 7"/>
+          <p:cNvPr id="9" name="TextBox 8"/>
           <p:cNvSpPr txBox="1"/>
           <p:nvPr/>
         </p:nvSpPr>
@@ -24080,7 +24648,7 @@
       </p:sp>
       <p:sp>
         <p:nvSpPr>
-          <p:cNvPr id="9" name="Rounded Rectangle 8"/>
+          <p:cNvPr id="10" name="Rounded Rectangle 9"/>
           <p:cNvSpPr/>
           <p:nvPr/>
         </p:nvSpPr>
@@ -24134,7 +24702,7 @@
       </p:sp>
       <p:sp>
         <p:nvSpPr>
-          <p:cNvPr id="10" name="Rectangle 9"/>
+          <p:cNvPr id="11" name="Rectangle 10"/>
           <p:cNvSpPr/>
           <p:nvPr/>
         </p:nvSpPr>
@@ -24178,7 +24746,7 @@
       </p:sp>
       <p:sp>
         <p:nvSpPr>
-          <p:cNvPr id="11" name="TextBox 10"/>
+          <p:cNvPr id="12" name="TextBox 11"/>
           <p:cNvSpPr txBox="1"/>
           <p:nvPr/>
         </p:nvSpPr>
@@ -24225,7 +24793,7 @@
       </p:sp>
       <p:sp>
         <p:nvSpPr>
-          <p:cNvPr id="12" name="Rounded Rectangle 11"/>
+          <p:cNvPr id="13" name="Rounded Rectangle 12"/>
           <p:cNvSpPr/>
           <p:nvPr/>
         </p:nvSpPr>
@@ -24271,7 +24839,7 @@
       </p:sp>
       <p:sp>
         <p:nvSpPr>
-          <p:cNvPr id="13" name="TextBox 12"/>
+          <p:cNvPr id="14" name="TextBox 13"/>
           <p:cNvSpPr txBox="1"/>
           <p:nvPr/>
         </p:nvSpPr>
@@ -24318,7 +24886,7 @@
       </p:sp>
       <p:sp>
         <p:nvSpPr>
-          <p:cNvPr id="14" name="Rounded Rectangle 13"/>
+          <p:cNvPr id="15" name="Rounded Rectangle 14"/>
           <p:cNvSpPr/>
           <p:nvPr/>
         </p:nvSpPr>
@@ -24364,7 +24932,7 @@
       </p:sp>
       <p:sp>
         <p:nvSpPr>
-          <p:cNvPr id="15" name="TextBox 14"/>
+          <p:cNvPr id="16" name="TextBox 15"/>
           <p:cNvSpPr txBox="1"/>
           <p:nvPr/>
         </p:nvSpPr>
@@ -24411,7 +24979,7 @@
       </p:sp>
       <p:sp>
         <p:nvSpPr>
-          <p:cNvPr id="16" name="Rounded Rectangle 15"/>
+          <p:cNvPr id="17" name="Rounded Rectangle 16"/>
           <p:cNvSpPr/>
           <p:nvPr/>
         </p:nvSpPr>
@@ -24457,7 +25025,7 @@
       </p:sp>
       <p:sp>
         <p:nvSpPr>
-          <p:cNvPr id="17" name="TextBox 16"/>
+          <p:cNvPr id="18" name="TextBox 17"/>
           <p:cNvSpPr txBox="1"/>
           <p:nvPr/>
         </p:nvSpPr>
@@ -24504,7 +25072,7 @@
       </p:sp>
       <p:sp>
         <p:nvSpPr>
-          <p:cNvPr id="18" name="Rounded Rectangle 17"/>
+          <p:cNvPr id="19" name="Rounded Rectangle 18"/>
           <p:cNvSpPr/>
           <p:nvPr/>
         </p:nvSpPr>
@@ -24558,7 +25126,7 @@
       </p:sp>
       <p:sp>
         <p:nvSpPr>
-          <p:cNvPr id="19" name="Rectangle 18"/>
+          <p:cNvPr id="20" name="Rectangle 19"/>
           <p:cNvSpPr/>
           <p:nvPr/>
         </p:nvSpPr>
@@ -24602,7 +25170,7 @@
       </p:sp>
       <p:sp>
         <p:nvSpPr>
-          <p:cNvPr id="20" name="TextBox 19"/>
+          <p:cNvPr id="21" name="TextBox 20"/>
           <p:cNvSpPr txBox="1"/>
           <p:nvPr/>
         </p:nvSpPr>
@@ -24649,7 +25217,7 @@
       </p:sp>
       <p:sp>
         <p:nvSpPr>
-          <p:cNvPr id="21" name="Rounded Rectangle 20"/>
+          <p:cNvPr id="22" name="Rounded Rectangle 21"/>
           <p:cNvSpPr/>
           <p:nvPr/>
         </p:nvSpPr>
@@ -24695,7 +25263,7 @@
       </p:sp>
       <p:sp>
         <p:nvSpPr>
-          <p:cNvPr id="22" name="TextBox 21"/>
+          <p:cNvPr id="23" name="TextBox 22"/>
           <p:cNvSpPr txBox="1"/>
           <p:nvPr/>
         </p:nvSpPr>
@@ -24742,7 +25310,7 @@
       </p:sp>
       <p:sp>
         <p:nvSpPr>
-          <p:cNvPr id="23" name="Rounded Rectangle 22"/>
+          <p:cNvPr id="24" name="Rounded Rectangle 23"/>
           <p:cNvSpPr/>
           <p:nvPr/>
         </p:nvSpPr>
@@ -24788,7 +25356,7 @@
       </p:sp>
       <p:sp>
         <p:nvSpPr>
-          <p:cNvPr id="24" name="TextBox 23"/>
+          <p:cNvPr id="25" name="TextBox 24"/>
           <p:cNvSpPr txBox="1"/>
           <p:nvPr/>
         </p:nvSpPr>
@@ -24835,7 +25403,7 @@
       </p:sp>
       <p:sp>
         <p:nvSpPr>
-          <p:cNvPr id="25" name="Rounded Rectangle 24"/>
+          <p:cNvPr id="26" name="Rounded Rectangle 25"/>
           <p:cNvSpPr/>
           <p:nvPr/>
         </p:nvSpPr>
@@ -24881,7 +25449,7 @@
       </p:sp>
       <p:sp>
         <p:nvSpPr>
-          <p:cNvPr id="26" name="TextBox 25"/>
+          <p:cNvPr id="27" name="TextBox 26"/>
           <p:cNvSpPr txBox="1"/>
           <p:nvPr/>
         </p:nvSpPr>
@@ -24928,7 +25496,7 @@
       </p:sp>
       <p:sp>
         <p:nvSpPr>
-          <p:cNvPr id="27" name="Rounded Rectangle 26"/>
+          <p:cNvPr id="28" name="Rounded Rectangle 27"/>
           <p:cNvSpPr/>
           <p:nvPr/>
         </p:nvSpPr>
@@ -24982,7 +25550,7 @@
       </p:sp>
       <p:sp>
         <p:nvSpPr>
-          <p:cNvPr id="28" name="Rectangle 27"/>
+          <p:cNvPr id="29" name="Rectangle 28"/>
           <p:cNvSpPr/>
           <p:nvPr/>
         </p:nvSpPr>
@@ -25026,7 +25594,7 @@
       </p:sp>
       <p:sp>
         <p:nvSpPr>
-          <p:cNvPr id="29" name="TextBox 28"/>
+          <p:cNvPr id="30" name="TextBox 29"/>
           <p:cNvSpPr txBox="1"/>
           <p:nvPr/>
         </p:nvSpPr>
@@ -25073,7 +25641,7 @@
       </p:sp>
       <p:sp>
         <p:nvSpPr>
-          <p:cNvPr id="30" name="Rounded Rectangle 29"/>
+          <p:cNvPr id="31" name="Rounded Rectangle 30"/>
           <p:cNvSpPr/>
           <p:nvPr/>
         </p:nvSpPr>
@@ -25119,7 +25687,7 @@
       </p:sp>
       <p:sp>
         <p:nvSpPr>
-          <p:cNvPr id="31" name="TextBox 30"/>
+          <p:cNvPr id="32" name="TextBox 31"/>
           <p:cNvSpPr txBox="1"/>
           <p:nvPr/>
         </p:nvSpPr>
@@ -25166,7 +25734,7 @@
       </p:sp>
       <p:sp>
         <p:nvSpPr>
-          <p:cNvPr id="32" name="Rounded Rectangle 31"/>
+          <p:cNvPr id="33" name="Rounded Rectangle 32"/>
           <p:cNvSpPr/>
           <p:nvPr/>
         </p:nvSpPr>
@@ -25212,7 +25780,7 @@
       </p:sp>
       <p:sp>
         <p:nvSpPr>
-          <p:cNvPr id="33" name="TextBox 32"/>
+          <p:cNvPr id="34" name="TextBox 33"/>
           <p:cNvSpPr txBox="1"/>
           <p:nvPr/>
         </p:nvSpPr>
@@ -25259,7 +25827,7 @@
       </p:sp>
       <p:sp>
         <p:nvSpPr>
-          <p:cNvPr id="34" name="Rounded Rectangle 33"/>
+          <p:cNvPr id="35" name="Rounded Rectangle 34"/>
           <p:cNvSpPr/>
           <p:nvPr/>
         </p:nvSpPr>
@@ -25305,7 +25873,7 @@
       </p:sp>
       <p:sp>
         <p:nvSpPr>
-          <p:cNvPr id="35" name="TextBox 34"/>
+          <p:cNvPr id="36" name="TextBox 35"/>
           <p:cNvSpPr txBox="1"/>
           <p:nvPr/>
         </p:nvSpPr>
@@ -25352,7 +25920,7 @@
       </p:sp>
       <p:sp>
         <p:nvSpPr>
-          <p:cNvPr id="36" name="Rounded Rectangle 35"/>
+          <p:cNvPr id="37" name="Rounded Rectangle 36"/>
           <p:cNvSpPr/>
           <p:nvPr/>
         </p:nvSpPr>
@@ -25406,7 +25974,7 @@
       </p:sp>
       <p:sp>
         <p:nvSpPr>
-          <p:cNvPr id="37" name="Rectangle 36"/>
+          <p:cNvPr id="38" name="Rectangle 37"/>
           <p:cNvSpPr/>
           <p:nvPr/>
         </p:nvSpPr>
@@ -25450,7 +26018,7 @@
       </p:sp>
       <p:sp>
         <p:nvSpPr>
-          <p:cNvPr id="38" name="TextBox 37"/>
+          <p:cNvPr id="39" name="TextBox 38"/>
           <p:cNvSpPr txBox="1"/>
           <p:nvPr/>
         </p:nvSpPr>
@@ -25497,7 +26065,7 @@
       </p:sp>
       <p:sp>
         <p:nvSpPr>
-          <p:cNvPr id="39" name="Rounded Rectangle 38"/>
+          <p:cNvPr id="40" name="Rounded Rectangle 39"/>
           <p:cNvSpPr/>
           <p:nvPr/>
         </p:nvSpPr>
@@ -25543,7 +26111,7 @@
       </p:sp>
       <p:sp>
         <p:nvSpPr>
-          <p:cNvPr id="40" name="TextBox 39"/>
+          <p:cNvPr id="41" name="TextBox 40"/>
           <p:cNvSpPr txBox="1"/>
           <p:nvPr/>
         </p:nvSpPr>
@@ -25590,7 +26158,7 @@
       </p:sp>
       <p:sp>
         <p:nvSpPr>
-          <p:cNvPr id="41" name="Rounded Rectangle 40"/>
+          <p:cNvPr id="42" name="Rounded Rectangle 41"/>
           <p:cNvSpPr/>
           <p:nvPr/>
         </p:nvSpPr>
@@ -25636,7 +26204,7 @@
       </p:sp>
       <p:sp>
         <p:nvSpPr>
-          <p:cNvPr id="42" name="TextBox 41"/>
+          <p:cNvPr id="43" name="TextBox 42"/>
           <p:cNvSpPr txBox="1"/>
           <p:nvPr/>
         </p:nvSpPr>
@@ -25683,7 +26251,7 @@
       </p:sp>
       <p:sp>
         <p:nvSpPr>
-          <p:cNvPr id="43" name="Rounded Rectangle 42"/>
+          <p:cNvPr id="44" name="Rounded Rectangle 43"/>
           <p:cNvSpPr/>
           <p:nvPr/>
         </p:nvSpPr>
@@ -25729,7 +26297,7 @@
       </p:sp>
       <p:sp>
         <p:nvSpPr>
-          <p:cNvPr id="44" name="TextBox 43"/>
+          <p:cNvPr id="45" name="TextBox 44"/>
           <p:cNvSpPr txBox="1"/>
           <p:nvPr/>
         </p:nvSpPr>
@@ -25836,9 +26404,33 @@
           </a:p>
         </p:txBody>
       </p:sp>
-      <p:sp>
-        <p:nvSpPr>
-          <p:cNvPr id="3" name="TextBox 2"/>
+      <p:pic>
+        <p:nvPicPr>
+          <p:cNvPr id="3" name="college-logo" descr="logo-mark.png"/>
+          <p:cNvPicPr>
+            <a:picLocks noChangeAspect="1"/>
+          </p:cNvPicPr>
+          <p:nvPr/>
+        </p:nvPicPr>
+        <p:blipFill>
+          <a:blip r:embed="rId2"/>
+          <a:stretch>
+            <a:fillRect/>
+          </a:stretch>
+        </p:blipFill>
+        <p:spPr>
+          <a:xfrm>
+            <a:off x="11203333" y="6199632"/>
+            <a:ext cx="275129" cy="310896"/>
+          </a:xfrm>
+          <a:prstGeom prst="rect">
+            <a:avLst/>
+          </a:prstGeom>
+        </p:spPr>
+      </p:pic>
+      <p:sp>
+        <p:nvSpPr>
+          <p:cNvPr id="4" name="TextBox 3"/>
           <p:cNvSpPr txBox="1"/>
           <p:nvPr/>
         </p:nvSpPr>
@@ -25907,13 +26499,13 @@
       </p:sp>
       <p:sp>
         <p:nvSpPr>
-          <p:cNvPr id="4" name="TextBox 3"/>
+          <p:cNvPr id="5" name="TextBox 4"/>
           <p:cNvSpPr txBox="1"/>
           <p:nvPr/>
         </p:nvSpPr>
         <p:spPr>
           <a:xfrm>
-            <a:off x="8826703" y="6272784"/>
+            <a:off x="8240677" y="6272784"/>
             <a:ext cx="2651760" cy="219456"/>
           </a:xfrm>
           <a:prstGeom prst="rect">
@@ -25976,7 +26568,7 @@
       </p:sp>
       <p:sp>
         <p:nvSpPr>
-          <p:cNvPr id="5" name="TextBox 4"/>
+          <p:cNvPr id="6" name="TextBox 5"/>
           <p:cNvSpPr txBox="1"/>
           <p:nvPr/>
         </p:nvSpPr>
@@ -26023,7 +26615,7 @@
       </p:sp>
       <p:sp>
         <p:nvSpPr>
-          <p:cNvPr id="6" name="TextBox 5"/>
+          <p:cNvPr id="7" name="TextBox 6"/>
           <p:cNvSpPr txBox="1"/>
           <p:nvPr/>
         </p:nvSpPr>
@@ -26070,7 +26662,7 @@
       </p:sp>
       <p:sp>
         <p:nvSpPr>
-          <p:cNvPr id="7" name="Rectangle 6"/>
+          <p:cNvPr id="8" name="Rectangle 7"/>
           <p:cNvSpPr/>
           <p:nvPr/>
         </p:nvSpPr>
@@ -26114,7 +26706,7 @@
       </p:sp>
       <p:sp>
         <p:nvSpPr>
-          <p:cNvPr id="8" name="TextBox 7"/>
+          <p:cNvPr id="9" name="TextBox 8"/>
           <p:cNvSpPr txBox="1"/>
           <p:nvPr/>
         </p:nvSpPr>
@@ -26161,7 +26753,7 @@
       </p:sp>
       <p:sp>
         <p:nvSpPr>
-          <p:cNvPr id="9" name="Rounded Rectangle 8"/>
+          <p:cNvPr id="10" name="Rounded Rectangle 9"/>
           <p:cNvSpPr/>
           <p:nvPr/>
         </p:nvSpPr>
@@ -26215,7 +26807,7 @@
       </p:sp>
       <p:sp>
         <p:nvSpPr>
-          <p:cNvPr id="10" name="Rectangle 9"/>
+          <p:cNvPr id="11" name="Rectangle 10"/>
           <p:cNvSpPr/>
           <p:nvPr/>
         </p:nvSpPr>
@@ -26259,7 +26851,7 @@
       </p:sp>
       <p:sp>
         <p:nvSpPr>
-          <p:cNvPr id="11" name="Oval 10"/>
+          <p:cNvPr id="12" name="Oval 11"/>
           <p:cNvSpPr/>
           <p:nvPr/>
         </p:nvSpPr>
@@ -26303,7 +26895,7 @@
       </p:sp>
       <p:sp>
         <p:nvSpPr>
-          <p:cNvPr id="12" name="TextBox 11"/>
+          <p:cNvPr id="13" name="TextBox 12"/>
           <p:cNvSpPr txBox="1"/>
           <p:nvPr/>
         </p:nvSpPr>
@@ -26350,7 +26942,7 @@
       </p:sp>
       <p:sp>
         <p:nvSpPr>
-          <p:cNvPr id="13" name="TextBox 12"/>
+          <p:cNvPr id="14" name="TextBox 13"/>
           <p:cNvSpPr txBox="1"/>
           <p:nvPr/>
         </p:nvSpPr>
@@ -26421,7 +27013,7 @@
       </p:sp>
       <p:sp>
         <p:nvSpPr>
-          <p:cNvPr id="14" name="Rounded Rectangle 13"/>
+          <p:cNvPr id="15" name="Rounded Rectangle 14"/>
           <p:cNvSpPr/>
           <p:nvPr/>
         </p:nvSpPr>
@@ -26475,7 +27067,7 @@
       </p:sp>
       <p:sp>
         <p:nvSpPr>
-          <p:cNvPr id="15" name="Rectangle 14"/>
+          <p:cNvPr id="16" name="Rectangle 15"/>
           <p:cNvSpPr/>
           <p:nvPr/>
         </p:nvSpPr>
@@ -26519,7 +27111,7 @@
       </p:sp>
       <p:sp>
         <p:nvSpPr>
-          <p:cNvPr id="16" name="Oval 15"/>
+          <p:cNvPr id="17" name="Oval 16"/>
           <p:cNvSpPr/>
           <p:nvPr/>
         </p:nvSpPr>
@@ -26563,7 +27155,7 @@
       </p:sp>
       <p:sp>
         <p:nvSpPr>
-          <p:cNvPr id="17" name="TextBox 16"/>
+          <p:cNvPr id="18" name="TextBox 17"/>
           <p:cNvSpPr txBox="1"/>
           <p:nvPr/>
         </p:nvSpPr>
@@ -26610,7 +27202,7 @@
       </p:sp>
       <p:sp>
         <p:nvSpPr>
-          <p:cNvPr id="18" name="TextBox 17"/>
+          <p:cNvPr id="19" name="TextBox 18"/>
           <p:cNvSpPr txBox="1"/>
           <p:nvPr/>
         </p:nvSpPr>
@@ -26681,7 +27273,7 @@
       </p:sp>
       <p:sp>
         <p:nvSpPr>
-          <p:cNvPr id="19" name="Rounded Rectangle 18"/>
+          <p:cNvPr id="20" name="Rounded Rectangle 19"/>
           <p:cNvSpPr/>
           <p:nvPr/>
         </p:nvSpPr>
@@ -26735,7 +27327,7 @@
       </p:sp>
       <p:sp>
         <p:nvSpPr>
-          <p:cNvPr id="20" name="Rectangle 19"/>
+          <p:cNvPr id="21" name="Rectangle 20"/>
           <p:cNvSpPr/>
           <p:nvPr/>
         </p:nvSpPr>
@@ -26779,7 +27371,7 @@
       </p:sp>
       <p:sp>
         <p:nvSpPr>
-          <p:cNvPr id="21" name="Oval 20"/>
+          <p:cNvPr id="22" name="Oval 21"/>
           <p:cNvSpPr/>
           <p:nvPr/>
         </p:nvSpPr>
@@ -26823,7 +27415,7 @@
       </p:sp>
       <p:sp>
         <p:nvSpPr>
-          <p:cNvPr id="22" name="TextBox 21"/>
+          <p:cNvPr id="23" name="TextBox 22"/>
           <p:cNvSpPr txBox="1"/>
           <p:nvPr/>
         </p:nvSpPr>
@@ -26870,7 +27462,7 @@
       </p:sp>
       <p:sp>
         <p:nvSpPr>
-          <p:cNvPr id="23" name="TextBox 22"/>
+          <p:cNvPr id="24" name="TextBox 23"/>
           <p:cNvSpPr txBox="1"/>
           <p:nvPr/>
         </p:nvSpPr>
@@ -26941,7 +27533,7 @@
       </p:sp>
       <p:sp>
         <p:nvSpPr>
-          <p:cNvPr id="24" name="Rounded Rectangle 23"/>
+          <p:cNvPr id="25" name="Rounded Rectangle 24"/>
           <p:cNvSpPr/>
           <p:nvPr/>
         </p:nvSpPr>
@@ -26995,7 +27587,7 @@
       </p:sp>
       <p:sp>
         <p:nvSpPr>
-          <p:cNvPr id="25" name="Rectangle 24"/>
+          <p:cNvPr id="26" name="Rectangle 25"/>
           <p:cNvSpPr/>
           <p:nvPr/>
         </p:nvSpPr>
@@ -27039,7 +27631,7 @@
       </p:sp>
       <p:sp>
         <p:nvSpPr>
-          <p:cNvPr id="26" name="Oval 25"/>
+          <p:cNvPr id="27" name="Oval 26"/>
           <p:cNvSpPr/>
           <p:nvPr/>
         </p:nvSpPr>
@@ -27083,7 +27675,7 @@
       </p:sp>
       <p:sp>
         <p:nvSpPr>
-          <p:cNvPr id="27" name="TextBox 26"/>
+          <p:cNvPr id="28" name="TextBox 27"/>
           <p:cNvSpPr txBox="1"/>
           <p:nvPr/>
         </p:nvSpPr>
@@ -27130,7 +27722,7 @@
       </p:sp>
       <p:sp>
         <p:nvSpPr>
-          <p:cNvPr id="28" name="TextBox 27"/>
+          <p:cNvPr id="29" name="TextBox 28"/>
           <p:cNvSpPr txBox="1"/>
           <p:nvPr/>
         </p:nvSpPr>
@@ -27201,7 +27793,7 @@
       </p:sp>
       <p:sp>
         <p:nvSpPr>
-          <p:cNvPr id="29" name="Rounded Rectangle 28"/>
+          <p:cNvPr id="30" name="Rounded Rectangle 29"/>
           <p:cNvSpPr/>
           <p:nvPr/>
         </p:nvSpPr>
@@ -27255,7 +27847,7 @@
       </p:sp>
       <p:sp>
         <p:nvSpPr>
-          <p:cNvPr id="30" name="Rectangle 29"/>
+          <p:cNvPr id="31" name="Rectangle 30"/>
           <p:cNvSpPr/>
           <p:nvPr/>
         </p:nvSpPr>
@@ -27299,7 +27891,7 @@
       </p:sp>
       <p:sp>
         <p:nvSpPr>
-          <p:cNvPr id="31" name="Oval 30"/>
+          <p:cNvPr id="32" name="Oval 31"/>
           <p:cNvSpPr/>
           <p:nvPr/>
         </p:nvSpPr>
@@ -27343,7 +27935,7 @@
       </p:sp>
       <p:sp>
         <p:nvSpPr>
-          <p:cNvPr id="32" name="TextBox 31"/>
+          <p:cNvPr id="33" name="TextBox 32"/>
           <p:cNvSpPr txBox="1"/>
           <p:nvPr/>
         </p:nvSpPr>
@@ -27390,7 +27982,7 @@
       </p:sp>
       <p:sp>
         <p:nvSpPr>
-          <p:cNvPr id="33" name="TextBox 32"/>
+          <p:cNvPr id="34" name="TextBox 33"/>
           <p:cNvSpPr txBox="1"/>
           <p:nvPr/>
         </p:nvSpPr>
@@ -27461,7 +28053,7 @@
       </p:sp>
       <p:sp>
         <p:nvSpPr>
-          <p:cNvPr id="34" name="Rounded Rectangle 33"/>
+          <p:cNvPr id="35" name="Rounded Rectangle 34"/>
           <p:cNvSpPr/>
           <p:nvPr/>
         </p:nvSpPr>
@@ -27515,7 +28107,7 @@
       </p:sp>
       <p:sp>
         <p:nvSpPr>
-          <p:cNvPr id="35" name="Rectangle 34"/>
+          <p:cNvPr id="36" name="Rectangle 35"/>
           <p:cNvSpPr/>
           <p:nvPr/>
         </p:nvSpPr>
@@ -27559,7 +28151,7 @@
       </p:sp>
       <p:sp>
         <p:nvSpPr>
-          <p:cNvPr id="36" name="Oval 35"/>
+          <p:cNvPr id="37" name="Oval 36"/>
           <p:cNvSpPr/>
           <p:nvPr/>
         </p:nvSpPr>
@@ -27603,7 +28195,7 @@
       </p:sp>
       <p:sp>
         <p:nvSpPr>
-          <p:cNvPr id="37" name="TextBox 36"/>
+          <p:cNvPr id="38" name="TextBox 37"/>
           <p:cNvSpPr txBox="1"/>
           <p:nvPr/>
         </p:nvSpPr>
@@ -27650,7 +28242,7 @@
       </p:sp>
       <p:sp>
         <p:nvSpPr>
-          <p:cNvPr id="38" name="TextBox 37"/>
+          <p:cNvPr id="39" name="TextBox 38"/>
           <p:cNvSpPr txBox="1"/>
           <p:nvPr/>
         </p:nvSpPr>
@@ -28231,7 +28823,77 @@
       </p:sp>
       <p:sp>
         <p:nvSpPr>
-          <p:cNvPr id="11" name="Rectangle 10"/>
+          <p:cNvPr id="11" name="logo-plate"/>
+          <p:cNvSpPr/>
+          <p:nvPr/>
+        </p:nvSpPr>
+        <p:spPr>
+          <a:xfrm>
+            <a:off x="9233806" y="539496"/>
+            <a:ext cx="2272088" cy="1106424"/>
+          </a:xfrm>
+          <a:prstGeom prst="roundRect">
+            <a:avLst>
+              <a:gd name="adj" fmla="val 14000"/>
+            </a:avLst>
+          </a:prstGeom>
+          <a:solidFill>
+            <a:srgbClr val="FFFFFF"/>
+          </a:solidFill>
+          <a:ln>
+            <a:noFill/>
+          </a:ln>
+          <a:effectLst/>
+        </p:spPr>
+        <p:style>
+          <a:lnRef idx="1">
+            <a:schemeClr val="accent1"/>
+          </a:lnRef>
+          <a:fillRef idx="3">
+            <a:schemeClr val="accent1"/>
+          </a:fillRef>
+          <a:effectRef idx="2">
+            <a:schemeClr val="accent1"/>
+          </a:effectRef>
+          <a:fontRef idx="minor">
+            <a:schemeClr val="lt1"/>
+          </a:fontRef>
+        </p:style>
+        <p:txBody>
+          <a:bodyPr rtlCol="0" anchor="ctr" wrap="square"/>
+          <a:lstStyle/>
+          <a:p>
+            <a:pPr algn="ctr"/>
+          </a:p>
+        </p:txBody>
+      </p:sp>
+      <p:pic>
+        <p:nvPicPr>
+          <p:cNvPr id="12" name="college-logo" descr="logo-full.png"/>
+          <p:cNvPicPr>
+            <a:picLocks noChangeAspect="1"/>
+          </p:cNvPicPr>
+          <p:nvPr/>
+        </p:nvPicPr>
+        <p:blipFill>
+          <a:blip r:embed="rId2"/>
+          <a:stretch>
+            <a:fillRect/>
+          </a:stretch>
+        </p:blipFill>
+        <p:spPr>
+          <a:xfrm>
+            <a:off x="9352678" y="658368"/>
+            <a:ext cx="2034345" cy="868680"/>
+          </a:xfrm>
+          <a:prstGeom prst="rect">
+            <a:avLst/>
+          </a:prstGeom>
+        </p:spPr>
+      </p:pic>
+      <p:sp>
+        <p:nvSpPr>
+          <p:cNvPr id="13" name="Rectangle 12"/>
           <p:cNvSpPr/>
           <p:nvPr/>
         </p:nvSpPr>
@@ -28275,7 +28937,7 @@
       </p:sp>
       <p:sp>
         <p:nvSpPr>
-          <p:cNvPr id="12" name="TextBox 11"/>
+          <p:cNvPr id="14" name="TextBox 13"/>
           <p:cNvSpPr txBox="1"/>
           <p:nvPr/>
         </p:nvSpPr>
@@ -28802,6 +29464,76 @@
           </a:p>
         </p:txBody>
       </p:sp>
+      <p:sp>
+        <p:nvSpPr>
+          <p:cNvPr id="11" name="logo-plate"/>
+          <p:cNvSpPr/>
+          <p:nvPr/>
+        </p:nvSpPr>
+        <p:spPr>
+          <a:xfrm>
+            <a:off x="9512190" y="539496"/>
+            <a:ext cx="1993704" cy="987552"/>
+          </a:xfrm>
+          <a:prstGeom prst="roundRect">
+            <a:avLst>
+              <a:gd name="adj" fmla="val 14000"/>
+            </a:avLst>
+          </a:prstGeom>
+          <a:solidFill>
+            <a:srgbClr val="FFFFFF"/>
+          </a:solidFill>
+          <a:ln>
+            <a:noFill/>
+          </a:ln>
+          <a:effectLst/>
+        </p:spPr>
+        <p:style>
+          <a:lnRef idx="1">
+            <a:schemeClr val="accent1"/>
+          </a:lnRef>
+          <a:fillRef idx="3">
+            <a:schemeClr val="accent1"/>
+          </a:fillRef>
+          <a:effectRef idx="2">
+            <a:schemeClr val="accent1"/>
+          </a:effectRef>
+          <a:fontRef idx="minor">
+            <a:schemeClr val="lt1"/>
+          </a:fontRef>
+        </p:style>
+        <p:txBody>
+          <a:bodyPr rtlCol="0" anchor="ctr" wrap="square"/>
+          <a:lstStyle/>
+          <a:p>
+            <a:pPr algn="ctr"/>
+          </a:p>
+        </p:txBody>
+      </p:sp>
+      <p:pic>
+        <p:nvPicPr>
+          <p:cNvPr id="12" name="college-logo" descr="logo-full.png"/>
+          <p:cNvPicPr>
+            <a:picLocks noChangeAspect="1"/>
+          </p:cNvPicPr>
+          <p:nvPr/>
+        </p:nvPicPr>
+        <p:blipFill>
+          <a:blip r:embed="rId2"/>
+          <a:stretch>
+            <a:fillRect/>
+          </a:stretch>
+        </p:blipFill>
+        <p:spPr>
+          <a:xfrm>
+            <a:off x="9631062" y="658368"/>
+            <a:ext cx="1755961" cy="749808"/>
+          </a:xfrm>
+          <a:prstGeom prst="rect">
+            <a:avLst/>
+          </a:prstGeom>
+        </p:spPr>
+      </p:pic>
     </p:spTree>
   </p:cSld>
   <p:clrMapOvr>
@@ -28864,9 +29596,33 @@
           </a:p>
         </p:txBody>
       </p:sp>
-      <p:sp>
-        <p:nvSpPr>
-          <p:cNvPr id="3" name="TextBox 2"/>
+      <p:pic>
+        <p:nvPicPr>
+          <p:cNvPr id="3" name="college-logo" descr="logo-mark.png"/>
+          <p:cNvPicPr>
+            <a:picLocks noChangeAspect="1"/>
+          </p:cNvPicPr>
+          <p:nvPr/>
+        </p:nvPicPr>
+        <p:blipFill>
+          <a:blip r:embed="rId2"/>
+          <a:stretch>
+            <a:fillRect/>
+          </a:stretch>
+        </p:blipFill>
+        <p:spPr>
+          <a:xfrm>
+            <a:off x="11203333" y="6199632"/>
+            <a:ext cx="275129" cy="310896"/>
+          </a:xfrm>
+          <a:prstGeom prst="rect">
+            <a:avLst/>
+          </a:prstGeom>
+        </p:spPr>
+      </p:pic>
+      <p:sp>
+        <p:nvSpPr>
+          <p:cNvPr id="4" name="TextBox 3"/>
           <p:cNvSpPr txBox="1"/>
           <p:nvPr/>
         </p:nvSpPr>
@@ -28935,13 +29691,13 @@
       </p:sp>
       <p:sp>
         <p:nvSpPr>
-          <p:cNvPr id="4" name="TextBox 3"/>
+          <p:cNvPr id="5" name="TextBox 4"/>
           <p:cNvSpPr txBox="1"/>
           <p:nvPr/>
         </p:nvSpPr>
         <p:spPr>
           <a:xfrm>
-            <a:off x="8826703" y="6272784"/>
+            <a:off x="8240677" y="6272784"/>
             <a:ext cx="2651760" cy="219456"/>
           </a:xfrm>
           <a:prstGeom prst="rect">
@@ -29004,7 +29760,7 @@
       </p:sp>
       <p:sp>
         <p:nvSpPr>
-          <p:cNvPr id="5" name="TextBox 4"/>
+          <p:cNvPr id="6" name="TextBox 5"/>
           <p:cNvSpPr txBox="1"/>
           <p:nvPr/>
         </p:nvSpPr>
@@ -29051,7 +29807,7 @@
       </p:sp>
       <p:sp>
         <p:nvSpPr>
-          <p:cNvPr id="6" name="TextBox 5"/>
+          <p:cNvPr id="7" name="TextBox 6"/>
           <p:cNvSpPr txBox="1"/>
           <p:nvPr/>
         </p:nvSpPr>
@@ -29098,7 +29854,7 @@
       </p:sp>
       <p:sp>
         <p:nvSpPr>
-          <p:cNvPr id="7" name="Rectangle 6"/>
+          <p:cNvPr id="8" name="Rectangle 7"/>
           <p:cNvSpPr/>
           <p:nvPr/>
         </p:nvSpPr>
@@ -29142,7 +29898,7 @@
       </p:sp>
       <p:sp>
         <p:nvSpPr>
-          <p:cNvPr id="8" name="TextBox 7"/>
+          <p:cNvPr id="9" name="TextBox 8"/>
           <p:cNvSpPr txBox="1"/>
           <p:nvPr/>
         </p:nvSpPr>
@@ -29189,7 +29945,7 @@
       </p:sp>
       <p:sp>
         <p:nvSpPr>
-          <p:cNvPr id="9" name="Rounded Rectangle 8"/>
+          <p:cNvPr id="10" name="Rounded Rectangle 9"/>
           <p:cNvSpPr/>
           <p:nvPr/>
         </p:nvSpPr>
@@ -29235,7 +29991,7 @@
       </p:sp>
       <p:sp>
         <p:nvSpPr>
-          <p:cNvPr id="10" name="Rectangle 9"/>
+          <p:cNvPr id="11" name="Rectangle 10"/>
           <p:cNvSpPr/>
           <p:nvPr/>
         </p:nvSpPr>
@@ -29279,7 +30035,7 @@
       </p:sp>
       <p:sp>
         <p:nvSpPr>
-          <p:cNvPr id="11" name="TextBox 10"/>
+          <p:cNvPr id="12" name="TextBox 11"/>
           <p:cNvSpPr txBox="1"/>
           <p:nvPr/>
         </p:nvSpPr>
@@ -29326,7 +30082,7 @@
       </p:sp>
       <p:sp>
         <p:nvSpPr>
-          <p:cNvPr id="12" name="TextBox 11"/>
+          <p:cNvPr id="13" name="TextBox 12"/>
           <p:cNvSpPr txBox="1"/>
           <p:nvPr/>
         </p:nvSpPr>
@@ -29373,7 +30129,7 @@
       </p:sp>
       <p:sp>
         <p:nvSpPr>
-          <p:cNvPr id="13" name="Rounded Rectangle 12"/>
+          <p:cNvPr id="14" name="Rounded Rectangle 13"/>
           <p:cNvSpPr/>
           <p:nvPr/>
         </p:nvSpPr>
@@ -29419,7 +30175,7 @@
       </p:sp>
       <p:sp>
         <p:nvSpPr>
-          <p:cNvPr id="14" name="Rectangle 13"/>
+          <p:cNvPr id="15" name="Rectangle 14"/>
           <p:cNvSpPr/>
           <p:nvPr/>
         </p:nvSpPr>
@@ -29463,7 +30219,7 @@
       </p:sp>
       <p:sp>
         <p:nvSpPr>
-          <p:cNvPr id="15" name="TextBox 14"/>
+          <p:cNvPr id="16" name="TextBox 15"/>
           <p:cNvSpPr txBox="1"/>
           <p:nvPr/>
         </p:nvSpPr>
@@ -29510,7 +30266,7 @@
       </p:sp>
       <p:sp>
         <p:nvSpPr>
-          <p:cNvPr id="16" name="TextBox 15"/>
+          <p:cNvPr id="17" name="TextBox 16"/>
           <p:cNvSpPr txBox="1"/>
           <p:nvPr/>
         </p:nvSpPr>
@@ -29557,7 +30313,7 @@
       </p:sp>
       <p:sp>
         <p:nvSpPr>
-          <p:cNvPr id="17" name="Rounded Rectangle 16"/>
+          <p:cNvPr id="18" name="Rounded Rectangle 17"/>
           <p:cNvSpPr/>
           <p:nvPr/>
         </p:nvSpPr>
@@ -29603,7 +30359,7 @@
       </p:sp>
       <p:sp>
         <p:nvSpPr>
-          <p:cNvPr id="18" name="Rectangle 17"/>
+          <p:cNvPr id="19" name="Rectangle 18"/>
           <p:cNvSpPr/>
           <p:nvPr/>
         </p:nvSpPr>
@@ -29647,7 +30403,7 @@
       </p:sp>
       <p:sp>
         <p:nvSpPr>
-          <p:cNvPr id="19" name="TextBox 18"/>
+          <p:cNvPr id="20" name="TextBox 19"/>
           <p:cNvSpPr txBox="1"/>
           <p:nvPr/>
         </p:nvSpPr>
@@ -29694,7 +30450,7 @@
       </p:sp>
       <p:sp>
         <p:nvSpPr>
-          <p:cNvPr id="20" name="TextBox 19"/>
+          <p:cNvPr id="21" name="TextBox 20"/>
           <p:cNvSpPr txBox="1"/>
           <p:nvPr/>
         </p:nvSpPr>
@@ -29741,7 +30497,7 @@
       </p:sp>
       <p:sp>
         <p:nvSpPr>
-          <p:cNvPr id="21" name="Rounded Rectangle 20"/>
+          <p:cNvPr id="22" name="Rounded Rectangle 21"/>
           <p:cNvSpPr/>
           <p:nvPr/>
         </p:nvSpPr>
@@ -29787,7 +30543,7 @@
       </p:sp>
       <p:sp>
         <p:nvSpPr>
-          <p:cNvPr id="22" name="Rectangle 21"/>
+          <p:cNvPr id="23" name="Rectangle 22"/>
           <p:cNvSpPr/>
           <p:nvPr/>
         </p:nvSpPr>
@@ -29831,7 +30587,7 @@
       </p:sp>
       <p:sp>
         <p:nvSpPr>
-          <p:cNvPr id="23" name="TextBox 22"/>
+          <p:cNvPr id="24" name="TextBox 23"/>
           <p:cNvSpPr txBox="1"/>
           <p:nvPr/>
         </p:nvSpPr>
@@ -29878,7 +30634,7 @@
       </p:sp>
       <p:sp>
         <p:nvSpPr>
-          <p:cNvPr id="24" name="TextBox 23"/>
+          <p:cNvPr id="25" name="TextBox 24"/>
           <p:cNvSpPr txBox="1"/>
           <p:nvPr/>
         </p:nvSpPr>
@@ -29985,9 +30741,33 @@
           </a:p>
         </p:txBody>
       </p:sp>
-      <p:sp>
-        <p:nvSpPr>
-          <p:cNvPr id="3" name="TextBox 2"/>
+      <p:pic>
+        <p:nvPicPr>
+          <p:cNvPr id="3" name="college-logo" descr="logo-mark.png"/>
+          <p:cNvPicPr>
+            <a:picLocks noChangeAspect="1"/>
+          </p:cNvPicPr>
+          <p:nvPr/>
+        </p:nvPicPr>
+        <p:blipFill>
+          <a:blip r:embed="rId2"/>
+          <a:stretch>
+            <a:fillRect/>
+          </a:stretch>
+        </p:blipFill>
+        <p:spPr>
+          <a:xfrm>
+            <a:off x="11203333" y="6199632"/>
+            <a:ext cx="275129" cy="310896"/>
+          </a:xfrm>
+          <a:prstGeom prst="rect">
+            <a:avLst/>
+          </a:prstGeom>
+        </p:spPr>
+      </p:pic>
+      <p:sp>
+        <p:nvSpPr>
+          <p:cNvPr id="4" name="TextBox 3"/>
           <p:cNvSpPr txBox="1"/>
           <p:nvPr/>
         </p:nvSpPr>
@@ -30056,13 +30836,13 @@
       </p:sp>
       <p:sp>
         <p:nvSpPr>
-          <p:cNvPr id="4" name="TextBox 3"/>
+          <p:cNvPr id="5" name="TextBox 4"/>
           <p:cNvSpPr txBox="1"/>
           <p:nvPr/>
         </p:nvSpPr>
         <p:spPr>
           <a:xfrm>
-            <a:off x="8826703" y="6272784"/>
+            <a:off x="8240677" y="6272784"/>
             <a:ext cx="2651760" cy="219456"/>
           </a:xfrm>
           <a:prstGeom prst="rect">
@@ -30125,7 +30905,7 @@
       </p:sp>
       <p:sp>
         <p:nvSpPr>
-          <p:cNvPr id="5" name="TextBox 4"/>
+          <p:cNvPr id="6" name="TextBox 5"/>
           <p:cNvSpPr txBox="1"/>
           <p:nvPr/>
         </p:nvSpPr>
@@ -30172,7 +30952,7 @@
       </p:sp>
       <p:sp>
         <p:nvSpPr>
-          <p:cNvPr id="6" name="TextBox 5"/>
+          <p:cNvPr id="7" name="TextBox 6"/>
           <p:cNvSpPr txBox="1"/>
           <p:nvPr/>
         </p:nvSpPr>
@@ -30219,7 +30999,7 @@
       </p:sp>
       <p:sp>
         <p:nvSpPr>
-          <p:cNvPr id="7" name="Rectangle 6"/>
+          <p:cNvPr id="8" name="Rectangle 7"/>
           <p:cNvSpPr/>
           <p:nvPr/>
         </p:nvSpPr>
@@ -30263,7 +31043,7 @@
       </p:sp>
       <p:sp>
         <p:nvSpPr>
-          <p:cNvPr id="8" name="TextBox 7"/>
+          <p:cNvPr id="9" name="TextBox 8"/>
           <p:cNvSpPr txBox="1"/>
           <p:nvPr/>
         </p:nvSpPr>
@@ -30310,7 +31090,7 @@
       </p:sp>
       <p:sp>
         <p:nvSpPr>
-          <p:cNvPr id="9" name="Rectangle 8"/>
+          <p:cNvPr id="10" name="Rectangle 9"/>
           <p:cNvSpPr/>
           <p:nvPr/>
         </p:nvSpPr>
@@ -30354,7 +31134,7 @@
       </p:sp>
       <p:sp>
         <p:nvSpPr>
-          <p:cNvPr id="10" name="Rounded Rectangle 9"/>
+          <p:cNvPr id="11" name="Rounded Rectangle 10"/>
           <p:cNvSpPr/>
           <p:nvPr/>
         </p:nvSpPr>
@@ -30400,7 +31180,7 @@
       </p:sp>
       <p:sp>
         <p:nvSpPr>
-          <p:cNvPr id="11" name="TextBox 10"/>
+          <p:cNvPr id="12" name="TextBox 11"/>
           <p:cNvSpPr txBox="1"/>
           <p:nvPr/>
         </p:nvSpPr>
@@ -30447,7 +31227,7 @@
       </p:sp>
       <p:sp>
         <p:nvSpPr>
-          <p:cNvPr id="12" name="Rounded Rectangle 11"/>
+          <p:cNvPr id="13" name="Rounded Rectangle 12"/>
           <p:cNvSpPr/>
           <p:nvPr/>
         </p:nvSpPr>
@@ -30493,7 +31273,7 @@
       </p:sp>
       <p:sp>
         <p:nvSpPr>
-          <p:cNvPr id="13" name="TextBox 12"/>
+          <p:cNvPr id="14" name="TextBox 13"/>
           <p:cNvSpPr txBox="1"/>
           <p:nvPr/>
         </p:nvSpPr>
@@ -30540,7 +31320,7 @@
       </p:sp>
       <p:sp>
         <p:nvSpPr>
-          <p:cNvPr id="14" name="Rounded Rectangle 13"/>
+          <p:cNvPr id="15" name="Rounded Rectangle 14"/>
           <p:cNvSpPr/>
           <p:nvPr/>
         </p:nvSpPr>
@@ -30586,7 +31366,7 @@
       </p:sp>
       <p:sp>
         <p:nvSpPr>
-          <p:cNvPr id="15" name="TextBox 14"/>
+          <p:cNvPr id="16" name="TextBox 15"/>
           <p:cNvSpPr txBox="1"/>
           <p:nvPr/>
         </p:nvSpPr>
@@ -30633,7 +31413,7 @@
       </p:sp>
       <p:sp>
         <p:nvSpPr>
-          <p:cNvPr id="16" name="Rounded Rectangle 15"/>
+          <p:cNvPr id="17" name="Rounded Rectangle 16"/>
           <p:cNvSpPr/>
           <p:nvPr/>
         </p:nvSpPr>
@@ -30679,7 +31459,7 @@
       </p:sp>
       <p:sp>
         <p:nvSpPr>
-          <p:cNvPr id="17" name="TextBox 16"/>
+          <p:cNvPr id="18" name="TextBox 17"/>
           <p:cNvSpPr txBox="1"/>
           <p:nvPr/>
         </p:nvSpPr>
@@ -30726,7 +31506,7 @@
       </p:sp>
       <p:sp>
         <p:nvSpPr>
-          <p:cNvPr id="18" name="Rounded Rectangle 17"/>
+          <p:cNvPr id="19" name="Rounded Rectangle 18"/>
           <p:cNvSpPr/>
           <p:nvPr/>
         </p:nvSpPr>
@@ -30780,7 +31560,7 @@
       </p:sp>
       <p:sp>
         <p:nvSpPr>
-          <p:cNvPr id="19" name="Rectangle 18"/>
+          <p:cNvPr id="20" name="Rectangle 19"/>
           <p:cNvSpPr/>
           <p:nvPr/>
         </p:nvSpPr>
@@ -30824,7 +31604,7 @@
       </p:sp>
       <p:sp>
         <p:nvSpPr>
-          <p:cNvPr id="20" name="TextBox 19"/>
+          <p:cNvPr id="21" name="TextBox 20"/>
           <p:cNvSpPr txBox="1"/>
           <p:nvPr/>
         </p:nvSpPr>
@@ -30871,7 +31651,7 @@
       </p:sp>
       <p:sp>
         <p:nvSpPr>
-          <p:cNvPr id="21" name="TextBox 20"/>
+          <p:cNvPr id="22" name="TextBox 21"/>
           <p:cNvSpPr txBox="1"/>
           <p:nvPr/>
         </p:nvSpPr>
@@ -30918,7 +31698,7 @@
       </p:sp>
       <p:sp>
         <p:nvSpPr>
-          <p:cNvPr id="22" name="Rounded Rectangle 21"/>
+          <p:cNvPr id="23" name="Rounded Rectangle 22"/>
           <p:cNvSpPr/>
           <p:nvPr/>
         </p:nvSpPr>
@@ -30972,7 +31752,7 @@
       </p:sp>
       <p:sp>
         <p:nvSpPr>
-          <p:cNvPr id="23" name="Rectangle 22"/>
+          <p:cNvPr id="24" name="Rectangle 23"/>
           <p:cNvSpPr/>
           <p:nvPr/>
         </p:nvSpPr>
@@ -31016,7 +31796,7 @@
       </p:sp>
       <p:sp>
         <p:nvSpPr>
-          <p:cNvPr id="24" name="TextBox 23"/>
+          <p:cNvPr id="25" name="TextBox 24"/>
           <p:cNvSpPr txBox="1"/>
           <p:nvPr/>
         </p:nvSpPr>
@@ -31063,7 +31843,7 @@
       </p:sp>
       <p:sp>
         <p:nvSpPr>
-          <p:cNvPr id="25" name="TextBox 24"/>
+          <p:cNvPr id="26" name="TextBox 25"/>
           <p:cNvSpPr txBox="1"/>
           <p:nvPr/>
         </p:nvSpPr>
@@ -31110,7 +31890,7 @@
       </p:sp>
       <p:sp>
         <p:nvSpPr>
-          <p:cNvPr id="26" name="Rounded Rectangle 25"/>
+          <p:cNvPr id="27" name="Rounded Rectangle 26"/>
           <p:cNvSpPr/>
           <p:nvPr/>
         </p:nvSpPr>
@@ -31164,7 +31944,7 @@
       </p:sp>
       <p:sp>
         <p:nvSpPr>
-          <p:cNvPr id="27" name="Rectangle 26"/>
+          <p:cNvPr id="28" name="Rectangle 27"/>
           <p:cNvSpPr/>
           <p:nvPr/>
         </p:nvSpPr>
@@ -31208,7 +31988,7 @@
       </p:sp>
       <p:sp>
         <p:nvSpPr>
-          <p:cNvPr id="28" name="TextBox 27"/>
+          <p:cNvPr id="29" name="TextBox 28"/>
           <p:cNvSpPr txBox="1"/>
           <p:nvPr/>
         </p:nvSpPr>
@@ -31255,7 +32035,7 @@
       </p:sp>
       <p:sp>
         <p:nvSpPr>
-          <p:cNvPr id="29" name="TextBox 28"/>
+          <p:cNvPr id="30" name="TextBox 29"/>
           <p:cNvSpPr txBox="1"/>
           <p:nvPr/>
         </p:nvSpPr>
@@ -31302,7 +32082,7 @@
       </p:sp>
       <p:sp>
         <p:nvSpPr>
-          <p:cNvPr id="30" name="Rounded Rectangle 29"/>
+          <p:cNvPr id="31" name="Rounded Rectangle 30"/>
           <p:cNvSpPr/>
           <p:nvPr/>
         </p:nvSpPr>
@@ -31356,7 +32136,7 @@
       </p:sp>
       <p:sp>
         <p:nvSpPr>
-          <p:cNvPr id="31" name="Rectangle 30"/>
+          <p:cNvPr id="32" name="Rectangle 31"/>
           <p:cNvSpPr/>
           <p:nvPr/>
         </p:nvSpPr>
@@ -31400,7 +32180,7 @@
       </p:sp>
       <p:sp>
         <p:nvSpPr>
-          <p:cNvPr id="32" name="TextBox 31"/>
+          <p:cNvPr id="33" name="TextBox 32"/>
           <p:cNvSpPr txBox="1"/>
           <p:nvPr/>
         </p:nvSpPr>
@@ -31447,7 +32227,7 @@
       </p:sp>
       <p:sp>
         <p:nvSpPr>
-          <p:cNvPr id="33" name="TextBox 32"/>
+          <p:cNvPr id="34" name="TextBox 33"/>
           <p:cNvSpPr txBox="1"/>
           <p:nvPr/>
         </p:nvSpPr>
@@ -31930,6 +32710,76 @@
           </a:p>
         </p:txBody>
       </p:sp>
+      <p:sp>
+        <p:nvSpPr>
+          <p:cNvPr id="11" name="logo-plate"/>
+          <p:cNvSpPr/>
+          <p:nvPr/>
+        </p:nvSpPr>
+        <p:spPr>
+          <a:xfrm>
+            <a:off x="9512190" y="539496"/>
+            <a:ext cx="1993704" cy="987552"/>
+          </a:xfrm>
+          <a:prstGeom prst="roundRect">
+            <a:avLst>
+              <a:gd name="adj" fmla="val 14000"/>
+            </a:avLst>
+          </a:prstGeom>
+          <a:solidFill>
+            <a:srgbClr val="FFFFFF"/>
+          </a:solidFill>
+          <a:ln>
+            <a:noFill/>
+          </a:ln>
+          <a:effectLst/>
+        </p:spPr>
+        <p:style>
+          <a:lnRef idx="1">
+            <a:schemeClr val="accent1"/>
+          </a:lnRef>
+          <a:fillRef idx="3">
+            <a:schemeClr val="accent1"/>
+          </a:fillRef>
+          <a:effectRef idx="2">
+            <a:schemeClr val="accent1"/>
+          </a:effectRef>
+          <a:fontRef idx="minor">
+            <a:schemeClr val="lt1"/>
+          </a:fontRef>
+        </p:style>
+        <p:txBody>
+          <a:bodyPr rtlCol="0" anchor="ctr" wrap="square"/>
+          <a:lstStyle/>
+          <a:p>
+            <a:pPr algn="ctr"/>
+          </a:p>
+        </p:txBody>
+      </p:sp>
+      <p:pic>
+        <p:nvPicPr>
+          <p:cNvPr id="12" name="college-logo" descr="logo-full.png"/>
+          <p:cNvPicPr>
+            <a:picLocks noChangeAspect="1"/>
+          </p:cNvPicPr>
+          <p:nvPr/>
+        </p:nvPicPr>
+        <p:blipFill>
+          <a:blip r:embed="rId2"/>
+          <a:stretch>
+            <a:fillRect/>
+          </a:stretch>
+        </p:blipFill>
+        <p:spPr>
+          <a:xfrm>
+            <a:off x="9631062" y="658368"/>
+            <a:ext cx="1755961" cy="749808"/>
+          </a:xfrm>
+          <a:prstGeom prst="rect">
+            <a:avLst/>
+          </a:prstGeom>
+        </p:spPr>
+      </p:pic>
     </p:spTree>
   </p:cSld>
   <p:clrMapOvr>
@@ -31992,9 +32842,33 @@
           </a:p>
         </p:txBody>
       </p:sp>
-      <p:sp>
-        <p:nvSpPr>
-          <p:cNvPr id="3" name="TextBox 2"/>
+      <p:pic>
+        <p:nvPicPr>
+          <p:cNvPr id="3" name="college-logo" descr="logo-mark.png"/>
+          <p:cNvPicPr>
+            <a:picLocks noChangeAspect="1"/>
+          </p:cNvPicPr>
+          <p:nvPr/>
+        </p:nvPicPr>
+        <p:blipFill>
+          <a:blip r:embed="rId2"/>
+          <a:stretch>
+            <a:fillRect/>
+          </a:stretch>
+        </p:blipFill>
+        <p:spPr>
+          <a:xfrm>
+            <a:off x="11203333" y="6199632"/>
+            <a:ext cx="275129" cy="310896"/>
+          </a:xfrm>
+          <a:prstGeom prst="rect">
+            <a:avLst/>
+          </a:prstGeom>
+        </p:spPr>
+      </p:pic>
+      <p:sp>
+        <p:nvSpPr>
+          <p:cNvPr id="4" name="TextBox 3"/>
           <p:cNvSpPr txBox="1"/>
           <p:nvPr/>
         </p:nvSpPr>
@@ -32063,13 +32937,13 @@
       </p:sp>
       <p:sp>
         <p:nvSpPr>
-          <p:cNvPr id="4" name="TextBox 3"/>
+          <p:cNvPr id="5" name="TextBox 4"/>
           <p:cNvSpPr txBox="1"/>
           <p:nvPr/>
         </p:nvSpPr>
         <p:spPr>
           <a:xfrm>
-            <a:off x="8826703" y="6272784"/>
+            <a:off x="8240677" y="6272784"/>
             <a:ext cx="2651760" cy="219456"/>
           </a:xfrm>
           <a:prstGeom prst="rect">
@@ -32132,7 +33006,7 @@
       </p:sp>
       <p:sp>
         <p:nvSpPr>
-          <p:cNvPr id="5" name="TextBox 4"/>
+          <p:cNvPr id="6" name="TextBox 5"/>
           <p:cNvSpPr txBox="1"/>
           <p:nvPr/>
         </p:nvSpPr>
@@ -32179,7 +33053,7 @@
       </p:sp>
       <p:sp>
         <p:nvSpPr>
-          <p:cNvPr id="6" name="TextBox 5"/>
+          <p:cNvPr id="7" name="TextBox 6"/>
           <p:cNvSpPr txBox="1"/>
           <p:nvPr/>
         </p:nvSpPr>
@@ -32226,7 +33100,7 @@
       </p:sp>
       <p:sp>
         <p:nvSpPr>
-          <p:cNvPr id="7" name="Rectangle 6"/>
+          <p:cNvPr id="8" name="Rectangle 7"/>
           <p:cNvSpPr/>
           <p:nvPr/>
         </p:nvSpPr>
@@ -32270,7 +33144,7 @@
       </p:sp>
       <p:sp>
         <p:nvSpPr>
-          <p:cNvPr id="8" name="Rounded Rectangle 7"/>
+          <p:cNvPr id="9" name="Rounded Rectangle 8"/>
           <p:cNvSpPr/>
           <p:nvPr/>
         </p:nvSpPr>
@@ -32324,7 +33198,7 @@
       </p:sp>
       <p:sp>
         <p:nvSpPr>
-          <p:cNvPr id="9" name="Rectangle 8"/>
+          <p:cNvPr id="10" name="Rectangle 9"/>
           <p:cNvSpPr/>
           <p:nvPr/>
         </p:nvSpPr>
@@ -32368,7 +33242,7 @@
       </p:sp>
       <p:sp>
         <p:nvSpPr>
-          <p:cNvPr id="10" name="TextBox 9"/>
+          <p:cNvPr id="11" name="TextBox 10"/>
           <p:cNvSpPr txBox="1"/>
           <p:nvPr/>
         </p:nvSpPr>
@@ -32415,7 +33289,7 @@
       </p:sp>
       <p:sp>
         <p:nvSpPr>
-          <p:cNvPr id="11" name="TextBox 10"/>
+          <p:cNvPr id="12" name="TextBox 11"/>
           <p:cNvSpPr txBox="1"/>
           <p:nvPr/>
         </p:nvSpPr>
@@ -32462,7 +33336,7 @@
       </p:sp>
       <p:sp>
         <p:nvSpPr>
-          <p:cNvPr id="12" name="Rounded Rectangle 11"/>
+          <p:cNvPr id="13" name="Rounded Rectangle 12"/>
           <p:cNvSpPr/>
           <p:nvPr/>
         </p:nvSpPr>
@@ -32516,7 +33390,7 @@
       </p:sp>
       <p:sp>
         <p:nvSpPr>
-          <p:cNvPr id="13" name="Rectangle 12"/>
+          <p:cNvPr id="14" name="Rectangle 13"/>
           <p:cNvSpPr/>
           <p:nvPr/>
         </p:nvSpPr>
@@ -32560,7 +33434,7 @@
       </p:sp>
       <p:sp>
         <p:nvSpPr>
-          <p:cNvPr id="14" name="TextBox 13"/>
+          <p:cNvPr id="15" name="TextBox 14"/>
           <p:cNvSpPr txBox="1"/>
           <p:nvPr/>
         </p:nvSpPr>
@@ -32607,7 +33481,7 @@
       </p:sp>
       <p:sp>
         <p:nvSpPr>
-          <p:cNvPr id="15" name="TextBox 14"/>
+          <p:cNvPr id="16" name="TextBox 15"/>
           <p:cNvSpPr txBox="1"/>
           <p:nvPr/>
         </p:nvSpPr>
@@ -32654,7 +33528,7 @@
       </p:sp>
       <p:sp>
         <p:nvSpPr>
-          <p:cNvPr id="16" name="Rounded Rectangle 15"/>
+          <p:cNvPr id="17" name="Rounded Rectangle 16"/>
           <p:cNvSpPr/>
           <p:nvPr/>
         </p:nvSpPr>
@@ -32708,7 +33582,7 @@
       </p:sp>
       <p:sp>
         <p:nvSpPr>
-          <p:cNvPr id="17" name="Rectangle 16"/>
+          <p:cNvPr id="18" name="Rectangle 17"/>
           <p:cNvSpPr/>
           <p:nvPr/>
         </p:nvSpPr>
@@ -32752,7 +33626,7 @@
       </p:sp>
       <p:sp>
         <p:nvSpPr>
-          <p:cNvPr id="18" name="TextBox 17"/>
+          <p:cNvPr id="19" name="TextBox 18"/>
           <p:cNvSpPr txBox="1"/>
           <p:nvPr/>
         </p:nvSpPr>
@@ -32799,7 +33673,7 @@
       </p:sp>
       <p:sp>
         <p:nvSpPr>
-          <p:cNvPr id="19" name="TextBox 18"/>
+          <p:cNvPr id="20" name="TextBox 19"/>
           <p:cNvSpPr txBox="1"/>
           <p:nvPr/>
         </p:nvSpPr>
@@ -32846,7 +33720,7 @@
       </p:sp>
       <p:sp>
         <p:nvSpPr>
-          <p:cNvPr id="20" name="Rounded Rectangle 19"/>
+          <p:cNvPr id="21" name="Rounded Rectangle 20"/>
           <p:cNvSpPr/>
           <p:nvPr/>
         </p:nvSpPr>
@@ -32900,7 +33774,7 @@
       </p:sp>
       <p:sp>
         <p:nvSpPr>
-          <p:cNvPr id="21" name="Rectangle 20"/>
+          <p:cNvPr id="22" name="Rectangle 21"/>
           <p:cNvSpPr/>
           <p:nvPr/>
         </p:nvSpPr>
@@ -32944,7 +33818,7 @@
       </p:sp>
       <p:sp>
         <p:nvSpPr>
-          <p:cNvPr id="22" name="TextBox 21"/>
+          <p:cNvPr id="23" name="TextBox 22"/>
           <p:cNvSpPr txBox="1"/>
           <p:nvPr/>
         </p:nvSpPr>
@@ -32991,7 +33865,7 @@
       </p:sp>
       <p:sp>
         <p:nvSpPr>
-          <p:cNvPr id="23" name="TextBox 22"/>
+          <p:cNvPr id="24" name="TextBox 23"/>
           <p:cNvSpPr txBox="1"/>
           <p:nvPr/>
         </p:nvSpPr>
@@ -33038,7 +33912,7 @@
       </p:sp>
       <p:sp>
         <p:nvSpPr>
-          <p:cNvPr id="24" name="Rounded Rectangle 23"/>
+          <p:cNvPr id="25" name="Rounded Rectangle 24"/>
           <p:cNvSpPr/>
           <p:nvPr/>
         </p:nvSpPr>
@@ -33092,7 +33966,7 @@
       </p:sp>
       <p:sp>
         <p:nvSpPr>
-          <p:cNvPr id="25" name="Rectangle 24"/>
+          <p:cNvPr id="26" name="Rectangle 25"/>
           <p:cNvSpPr/>
           <p:nvPr/>
         </p:nvSpPr>
@@ -33136,7 +34010,7 @@
       </p:sp>
       <p:sp>
         <p:nvSpPr>
-          <p:cNvPr id="26" name="TextBox 25"/>
+          <p:cNvPr id="27" name="TextBox 26"/>
           <p:cNvSpPr txBox="1"/>
           <p:nvPr/>
         </p:nvSpPr>
@@ -33183,7 +34057,7 @@
       </p:sp>
       <p:sp>
         <p:nvSpPr>
-          <p:cNvPr id="27" name="TextBox 26"/>
+          <p:cNvPr id="28" name="TextBox 27"/>
           <p:cNvSpPr txBox="1"/>
           <p:nvPr/>
         </p:nvSpPr>
@@ -33230,7 +34104,7 @@
       </p:sp>
       <p:sp>
         <p:nvSpPr>
-          <p:cNvPr id="28" name="Rounded Rectangle 27"/>
+          <p:cNvPr id="29" name="Rounded Rectangle 28"/>
           <p:cNvSpPr/>
           <p:nvPr/>
         </p:nvSpPr>
@@ -33284,7 +34158,7 @@
       </p:sp>
       <p:sp>
         <p:nvSpPr>
-          <p:cNvPr id="29" name="Rectangle 28"/>
+          <p:cNvPr id="30" name="Rectangle 29"/>
           <p:cNvSpPr/>
           <p:nvPr/>
         </p:nvSpPr>
@@ -33328,7 +34202,7 @@
       </p:sp>
       <p:sp>
         <p:nvSpPr>
-          <p:cNvPr id="30" name="TextBox 29"/>
+          <p:cNvPr id="31" name="TextBox 30"/>
           <p:cNvSpPr txBox="1"/>
           <p:nvPr/>
         </p:nvSpPr>
@@ -33375,7 +34249,7 @@
       </p:sp>
       <p:sp>
         <p:nvSpPr>
-          <p:cNvPr id="31" name="TextBox 30"/>
+          <p:cNvPr id="32" name="TextBox 31"/>
           <p:cNvSpPr txBox="1"/>
           <p:nvPr/>
         </p:nvSpPr>
@@ -33482,9 +34356,33 @@
           </a:p>
         </p:txBody>
       </p:sp>
-      <p:sp>
-        <p:nvSpPr>
-          <p:cNvPr id="3" name="TextBox 2"/>
+      <p:pic>
+        <p:nvPicPr>
+          <p:cNvPr id="3" name="college-logo" descr="logo-mark.png"/>
+          <p:cNvPicPr>
+            <a:picLocks noChangeAspect="1"/>
+          </p:cNvPicPr>
+          <p:nvPr/>
+        </p:nvPicPr>
+        <p:blipFill>
+          <a:blip r:embed="rId2"/>
+          <a:stretch>
+            <a:fillRect/>
+          </a:stretch>
+        </p:blipFill>
+        <p:spPr>
+          <a:xfrm>
+            <a:off x="11203333" y="6199632"/>
+            <a:ext cx="275129" cy="310896"/>
+          </a:xfrm>
+          <a:prstGeom prst="rect">
+            <a:avLst/>
+          </a:prstGeom>
+        </p:spPr>
+      </p:pic>
+      <p:sp>
+        <p:nvSpPr>
+          <p:cNvPr id="4" name="TextBox 3"/>
           <p:cNvSpPr txBox="1"/>
           <p:nvPr/>
         </p:nvSpPr>
@@ -33553,13 +34451,13 @@
       </p:sp>
       <p:sp>
         <p:nvSpPr>
-          <p:cNvPr id="4" name="TextBox 3"/>
+          <p:cNvPr id="5" name="TextBox 4"/>
           <p:cNvSpPr txBox="1"/>
           <p:nvPr/>
         </p:nvSpPr>
         <p:spPr>
           <a:xfrm>
-            <a:off x="8826703" y="6272784"/>
+            <a:off x="8240677" y="6272784"/>
             <a:ext cx="2651760" cy="219456"/>
           </a:xfrm>
           <a:prstGeom prst="rect">
@@ -33622,7 +34520,7 @@
       </p:sp>
       <p:sp>
         <p:nvSpPr>
-          <p:cNvPr id="5" name="TextBox 4"/>
+          <p:cNvPr id="6" name="TextBox 5"/>
           <p:cNvSpPr txBox="1"/>
           <p:nvPr/>
         </p:nvSpPr>
@@ -33669,7 +34567,7 @@
       </p:sp>
       <p:sp>
         <p:nvSpPr>
-          <p:cNvPr id="6" name="TextBox 5"/>
+          <p:cNvPr id="7" name="TextBox 6"/>
           <p:cNvSpPr txBox="1"/>
           <p:nvPr/>
         </p:nvSpPr>
@@ -33716,7 +34614,7 @@
       </p:sp>
       <p:sp>
         <p:nvSpPr>
-          <p:cNvPr id="7" name="Rectangle 6"/>
+          <p:cNvPr id="8" name="Rectangle 7"/>
           <p:cNvSpPr/>
           <p:nvPr/>
         </p:nvSpPr>
@@ -33760,7 +34658,7 @@
       </p:sp>
       <p:sp>
         <p:nvSpPr>
-          <p:cNvPr id="8" name="TextBox 7"/>
+          <p:cNvPr id="9" name="TextBox 8"/>
           <p:cNvSpPr txBox="1"/>
           <p:nvPr/>
         </p:nvSpPr>
@@ -33807,7 +34705,7 @@
       </p:sp>
       <p:sp>
         <p:nvSpPr>
-          <p:cNvPr id="9" name="Rounded Rectangle 8"/>
+          <p:cNvPr id="10" name="Rounded Rectangle 9"/>
           <p:cNvSpPr/>
           <p:nvPr/>
         </p:nvSpPr>
@@ -33861,7 +34759,7 @@
       </p:sp>
       <p:sp>
         <p:nvSpPr>
-          <p:cNvPr id="10" name="TextBox 9"/>
+          <p:cNvPr id="11" name="TextBox 10"/>
           <p:cNvSpPr txBox="1"/>
           <p:nvPr/>
         </p:nvSpPr>
@@ -33908,7 +34806,7 @@
       </p:sp>
       <p:sp>
         <p:nvSpPr>
-          <p:cNvPr id="11" name="Rectangle 10"/>
+          <p:cNvPr id="12" name="Rectangle 11"/>
           <p:cNvSpPr/>
           <p:nvPr/>
         </p:nvSpPr>
@@ -33952,7 +34850,7 @@
       </p:sp>
       <p:sp>
         <p:nvSpPr>
-          <p:cNvPr id="12" name="TextBox 11"/>
+          <p:cNvPr id="13" name="TextBox 12"/>
           <p:cNvSpPr txBox="1"/>
           <p:nvPr/>
         </p:nvSpPr>
@@ -33999,7 +34897,7 @@
       </p:sp>
       <p:sp>
         <p:nvSpPr>
-          <p:cNvPr id="13" name="TextBox 12"/>
+          <p:cNvPr id="14" name="TextBox 13"/>
           <p:cNvSpPr txBox="1"/>
           <p:nvPr/>
         </p:nvSpPr>
@@ -34046,7 +34944,7 @@
       </p:sp>
       <p:sp>
         <p:nvSpPr>
-          <p:cNvPr id="14" name="Rounded Rectangle 13"/>
+          <p:cNvPr id="15" name="Rounded Rectangle 14"/>
           <p:cNvSpPr/>
           <p:nvPr/>
         </p:nvSpPr>
@@ -34100,7 +34998,7 @@
       </p:sp>
       <p:sp>
         <p:nvSpPr>
-          <p:cNvPr id="15" name="TextBox 14"/>
+          <p:cNvPr id="16" name="TextBox 15"/>
           <p:cNvSpPr txBox="1"/>
           <p:nvPr/>
         </p:nvSpPr>
@@ -34147,7 +35045,7 @@
       </p:sp>
       <p:sp>
         <p:nvSpPr>
-          <p:cNvPr id="16" name="Rectangle 15"/>
+          <p:cNvPr id="17" name="Rectangle 16"/>
           <p:cNvSpPr/>
           <p:nvPr/>
         </p:nvSpPr>
@@ -34191,7 +35089,7 @@
       </p:sp>
       <p:sp>
         <p:nvSpPr>
-          <p:cNvPr id="17" name="TextBox 16"/>
+          <p:cNvPr id="18" name="TextBox 17"/>
           <p:cNvSpPr txBox="1"/>
           <p:nvPr/>
         </p:nvSpPr>
@@ -34238,7 +35136,7 @@
       </p:sp>
       <p:sp>
         <p:nvSpPr>
-          <p:cNvPr id="18" name="TextBox 17"/>
+          <p:cNvPr id="19" name="TextBox 18"/>
           <p:cNvSpPr txBox="1"/>
           <p:nvPr/>
         </p:nvSpPr>
@@ -34285,7 +35183,7 @@
       </p:sp>
       <p:sp>
         <p:nvSpPr>
-          <p:cNvPr id="19" name="Rounded Rectangle 18"/>
+          <p:cNvPr id="20" name="Rounded Rectangle 19"/>
           <p:cNvSpPr/>
           <p:nvPr/>
         </p:nvSpPr>
@@ -34339,7 +35237,7 @@
       </p:sp>
       <p:sp>
         <p:nvSpPr>
-          <p:cNvPr id="20" name="TextBox 19"/>
+          <p:cNvPr id="21" name="TextBox 20"/>
           <p:cNvSpPr txBox="1"/>
           <p:nvPr/>
         </p:nvSpPr>
@@ -34386,7 +35284,7 @@
       </p:sp>
       <p:sp>
         <p:nvSpPr>
-          <p:cNvPr id="21" name="Rectangle 20"/>
+          <p:cNvPr id="22" name="Rectangle 21"/>
           <p:cNvSpPr/>
           <p:nvPr/>
         </p:nvSpPr>
@@ -34430,7 +35328,7 @@
       </p:sp>
       <p:sp>
         <p:nvSpPr>
-          <p:cNvPr id="22" name="TextBox 21"/>
+          <p:cNvPr id="23" name="TextBox 22"/>
           <p:cNvSpPr txBox="1"/>
           <p:nvPr/>
         </p:nvSpPr>
@@ -34477,7 +35375,7 @@
       </p:sp>
       <p:sp>
         <p:nvSpPr>
-          <p:cNvPr id="23" name="TextBox 22"/>
+          <p:cNvPr id="24" name="TextBox 23"/>
           <p:cNvSpPr txBox="1"/>
           <p:nvPr/>
         </p:nvSpPr>
@@ -34524,7 +35422,7 @@
       </p:sp>
       <p:sp>
         <p:nvSpPr>
-          <p:cNvPr id="24" name="Rounded Rectangle 23"/>
+          <p:cNvPr id="25" name="Rounded Rectangle 24"/>
           <p:cNvSpPr/>
           <p:nvPr/>
         </p:nvSpPr>
@@ -35027,6 +35925,76 @@
           </a:p>
         </p:txBody>
       </p:sp>
+      <p:sp>
+        <p:nvSpPr>
+          <p:cNvPr id="11" name="logo-plate"/>
+          <p:cNvSpPr/>
+          <p:nvPr/>
+        </p:nvSpPr>
+        <p:spPr>
+          <a:xfrm>
+            <a:off x="9512190" y="539496"/>
+            <a:ext cx="1993704" cy="987552"/>
+          </a:xfrm>
+          <a:prstGeom prst="roundRect">
+            <a:avLst>
+              <a:gd name="adj" fmla="val 14000"/>
+            </a:avLst>
+          </a:prstGeom>
+          <a:solidFill>
+            <a:srgbClr val="FFFFFF"/>
+          </a:solidFill>
+          <a:ln>
+            <a:noFill/>
+          </a:ln>
+          <a:effectLst/>
+        </p:spPr>
+        <p:style>
+          <a:lnRef idx="1">
+            <a:schemeClr val="accent1"/>
+          </a:lnRef>
+          <a:fillRef idx="3">
+            <a:schemeClr val="accent1"/>
+          </a:fillRef>
+          <a:effectRef idx="2">
+            <a:schemeClr val="accent1"/>
+          </a:effectRef>
+          <a:fontRef idx="minor">
+            <a:schemeClr val="lt1"/>
+          </a:fontRef>
+        </p:style>
+        <p:txBody>
+          <a:bodyPr rtlCol="0" anchor="ctr" wrap="square"/>
+          <a:lstStyle/>
+          <a:p>
+            <a:pPr algn="ctr"/>
+          </a:p>
+        </p:txBody>
+      </p:sp>
+      <p:pic>
+        <p:nvPicPr>
+          <p:cNvPr id="12" name="college-logo" descr="logo-full.png"/>
+          <p:cNvPicPr>
+            <a:picLocks noChangeAspect="1"/>
+          </p:cNvPicPr>
+          <p:nvPr/>
+        </p:nvPicPr>
+        <p:blipFill>
+          <a:blip r:embed="rId2"/>
+          <a:stretch>
+            <a:fillRect/>
+          </a:stretch>
+        </p:blipFill>
+        <p:spPr>
+          <a:xfrm>
+            <a:off x="9631062" y="658368"/>
+            <a:ext cx="1755961" cy="749808"/>
+          </a:xfrm>
+          <a:prstGeom prst="rect">
+            <a:avLst/>
+          </a:prstGeom>
+        </p:spPr>
+      </p:pic>
     </p:spTree>
   </p:cSld>
   <p:clrMapOvr>

--- a/Unit 3 - Business Application in AI.pptx
+++ b/Unit 3 - Business Application in AI.pptx
@@ -3908,60 +3908,13 @@
       </p:pic>
       <p:sp>
         <p:nvSpPr>
-          <p:cNvPr id="9" name="TextBox 8"/>
-          <p:cNvSpPr txBox="1"/>
-          <p:nvPr/>
-        </p:nvSpPr>
-        <p:spPr>
-          <a:xfrm>
-            <a:off x="932688" y="1170432"/>
-            <a:ext cx="7223760" cy="274320"/>
-          </a:xfrm>
-          <a:prstGeom prst="rect">
-            <a:avLst/>
-          </a:prstGeom>
-          <a:noFill/>
-        </p:spPr>
-        <p:txBody>
-          <a:bodyPr wrap="square" lIns="0" rIns="0" tIns="0" bIns="0" anchor="t">
-            <a:spAutoFit/>
-          </a:bodyPr>
-          <a:lstStyle/>
-          <a:p>
-            <a:pPr algn="l">
-              <a:lnSpc>
-                <a:spcPct val="122000"/>
-              </a:lnSpc>
-              <a:spcBef>
-                <a:spcPts val="0"/>
-              </a:spcBef>
-              <a:spcAft>
-                <a:spcPts val="0"/>
-              </a:spcAft>
-            </a:pPr>
-            <a:r>
-              <a:rPr sz="1050" b="1" i="0" spc="220">
-                <a:solidFill>
-                  <a:srgbClr val="00B3A4"/>
-                </a:solidFill>
-                <a:latin typeface="Segoe UI"/>
-                <a:ea typeface="Segoe UI"/>
-                <a:cs typeface="Segoe UI"/>
-              </a:rPr>
-              <a:t>PGPM · SYSTEMS SPECIALISATION</a:t>
-            </a:r>
-          </a:p>
-        </p:txBody>
-      </p:sp>
-      <p:sp>
-        <p:nvSpPr>
-          <p:cNvPr id="10" name="Rounded Rectangle 9"/>
+          <p:cNvPr id="9" name="Rounded Rectangle 8"/>
           <p:cNvSpPr/>
           <p:nvPr/>
         </p:nvSpPr>
         <p:spPr>
           <a:xfrm>
-            <a:off x="932688" y="1627632"/>
+            <a:off x="932688" y="1572768"/>
             <a:ext cx="1481328" cy="384048"/>
           </a:xfrm>
           <a:prstGeom prst="roundRect">
@@ -4022,7 +3975,7 @@
       </p:sp>
       <p:sp>
         <p:nvSpPr>
-          <p:cNvPr id="11" name="TextBox 10"/>
+          <p:cNvPr id="10" name="TextBox 9"/>
           <p:cNvSpPr txBox="1"/>
           <p:nvPr/>
         </p:nvSpPr>
@@ -4069,7 +4022,7 @@
       </p:sp>
       <p:sp>
         <p:nvSpPr>
-          <p:cNvPr id="12" name="Rectangle 11"/>
+          <p:cNvPr id="11" name="Rectangle 10"/>
           <p:cNvSpPr/>
           <p:nvPr/>
         </p:nvSpPr>
@@ -4113,7 +4066,7 @@
       </p:sp>
       <p:sp>
         <p:nvSpPr>
-          <p:cNvPr id="13" name="TextBox 12"/>
+          <p:cNvPr id="12" name="TextBox 11"/>
           <p:cNvSpPr txBox="1"/>
           <p:nvPr/>
         </p:nvSpPr>
@@ -4160,7 +4113,7 @@
       </p:sp>
       <p:sp>
         <p:nvSpPr>
-          <p:cNvPr id="14" name="Rounded Rectangle 13"/>
+          <p:cNvPr id="13" name="Rounded Rectangle 12"/>
           <p:cNvSpPr/>
           <p:nvPr/>
         </p:nvSpPr>
@@ -4227,7 +4180,7 @@
       </p:sp>
       <p:sp>
         <p:nvSpPr>
-          <p:cNvPr id="15" name="Rounded Rectangle 14"/>
+          <p:cNvPr id="14" name="Rounded Rectangle 13"/>
           <p:cNvSpPr/>
           <p:nvPr/>
         </p:nvSpPr>
@@ -4294,7 +4247,7 @@
       </p:sp>
       <p:sp>
         <p:nvSpPr>
-          <p:cNvPr id="16" name="Rounded Rectangle 15"/>
+          <p:cNvPr id="15" name="Rounded Rectangle 14"/>
           <p:cNvSpPr/>
           <p:nvPr/>
         </p:nvSpPr>
@@ -4361,7 +4314,7 @@
       </p:sp>
       <p:sp>
         <p:nvSpPr>
-          <p:cNvPr id="17" name="Rounded Rectangle 16"/>
+          <p:cNvPr id="16" name="Rounded Rectangle 15"/>
           <p:cNvSpPr/>
           <p:nvPr/>
         </p:nvSpPr>
@@ -4428,7 +4381,7 @@
       </p:sp>
       <p:sp>
         <p:nvSpPr>
-          <p:cNvPr id="18" name="Rounded Rectangle 17"/>
+          <p:cNvPr id="17" name="Rounded Rectangle 16"/>
           <p:cNvSpPr/>
           <p:nvPr/>
         </p:nvSpPr>
@@ -4495,7 +4448,7 @@
       </p:sp>
       <p:sp>
         <p:nvSpPr>
-          <p:cNvPr id="19" name="Rectangle 18"/>
+          <p:cNvPr id="18" name="Rectangle 17"/>
           <p:cNvSpPr/>
           <p:nvPr/>
         </p:nvSpPr>
@@ -4539,7 +4492,7 @@
       </p:sp>
       <p:sp>
         <p:nvSpPr>
-          <p:cNvPr id="20" name="TextBox 19"/>
+          <p:cNvPr id="19" name="TextBox 18"/>
           <p:cNvSpPr txBox="1"/>
           <p:nvPr/>
         </p:nvSpPr>
@@ -4626,53 +4579,6 @@
                 <a:cs typeface="Segoe UI"/>
               </a:rPr>
               <a:t>OSI2509030</a:t>
-            </a:r>
-          </a:p>
-        </p:txBody>
-      </p:sp>
-      <p:sp>
-        <p:nvSpPr>
-          <p:cNvPr id="21" name="TextBox 20"/>
-          <p:cNvSpPr txBox="1"/>
-          <p:nvPr/>
-        </p:nvSpPr>
-        <p:spPr>
-          <a:xfrm>
-            <a:off x="7180783" y="5870448"/>
-            <a:ext cx="4206240" cy="640080"/>
-          </a:xfrm>
-          <a:prstGeom prst="rect">
-            <a:avLst/>
-          </a:prstGeom>
-          <a:noFill/>
-        </p:spPr>
-        <p:txBody>
-          <a:bodyPr wrap="square" lIns="0" rIns="0" tIns="0" bIns="0" anchor="t">
-            <a:spAutoFit/>
-          </a:bodyPr>
-          <a:lstStyle/>
-          <a:p>
-            <a:pPr algn="r">
-              <a:lnSpc>
-                <a:spcPct val="134000"/>
-              </a:lnSpc>
-              <a:spcBef>
-                <a:spcPts val="0"/>
-              </a:spcBef>
-              <a:spcAft>
-                <a:spcPts val="0"/>
-              </a:spcAft>
-            </a:pPr>
-            <a:r>
-              <a:rPr sz="1000" b="1" i="0">
-                <a:solidFill>
-                  <a:srgbClr val="C5D2E8"/>
-                </a:solidFill>
-                <a:latin typeface="Segoe UI"/>
-                <a:ea typeface="Segoe UI"/>
-                <a:cs typeface="Segoe UI"/>
-              </a:rPr>
-              <a:t>Unit 3 of 5</a:t>
             </a:r>
           </a:p>
         </p:txBody>
@@ -4771,8 +4677,77 @@
         </p:nvSpPr>
         <p:spPr>
           <a:xfrm>
-            <a:off x="713232" y="6272784"/>
-            <a:ext cx="5597920" cy="219456"/>
+            <a:off x="8240677" y="6272784"/>
+            <a:ext cx="2651760" cy="219456"/>
+          </a:xfrm>
+          <a:prstGeom prst="rect">
+            <a:avLst/>
+          </a:prstGeom>
+          <a:noFill/>
+        </p:spPr>
+        <p:txBody>
+          <a:bodyPr wrap="square" lIns="0" rIns="0" tIns="0" bIns="0" anchor="t">
+            <a:spAutoFit/>
+          </a:bodyPr>
+          <a:lstStyle/>
+          <a:p>
+            <a:pPr algn="r">
+              <a:lnSpc>
+                <a:spcPct val="122000"/>
+              </a:lnSpc>
+              <a:spcBef>
+                <a:spcPts val="0"/>
+              </a:spcBef>
+              <a:spcAft>
+                <a:spcPts val="0"/>
+              </a:spcAft>
+            </a:pPr>
+            <a:r>
+              <a:rPr sz="900" b="0" i="0">
+                <a:solidFill>
+                  <a:srgbClr val="636E85"/>
+                </a:solidFill>
+                <a:latin typeface="Segoe UI"/>
+                <a:ea typeface="Segoe UI"/>
+                <a:cs typeface="Segoe UI"/>
+              </a:rPr>
+              <a:t>Lingesh K  ·  OSI2509030</a:t>
+            </a:r>
+            <a:r>
+              <a:rPr sz="900" b="0" i="0">
+                <a:solidFill>
+                  <a:srgbClr val="141C2E"/>
+                </a:solidFill>
+                <a:latin typeface="Segoe UI"/>
+                <a:ea typeface="Segoe UI"/>
+                <a:cs typeface="Segoe UI"/>
+              </a:rPr>
+              <a:t>     </a:t>
+            </a:r>
+            <a:r>
+              <a:rPr sz="900" b="1" i="0">
+                <a:solidFill>
+                  <a:srgbClr val="0E1E3C"/>
+                </a:solidFill>
+                <a:latin typeface="Segoe UI"/>
+                <a:ea typeface="Segoe UI"/>
+                <a:cs typeface="Segoe UI"/>
+              </a:rPr>
+              <a:t>10</a:t>
+            </a:r>
+          </a:p>
+        </p:txBody>
+      </p:sp>
+      <p:sp>
+        <p:nvSpPr>
+          <p:cNvPr id="5" name="TextBox 4"/>
+          <p:cNvSpPr txBox="1"/>
+          <p:nvPr/>
+        </p:nvSpPr>
+        <p:spPr>
+          <a:xfrm>
+            <a:off x="713232" y="566928"/>
+            <a:ext cx="10765231" cy="219456"/>
           </a:xfrm>
           <a:prstGeom prst="rect">
             <a:avLst/>
@@ -4797,106 +4772,15 @@
               </a:spcAft>
             </a:pPr>
             <a:r>
-              <a:rPr sz="900" b="1" i="0">
-                <a:solidFill>
-                  <a:srgbClr val="0E1E3C"/>
-                </a:solidFill>
-                <a:latin typeface="Segoe UI"/>
-                <a:ea typeface="Segoe UI"/>
-                <a:cs typeface="Segoe UI"/>
-              </a:rPr>
-              <a:t>Unit 3</a:t>
-            </a:r>
-            <a:r>
-              <a:rPr sz="900" b="0" i="0">
-                <a:solidFill>
-                  <a:srgbClr val="939EB3"/>
-                </a:solidFill>
-                <a:latin typeface="Segoe UI"/>
-                <a:ea typeface="Segoe UI"/>
-                <a:cs typeface="Segoe UI"/>
-              </a:rPr>
-              <a:t>  ·  </a:t>
-            </a:r>
-            <a:r>
-              <a:rPr sz="900" b="0" i="0">
-                <a:solidFill>
-                  <a:srgbClr val="636E85"/>
-                </a:solidFill>
-                <a:latin typeface="Segoe UI"/>
-                <a:ea typeface="Segoe UI"/>
-                <a:cs typeface="Segoe UI"/>
-              </a:rPr>
-              <a:t>Business Application in AI</a:t>
-            </a:r>
-          </a:p>
-        </p:txBody>
-      </p:sp>
-      <p:sp>
-        <p:nvSpPr>
-          <p:cNvPr id="5" name="TextBox 4"/>
-          <p:cNvSpPr txBox="1"/>
-          <p:nvPr/>
-        </p:nvSpPr>
-        <p:spPr>
-          <a:xfrm>
-            <a:off x="8240677" y="6272784"/>
-            <a:ext cx="2651760" cy="219456"/>
-          </a:xfrm>
-          <a:prstGeom prst="rect">
-            <a:avLst/>
-          </a:prstGeom>
-          <a:noFill/>
-        </p:spPr>
-        <p:txBody>
-          <a:bodyPr wrap="square" lIns="0" rIns="0" tIns="0" bIns="0" anchor="t">
-            <a:spAutoFit/>
-          </a:bodyPr>
-          <a:lstStyle/>
-          <a:p>
-            <a:pPr algn="r">
-              <a:lnSpc>
-                <a:spcPct val="122000"/>
-              </a:lnSpc>
-              <a:spcBef>
-                <a:spcPts val="0"/>
-              </a:spcBef>
-              <a:spcAft>
-                <a:spcPts val="0"/>
-              </a:spcAft>
-            </a:pPr>
-            <a:r>
-              <a:rPr sz="900" b="0" i="0">
-                <a:solidFill>
-                  <a:srgbClr val="636E85"/>
-                </a:solidFill>
-                <a:latin typeface="Segoe UI"/>
-                <a:ea typeface="Segoe UI"/>
-                <a:cs typeface="Segoe UI"/>
-              </a:rPr>
-              <a:t>Lingesh K  ·  OSI2509030</a:t>
-            </a:r>
-            <a:r>
-              <a:rPr sz="900" b="0" i="0">
-                <a:solidFill>
-                  <a:srgbClr val="141C2E"/>
-                </a:solidFill>
-                <a:latin typeface="Segoe UI"/>
-                <a:ea typeface="Segoe UI"/>
-                <a:cs typeface="Segoe UI"/>
-              </a:rPr>
-              <a:t>     </a:t>
-            </a:r>
-            <a:r>
-              <a:rPr sz="900" b="1" i="0">
-                <a:solidFill>
-                  <a:srgbClr val="0E1E3C"/>
-                </a:solidFill>
-                <a:latin typeface="Segoe UI"/>
-                <a:ea typeface="Segoe UI"/>
-                <a:cs typeface="Segoe UI"/>
-              </a:rPr>
-              <a:t>10</a:t>
+              <a:rPr sz="950" b="1" i="0" spc="160">
+                <a:solidFill>
+                  <a:srgbClr val="27A06A"/>
+                </a:solidFill>
+                <a:latin typeface="Segoe UI"/>
+                <a:ea typeface="Segoe UI"/>
+                <a:cs typeface="Segoe UI"/>
+              </a:rPr>
+              <a:t>FINANCE</a:t>
             </a:r>
           </a:p>
         </p:txBody>
@@ -4904,53 +4788,6 @@
       <p:sp>
         <p:nvSpPr>
           <p:cNvPr id="6" name="TextBox 5"/>
-          <p:cNvSpPr txBox="1"/>
-          <p:nvPr/>
-        </p:nvSpPr>
-        <p:spPr>
-          <a:xfrm>
-            <a:off x="713232" y="566928"/>
-            <a:ext cx="10765231" cy="219456"/>
-          </a:xfrm>
-          <a:prstGeom prst="rect">
-            <a:avLst/>
-          </a:prstGeom>
-          <a:noFill/>
-        </p:spPr>
-        <p:txBody>
-          <a:bodyPr wrap="square" lIns="0" rIns="0" tIns="0" bIns="0" anchor="t">
-            <a:spAutoFit/>
-          </a:bodyPr>
-          <a:lstStyle/>
-          <a:p>
-            <a:pPr algn="l">
-              <a:lnSpc>
-                <a:spcPct val="122000"/>
-              </a:lnSpc>
-              <a:spcBef>
-                <a:spcPts val="0"/>
-              </a:spcBef>
-              <a:spcAft>
-                <a:spcPts val="0"/>
-              </a:spcAft>
-            </a:pPr>
-            <a:r>
-              <a:rPr sz="950" b="1" i="0" spc="160">
-                <a:solidFill>
-                  <a:srgbClr val="27A06A"/>
-                </a:solidFill>
-                <a:latin typeface="Segoe UI"/>
-                <a:ea typeface="Segoe UI"/>
-                <a:cs typeface="Segoe UI"/>
-              </a:rPr>
-              <a:t>FINANCE</a:t>
-            </a:r>
-          </a:p>
-        </p:txBody>
-      </p:sp>
-      <p:sp>
-        <p:nvSpPr>
-          <p:cNvPr id="7" name="TextBox 6"/>
           <p:cNvSpPr txBox="1"/>
           <p:nvPr/>
         </p:nvSpPr>
@@ -4997,7 +4834,7 @@
       </p:sp>
       <p:sp>
         <p:nvSpPr>
-          <p:cNvPr id="8" name="Rectangle 7"/>
+          <p:cNvPr id="7" name="Rectangle 6"/>
           <p:cNvSpPr/>
           <p:nvPr/>
         </p:nvSpPr>
@@ -5041,7 +4878,7 @@
       </p:sp>
       <p:sp>
         <p:nvSpPr>
-          <p:cNvPr id="9" name="TextBox 8"/>
+          <p:cNvPr id="8" name="TextBox 7"/>
           <p:cNvSpPr txBox="1"/>
           <p:nvPr/>
         </p:nvSpPr>
@@ -5088,7 +4925,7 @@
       </p:sp>
       <p:sp>
         <p:nvSpPr>
-          <p:cNvPr id="10" name="Rounded Rectangle 9"/>
+          <p:cNvPr id="9" name="Rounded Rectangle 8"/>
           <p:cNvSpPr/>
           <p:nvPr/>
         </p:nvSpPr>
@@ -5142,7 +4979,7 @@
       </p:sp>
       <p:sp>
         <p:nvSpPr>
-          <p:cNvPr id="11" name="Rectangle 10"/>
+          <p:cNvPr id="10" name="Rectangle 9"/>
           <p:cNvSpPr/>
           <p:nvPr/>
         </p:nvSpPr>
@@ -5186,7 +5023,7 @@
       </p:sp>
       <p:sp>
         <p:nvSpPr>
-          <p:cNvPr id="12" name="TextBox 11"/>
+          <p:cNvPr id="11" name="TextBox 10"/>
           <p:cNvSpPr txBox="1"/>
           <p:nvPr/>
         </p:nvSpPr>
@@ -5233,7 +5070,7 @@
       </p:sp>
       <p:sp>
         <p:nvSpPr>
-          <p:cNvPr id="13" name="TextBox 12"/>
+          <p:cNvPr id="12" name="TextBox 11"/>
           <p:cNvSpPr txBox="1"/>
           <p:nvPr/>
         </p:nvSpPr>
@@ -5280,7 +5117,7 @@
       </p:sp>
       <p:sp>
         <p:nvSpPr>
-          <p:cNvPr id="14" name="Rounded Rectangle 13"/>
+          <p:cNvPr id="13" name="Rounded Rectangle 12"/>
           <p:cNvSpPr/>
           <p:nvPr/>
         </p:nvSpPr>
@@ -5334,7 +5171,7 @@
       </p:sp>
       <p:sp>
         <p:nvSpPr>
-          <p:cNvPr id="15" name="Rectangle 14"/>
+          <p:cNvPr id="14" name="Rectangle 13"/>
           <p:cNvSpPr/>
           <p:nvPr/>
         </p:nvSpPr>
@@ -5378,7 +5215,7 @@
       </p:sp>
       <p:sp>
         <p:nvSpPr>
-          <p:cNvPr id="16" name="TextBox 15"/>
+          <p:cNvPr id="15" name="TextBox 14"/>
           <p:cNvSpPr txBox="1"/>
           <p:nvPr/>
         </p:nvSpPr>
@@ -5425,7 +5262,7 @@
       </p:sp>
       <p:sp>
         <p:nvSpPr>
-          <p:cNvPr id="17" name="TextBox 16"/>
+          <p:cNvPr id="16" name="TextBox 15"/>
           <p:cNvSpPr txBox="1"/>
           <p:nvPr/>
         </p:nvSpPr>
@@ -5472,7 +5309,7 @@
       </p:sp>
       <p:sp>
         <p:nvSpPr>
-          <p:cNvPr id="18" name="Rounded Rectangle 17"/>
+          <p:cNvPr id="17" name="Rounded Rectangle 16"/>
           <p:cNvSpPr/>
           <p:nvPr/>
         </p:nvSpPr>
@@ -5526,7 +5363,7 @@
       </p:sp>
       <p:sp>
         <p:nvSpPr>
-          <p:cNvPr id="19" name="Rectangle 18"/>
+          <p:cNvPr id="18" name="Rectangle 17"/>
           <p:cNvSpPr/>
           <p:nvPr/>
         </p:nvSpPr>
@@ -5570,7 +5407,7 @@
       </p:sp>
       <p:sp>
         <p:nvSpPr>
-          <p:cNvPr id="20" name="TextBox 19"/>
+          <p:cNvPr id="19" name="TextBox 18"/>
           <p:cNvSpPr txBox="1"/>
           <p:nvPr/>
         </p:nvSpPr>
@@ -5617,7 +5454,7 @@
       </p:sp>
       <p:sp>
         <p:nvSpPr>
-          <p:cNvPr id="21" name="TextBox 20"/>
+          <p:cNvPr id="20" name="TextBox 19"/>
           <p:cNvSpPr txBox="1"/>
           <p:nvPr/>
         </p:nvSpPr>
@@ -5664,7 +5501,7 @@
       </p:sp>
       <p:sp>
         <p:nvSpPr>
-          <p:cNvPr id="22" name="Rounded Rectangle 21"/>
+          <p:cNvPr id="21" name="Rounded Rectangle 20"/>
           <p:cNvSpPr/>
           <p:nvPr/>
         </p:nvSpPr>
@@ -5718,7 +5555,7 @@
       </p:sp>
       <p:sp>
         <p:nvSpPr>
-          <p:cNvPr id="23" name="Rectangle 22"/>
+          <p:cNvPr id="22" name="Rectangle 21"/>
           <p:cNvSpPr/>
           <p:nvPr/>
         </p:nvSpPr>
@@ -5762,7 +5599,7 @@
       </p:sp>
       <p:sp>
         <p:nvSpPr>
-          <p:cNvPr id="24" name="TextBox 23"/>
+          <p:cNvPr id="23" name="TextBox 22"/>
           <p:cNvSpPr txBox="1"/>
           <p:nvPr/>
         </p:nvSpPr>
@@ -5809,7 +5646,7 @@
       </p:sp>
       <p:sp>
         <p:nvSpPr>
-          <p:cNvPr id="25" name="TextBox 24"/>
+          <p:cNvPr id="24" name="TextBox 23"/>
           <p:cNvSpPr txBox="1"/>
           <p:nvPr/>
         </p:nvSpPr>
@@ -5856,7 +5693,7 @@
       </p:sp>
       <p:sp>
         <p:nvSpPr>
-          <p:cNvPr id="26" name="Rounded Rectangle 25"/>
+          <p:cNvPr id="25" name="Rounded Rectangle 24"/>
           <p:cNvSpPr/>
           <p:nvPr/>
         </p:nvSpPr>
@@ -5910,7 +5747,7 @@
       </p:sp>
       <p:sp>
         <p:nvSpPr>
-          <p:cNvPr id="27" name="Rectangle 26"/>
+          <p:cNvPr id="26" name="Rectangle 25"/>
           <p:cNvSpPr/>
           <p:nvPr/>
         </p:nvSpPr>
@@ -5954,7 +5791,7 @@
       </p:sp>
       <p:sp>
         <p:nvSpPr>
-          <p:cNvPr id="28" name="TextBox 27"/>
+          <p:cNvPr id="27" name="TextBox 26"/>
           <p:cNvSpPr txBox="1"/>
           <p:nvPr/>
         </p:nvSpPr>
@@ -6001,7 +5838,7 @@
       </p:sp>
       <p:sp>
         <p:nvSpPr>
-          <p:cNvPr id="29" name="TextBox 28"/>
+          <p:cNvPr id="28" name="TextBox 27"/>
           <p:cNvSpPr txBox="1"/>
           <p:nvPr/>
         </p:nvSpPr>
@@ -6048,7 +5885,7 @@
       </p:sp>
       <p:sp>
         <p:nvSpPr>
-          <p:cNvPr id="30" name="Rounded Rectangle 29"/>
+          <p:cNvPr id="29" name="Rounded Rectangle 28"/>
           <p:cNvSpPr/>
           <p:nvPr/>
         </p:nvSpPr>
@@ -6102,7 +5939,7 @@
       </p:sp>
       <p:sp>
         <p:nvSpPr>
-          <p:cNvPr id="31" name="Rectangle 30"/>
+          <p:cNvPr id="30" name="Rectangle 29"/>
           <p:cNvSpPr/>
           <p:nvPr/>
         </p:nvSpPr>
@@ -6146,7 +5983,7 @@
       </p:sp>
       <p:sp>
         <p:nvSpPr>
-          <p:cNvPr id="32" name="TextBox 31"/>
+          <p:cNvPr id="31" name="TextBox 30"/>
           <p:cNvSpPr txBox="1"/>
           <p:nvPr/>
         </p:nvSpPr>
@@ -6193,7 +6030,7 @@
       </p:sp>
       <p:sp>
         <p:nvSpPr>
-          <p:cNvPr id="33" name="TextBox 32"/>
+          <p:cNvPr id="32" name="TextBox 31"/>
           <p:cNvSpPr txBox="1"/>
           <p:nvPr/>
         </p:nvSpPr>
@@ -6332,8 +6169,77 @@
         </p:nvSpPr>
         <p:spPr>
           <a:xfrm>
-            <a:off x="713232" y="6272784"/>
-            <a:ext cx="5597920" cy="219456"/>
+            <a:off x="8240677" y="6272784"/>
+            <a:ext cx="2651760" cy="219456"/>
+          </a:xfrm>
+          <a:prstGeom prst="rect">
+            <a:avLst/>
+          </a:prstGeom>
+          <a:noFill/>
+        </p:spPr>
+        <p:txBody>
+          <a:bodyPr wrap="square" lIns="0" rIns="0" tIns="0" bIns="0" anchor="t">
+            <a:spAutoFit/>
+          </a:bodyPr>
+          <a:lstStyle/>
+          <a:p>
+            <a:pPr algn="r">
+              <a:lnSpc>
+                <a:spcPct val="122000"/>
+              </a:lnSpc>
+              <a:spcBef>
+                <a:spcPts val="0"/>
+              </a:spcBef>
+              <a:spcAft>
+                <a:spcPts val="0"/>
+              </a:spcAft>
+            </a:pPr>
+            <a:r>
+              <a:rPr sz="900" b="0" i="0">
+                <a:solidFill>
+                  <a:srgbClr val="636E85"/>
+                </a:solidFill>
+                <a:latin typeface="Segoe UI"/>
+                <a:ea typeface="Segoe UI"/>
+                <a:cs typeface="Segoe UI"/>
+              </a:rPr>
+              <a:t>Lingesh K  ·  OSI2509030</a:t>
+            </a:r>
+            <a:r>
+              <a:rPr sz="900" b="0" i="0">
+                <a:solidFill>
+                  <a:srgbClr val="141C2E"/>
+                </a:solidFill>
+                <a:latin typeface="Segoe UI"/>
+                <a:ea typeface="Segoe UI"/>
+                <a:cs typeface="Segoe UI"/>
+              </a:rPr>
+              <a:t>     </a:t>
+            </a:r>
+            <a:r>
+              <a:rPr sz="900" b="1" i="0">
+                <a:solidFill>
+                  <a:srgbClr val="0E1E3C"/>
+                </a:solidFill>
+                <a:latin typeface="Segoe UI"/>
+                <a:ea typeface="Segoe UI"/>
+                <a:cs typeface="Segoe UI"/>
+              </a:rPr>
+              <a:t>11</a:t>
+            </a:r>
+          </a:p>
+        </p:txBody>
+      </p:sp>
+      <p:sp>
+        <p:nvSpPr>
+          <p:cNvPr id="5" name="TextBox 4"/>
+          <p:cNvSpPr txBox="1"/>
+          <p:nvPr/>
+        </p:nvSpPr>
+        <p:spPr>
+          <a:xfrm>
+            <a:off x="713232" y="566928"/>
+            <a:ext cx="10765231" cy="219456"/>
           </a:xfrm>
           <a:prstGeom prst="rect">
             <a:avLst/>
@@ -6358,106 +6264,15 @@
               </a:spcAft>
             </a:pPr>
             <a:r>
-              <a:rPr sz="900" b="1" i="0">
-                <a:solidFill>
-                  <a:srgbClr val="0E1E3C"/>
-                </a:solidFill>
-                <a:latin typeface="Segoe UI"/>
-                <a:ea typeface="Segoe UI"/>
-                <a:cs typeface="Segoe UI"/>
-              </a:rPr>
-              <a:t>Unit 3</a:t>
-            </a:r>
-            <a:r>
-              <a:rPr sz="900" b="0" i="0">
-                <a:solidFill>
-                  <a:srgbClr val="939EB3"/>
-                </a:solidFill>
-                <a:latin typeface="Segoe UI"/>
-                <a:ea typeface="Segoe UI"/>
-                <a:cs typeface="Segoe UI"/>
-              </a:rPr>
-              <a:t>  ·  </a:t>
-            </a:r>
-            <a:r>
-              <a:rPr sz="900" b="0" i="0">
-                <a:solidFill>
-                  <a:srgbClr val="636E85"/>
-                </a:solidFill>
-                <a:latin typeface="Segoe UI"/>
-                <a:ea typeface="Segoe UI"/>
-                <a:cs typeface="Segoe UI"/>
-              </a:rPr>
-              <a:t>Business Application in AI</a:t>
-            </a:r>
-          </a:p>
-        </p:txBody>
-      </p:sp>
-      <p:sp>
-        <p:nvSpPr>
-          <p:cNvPr id="5" name="TextBox 4"/>
-          <p:cNvSpPr txBox="1"/>
-          <p:nvPr/>
-        </p:nvSpPr>
-        <p:spPr>
-          <a:xfrm>
-            <a:off x="8240677" y="6272784"/>
-            <a:ext cx="2651760" cy="219456"/>
-          </a:xfrm>
-          <a:prstGeom prst="rect">
-            <a:avLst/>
-          </a:prstGeom>
-          <a:noFill/>
-        </p:spPr>
-        <p:txBody>
-          <a:bodyPr wrap="square" lIns="0" rIns="0" tIns="0" bIns="0" anchor="t">
-            <a:spAutoFit/>
-          </a:bodyPr>
-          <a:lstStyle/>
-          <a:p>
-            <a:pPr algn="r">
-              <a:lnSpc>
-                <a:spcPct val="122000"/>
-              </a:lnSpc>
-              <a:spcBef>
-                <a:spcPts val="0"/>
-              </a:spcBef>
-              <a:spcAft>
-                <a:spcPts val="0"/>
-              </a:spcAft>
-            </a:pPr>
-            <a:r>
-              <a:rPr sz="900" b="0" i="0">
-                <a:solidFill>
-                  <a:srgbClr val="636E85"/>
-                </a:solidFill>
-                <a:latin typeface="Segoe UI"/>
-                <a:ea typeface="Segoe UI"/>
-                <a:cs typeface="Segoe UI"/>
-              </a:rPr>
-              <a:t>Lingesh K  ·  OSI2509030</a:t>
-            </a:r>
-            <a:r>
-              <a:rPr sz="900" b="0" i="0">
-                <a:solidFill>
-                  <a:srgbClr val="141C2E"/>
-                </a:solidFill>
-                <a:latin typeface="Segoe UI"/>
-                <a:ea typeface="Segoe UI"/>
-                <a:cs typeface="Segoe UI"/>
-              </a:rPr>
-              <a:t>     </a:t>
-            </a:r>
-            <a:r>
-              <a:rPr sz="900" b="1" i="0">
-                <a:solidFill>
-                  <a:srgbClr val="0E1E3C"/>
-                </a:solidFill>
-                <a:latin typeface="Segoe UI"/>
-                <a:ea typeface="Segoe UI"/>
-                <a:cs typeface="Segoe UI"/>
-              </a:rPr>
-              <a:t>11</a:t>
+              <a:rPr sz="950" b="1" i="0" spc="160">
+                <a:solidFill>
+                  <a:srgbClr val="F5A623"/>
+                </a:solidFill>
+                <a:latin typeface="Segoe UI"/>
+                <a:ea typeface="Segoe UI"/>
+                <a:cs typeface="Segoe UI"/>
+              </a:rPr>
+              <a:t>A WORKED EXAMPLE</a:t>
             </a:r>
           </a:p>
         </p:txBody>
@@ -6465,53 +6280,6 @@
       <p:sp>
         <p:nvSpPr>
           <p:cNvPr id="6" name="TextBox 5"/>
-          <p:cNvSpPr txBox="1"/>
-          <p:nvPr/>
-        </p:nvSpPr>
-        <p:spPr>
-          <a:xfrm>
-            <a:off x="713232" y="566928"/>
-            <a:ext cx="10765231" cy="219456"/>
-          </a:xfrm>
-          <a:prstGeom prst="rect">
-            <a:avLst/>
-          </a:prstGeom>
-          <a:noFill/>
-        </p:spPr>
-        <p:txBody>
-          <a:bodyPr wrap="square" lIns="0" rIns="0" tIns="0" bIns="0" anchor="t">
-            <a:spAutoFit/>
-          </a:bodyPr>
-          <a:lstStyle/>
-          <a:p>
-            <a:pPr algn="l">
-              <a:lnSpc>
-                <a:spcPct val="122000"/>
-              </a:lnSpc>
-              <a:spcBef>
-                <a:spcPts val="0"/>
-              </a:spcBef>
-              <a:spcAft>
-                <a:spcPts val="0"/>
-              </a:spcAft>
-            </a:pPr>
-            <a:r>
-              <a:rPr sz="950" b="1" i="0" spc="160">
-                <a:solidFill>
-                  <a:srgbClr val="F5A623"/>
-                </a:solidFill>
-                <a:latin typeface="Segoe UI"/>
-                <a:ea typeface="Segoe UI"/>
-                <a:cs typeface="Segoe UI"/>
-              </a:rPr>
-              <a:t>A WORKED EXAMPLE</a:t>
-            </a:r>
-          </a:p>
-        </p:txBody>
-      </p:sp>
-      <p:sp>
-        <p:nvSpPr>
-          <p:cNvPr id="7" name="TextBox 6"/>
           <p:cNvSpPr txBox="1"/>
           <p:nvPr/>
         </p:nvSpPr>
@@ -6558,7 +6326,7 @@
       </p:sp>
       <p:sp>
         <p:nvSpPr>
-          <p:cNvPr id="8" name="Rectangle 7"/>
+          <p:cNvPr id="7" name="Rectangle 6"/>
           <p:cNvSpPr/>
           <p:nvPr/>
         </p:nvSpPr>
@@ -6602,7 +6370,7 @@
       </p:sp>
       <p:sp>
         <p:nvSpPr>
-          <p:cNvPr id="9" name="Rounded Rectangle 8"/>
+          <p:cNvPr id="8" name="Rounded Rectangle 7"/>
           <p:cNvSpPr/>
           <p:nvPr/>
         </p:nvSpPr>
@@ -6656,7 +6424,7 @@
       </p:sp>
       <p:sp>
         <p:nvSpPr>
-          <p:cNvPr id="10" name="Rectangle 9"/>
+          <p:cNvPr id="9" name="Rectangle 8"/>
           <p:cNvSpPr/>
           <p:nvPr/>
         </p:nvSpPr>
@@ -6700,7 +6468,7 @@
       </p:sp>
       <p:sp>
         <p:nvSpPr>
-          <p:cNvPr id="11" name="Rounded Rectangle 10"/>
+          <p:cNvPr id="10" name="Rounded Rectangle 9"/>
           <p:cNvSpPr/>
           <p:nvPr/>
         </p:nvSpPr>
@@ -6767,7 +6535,7 @@
       </p:sp>
       <p:sp>
         <p:nvSpPr>
-          <p:cNvPr id="12" name="TextBox 11"/>
+          <p:cNvPr id="11" name="TextBox 10"/>
           <p:cNvSpPr txBox="1"/>
           <p:nvPr/>
         </p:nvSpPr>
@@ -6814,7 +6582,7 @@
       </p:sp>
       <p:sp>
         <p:nvSpPr>
-          <p:cNvPr id="13" name="Rectangle 12"/>
+          <p:cNvPr id="12" name="Rectangle 11"/>
           <p:cNvSpPr/>
           <p:nvPr/>
         </p:nvSpPr>
@@ -6858,7 +6626,7 @@
       </p:sp>
       <p:sp>
         <p:nvSpPr>
-          <p:cNvPr id="14" name="Rounded Rectangle 13"/>
+          <p:cNvPr id="13" name="Rounded Rectangle 12"/>
           <p:cNvSpPr/>
           <p:nvPr/>
         </p:nvSpPr>
@@ -6904,7 +6672,7 @@
       </p:sp>
       <p:sp>
         <p:nvSpPr>
-          <p:cNvPr id="15" name="TextBox 14"/>
+          <p:cNvPr id="14" name="TextBox 13"/>
           <p:cNvSpPr txBox="1"/>
           <p:nvPr/>
         </p:nvSpPr>
@@ -6951,7 +6719,7 @@
       </p:sp>
       <p:sp>
         <p:nvSpPr>
-          <p:cNvPr id="16" name="Rounded Rectangle 15"/>
+          <p:cNvPr id="15" name="Rounded Rectangle 14"/>
           <p:cNvSpPr/>
           <p:nvPr/>
         </p:nvSpPr>
@@ -6997,7 +6765,7 @@
       </p:sp>
       <p:sp>
         <p:nvSpPr>
-          <p:cNvPr id="17" name="TextBox 16"/>
+          <p:cNvPr id="16" name="TextBox 15"/>
           <p:cNvSpPr txBox="1"/>
           <p:nvPr/>
         </p:nvSpPr>
@@ -7044,7 +6812,7 @@
       </p:sp>
       <p:sp>
         <p:nvSpPr>
-          <p:cNvPr id="18" name="Rounded Rectangle 17"/>
+          <p:cNvPr id="17" name="Rounded Rectangle 16"/>
           <p:cNvSpPr/>
           <p:nvPr/>
         </p:nvSpPr>
@@ -7090,7 +6858,7 @@
       </p:sp>
       <p:sp>
         <p:nvSpPr>
-          <p:cNvPr id="19" name="TextBox 18"/>
+          <p:cNvPr id="18" name="TextBox 17"/>
           <p:cNvSpPr txBox="1"/>
           <p:nvPr/>
         </p:nvSpPr>
@@ -7137,7 +6905,7 @@
       </p:sp>
       <p:sp>
         <p:nvSpPr>
-          <p:cNvPr id="20" name="Rounded Rectangle 19"/>
+          <p:cNvPr id="19" name="Rounded Rectangle 18"/>
           <p:cNvSpPr/>
           <p:nvPr/>
         </p:nvSpPr>
@@ -7183,7 +6951,7 @@
       </p:sp>
       <p:sp>
         <p:nvSpPr>
-          <p:cNvPr id="21" name="TextBox 20"/>
+          <p:cNvPr id="20" name="TextBox 19"/>
           <p:cNvSpPr txBox="1"/>
           <p:nvPr/>
         </p:nvSpPr>
@@ -7230,7 +6998,7 @@
       </p:sp>
       <p:sp>
         <p:nvSpPr>
-          <p:cNvPr id="22" name="Rounded Rectangle 21"/>
+          <p:cNvPr id="21" name="Rounded Rectangle 20"/>
           <p:cNvSpPr/>
           <p:nvPr/>
         </p:nvSpPr>
@@ -7276,7 +7044,7 @@
       </p:sp>
       <p:sp>
         <p:nvSpPr>
-          <p:cNvPr id="23" name="TextBox 22"/>
+          <p:cNvPr id="22" name="TextBox 21"/>
           <p:cNvSpPr txBox="1"/>
           <p:nvPr/>
         </p:nvSpPr>
@@ -7323,7 +7091,7 @@
       </p:sp>
       <p:sp>
         <p:nvSpPr>
-          <p:cNvPr id="24" name="Rounded Rectangle 23"/>
+          <p:cNvPr id="23" name="Rounded Rectangle 22"/>
           <p:cNvSpPr/>
           <p:nvPr/>
         </p:nvSpPr>
@@ -7377,7 +7145,7 @@
       </p:sp>
       <p:sp>
         <p:nvSpPr>
-          <p:cNvPr id="25" name="Rectangle 24"/>
+          <p:cNvPr id="24" name="Rectangle 23"/>
           <p:cNvSpPr/>
           <p:nvPr/>
         </p:nvSpPr>
@@ -7421,7 +7189,7 @@
       </p:sp>
       <p:sp>
         <p:nvSpPr>
-          <p:cNvPr id="26" name="Rounded Rectangle 25"/>
+          <p:cNvPr id="25" name="Rounded Rectangle 24"/>
           <p:cNvSpPr/>
           <p:nvPr/>
         </p:nvSpPr>
@@ -7488,7 +7256,7 @@
       </p:sp>
       <p:sp>
         <p:nvSpPr>
-          <p:cNvPr id="27" name="TextBox 26"/>
+          <p:cNvPr id="26" name="TextBox 25"/>
           <p:cNvSpPr txBox="1"/>
           <p:nvPr/>
         </p:nvSpPr>
@@ -7535,7 +7303,7 @@
       </p:sp>
       <p:sp>
         <p:nvSpPr>
-          <p:cNvPr id="28" name="Rectangle 27"/>
+          <p:cNvPr id="27" name="Rectangle 26"/>
           <p:cNvSpPr/>
           <p:nvPr/>
         </p:nvSpPr>
@@ -7579,7 +7347,7 @@
       </p:sp>
       <p:sp>
         <p:nvSpPr>
-          <p:cNvPr id="29" name="Rounded Rectangle 28"/>
+          <p:cNvPr id="28" name="Rounded Rectangle 27"/>
           <p:cNvSpPr/>
           <p:nvPr/>
         </p:nvSpPr>
@@ -7625,7 +7393,7 @@
       </p:sp>
       <p:sp>
         <p:nvSpPr>
-          <p:cNvPr id="30" name="TextBox 29"/>
+          <p:cNvPr id="29" name="TextBox 28"/>
           <p:cNvSpPr txBox="1"/>
           <p:nvPr/>
         </p:nvSpPr>
@@ -7672,7 +7440,7 @@
       </p:sp>
       <p:sp>
         <p:nvSpPr>
-          <p:cNvPr id="31" name="Rounded Rectangle 30"/>
+          <p:cNvPr id="30" name="Rounded Rectangle 29"/>
           <p:cNvSpPr/>
           <p:nvPr/>
         </p:nvSpPr>
@@ -7718,7 +7486,7 @@
       </p:sp>
       <p:sp>
         <p:nvSpPr>
-          <p:cNvPr id="32" name="TextBox 31"/>
+          <p:cNvPr id="31" name="TextBox 30"/>
           <p:cNvSpPr txBox="1"/>
           <p:nvPr/>
         </p:nvSpPr>
@@ -7765,7 +7533,7 @@
       </p:sp>
       <p:sp>
         <p:nvSpPr>
-          <p:cNvPr id="33" name="Rounded Rectangle 32"/>
+          <p:cNvPr id="32" name="Rounded Rectangle 31"/>
           <p:cNvSpPr/>
           <p:nvPr/>
         </p:nvSpPr>
@@ -7811,7 +7579,7 @@
       </p:sp>
       <p:sp>
         <p:nvSpPr>
-          <p:cNvPr id="34" name="TextBox 33"/>
+          <p:cNvPr id="33" name="TextBox 32"/>
           <p:cNvSpPr txBox="1"/>
           <p:nvPr/>
         </p:nvSpPr>
@@ -7858,7 +7626,7 @@
       </p:sp>
       <p:sp>
         <p:nvSpPr>
-          <p:cNvPr id="35" name="Rounded Rectangle 34"/>
+          <p:cNvPr id="34" name="Rounded Rectangle 33"/>
           <p:cNvSpPr/>
           <p:nvPr/>
         </p:nvSpPr>
@@ -7904,7 +7672,7 @@
       </p:sp>
       <p:sp>
         <p:nvSpPr>
-          <p:cNvPr id="36" name="TextBox 35"/>
+          <p:cNvPr id="35" name="TextBox 34"/>
           <p:cNvSpPr txBox="1"/>
           <p:nvPr/>
         </p:nvSpPr>
@@ -7951,7 +7719,7 @@
       </p:sp>
       <p:sp>
         <p:nvSpPr>
-          <p:cNvPr id="37" name="Rounded Rectangle 36"/>
+          <p:cNvPr id="36" name="Rounded Rectangle 35"/>
           <p:cNvSpPr/>
           <p:nvPr/>
         </p:nvSpPr>
@@ -7997,7 +7765,7 @@
       </p:sp>
       <p:sp>
         <p:nvSpPr>
-          <p:cNvPr id="38" name="TextBox 37"/>
+          <p:cNvPr id="37" name="TextBox 36"/>
           <p:cNvSpPr txBox="1"/>
           <p:nvPr/>
         </p:nvSpPr>
@@ -8044,7 +7812,7 @@
       </p:sp>
       <p:sp>
         <p:nvSpPr>
-          <p:cNvPr id="39" name="Rounded Rectangle 38"/>
+          <p:cNvPr id="38" name="Rounded Rectangle 37"/>
           <p:cNvSpPr/>
           <p:nvPr/>
         </p:nvSpPr>
@@ -8513,54 +8281,7 @@
       </p:sp>
       <p:sp>
         <p:nvSpPr>
-          <p:cNvPr id="10" name="TextBox 9"/>
-          <p:cNvSpPr txBox="1"/>
-          <p:nvPr/>
-        </p:nvSpPr>
-        <p:spPr>
-          <a:xfrm>
-            <a:off x="987552" y="5943600"/>
-            <a:ext cx="6400800" cy="274320"/>
-          </a:xfrm>
-          <a:prstGeom prst="rect">
-            <a:avLst/>
-          </a:prstGeom>
-          <a:noFill/>
-        </p:spPr>
-        <p:txBody>
-          <a:bodyPr wrap="square" lIns="0" rIns="0" tIns="0" bIns="0" anchor="t">
-            <a:spAutoFit/>
-          </a:bodyPr>
-          <a:lstStyle/>
-          <a:p>
-            <a:pPr algn="l">
-              <a:lnSpc>
-                <a:spcPct val="122000"/>
-              </a:lnSpc>
-              <a:spcBef>
-                <a:spcPts val="0"/>
-              </a:spcBef>
-              <a:spcAft>
-                <a:spcPts val="0"/>
-              </a:spcAft>
-            </a:pPr>
-            <a:r>
-              <a:rPr sz="900" b="1" i="0" spc="160">
-                <a:solidFill>
-                  <a:srgbClr val="6B7FA6"/>
-                </a:solidFill>
-                <a:latin typeface="Segoe UI"/>
-                <a:ea typeface="Segoe UI"/>
-                <a:cs typeface="Segoe UI"/>
-              </a:rPr>
-              <a:t>UNIT 3  ·  BUSINESS APPLICATION IN AI</a:t>
-            </a:r>
-          </a:p>
-        </p:txBody>
-      </p:sp>
-      <p:sp>
-        <p:nvSpPr>
-          <p:cNvPr id="11" name="logo-plate"/>
+          <p:cNvPr id="10" name="logo-plate"/>
           <p:cNvSpPr/>
           <p:nvPr/>
         </p:nvSpPr>
@@ -8606,7 +8327,7 @@
       </p:sp>
       <p:pic>
         <p:nvPicPr>
-          <p:cNvPr id="12" name="college-logo" descr="logo-full.png"/>
+          <p:cNvPr id="11" name="college-logo" descr="logo-full.png"/>
           <p:cNvPicPr>
             <a:picLocks noChangeAspect="1"/>
           </p:cNvPicPr>
@@ -8722,8 +8443,77 @@
         </p:nvSpPr>
         <p:spPr>
           <a:xfrm>
-            <a:off x="713232" y="6272784"/>
-            <a:ext cx="5597920" cy="219456"/>
+            <a:off x="8240677" y="6272784"/>
+            <a:ext cx="2651760" cy="219456"/>
+          </a:xfrm>
+          <a:prstGeom prst="rect">
+            <a:avLst/>
+          </a:prstGeom>
+          <a:noFill/>
+        </p:spPr>
+        <p:txBody>
+          <a:bodyPr wrap="square" lIns="0" rIns="0" tIns="0" bIns="0" anchor="t">
+            <a:spAutoFit/>
+          </a:bodyPr>
+          <a:lstStyle/>
+          <a:p>
+            <a:pPr algn="r">
+              <a:lnSpc>
+                <a:spcPct val="122000"/>
+              </a:lnSpc>
+              <a:spcBef>
+                <a:spcPts val="0"/>
+              </a:spcBef>
+              <a:spcAft>
+                <a:spcPts val="0"/>
+              </a:spcAft>
+            </a:pPr>
+            <a:r>
+              <a:rPr sz="900" b="0" i="0">
+                <a:solidFill>
+                  <a:srgbClr val="636E85"/>
+                </a:solidFill>
+                <a:latin typeface="Segoe UI"/>
+                <a:ea typeface="Segoe UI"/>
+                <a:cs typeface="Segoe UI"/>
+              </a:rPr>
+              <a:t>Lingesh K  ·  OSI2509030</a:t>
+            </a:r>
+            <a:r>
+              <a:rPr sz="900" b="0" i="0">
+                <a:solidFill>
+                  <a:srgbClr val="141C2E"/>
+                </a:solidFill>
+                <a:latin typeface="Segoe UI"/>
+                <a:ea typeface="Segoe UI"/>
+                <a:cs typeface="Segoe UI"/>
+              </a:rPr>
+              <a:t>     </a:t>
+            </a:r>
+            <a:r>
+              <a:rPr sz="900" b="1" i="0">
+                <a:solidFill>
+                  <a:srgbClr val="0E1E3C"/>
+                </a:solidFill>
+                <a:latin typeface="Segoe UI"/>
+                <a:ea typeface="Segoe UI"/>
+                <a:cs typeface="Segoe UI"/>
+              </a:rPr>
+              <a:t>13</a:t>
+            </a:r>
+          </a:p>
+        </p:txBody>
+      </p:sp>
+      <p:sp>
+        <p:nvSpPr>
+          <p:cNvPr id="5" name="TextBox 4"/>
+          <p:cNvSpPr txBox="1"/>
+          <p:nvPr/>
+        </p:nvSpPr>
+        <p:spPr>
+          <a:xfrm>
+            <a:off x="713232" y="566928"/>
+            <a:ext cx="10765231" cy="219456"/>
           </a:xfrm>
           <a:prstGeom prst="rect">
             <a:avLst/>
@@ -8748,106 +8538,15 @@
               </a:spcAft>
             </a:pPr>
             <a:r>
-              <a:rPr sz="900" b="1" i="0">
-                <a:solidFill>
-                  <a:srgbClr val="0E1E3C"/>
-                </a:solidFill>
-                <a:latin typeface="Segoe UI"/>
-                <a:ea typeface="Segoe UI"/>
-                <a:cs typeface="Segoe UI"/>
-              </a:rPr>
-              <a:t>Unit 3</a:t>
-            </a:r>
-            <a:r>
-              <a:rPr sz="900" b="0" i="0">
-                <a:solidFill>
-                  <a:srgbClr val="939EB3"/>
-                </a:solidFill>
-                <a:latin typeface="Segoe UI"/>
-                <a:ea typeface="Segoe UI"/>
-                <a:cs typeface="Segoe UI"/>
-              </a:rPr>
-              <a:t>  ·  </a:t>
-            </a:r>
-            <a:r>
-              <a:rPr sz="900" b="0" i="0">
-                <a:solidFill>
-                  <a:srgbClr val="636E85"/>
-                </a:solidFill>
-                <a:latin typeface="Segoe UI"/>
-                <a:ea typeface="Segoe UI"/>
-                <a:cs typeface="Segoe UI"/>
-              </a:rPr>
-              <a:t>Business Application in AI</a:t>
-            </a:r>
-          </a:p>
-        </p:txBody>
-      </p:sp>
-      <p:sp>
-        <p:nvSpPr>
-          <p:cNvPr id="5" name="TextBox 4"/>
-          <p:cNvSpPr txBox="1"/>
-          <p:nvPr/>
-        </p:nvSpPr>
-        <p:spPr>
-          <a:xfrm>
-            <a:off x="8240677" y="6272784"/>
-            <a:ext cx="2651760" cy="219456"/>
-          </a:xfrm>
-          <a:prstGeom prst="rect">
-            <a:avLst/>
-          </a:prstGeom>
-          <a:noFill/>
-        </p:spPr>
-        <p:txBody>
-          <a:bodyPr wrap="square" lIns="0" rIns="0" tIns="0" bIns="0" anchor="t">
-            <a:spAutoFit/>
-          </a:bodyPr>
-          <a:lstStyle/>
-          <a:p>
-            <a:pPr algn="r">
-              <a:lnSpc>
-                <a:spcPct val="122000"/>
-              </a:lnSpc>
-              <a:spcBef>
-                <a:spcPts val="0"/>
-              </a:spcBef>
-              <a:spcAft>
-                <a:spcPts val="0"/>
-              </a:spcAft>
-            </a:pPr>
-            <a:r>
-              <a:rPr sz="900" b="0" i="0">
-                <a:solidFill>
-                  <a:srgbClr val="636E85"/>
-                </a:solidFill>
-                <a:latin typeface="Segoe UI"/>
-                <a:ea typeface="Segoe UI"/>
-                <a:cs typeface="Segoe UI"/>
-              </a:rPr>
-              <a:t>Lingesh K  ·  OSI2509030</a:t>
-            </a:r>
-            <a:r>
-              <a:rPr sz="900" b="0" i="0">
-                <a:solidFill>
-                  <a:srgbClr val="141C2E"/>
-                </a:solidFill>
-                <a:latin typeface="Segoe UI"/>
-                <a:ea typeface="Segoe UI"/>
-                <a:cs typeface="Segoe UI"/>
-              </a:rPr>
-              <a:t>     </a:t>
-            </a:r>
-            <a:r>
-              <a:rPr sz="900" b="1" i="0">
-                <a:solidFill>
-                  <a:srgbClr val="0E1E3C"/>
-                </a:solidFill>
-                <a:latin typeface="Segoe UI"/>
-                <a:ea typeface="Segoe UI"/>
-                <a:cs typeface="Segoe UI"/>
-              </a:rPr>
-              <a:t>13</a:t>
+              <a:rPr sz="950" b="1" i="0" spc="160">
+                <a:solidFill>
+                  <a:srgbClr val="745CE0"/>
+                </a:solidFill>
+                <a:latin typeface="Segoe UI"/>
+                <a:ea typeface="Segoe UI"/>
+                <a:cs typeface="Segoe UI"/>
+              </a:rPr>
+              <a:t>HUMAN RESOURCES</a:t>
             </a:r>
           </a:p>
         </p:txBody>
@@ -8855,53 +8554,6 @@
       <p:sp>
         <p:nvSpPr>
           <p:cNvPr id="6" name="TextBox 5"/>
-          <p:cNvSpPr txBox="1"/>
-          <p:nvPr/>
-        </p:nvSpPr>
-        <p:spPr>
-          <a:xfrm>
-            <a:off x="713232" y="566928"/>
-            <a:ext cx="10765231" cy="219456"/>
-          </a:xfrm>
-          <a:prstGeom prst="rect">
-            <a:avLst/>
-          </a:prstGeom>
-          <a:noFill/>
-        </p:spPr>
-        <p:txBody>
-          <a:bodyPr wrap="square" lIns="0" rIns="0" tIns="0" bIns="0" anchor="t">
-            <a:spAutoFit/>
-          </a:bodyPr>
-          <a:lstStyle/>
-          <a:p>
-            <a:pPr algn="l">
-              <a:lnSpc>
-                <a:spcPct val="122000"/>
-              </a:lnSpc>
-              <a:spcBef>
-                <a:spcPts val="0"/>
-              </a:spcBef>
-              <a:spcAft>
-                <a:spcPts val="0"/>
-              </a:spcAft>
-            </a:pPr>
-            <a:r>
-              <a:rPr sz="950" b="1" i="0" spc="160">
-                <a:solidFill>
-                  <a:srgbClr val="745CE0"/>
-                </a:solidFill>
-                <a:latin typeface="Segoe UI"/>
-                <a:ea typeface="Segoe UI"/>
-                <a:cs typeface="Segoe UI"/>
-              </a:rPr>
-              <a:t>HUMAN RESOURCES</a:t>
-            </a:r>
-          </a:p>
-        </p:txBody>
-      </p:sp>
-      <p:sp>
-        <p:nvSpPr>
-          <p:cNvPr id="7" name="TextBox 6"/>
           <p:cNvSpPr txBox="1"/>
           <p:nvPr/>
         </p:nvSpPr>
@@ -8948,7 +8600,7 @@
       </p:sp>
       <p:sp>
         <p:nvSpPr>
-          <p:cNvPr id="8" name="Rectangle 7"/>
+          <p:cNvPr id="7" name="Rectangle 6"/>
           <p:cNvSpPr/>
           <p:nvPr/>
         </p:nvSpPr>
@@ -8992,7 +8644,7 @@
       </p:sp>
       <p:sp>
         <p:nvSpPr>
-          <p:cNvPr id="9" name="Rounded Rectangle 8"/>
+          <p:cNvPr id="8" name="Rounded Rectangle 7"/>
           <p:cNvSpPr/>
           <p:nvPr/>
         </p:nvSpPr>
@@ -9046,7 +8698,7 @@
       </p:sp>
       <p:sp>
         <p:nvSpPr>
-          <p:cNvPr id="10" name="Rectangle 9"/>
+          <p:cNvPr id="9" name="Rectangle 8"/>
           <p:cNvSpPr/>
           <p:nvPr/>
         </p:nvSpPr>
@@ -9090,7 +8742,7 @@
       </p:sp>
       <p:sp>
         <p:nvSpPr>
-          <p:cNvPr id="11" name="TextBox 10"/>
+          <p:cNvPr id="10" name="TextBox 9"/>
           <p:cNvSpPr txBox="1"/>
           <p:nvPr/>
         </p:nvSpPr>
@@ -9137,7 +8789,7 @@
       </p:sp>
       <p:sp>
         <p:nvSpPr>
-          <p:cNvPr id="12" name="TextBox 11"/>
+          <p:cNvPr id="11" name="TextBox 10"/>
           <p:cNvSpPr txBox="1"/>
           <p:nvPr/>
         </p:nvSpPr>
@@ -9184,7 +8836,7 @@
       </p:sp>
       <p:sp>
         <p:nvSpPr>
-          <p:cNvPr id="13" name="Rounded Rectangle 12"/>
+          <p:cNvPr id="12" name="Rounded Rectangle 11"/>
           <p:cNvSpPr/>
           <p:nvPr/>
         </p:nvSpPr>
@@ -9238,7 +8890,7 @@
       </p:sp>
       <p:sp>
         <p:nvSpPr>
-          <p:cNvPr id="14" name="Rectangle 13"/>
+          <p:cNvPr id="13" name="Rectangle 12"/>
           <p:cNvSpPr/>
           <p:nvPr/>
         </p:nvSpPr>
@@ -9282,7 +8934,7 @@
       </p:sp>
       <p:sp>
         <p:nvSpPr>
-          <p:cNvPr id="15" name="TextBox 14"/>
+          <p:cNvPr id="14" name="TextBox 13"/>
           <p:cNvSpPr txBox="1"/>
           <p:nvPr/>
         </p:nvSpPr>
@@ -9329,7 +8981,7 @@
       </p:sp>
       <p:sp>
         <p:nvSpPr>
-          <p:cNvPr id="16" name="TextBox 15"/>
+          <p:cNvPr id="15" name="TextBox 14"/>
           <p:cNvSpPr txBox="1"/>
           <p:nvPr/>
         </p:nvSpPr>
@@ -9376,7 +9028,7 @@
       </p:sp>
       <p:sp>
         <p:nvSpPr>
-          <p:cNvPr id="17" name="Rounded Rectangle 16"/>
+          <p:cNvPr id="16" name="Rounded Rectangle 15"/>
           <p:cNvSpPr/>
           <p:nvPr/>
         </p:nvSpPr>
@@ -9430,7 +9082,7 @@
       </p:sp>
       <p:sp>
         <p:nvSpPr>
-          <p:cNvPr id="18" name="Rectangle 17"/>
+          <p:cNvPr id="17" name="Rectangle 16"/>
           <p:cNvSpPr/>
           <p:nvPr/>
         </p:nvSpPr>
@@ -9474,7 +9126,7 @@
       </p:sp>
       <p:sp>
         <p:nvSpPr>
-          <p:cNvPr id="19" name="TextBox 18"/>
+          <p:cNvPr id="18" name="TextBox 17"/>
           <p:cNvSpPr txBox="1"/>
           <p:nvPr/>
         </p:nvSpPr>
@@ -9521,7 +9173,7 @@
       </p:sp>
       <p:sp>
         <p:nvSpPr>
-          <p:cNvPr id="20" name="TextBox 19"/>
+          <p:cNvPr id="19" name="TextBox 18"/>
           <p:cNvSpPr txBox="1"/>
           <p:nvPr/>
         </p:nvSpPr>
@@ -9568,7 +9220,7 @@
       </p:sp>
       <p:sp>
         <p:nvSpPr>
-          <p:cNvPr id="21" name="Rounded Rectangle 20"/>
+          <p:cNvPr id="20" name="Rounded Rectangle 19"/>
           <p:cNvSpPr/>
           <p:nvPr/>
         </p:nvSpPr>
@@ -9622,7 +9274,7 @@
       </p:sp>
       <p:sp>
         <p:nvSpPr>
-          <p:cNvPr id="22" name="Rectangle 21"/>
+          <p:cNvPr id="21" name="Rectangle 20"/>
           <p:cNvSpPr/>
           <p:nvPr/>
         </p:nvSpPr>
@@ -9666,7 +9318,7 @@
       </p:sp>
       <p:sp>
         <p:nvSpPr>
-          <p:cNvPr id="23" name="TextBox 22"/>
+          <p:cNvPr id="22" name="TextBox 21"/>
           <p:cNvSpPr txBox="1"/>
           <p:nvPr/>
         </p:nvSpPr>
@@ -9713,7 +9365,7 @@
       </p:sp>
       <p:sp>
         <p:nvSpPr>
-          <p:cNvPr id="24" name="TextBox 23"/>
+          <p:cNvPr id="23" name="TextBox 22"/>
           <p:cNvSpPr txBox="1"/>
           <p:nvPr/>
         </p:nvSpPr>
@@ -9760,7 +9412,7 @@
       </p:sp>
       <p:sp>
         <p:nvSpPr>
-          <p:cNvPr id="25" name="Rounded Rectangle 24"/>
+          <p:cNvPr id="24" name="Rounded Rectangle 23"/>
           <p:cNvSpPr/>
           <p:nvPr/>
         </p:nvSpPr>
@@ -9814,7 +9466,7 @@
       </p:sp>
       <p:sp>
         <p:nvSpPr>
-          <p:cNvPr id="26" name="Rectangle 25"/>
+          <p:cNvPr id="25" name="Rectangle 24"/>
           <p:cNvSpPr/>
           <p:nvPr/>
         </p:nvSpPr>
@@ -9858,7 +9510,7 @@
       </p:sp>
       <p:sp>
         <p:nvSpPr>
-          <p:cNvPr id="27" name="TextBox 26"/>
+          <p:cNvPr id="26" name="TextBox 25"/>
           <p:cNvSpPr txBox="1"/>
           <p:nvPr/>
         </p:nvSpPr>
@@ -9905,7 +9557,7 @@
       </p:sp>
       <p:sp>
         <p:nvSpPr>
-          <p:cNvPr id="28" name="TextBox 27"/>
+          <p:cNvPr id="27" name="TextBox 26"/>
           <p:cNvSpPr txBox="1"/>
           <p:nvPr/>
         </p:nvSpPr>
@@ -9952,7 +9604,7 @@
       </p:sp>
       <p:sp>
         <p:nvSpPr>
-          <p:cNvPr id="29" name="Rounded Rectangle 28"/>
+          <p:cNvPr id="28" name="Rounded Rectangle 27"/>
           <p:cNvSpPr/>
           <p:nvPr/>
         </p:nvSpPr>
@@ -10006,7 +9658,7 @@
       </p:sp>
       <p:sp>
         <p:nvSpPr>
-          <p:cNvPr id="30" name="Rectangle 29"/>
+          <p:cNvPr id="29" name="Rectangle 28"/>
           <p:cNvSpPr/>
           <p:nvPr/>
         </p:nvSpPr>
@@ -10050,7 +9702,7 @@
       </p:sp>
       <p:sp>
         <p:nvSpPr>
-          <p:cNvPr id="31" name="TextBox 30"/>
+          <p:cNvPr id="30" name="TextBox 29"/>
           <p:cNvSpPr txBox="1"/>
           <p:nvPr/>
         </p:nvSpPr>
@@ -10097,7 +9749,7 @@
       </p:sp>
       <p:sp>
         <p:nvSpPr>
-          <p:cNvPr id="32" name="TextBox 31"/>
+          <p:cNvPr id="31" name="TextBox 30"/>
           <p:cNvSpPr txBox="1"/>
           <p:nvPr/>
         </p:nvSpPr>
@@ -10236,8 +9888,77 @@
         </p:nvSpPr>
         <p:spPr>
           <a:xfrm>
-            <a:off x="713232" y="6272784"/>
-            <a:ext cx="5597920" cy="219456"/>
+            <a:off x="8240677" y="6272784"/>
+            <a:ext cx="2651760" cy="219456"/>
+          </a:xfrm>
+          <a:prstGeom prst="rect">
+            <a:avLst/>
+          </a:prstGeom>
+          <a:noFill/>
+        </p:spPr>
+        <p:txBody>
+          <a:bodyPr wrap="square" lIns="0" rIns="0" tIns="0" bIns="0" anchor="t">
+            <a:spAutoFit/>
+          </a:bodyPr>
+          <a:lstStyle/>
+          <a:p>
+            <a:pPr algn="r">
+              <a:lnSpc>
+                <a:spcPct val="122000"/>
+              </a:lnSpc>
+              <a:spcBef>
+                <a:spcPts val="0"/>
+              </a:spcBef>
+              <a:spcAft>
+                <a:spcPts val="0"/>
+              </a:spcAft>
+            </a:pPr>
+            <a:r>
+              <a:rPr sz="900" b="0" i="0">
+                <a:solidFill>
+                  <a:srgbClr val="636E85"/>
+                </a:solidFill>
+                <a:latin typeface="Segoe UI"/>
+                <a:ea typeface="Segoe UI"/>
+                <a:cs typeface="Segoe UI"/>
+              </a:rPr>
+              <a:t>Lingesh K  ·  OSI2509030</a:t>
+            </a:r>
+            <a:r>
+              <a:rPr sz="900" b="0" i="0">
+                <a:solidFill>
+                  <a:srgbClr val="141C2E"/>
+                </a:solidFill>
+                <a:latin typeface="Segoe UI"/>
+                <a:ea typeface="Segoe UI"/>
+                <a:cs typeface="Segoe UI"/>
+              </a:rPr>
+              <a:t>     </a:t>
+            </a:r>
+            <a:r>
+              <a:rPr sz="900" b="1" i="0">
+                <a:solidFill>
+                  <a:srgbClr val="0E1E3C"/>
+                </a:solidFill>
+                <a:latin typeface="Segoe UI"/>
+                <a:ea typeface="Segoe UI"/>
+                <a:cs typeface="Segoe UI"/>
+              </a:rPr>
+              <a:t>14</a:t>
+            </a:r>
+          </a:p>
+        </p:txBody>
+      </p:sp>
+      <p:sp>
+        <p:nvSpPr>
+          <p:cNvPr id="5" name="TextBox 4"/>
+          <p:cNvSpPr txBox="1"/>
+          <p:nvPr/>
+        </p:nvSpPr>
+        <p:spPr>
+          <a:xfrm>
+            <a:off x="713232" y="566928"/>
+            <a:ext cx="10765231" cy="219456"/>
           </a:xfrm>
           <a:prstGeom prst="rect">
             <a:avLst/>
@@ -10262,106 +9983,15 @@
               </a:spcAft>
             </a:pPr>
             <a:r>
-              <a:rPr sz="900" b="1" i="0">
-                <a:solidFill>
-                  <a:srgbClr val="0E1E3C"/>
-                </a:solidFill>
-                <a:latin typeface="Segoe UI"/>
-                <a:ea typeface="Segoe UI"/>
-                <a:cs typeface="Segoe UI"/>
-              </a:rPr>
-              <a:t>Unit 3</a:t>
-            </a:r>
-            <a:r>
-              <a:rPr sz="900" b="0" i="0">
-                <a:solidFill>
-                  <a:srgbClr val="939EB3"/>
-                </a:solidFill>
-                <a:latin typeface="Segoe UI"/>
-                <a:ea typeface="Segoe UI"/>
-                <a:cs typeface="Segoe UI"/>
-              </a:rPr>
-              <a:t>  ·  </a:t>
-            </a:r>
-            <a:r>
-              <a:rPr sz="900" b="0" i="0">
-                <a:solidFill>
-                  <a:srgbClr val="636E85"/>
-                </a:solidFill>
-                <a:latin typeface="Segoe UI"/>
-                <a:ea typeface="Segoe UI"/>
-                <a:cs typeface="Segoe UI"/>
-              </a:rPr>
-              <a:t>Business Application in AI</a:t>
-            </a:r>
-          </a:p>
-        </p:txBody>
-      </p:sp>
-      <p:sp>
-        <p:nvSpPr>
-          <p:cNvPr id="5" name="TextBox 4"/>
-          <p:cNvSpPr txBox="1"/>
-          <p:nvPr/>
-        </p:nvSpPr>
-        <p:spPr>
-          <a:xfrm>
-            <a:off x="8240677" y="6272784"/>
-            <a:ext cx="2651760" cy="219456"/>
-          </a:xfrm>
-          <a:prstGeom prst="rect">
-            <a:avLst/>
-          </a:prstGeom>
-          <a:noFill/>
-        </p:spPr>
-        <p:txBody>
-          <a:bodyPr wrap="square" lIns="0" rIns="0" tIns="0" bIns="0" anchor="t">
-            <a:spAutoFit/>
-          </a:bodyPr>
-          <a:lstStyle/>
-          <a:p>
-            <a:pPr algn="r">
-              <a:lnSpc>
-                <a:spcPct val="122000"/>
-              </a:lnSpc>
-              <a:spcBef>
-                <a:spcPts val="0"/>
-              </a:spcBef>
-              <a:spcAft>
-                <a:spcPts val="0"/>
-              </a:spcAft>
-            </a:pPr>
-            <a:r>
-              <a:rPr sz="900" b="0" i="0">
-                <a:solidFill>
-                  <a:srgbClr val="636E85"/>
-                </a:solidFill>
-                <a:latin typeface="Segoe UI"/>
-                <a:ea typeface="Segoe UI"/>
-                <a:cs typeface="Segoe UI"/>
-              </a:rPr>
-              <a:t>Lingesh K  ·  OSI2509030</a:t>
-            </a:r>
-            <a:r>
-              <a:rPr sz="900" b="0" i="0">
-                <a:solidFill>
-                  <a:srgbClr val="141C2E"/>
-                </a:solidFill>
-                <a:latin typeface="Segoe UI"/>
-                <a:ea typeface="Segoe UI"/>
-                <a:cs typeface="Segoe UI"/>
-              </a:rPr>
-              <a:t>     </a:t>
-            </a:r>
-            <a:r>
-              <a:rPr sz="900" b="1" i="0">
-                <a:solidFill>
-                  <a:srgbClr val="0E1E3C"/>
-                </a:solidFill>
-                <a:latin typeface="Segoe UI"/>
-                <a:ea typeface="Segoe UI"/>
-                <a:cs typeface="Segoe UI"/>
-              </a:rPr>
-              <a:t>14</a:t>
+              <a:rPr sz="950" b="1" i="0" spc="160">
+                <a:solidFill>
+                  <a:srgbClr val="E05151"/>
+                </a:solidFill>
+                <a:latin typeface="Segoe UI"/>
+                <a:ea typeface="Segoe UI"/>
+                <a:cs typeface="Segoe UI"/>
+              </a:rPr>
+              <a:t>HANDLE WITH CARE</a:t>
             </a:r>
           </a:p>
         </p:txBody>
@@ -10369,53 +9999,6 @@
       <p:sp>
         <p:nvSpPr>
           <p:cNvPr id="6" name="TextBox 5"/>
-          <p:cNvSpPr txBox="1"/>
-          <p:nvPr/>
-        </p:nvSpPr>
-        <p:spPr>
-          <a:xfrm>
-            <a:off x="713232" y="566928"/>
-            <a:ext cx="10765231" cy="219456"/>
-          </a:xfrm>
-          <a:prstGeom prst="rect">
-            <a:avLst/>
-          </a:prstGeom>
-          <a:noFill/>
-        </p:spPr>
-        <p:txBody>
-          <a:bodyPr wrap="square" lIns="0" rIns="0" tIns="0" bIns="0" anchor="t">
-            <a:spAutoFit/>
-          </a:bodyPr>
-          <a:lstStyle/>
-          <a:p>
-            <a:pPr algn="l">
-              <a:lnSpc>
-                <a:spcPct val="122000"/>
-              </a:lnSpc>
-              <a:spcBef>
-                <a:spcPts val="0"/>
-              </a:spcBef>
-              <a:spcAft>
-                <a:spcPts val="0"/>
-              </a:spcAft>
-            </a:pPr>
-            <a:r>
-              <a:rPr sz="950" b="1" i="0" spc="160">
-                <a:solidFill>
-                  <a:srgbClr val="E05151"/>
-                </a:solidFill>
-                <a:latin typeface="Segoe UI"/>
-                <a:ea typeface="Segoe UI"/>
-                <a:cs typeface="Segoe UI"/>
-              </a:rPr>
-              <a:t>HANDLE WITH CARE</a:t>
-            </a:r>
-          </a:p>
-        </p:txBody>
-      </p:sp>
-      <p:sp>
-        <p:nvSpPr>
-          <p:cNvPr id="7" name="TextBox 6"/>
           <p:cNvSpPr txBox="1"/>
           <p:nvPr/>
         </p:nvSpPr>
@@ -10462,7 +10045,7 @@
       </p:sp>
       <p:sp>
         <p:nvSpPr>
-          <p:cNvPr id="8" name="Rectangle 7"/>
+          <p:cNvPr id="7" name="Rectangle 6"/>
           <p:cNvSpPr/>
           <p:nvPr/>
         </p:nvSpPr>
@@ -10506,7 +10089,7 @@
       </p:sp>
       <p:sp>
         <p:nvSpPr>
-          <p:cNvPr id="9" name="TextBox 8"/>
+          <p:cNvPr id="8" name="TextBox 7"/>
           <p:cNvSpPr txBox="1"/>
           <p:nvPr/>
         </p:nvSpPr>
@@ -10553,7 +10136,7 @@
       </p:sp>
       <p:sp>
         <p:nvSpPr>
-          <p:cNvPr id="10" name="Rounded Rectangle 9"/>
+          <p:cNvPr id="9" name="Rounded Rectangle 8"/>
           <p:cNvSpPr/>
           <p:nvPr/>
         </p:nvSpPr>
@@ -10599,7 +10182,7 @@
       </p:sp>
       <p:sp>
         <p:nvSpPr>
-          <p:cNvPr id="11" name="TextBox 10"/>
+          <p:cNvPr id="10" name="TextBox 9"/>
           <p:cNvSpPr txBox="1"/>
           <p:nvPr/>
         </p:nvSpPr>
@@ -10670,7 +10253,7 @@
       </p:sp>
       <p:sp>
         <p:nvSpPr>
-          <p:cNvPr id="12" name="Rounded Rectangle 11"/>
+          <p:cNvPr id="11" name="Rounded Rectangle 10"/>
           <p:cNvSpPr/>
           <p:nvPr/>
         </p:nvSpPr>
@@ -10716,7 +10299,7 @@
       </p:sp>
       <p:sp>
         <p:nvSpPr>
-          <p:cNvPr id="13" name="TextBox 12"/>
+          <p:cNvPr id="12" name="TextBox 11"/>
           <p:cNvSpPr txBox="1"/>
           <p:nvPr/>
         </p:nvSpPr>
@@ -10787,7 +10370,7 @@
       </p:sp>
       <p:sp>
         <p:nvSpPr>
-          <p:cNvPr id="14" name="Rounded Rectangle 13"/>
+          <p:cNvPr id="13" name="Rounded Rectangle 12"/>
           <p:cNvSpPr/>
           <p:nvPr/>
         </p:nvSpPr>
@@ -10833,7 +10416,7 @@
       </p:sp>
       <p:sp>
         <p:nvSpPr>
-          <p:cNvPr id="15" name="TextBox 14"/>
+          <p:cNvPr id="14" name="TextBox 13"/>
           <p:cNvSpPr txBox="1"/>
           <p:nvPr/>
         </p:nvSpPr>
@@ -10904,7 +10487,7 @@
       </p:sp>
       <p:sp>
         <p:nvSpPr>
-          <p:cNvPr id="16" name="Rounded Rectangle 15"/>
+          <p:cNvPr id="15" name="Rounded Rectangle 14"/>
           <p:cNvSpPr/>
           <p:nvPr/>
         </p:nvSpPr>
@@ -10950,7 +10533,7 @@
       </p:sp>
       <p:sp>
         <p:nvSpPr>
-          <p:cNvPr id="17" name="TextBox 16"/>
+          <p:cNvPr id="16" name="TextBox 15"/>
           <p:cNvSpPr txBox="1"/>
           <p:nvPr/>
         </p:nvSpPr>
@@ -11021,7 +10604,7 @@
       </p:sp>
       <p:sp>
         <p:nvSpPr>
-          <p:cNvPr id="18" name="Rounded Rectangle 17"/>
+          <p:cNvPr id="17" name="Rounded Rectangle 16"/>
           <p:cNvSpPr/>
           <p:nvPr/>
         </p:nvSpPr>
@@ -11067,7 +10650,7 @@
       </p:sp>
       <p:sp>
         <p:nvSpPr>
-          <p:cNvPr id="19" name="TextBox 18"/>
+          <p:cNvPr id="18" name="TextBox 17"/>
           <p:cNvSpPr txBox="1"/>
           <p:nvPr/>
         </p:nvSpPr>
@@ -11138,7 +10721,7 @@
       </p:sp>
       <p:sp>
         <p:nvSpPr>
-          <p:cNvPr id="20" name="Rounded Rectangle 19"/>
+          <p:cNvPr id="19" name="Rounded Rectangle 18"/>
           <p:cNvSpPr/>
           <p:nvPr/>
         </p:nvSpPr>
@@ -11184,7 +10767,7 @@
       </p:sp>
       <p:sp>
         <p:nvSpPr>
-          <p:cNvPr id="21" name="TextBox 20"/>
+          <p:cNvPr id="20" name="TextBox 19"/>
           <p:cNvSpPr txBox="1"/>
           <p:nvPr/>
         </p:nvSpPr>
@@ -11646,54 +11229,7 @@
       </p:sp>
       <p:sp>
         <p:nvSpPr>
-          <p:cNvPr id="10" name="TextBox 9"/>
-          <p:cNvSpPr txBox="1"/>
-          <p:nvPr/>
-        </p:nvSpPr>
-        <p:spPr>
-          <a:xfrm>
-            <a:off x="987552" y="5943600"/>
-            <a:ext cx="6400800" cy="274320"/>
-          </a:xfrm>
-          <a:prstGeom prst="rect">
-            <a:avLst/>
-          </a:prstGeom>
-          <a:noFill/>
-        </p:spPr>
-        <p:txBody>
-          <a:bodyPr wrap="square" lIns="0" rIns="0" tIns="0" bIns="0" anchor="t">
-            <a:spAutoFit/>
-          </a:bodyPr>
-          <a:lstStyle/>
-          <a:p>
-            <a:pPr algn="l">
-              <a:lnSpc>
-                <a:spcPct val="122000"/>
-              </a:lnSpc>
-              <a:spcBef>
-                <a:spcPts val="0"/>
-              </a:spcBef>
-              <a:spcAft>
-                <a:spcPts val="0"/>
-              </a:spcAft>
-            </a:pPr>
-            <a:r>
-              <a:rPr sz="900" b="1" i="0" spc="160">
-                <a:solidFill>
-                  <a:srgbClr val="6B7FA6"/>
-                </a:solidFill>
-                <a:latin typeface="Segoe UI"/>
-                <a:ea typeface="Segoe UI"/>
-                <a:cs typeface="Segoe UI"/>
-              </a:rPr>
-              <a:t>UNIT 3  ·  BUSINESS APPLICATION IN AI</a:t>
-            </a:r>
-          </a:p>
-        </p:txBody>
-      </p:sp>
-      <p:sp>
-        <p:nvSpPr>
-          <p:cNvPr id="11" name="logo-plate"/>
+          <p:cNvPr id="10" name="logo-plate"/>
           <p:cNvSpPr/>
           <p:nvPr/>
         </p:nvSpPr>
@@ -11739,7 +11275,7 @@
       </p:sp>
       <p:pic>
         <p:nvPicPr>
-          <p:cNvPr id="12" name="college-logo" descr="logo-full.png"/>
+          <p:cNvPr id="11" name="college-logo" descr="logo-full.png"/>
           <p:cNvPicPr>
             <a:picLocks noChangeAspect="1"/>
           </p:cNvPicPr>
@@ -11855,8 +11391,77 @@
         </p:nvSpPr>
         <p:spPr>
           <a:xfrm>
-            <a:off x="713232" y="6272784"/>
-            <a:ext cx="5597920" cy="219456"/>
+            <a:off x="8240677" y="6272784"/>
+            <a:ext cx="2651760" cy="219456"/>
+          </a:xfrm>
+          <a:prstGeom prst="rect">
+            <a:avLst/>
+          </a:prstGeom>
+          <a:noFill/>
+        </p:spPr>
+        <p:txBody>
+          <a:bodyPr wrap="square" lIns="0" rIns="0" tIns="0" bIns="0" anchor="t">
+            <a:spAutoFit/>
+          </a:bodyPr>
+          <a:lstStyle/>
+          <a:p>
+            <a:pPr algn="r">
+              <a:lnSpc>
+                <a:spcPct val="122000"/>
+              </a:lnSpc>
+              <a:spcBef>
+                <a:spcPts val="0"/>
+              </a:spcBef>
+              <a:spcAft>
+                <a:spcPts val="0"/>
+              </a:spcAft>
+            </a:pPr>
+            <a:r>
+              <a:rPr sz="900" b="0" i="0">
+                <a:solidFill>
+                  <a:srgbClr val="636E85"/>
+                </a:solidFill>
+                <a:latin typeface="Segoe UI"/>
+                <a:ea typeface="Segoe UI"/>
+                <a:cs typeface="Segoe UI"/>
+              </a:rPr>
+              <a:t>Lingesh K  ·  OSI2509030</a:t>
+            </a:r>
+            <a:r>
+              <a:rPr sz="900" b="0" i="0">
+                <a:solidFill>
+                  <a:srgbClr val="141C2E"/>
+                </a:solidFill>
+                <a:latin typeface="Segoe UI"/>
+                <a:ea typeface="Segoe UI"/>
+                <a:cs typeface="Segoe UI"/>
+              </a:rPr>
+              <a:t>     </a:t>
+            </a:r>
+            <a:r>
+              <a:rPr sz="900" b="1" i="0">
+                <a:solidFill>
+                  <a:srgbClr val="0E1E3C"/>
+                </a:solidFill>
+                <a:latin typeface="Segoe UI"/>
+                <a:ea typeface="Segoe UI"/>
+                <a:cs typeface="Segoe UI"/>
+              </a:rPr>
+              <a:t>16</a:t>
+            </a:r>
+          </a:p>
+        </p:txBody>
+      </p:sp>
+      <p:sp>
+        <p:nvSpPr>
+          <p:cNvPr id="5" name="TextBox 4"/>
+          <p:cNvSpPr txBox="1"/>
+          <p:nvPr/>
+        </p:nvSpPr>
+        <p:spPr>
+          <a:xfrm>
+            <a:off x="713232" y="566928"/>
+            <a:ext cx="10765231" cy="219456"/>
           </a:xfrm>
           <a:prstGeom prst="rect">
             <a:avLst/>
@@ -11881,106 +11486,15 @@
               </a:spcAft>
             </a:pPr>
             <a:r>
-              <a:rPr sz="900" b="1" i="0">
-                <a:solidFill>
-                  <a:srgbClr val="0E1E3C"/>
-                </a:solidFill>
-                <a:latin typeface="Segoe UI"/>
-                <a:ea typeface="Segoe UI"/>
-                <a:cs typeface="Segoe UI"/>
-              </a:rPr>
-              <a:t>Unit 3</a:t>
-            </a:r>
-            <a:r>
-              <a:rPr sz="900" b="0" i="0">
-                <a:solidFill>
-                  <a:srgbClr val="939EB3"/>
-                </a:solidFill>
-                <a:latin typeface="Segoe UI"/>
-                <a:ea typeface="Segoe UI"/>
-                <a:cs typeface="Segoe UI"/>
-              </a:rPr>
-              <a:t>  ·  </a:t>
-            </a:r>
-            <a:r>
-              <a:rPr sz="900" b="0" i="0">
-                <a:solidFill>
-                  <a:srgbClr val="636E85"/>
-                </a:solidFill>
-                <a:latin typeface="Segoe UI"/>
-                <a:ea typeface="Segoe UI"/>
-                <a:cs typeface="Segoe UI"/>
-              </a:rPr>
-              <a:t>Business Application in AI</a:t>
-            </a:r>
-          </a:p>
-        </p:txBody>
-      </p:sp>
-      <p:sp>
-        <p:nvSpPr>
-          <p:cNvPr id="5" name="TextBox 4"/>
-          <p:cNvSpPr txBox="1"/>
-          <p:nvPr/>
-        </p:nvSpPr>
-        <p:spPr>
-          <a:xfrm>
-            <a:off x="8240677" y="6272784"/>
-            <a:ext cx="2651760" cy="219456"/>
-          </a:xfrm>
-          <a:prstGeom prst="rect">
-            <a:avLst/>
-          </a:prstGeom>
-          <a:noFill/>
-        </p:spPr>
-        <p:txBody>
-          <a:bodyPr wrap="square" lIns="0" rIns="0" tIns="0" bIns="0" anchor="t">
-            <a:spAutoFit/>
-          </a:bodyPr>
-          <a:lstStyle/>
-          <a:p>
-            <a:pPr algn="r">
-              <a:lnSpc>
-                <a:spcPct val="122000"/>
-              </a:lnSpc>
-              <a:spcBef>
-                <a:spcPts val="0"/>
-              </a:spcBef>
-              <a:spcAft>
-                <a:spcPts val="0"/>
-              </a:spcAft>
-            </a:pPr>
-            <a:r>
-              <a:rPr sz="900" b="0" i="0">
-                <a:solidFill>
-                  <a:srgbClr val="636E85"/>
-                </a:solidFill>
-                <a:latin typeface="Segoe UI"/>
-                <a:ea typeface="Segoe UI"/>
-                <a:cs typeface="Segoe UI"/>
-              </a:rPr>
-              <a:t>Lingesh K  ·  OSI2509030</a:t>
-            </a:r>
-            <a:r>
-              <a:rPr sz="900" b="0" i="0">
-                <a:solidFill>
-                  <a:srgbClr val="141C2E"/>
-                </a:solidFill>
-                <a:latin typeface="Segoe UI"/>
-                <a:ea typeface="Segoe UI"/>
-                <a:cs typeface="Segoe UI"/>
-              </a:rPr>
-              <a:t>     </a:t>
-            </a:r>
-            <a:r>
-              <a:rPr sz="900" b="1" i="0">
-                <a:solidFill>
-                  <a:srgbClr val="0E1E3C"/>
-                </a:solidFill>
-                <a:latin typeface="Segoe UI"/>
-                <a:ea typeface="Segoe UI"/>
-                <a:cs typeface="Segoe UI"/>
-              </a:rPr>
-              <a:t>16</a:t>
+              <a:rPr sz="950" b="1" i="0" spc="160">
+                <a:solidFill>
+                  <a:srgbClr val="F5A623"/>
+                </a:solidFill>
+                <a:latin typeface="Segoe UI"/>
+                <a:ea typeface="Segoe UI"/>
+                <a:cs typeface="Segoe UI"/>
+              </a:rPr>
+              <a:t>OPERATIONS</a:t>
             </a:r>
           </a:p>
         </p:txBody>
@@ -11988,53 +11502,6 @@
       <p:sp>
         <p:nvSpPr>
           <p:cNvPr id="6" name="TextBox 5"/>
-          <p:cNvSpPr txBox="1"/>
-          <p:nvPr/>
-        </p:nvSpPr>
-        <p:spPr>
-          <a:xfrm>
-            <a:off x="713232" y="566928"/>
-            <a:ext cx="10765231" cy="219456"/>
-          </a:xfrm>
-          <a:prstGeom prst="rect">
-            <a:avLst/>
-          </a:prstGeom>
-          <a:noFill/>
-        </p:spPr>
-        <p:txBody>
-          <a:bodyPr wrap="square" lIns="0" rIns="0" tIns="0" bIns="0" anchor="t">
-            <a:spAutoFit/>
-          </a:bodyPr>
-          <a:lstStyle/>
-          <a:p>
-            <a:pPr algn="l">
-              <a:lnSpc>
-                <a:spcPct val="122000"/>
-              </a:lnSpc>
-              <a:spcBef>
-                <a:spcPts val="0"/>
-              </a:spcBef>
-              <a:spcAft>
-                <a:spcPts val="0"/>
-              </a:spcAft>
-            </a:pPr>
-            <a:r>
-              <a:rPr sz="950" b="1" i="0" spc="160">
-                <a:solidFill>
-                  <a:srgbClr val="F5A623"/>
-                </a:solidFill>
-                <a:latin typeface="Segoe UI"/>
-                <a:ea typeface="Segoe UI"/>
-                <a:cs typeface="Segoe UI"/>
-              </a:rPr>
-              <a:t>OPERATIONS</a:t>
-            </a:r>
-          </a:p>
-        </p:txBody>
-      </p:sp>
-      <p:sp>
-        <p:nvSpPr>
-          <p:cNvPr id="7" name="TextBox 6"/>
           <p:cNvSpPr txBox="1"/>
           <p:nvPr/>
         </p:nvSpPr>
@@ -12081,7 +11548,7 @@
       </p:sp>
       <p:sp>
         <p:nvSpPr>
-          <p:cNvPr id="8" name="Rectangle 7"/>
+          <p:cNvPr id="7" name="Rectangle 6"/>
           <p:cNvSpPr/>
           <p:nvPr/>
         </p:nvSpPr>
@@ -12125,7 +11592,7 @@
       </p:sp>
       <p:sp>
         <p:nvSpPr>
-          <p:cNvPr id="9" name="Rounded Rectangle 8"/>
+          <p:cNvPr id="8" name="Rounded Rectangle 7"/>
           <p:cNvSpPr/>
           <p:nvPr/>
         </p:nvSpPr>
@@ -12179,7 +11646,7 @@
       </p:sp>
       <p:sp>
         <p:nvSpPr>
-          <p:cNvPr id="10" name="Rectangle 9"/>
+          <p:cNvPr id="9" name="Rectangle 8"/>
           <p:cNvSpPr/>
           <p:nvPr/>
         </p:nvSpPr>
@@ -12223,7 +11690,7 @@
       </p:sp>
       <p:sp>
         <p:nvSpPr>
-          <p:cNvPr id="11" name="TextBox 10"/>
+          <p:cNvPr id="10" name="TextBox 9"/>
           <p:cNvSpPr txBox="1"/>
           <p:nvPr/>
         </p:nvSpPr>
@@ -12270,7 +11737,7 @@
       </p:sp>
       <p:sp>
         <p:nvSpPr>
-          <p:cNvPr id="12" name="TextBox 11"/>
+          <p:cNvPr id="11" name="TextBox 10"/>
           <p:cNvSpPr txBox="1"/>
           <p:nvPr/>
         </p:nvSpPr>
@@ -12317,7 +11784,7 @@
       </p:sp>
       <p:sp>
         <p:nvSpPr>
-          <p:cNvPr id="13" name="Rounded Rectangle 12"/>
+          <p:cNvPr id="12" name="Rounded Rectangle 11"/>
           <p:cNvSpPr/>
           <p:nvPr/>
         </p:nvSpPr>
@@ -12371,7 +11838,7 @@
       </p:sp>
       <p:sp>
         <p:nvSpPr>
-          <p:cNvPr id="14" name="Rectangle 13"/>
+          <p:cNvPr id="13" name="Rectangle 12"/>
           <p:cNvSpPr/>
           <p:nvPr/>
         </p:nvSpPr>
@@ -12415,7 +11882,7 @@
       </p:sp>
       <p:sp>
         <p:nvSpPr>
-          <p:cNvPr id="15" name="TextBox 14"/>
+          <p:cNvPr id="14" name="TextBox 13"/>
           <p:cNvSpPr txBox="1"/>
           <p:nvPr/>
         </p:nvSpPr>
@@ -12462,7 +11929,7 @@
       </p:sp>
       <p:sp>
         <p:nvSpPr>
-          <p:cNvPr id="16" name="TextBox 15"/>
+          <p:cNvPr id="15" name="TextBox 14"/>
           <p:cNvSpPr txBox="1"/>
           <p:nvPr/>
         </p:nvSpPr>
@@ -12509,7 +11976,7 @@
       </p:sp>
       <p:sp>
         <p:nvSpPr>
-          <p:cNvPr id="17" name="Rounded Rectangle 16"/>
+          <p:cNvPr id="16" name="Rounded Rectangle 15"/>
           <p:cNvSpPr/>
           <p:nvPr/>
         </p:nvSpPr>
@@ -12563,7 +12030,7 @@
       </p:sp>
       <p:sp>
         <p:nvSpPr>
-          <p:cNvPr id="18" name="Rectangle 17"/>
+          <p:cNvPr id="17" name="Rectangle 16"/>
           <p:cNvSpPr/>
           <p:nvPr/>
         </p:nvSpPr>
@@ -12607,7 +12074,7 @@
       </p:sp>
       <p:sp>
         <p:nvSpPr>
-          <p:cNvPr id="19" name="TextBox 18"/>
+          <p:cNvPr id="18" name="TextBox 17"/>
           <p:cNvSpPr txBox="1"/>
           <p:nvPr/>
         </p:nvSpPr>
@@ -12654,7 +12121,7 @@
       </p:sp>
       <p:sp>
         <p:nvSpPr>
-          <p:cNvPr id="20" name="TextBox 19"/>
+          <p:cNvPr id="19" name="TextBox 18"/>
           <p:cNvSpPr txBox="1"/>
           <p:nvPr/>
         </p:nvSpPr>
@@ -12701,7 +12168,7 @@
       </p:sp>
       <p:sp>
         <p:nvSpPr>
-          <p:cNvPr id="21" name="Rounded Rectangle 20"/>
+          <p:cNvPr id="20" name="Rounded Rectangle 19"/>
           <p:cNvSpPr/>
           <p:nvPr/>
         </p:nvSpPr>
@@ -12755,7 +12222,7 @@
       </p:sp>
       <p:sp>
         <p:nvSpPr>
-          <p:cNvPr id="22" name="Rectangle 21"/>
+          <p:cNvPr id="21" name="Rectangle 20"/>
           <p:cNvSpPr/>
           <p:nvPr/>
         </p:nvSpPr>
@@ -12799,7 +12266,7 @@
       </p:sp>
       <p:sp>
         <p:nvSpPr>
-          <p:cNvPr id="23" name="TextBox 22"/>
+          <p:cNvPr id="22" name="TextBox 21"/>
           <p:cNvSpPr txBox="1"/>
           <p:nvPr/>
         </p:nvSpPr>
@@ -12846,7 +12313,7 @@
       </p:sp>
       <p:sp>
         <p:nvSpPr>
-          <p:cNvPr id="24" name="TextBox 23"/>
+          <p:cNvPr id="23" name="TextBox 22"/>
           <p:cNvSpPr txBox="1"/>
           <p:nvPr/>
         </p:nvSpPr>
@@ -12893,7 +12360,7 @@
       </p:sp>
       <p:sp>
         <p:nvSpPr>
-          <p:cNvPr id="25" name="Rounded Rectangle 24"/>
+          <p:cNvPr id="24" name="Rounded Rectangle 23"/>
           <p:cNvSpPr/>
           <p:nvPr/>
         </p:nvSpPr>
@@ -12947,7 +12414,7 @@
       </p:sp>
       <p:sp>
         <p:nvSpPr>
-          <p:cNvPr id="26" name="Rectangle 25"/>
+          <p:cNvPr id="25" name="Rectangle 24"/>
           <p:cNvSpPr/>
           <p:nvPr/>
         </p:nvSpPr>
@@ -12991,7 +12458,7 @@
       </p:sp>
       <p:sp>
         <p:nvSpPr>
-          <p:cNvPr id="27" name="TextBox 26"/>
+          <p:cNvPr id="26" name="TextBox 25"/>
           <p:cNvSpPr txBox="1"/>
           <p:nvPr/>
         </p:nvSpPr>
@@ -13038,7 +12505,7 @@
       </p:sp>
       <p:sp>
         <p:nvSpPr>
-          <p:cNvPr id="28" name="TextBox 27"/>
+          <p:cNvPr id="27" name="TextBox 26"/>
           <p:cNvSpPr txBox="1"/>
           <p:nvPr/>
         </p:nvSpPr>
@@ -13085,7 +12552,7 @@
       </p:sp>
       <p:sp>
         <p:nvSpPr>
-          <p:cNvPr id="29" name="Rounded Rectangle 28"/>
+          <p:cNvPr id="28" name="Rounded Rectangle 27"/>
           <p:cNvSpPr/>
           <p:nvPr/>
         </p:nvSpPr>
@@ -13139,7 +12606,7 @@
       </p:sp>
       <p:sp>
         <p:nvSpPr>
-          <p:cNvPr id="30" name="Rectangle 29"/>
+          <p:cNvPr id="29" name="Rectangle 28"/>
           <p:cNvSpPr/>
           <p:nvPr/>
         </p:nvSpPr>
@@ -13183,7 +12650,7 @@
       </p:sp>
       <p:sp>
         <p:nvSpPr>
-          <p:cNvPr id="31" name="TextBox 30"/>
+          <p:cNvPr id="30" name="TextBox 29"/>
           <p:cNvSpPr txBox="1"/>
           <p:nvPr/>
         </p:nvSpPr>
@@ -13230,7 +12697,7 @@
       </p:sp>
       <p:sp>
         <p:nvSpPr>
-          <p:cNvPr id="32" name="TextBox 31"/>
+          <p:cNvPr id="31" name="TextBox 30"/>
           <p:cNvSpPr txBox="1"/>
           <p:nvPr/>
         </p:nvSpPr>
@@ -13369,8 +12836,77 @@
         </p:nvSpPr>
         <p:spPr>
           <a:xfrm>
-            <a:off x="713232" y="6272784"/>
-            <a:ext cx="5597920" cy="219456"/>
+            <a:off x="8240677" y="6272784"/>
+            <a:ext cx="2651760" cy="219456"/>
+          </a:xfrm>
+          <a:prstGeom prst="rect">
+            <a:avLst/>
+          </a:prstGeom>
+          <a:noFill/>
+        </p:spPr>
+        <p:txBody>
+          <a:bodyPr wrap="square" lIns="0" rIns="0" tIns="0" bIns="0" anchor="t">
+            <a:spAutoFit/>
+          </a:bodyPr>
+          <a:lstStyle/>
+          <a:p>
+            <a:pPr algn="r">
+              <a:lnSpc>
+                <a:spcPct val="122000"/>
+              </a:lnSpc>
+              <a:spcBef>
+                <a:spcPts val="0"/>
+              </a:spcBef>
+              <a:spcAft>
+                <a:spcPts val="0"/>
+              </a:spcAft>
+            </a:pPr>
+            <a:r>
+              <a:rPr sz="900" b="0" i="0">
+                <a:solidFill>
+                  <a:srgbClr val="636E85"/>
+                </a:solidFill>
+                <a:latin typeface="Segoe UI"/>
+                <a:ea typeface="Segoe UI"/>
+                <a:cs typeface="Segoe UI"/>
+              </a:rPr>
+              <a:t>Lingesh K  ·  OSI2509030</a:t>
+            </a:r>
+            <a:r>
+              <a:rPr sz="900" b="0" i="0">
+                <a:solidFill>
+                  <a:srgbClr val="141C2E"/>
+                </a:solidFill>
+                <a:latin typeface="Segoe UI"/>
+                <a:ea typeface="Segoe UI"/>
+                <a:cs typeface="Segoe UI"/>
+              </a:rPr>
+              <a:t>     </a:t>
+            </a:r>
+            <a:r>
+              <a:rPr sz="900" b="1" i="0">
+                <a:solidFill>
+                  <a:srgbClr val="0E1E3C"/>
+                </a:solidFill>
+                <a:latin typeface="Segoe UI"/>
+                <a:ea typeface="Segoe UI"/>
+                <a:cs typeface="Segoe UI"/>
+              </a:rPr>
+              <a:t>17</a:t>
+            </a:r>
+          </a:p>
+        </p:txBody>
+      </p:sp>
+      <p:sp>
+        <p:nvSpPr>
+          <p:cNvPr id="5" name="TextBox 4"/>
+          <p:cNvSpPr txBox="1"/>
+          <p:nvPr/>
+        </p:nvSpPr>
+        <p:spPr>
+          <a:xfrm>
+            <a:off x="713232" y="566928"/>
+            <a:ext cx="10765231" cy="219456"/>
           </a:xfrm>
           <a:prstGeom prst="rect">
             <a:avLst/>
@@ -13395,106 +12931,15 @@
               </a:spcAft>
             </a:pPr>
             <a:r>
-              <a:rPr sz="900" b="1" i="0">
-                <a:solidFill>
-                  <a:srgbClr val="0E1E3C"/>
-                </a:solidFill>
-                <a:latin typeface="Segoe UI"/>
-                <a:ea typeface="Segoe UI"/>
-                <a:cs typeface="Segoe UI"/>
-              </a:rPr>
-              <a:t>Unit 3</a:t>
-            </a:r>
-            <a:r>
-              <a:rPr sz="900" b="0" i="0">
-                <a:solidFill>
-                  <a:srgbClr val="939EB3"/>
-                </a:solidFill>
-                <a:latin typeface="Segoe UI"/>
-                <a:ea typeface="Segoe UI"/>
-                <a:cs typeface="Segoe UI"/>
-              </a:rPr>
-              <a:t>  ·  </a:t>
-            </a:r>
-            <a:r>
-              <a:rPr sz="900" b="0" i="0">
-                <a:solidFill>
-                  <a:srgbClr val="636E85"/>
-                </a:solidFill>
-                <a:latin typeface="Segoe UI"/>
-                <a:ea typeface="Segoe UI"/>
-                <a:cs typeface="Segoe UI"/>
-              </a:rPr>
-              <a:t>Business Application in AI</a:t>
-            </a:r>
-          </a:p>
-        </p:txBody>
-      </p:sp>
-      <p:sp>
-        <p:nvSpPr>
-          <p:cNvPr id="5" name="TextBox 4"/>
-          <p:cNvSpPr txBox="1"/>
-          <p:nvPr/>
-        </p:nvSpPr>
-        <p:spPr>
-          <a:xfrm>
-            <a:off x="8240677" y="6272784"/>
-            <a:ext cx="2651760" cy="219456"/>
-          </a:xfrm>
-          <a:prstGeom prst="rect">
-            <a:avLst/>
-          </a:prstGeom>
-          <a:noFill/>
-        </p:spPr>
-        <p:txBody>
-          <a:bodyPr wrap="square" lIns="0" rIns="0" tIns="0" bIns="0" anchor="t">
-            <a:spAutoFit/>
-          </a:bodyPr>
-          <a:lstStyle/>
-          <a:p>
-            <a:pPr algn="r">
-              <a:lnSpc>
-                <a:spcPct val="122000"/>
-              </a:lnSpc>
-              <a:spcBef>
-                <a:spcPts val="0"/>
-              </a:spcBef>
-              <a:spcAft>
-                <a:spcPts val="0"/>
-              </a:spcAft>
-            </a:pPr>
-            <a:r>
-              <a:rPr sz="900" b="0" i="0">
-                <a:solidFill>
-                  <a:srgbClr val="636E85"/>
-                </a:solidFill>
-                <a:latin typeface="Segoe UI"/>
-                <a:ea typeface="Segoe UI"/>
-                <a:cs typeface="Segoe UI"/>
-              </a:rPr>
-              <a:t>Lingesh K  ·  OSI2509030</a:t>
-            </a:r>
-            <a:r>
-              <a:rPr sz="900" b="0" i="0">
-                <a:solidFill>
-                  <a:srgbClr val="141C2E"/>
-                </a:solidFill>
-                <a:latin typeface="Segoe UI"/>
-                <a:ea typeface="Segoe UI"/>
-                <a:cs typeface="Segoe UI"/>
-              </a:rPr>
-              <a:t>     </a:t>
-            </a:r>
-            <a:r>
-              <a:rPr sz="900" b="1" i="0">
-                <a:solidFill>
-                  <a:srgbClr val="0E1E3C"/>
-                </a:solidFill>
-                <a:latin typeface="Segoe UI"/>
-                <a:ea typeface="Segoe UI"/>
-                <a:cs typeface="Segoe UI"/>
-              </a:rPr>
-              <a:t>17</a:t>
+              <a:rPr sz="950" b="1" i="0" spc="160">
+                <a:solidFill>
+                  <a:srgbClr val="3B7AF7"/>
+                </a:solidFill>
+                <a:latin typeface="Segoe UI"/>
+                <a:ea typeface="Segoe UI"/>
+                <a:cs typeface="Segoe UI"/>
+              </a:rPr>
+              <a:t>ACROSS THE BUSINESS</a:t>
             </a:r>
           </a:p>
         </p:txBody>
@@ -13502,53 +12947,6 @@
       <p:sp>
         <p:nvSpPr>
           <p:cNvPr id="6" name="TextBox 5"/>
-          <p:cNvSpPr txBox="1"/>
-          <p:nvPr/>
-        </p:nvSpPr>
-        <p:spPr>
-          <a:xfrm>
-            <a:off x="713232" y="566928"/>
-            <a:ext cx="10765231" cy="219456"/>
-          </a:xfrm>
-          <a:prstGeom prst="rect">
-            <a:avLst/>
-          </a:prstGeom>
-          <a:noFill/>
-        </p:spPr>
-        <p:txBody>
-          <a:bodyPr wrap="square" lIns="0" rIns="0" tIns="0" bIns="0" anchor="t">
-            <a:spAutoFit/>
-          </a:bodyPr>
-          <a:lstStyle/>
-          <a:p>
-            <a:pPr algn="l">
-              <a:lnSpc>
-                <a:spcPct val="122000"/>
-              </a:lnSpc>
-              <a:spcBef>
-                <a:spcPts val="0"/>
-              </a:spcBef>
-              <a:spcAft>
-                <a:spcPts val="0"/>
-              </a:spcAft>
-            </a:pPr>
-            <a:r>
-              <a:rPr sz="950" b="1" i="0" spc="160">
-                <a:solidFill>
-                  <a:srgbClr val="3B7AF7"/>
-                </a:solidFill>
-                <a:latin typeface="Segoe UI"/>
-                <a:ea typeface="Segoe UI"/>
-                <a:cs typeface="Segoe UI"/>
-              </a:rPr>
-              <a:t>ACROSS THE BUSINESS</a:t>
-            </a:r>
-          </a:p>
-        </p:txBody>
-      </p:sp>
-      <p:sp>
-        <p:nvSpPr>
-          <p:cNvPr id="7" name="TextBox 6"/>
           <p:cNvSpPr txBox="1"/>
           <p:nvPr/>
         </p:nvSpPr>
@@ -13595,7 +12993,7 @@
       </p:sp>
       <p:sp>
         <p:nvSpPr>
-          <p:cNvPr id="8" name="Rectangle 7"/>
+          <p:cNvPr id="7" name="Rectangle 6"/>
           <p:cNvSpPr/>
           <p:nvPr/>
         </p:nvSpPr>
@@ -13639,7 +13037,7 @@
       </p:sp>
       <p:graphicFrame>
         <p:nvGraphicFramePr>
-          <p:cNvPr id="9" name="Table 8"/>
+          <p:cNvPr id="8" name="Table 7"/>
           <p:cNvGraphicFramePr>
             <a:graphicFrameLocks noGrp="1"/>
           </p:cNvGraphicFramePr>
@@ -14377,7 +13775,7 @@
       </p:graphicFrame>
       <p:sp>
         <p:nvSpPr>
-          <p:cNvPr id="10" name="Rounded Rectangle 9"/>
+          <p:cNvPr id="9" name="Rounded Rectangle 8"/>
           <p:cNvSpPr/>
           <p:nvPr/>
         </p:nvSpPr>
@@ -14444,7 +13842,7 @@
       </p:sp>
       <p:sp>
         <p:nvSpPr>
-          <p:cNvPr id="11" name="Rectangle 10"/>
+          <p:cNvPr id="10" name="Rectangle 9"/>
           <p:cNvSpPr/>
           <p:nvPr/>
         </p:nvSpPr>
@@ -14879,54 +14277,7 @@
       </p:sp>
       <p:sp>
         <p:nvSpPr>
-          <p:cNvPr id="10" name="TextBox 9"/>
-          <p:cNvSpPr txBox="1"/>
-          <p:nvPr/>
-        </p:nvSpPr>
-        <p:spPr>
-          <a:xfrm>
-            <a:off x="987552" y="5943600"/>
-            <a:ext cx="6400800" cy="274320"/>
-          </a:xfrm>
-          <a:prstGeom prst="rect">
-            <a:avLst/>
-          </a:prstGeom>
-          <a:noFill/>
-        </p:spPr>
-        <p:txBody>
-          <a:bodyPr wrap="square" lIns="0" rIns="0" tIns="0" bIns="0" anchor="t">
-            <a:spAutoFit/>
-          </a:bodyPr>
-          <a:lstStyle/>
-          <a:p>
-            <a:pPr algn="l">
-              <a:lnSpc>
-                <a:spcPct val="122000"/>
-              </a:lnSpc>
-              <a:spcBef>
-                <a:spcPts val="0"/>
-              </a:spcBef>
-              <a:spcAft>
-                <a:spcPts val="0"/>
-              </a:spcAft>
-            </a:pPr>
-            <a:r>
-              <a:rPr sz="900" b="1" i="0" spc="160">
-                <a:solidFill>
-                  <a:srgbClr val="6B7FA6"/>
-                </a:solidFill>
-                <a:latin typeface="Segoe UI"/>
-                <a:ea typeface="Segoe UI"/>
-                <a:cs typeface="Segoe UI"/>
-              </a:rPr>
-              <a:t>UNIT 3  ·  BUSINESS APPLICATION IN AI</a:t>
-            </a:r>
-          </a:p>
-        </p:txBody>
-      </p:sp>
-      <p:sp>
-        <p:nvSpPr>
-          <p:cNvPr id="11" name="logo-plate"/>
+          <p:cNvPr id="10" name="logo-plate"/>
           <p:cNvSpPr/>
           <p:nvPr/>
         </p:nvSpPr>
@@ -14972,7 +14323,7 @@
       </p:sp>
       <p:pic>
         <p:nvPicPr>
-          <p:cNvPr id="12" name="college-logo" descr="logo-full.png"/>
+          <p:cNvPr id="11" name="college-logo" descr="logo-full.png"/>
           <p:cNvPicPr>
             <a:picLocks noChangeAspect="1"/>
           </p:cNvPicPr>
@@ -15088,8 +14439,77 @@
         </p:nvSpPr>
         <p:spPr>
           <a:xfrm>
-            <a:off x="713232" y="6272784"/>
-            <a:ext cx="5597920" cy="219456"/>
+            <a:off x="8240677" y="6272784"/>
+            <a:ext cx="2651760" cy="219456"/>
+          </a:xfrm>
+          <a:prstGeom prst="rect">
+            <a:avLst/>
+          </a:prstGeom>
+          <a:noFill/>
+        </p:spPr>
+        <p:txBody>
+          <a:bodyPr wrap="square" lIns="0" rIns="0" tIns="0" bIns="0" anchor="t">
+            <a:spAutoFit/>
+          </a:bodyPr>
+          <a:lstStyle/>
+          <a:p>
+            <a:pPr algn="r">
+              <a:lnSpc>
+                <a:spcPct val="122000"/>
+              </a:lnSpc>
+              <a:spcBef>
+                <a:spcPts val="0"/>
+              </a:spcBef>
+              <a:spcAft>
+                <a:spcPts val="0"/>
+              </a:spcAft>
+            </a:pPr>
+            <a:r>
+              <a:rPr sz="900" b="0" i="0">
+                <a:solidFill>
+                  <a:srgbClr val="636E85"/>
+                </a:solidFill>
+                <a:latin typeface="Segoe UI"/>
+                <a:ea typeface="Segoe UI"/>
+                <a:cs typeface="Segoe UI"/>
+              </a:rPr>
+              <a:t>Lingesh K  ·  OSI2509030</a:t>
+            </a:r>
+            <a:r>
+              <a:rPr sz="900" b="0" i="0">
+                <a:solidFill>
+                  <a:srgbClr val="141C2E"/>
+                </a:solidFill>
+                <a:latin typeface="Segoe UI"/>
+                <a:ea typeface="Segoe UI"/>
+                <a:cs typeface="Segoe UI"/>
+              </a:rPr>
+              <a:t>     </a:t>
+            </a:r>
+            <a:r>
+              <a:rPr sz="900" b="1" i="0">
+                <a:solidFill>
+                  <a:srgbClr val="0E1E3C"/>
+                </a:solidFill>
+                <a:latin typeface="Segoe UI"/>
+                <a:ea typeface="Segoe UI"/>
+                <a:cs typeface="Segoe UI"/>
+              </a:rPr>
+              <a:t>19</a:t>
+            </a:r>
+          </a:p>
+        </p:txBody>
+      </p:sp>
+      <p:sp>
+        <p:nvSpPr>
+          <p:cNvPr id="5" name="TextBox 4"/>
+          <p:cNvSpPr txBox="1"/>
+          <p:nvPr/>
+        </p:nvSpPr>
+        <p:spPr>
+          <a:xfrm>
+            <a:off x="713232" y="566928"/>
+            <a:ext cx="10765231" cy="219456"/>
           </a:xfrm>
           <a:prstGeom prst="rect">
             <a:avLst/>
@@ -15114,106 +14534,15 @@
               </a:spcAft>
             </a:pPr>
             <a:r>
-              <a:rPr sz="900" b="1" i="0">
-                <a:solidFill>
-                  <a:srgbClr val="0E1E3C"/>
-                </a:solidFill>
-                <a:latin typeface="Segoe UI"/>
-                <a:ea typeface="Segoe UI"/>
-                <a:cs typeface="Segoe UI"/>
-              </a:rPr>
-              <a:t>Unit 3</a:t>
-            </a:r>
-            <a:r>
-              <a:rPr sz="900" b="0" i="0">
-                <a:solidFill>
-                  <a:srgbClr val="939EB3"/>
-                </a:solidFill>
-                <a:latin typeface="Segoe UI"/>
-                <a:ea typeface="Segoe UI"/>
-                <a:cs typeface="Segoe UI"/>
-              </a:rPr>
-              <a:t>  ·  </a:t>
-            </a:r>
-            <a:r>
-              <a:rPr sz="900" b="0" i="0">
-                <a:solidFill>
-                  <a:srgbClr val="636E85"/>
-                </a:solidFill>
-                <a:latin typeface="Segoe UI"/>
-                <a:ea typeface="Segoe UI"/>
-                <a:cs typeface="Segoe UI"/>
-              </a:rPr>
-              <a:t>Business Application in AI</a:t>
-            </a:r>
-          </a:p>
-        </p:txBody>
-      </p:sp>
-      <p:sp>
-        <p:nvSpPr>
-          <p:cNvPr id="5" name="TextBox 4"/>
-          <p:cNvSpPr txBox="1"/>
-          <p:nvPr/>
-        </p:nvSpPr>
-        <p:spPr>
-          <a:xfrm>
-            <a:off x="8240677" y="6272784"/>
-            <a:ext cx="2651760" cy="219456"/>
-          </a:xfrm>
-          <a:prstGeom prst="rect">
-            <a:avLst/>
-          </a:prstGeom>
-          <a:noFill/>
-        </p:spPr>
-        <p:txBody>
-          <a:bodyPr wrap="square" lIns="0" rIns="0" tIns="0" bIns="0" anchor="t">
-            <a:spAutoFit/>
-          </a:bodyPr>
-          <a:lstStyle/>
-          <a:p>
-            <a:pPr algn="r">
-              <a:lnSpc>
-                <a:spcPct val="122000"/>
-              </a:lnSpc>
-              <a:spcBef>
-                <a:spcPts val="0"/>
-              </a:spcBef>
-              <a:spcAft>
-                <a:spcPts val="0"/>
-              </a:spcAft>
-            </a:pPr>
-            <a:r>
-              <a:rPr sz="900" b="0" i="0">
-                <a:solidFill>
-                  <a:srgbClr val="636E85"/>
-                </a:solidFill>
-                <a:latin typeface="Segoe UI"/>
-                <a:ea typeface="Segoe UI"/>
-                <a:cs typeface="Segoe UI"/>
-              </a:rPr>
-              <a:t>Lingesh K  ·  OSI2509030</a:t>
-            </a:r>
-            <a:r>
-              <a:rPr sz="900" b="0" i="0">
-                <a:solidFill>
-                  <a:srgbClr val="141C2E"/>
-                </a:solidFill>
-                <a:latin typeface="Segoe UI"/>
-                <a:ea typeface="Segoe UI"/>
-                <a:cs typeface="Segoe UI"/>
-              </a:rPr>
-              <a:t>     </a:t>
-            </a:r>
-            <a:r>
-              <a:rPr sz="900" b="1" i="0">
-                <a:solidFill>
-                  <a:srgbClr val="0E1E3C"/>
-                </a:solidFill>
-                <a:latin typeface="Segoe UI"/>
-                <a:ea typeface="Segoe UI"/>
-                <a:cs typeface="Segoe UI"/>
-              </a:rPr>
-              <a:t>19</a:t>
+              <a:rPr sz="950" b="1" i="0" spc="160">
+                <a:solidFill>
+                  <a:srgbClr val="3B7AF7"/>
+                </a:solidFill>
+                <a:latin typeface="Segoe UI"/>
+                <a:ea typeface="Segoe UI"/>
+                <a:cs typeface="Segoe UI"/>
+              </a:rPr>
+              <a:t>THE DIFFERENCE</a:t>
             </a:r>
           </a:p>
         </p:txBody>
@@ -15221,53 +14550,6 @@
       <p:sp>
         <p:nvSpPr>
           <p:cNvPr id="6" name="TextBox 5"/>
-          <p:cNvSpPr txBox="1"/>
-          <p:nvPr/>
-        </p:nvSpPr>
-        <p:spPr>
-          <a:xfrm>
-            <a:off x="713232" y="566928"/>
-            <a:ext cx="10765231" cy="219456"/>
-          </a:xfrm>
-          <a:prstGeom prst="rect">
-            <a:avLst/>
-          </a:prstGeom>
-          <a:noFill/>
-        </p:spPr>
-        <p:txBody>
-          <a:bodyPr wrap="square" lIns="0" rIns="0" tIns="0" bIns="0" anchor="t">
-            <a:spAutoFit/>
-          </a:bodyPr>
-          <a:lstStyle/>
-          <a:p>
-            <a:pPr algn="l">
-              <a:lnSpc>
-                <a:spcPct val="122000"/>
-              </a:lnSpc>
-              <a:spcBef>
-                <a:spcPts val="0"/>
-              </a:spcBef>
-              <a:spcAft>
-                <a:spcPts val="0"/>
-              </a:spcAft>
-            </a:pPr>
-            <a:r>
-              <a:rPr sz="950" b="1" i="0" spc="160">
-                <a:solidFill>
-                  <a:srgbClr val="3B7AF7"/>
-                </a:solidFill>
-                <a:latin typeface="Segoe UI"/>
-                <a:ea typeface="Segoe UI"/>
-                <a:cs typeface="Segoe UI"/>
-              </a:rPr>
-              <a:t>THE DIFFERENCE</a:t>
-            </a:r>
-          </a:p>
-        </p:txBody>
-      </p:sp>
-      <p:sp>
-        <p:nvSpPr>
-          <p:cNvPr id="7" name="TextBox 6"/>
           <p:cNvSpPr txBox="1"/>
           <p:nvPr/>
         </p:nvSpPr>
@@ -15314,7 +14596,7 @@
       </p:sp>
       <p:sp>
         <p:nvSpPr>
-          <p:cNvPr id="8" name="Rectangle 7"/>
+          <p:cNvPr id="7" name="Rectangle 6"/>
           <p:cNvSpPr/>
           <p:nvPr/>
         </p:nvSpPr>
@@ -15358,7 +14640,7 @@
       </p:sp>
       <p:sp>
         <p:nvSpPr>
-          <p:cNvPr id="9" name="TextBox 8"/>
+          <p:cNvPr id="8" name="TextBox 7"/>
           <p:cNvSpPr txBox="1"/>
           <p:nvPr/>
         </p:nvSpPr>
@@ -15405,7 +14687,7 @@
       </p:sp>
       <p:sp>
         <p:nvSpPr>
-          <p:cNvPr id="10" name="Rounded Rectangle 9"/>
+          <p:cNvPr id="9" name="Rounded Rectangle 8"/>
           <p:cNvSpPr/>
           <p:nvPr/>
         </p:nvSpPr>
@@ -15459,7 +14741,7 @@
       </p:sp>
       <p:sp>
         <p:nvSpPr>
-          <p:cNvPr id="11" name="Rectangle 10"/>
+          <p:cNvPr id="10" name="Rectangle 9"/>
           <p:cNvSpPr/>
           <p:nvPr/>
         </p:nvSpPr>
@@ -15503,7 +14785,7 @@
       </p:sp>
       <p:sp>
         <p:nvSpPr>
-          <p:cNvPr id="12" name="Rounded Rectangle 11"/>
+          <p:cNvPr id="11" name="Rounded Rectangle 10"/>
           <p:cNvSpPr/>
           <p:nvPr/>
         </p:nvSpPr>
@@ -15570,7 +14852,7 @@
       </p:sp>
       <p:sp>
         <p:nvSpPr>
-          <p:cNvPr id="13" name="TextBox 12"/>
+          <p:cNvPr id="12" name="TextBox 11"/>
           <p:cNvSpPr txBox="1"/>
           <p:nvPr/>
         </p:nvSpPr>
@@ -15617,7 +14899,7 @@
       </p:sp>
       <p:sp>
         <p:nvSpPr>
-          <p:cNvPr id="14" name="Rectangle 13"/>
+          <p:cNvPr id="13" name="Rectangle 12"/>
           <p:cNvSpPr/>
           <p:nvPr/>
         </p:nvSpPr>
@@ -15661,7 +14943,7 @@
       </p:sp>
       <p:sp>
         <p:nvSpPr>
-          <p:cNvPr id="15" name="Rounded Rectangle 14"/>
+          <p:cNvPr id="14" name="Rounded Rectangle 13"/>
           <p:cNvSpPr/>
           <p:nvPr/>
         </p:nvSpPr>
@@ -15707,7 +14989,7 @@
       </p:sp>
       <p:sp>
         <p:nvSpPr>
-          <p:cNvPr id="16" name="TextBox 15"/>
+          <p:cNvPr id="15" name="TextBox 14"/>
           <p:cNvSpPr txBox="1"/>
           <p:nvPr/>
         </p:nvSpPr>
@@ -15754,7 +15036,7 @@
       </p:sp>
       <p:sp>
         <p:nvSpPr>
-          <p:cNvPr id="17" name="Rounded Rectangle 16"/>
+          <p:cNvPr id="16" name="Rounded Rectangle 15"/>
           <p:cNvSpPr/>
           <p:nvPr/>
         </p:nvSpPr>
@@ -15800,7 +15082,7 @@
       </p:sp>
       <p:sp>
         <p:nvSpPr>
-          <p:cNvPr id="18" name="TextBox 17"/>
+          <p:cNvPr id="17" name="TextBox 16"/>
           <p:cNvSpPr txBox="1"/>
           <p:nvPr/>
         </p:nvSpPr>
@@ -15847,7 +15129,7 @@
       </p:sp>
       <p:sp>
         <p:nvSpPr>
-          <p:cNvPr id="19" name="Rounded Rectangle 18"/>
+          <p:cNvPr id="18" name="Rounded Rectangle 17"/>
           <p:cNvSpPr/>
           <p:nvPr/>
         </p:nvSpPr>
@@ -15893,7 +15175,7 @@
       </p:sp>
       <p:sp>
         <p:nvSpPr>
-          <p:cNvPr id="20" name="TextBox 19"/>
+          <p:cNvPr id="19" name="TextBox 18"/>
           <p:cNvSpPr txBox="1"/>
           <p:nvPr/>
         </p:nvSpPr>
@@ -15940,7 +15222,7 @@
       </p:sp>
       <p:sp>
         <p:nvSpPr>
-          <p:cNvPr id="21" name="Rounded Rectangle 20"/>
+          <p:cNvPr id="20" name="Rounded Rectangle 19"/>
           <p:cNvSpPr/>
           <p:nvPr/>
         </p:nvSpPr>
@@ -15986,7 +15268,7 @@
       </p:sp>
       <p:sp>
         <p:nvSpPr>
-          <p:cNvPr id="22" name="TextBox 21"/>
+          <p:cNvPr id="21" name="TextBox 20"/>
           <p:cNvSpPr txBox="1"/>
           <p:nvPr/>
         </p:nvSpPr>
@@ -16033,7 +15315,7 @@
       </p:sp>
       <p:sp>
         <p:nvSpPr>
-          <p:cNvPr id="23" name="Rounded Rectangle 22"/>
+          <p:cNvPr id="22" name="Rounded Rectangle 21"/>
           <p:cNvSpPr/>
           <p:nvPr/>
         </p:nvSpPr>
@@ -16079,7 +15361,7 @@
       </p:sp>
       <p:sp>
         <p:nvSpPr>
-          <p:cNvPr id="24" name="TextBox 23"/>
+          <p:cNvPr id="23" name="TextBox 22"/>
           <p:cNvSpPr txBox="1"/>
           <p:nvPr/>
         </p:nvSpPr>
@@ -16126,7 +15408,7 @@
       </p:sp>
       <p:sp>
         <p:nvSpPr>
-          <p:cNvPr id="25" name="Rounded Rectangle 24"/>
+          <p:cNvPr id="24" name="Rounded Rectangle 23"/>
           <p:cNvSpPr/>
           <p:nvPr/>
         </p:nvSpPr>
@@ -16180,7 +15462,7 @@
       </p:sp>
       <p:sp>
         <p:nvSpPr>
-          <p:cNvPr id="26" name="Rectangle 25"/>
+          <p:cNvPr id="25" name="Rectangle 24"/>
           <p:cNvSpPr/>
           <p:nvPr/>
         </p:nvSpPr>
@@ -16224,7 +15506,7 @@
       </p:sp>
       <p:sp>
         <p:nvSpPr>
-          <p:cNvPr id="27" name="Rounded Rectangle 26"/>
+          <p:cNvPr id="26" name="Rounded Rectangle 25"/>
           <p:cNvSpPr/>
           <p:nvPr/>
         </p:nvSpPr>
@@ -16291,7 +15573,7 @@
       </p:sp>
       <p:sp>
         <p:nvSpPr>
-          <p:cNvPr id="28" name="TextBox 27"/>
+          <p:cNvPr id="27" name="TextBox 26"/>
           <p:cNvSpPr txBox="1"/>
           <p:nvPr/>
         </p:nvSpPr>
@@ -16338,7 +15620,7 @@
       </p:sp>
       <p:sp>
         <p:nvSpPr>
-          <p:cNvPr id="29" name="Rectangle 28"/>
+          <p:cNvPr id="28" name="Rectangle 27"/>
           <p:cNvSpPr/>
           <p:nvPr/>
         </p:nvSpPr>
@@ -16382,7 +15664,7 @@
       </p:sp>
       <p:sp>
         <p:nvSpPr>
-          <p:cNvPr id="30" name="Rounded Rectangle 29"/>
+          <p:cNvPr id="29" name="Rounded Rectangle 28"/>
           <p:cNvSpPr/>
           <p:nvPr/>
         </p:nvSpPr>
@@ -16428,7 +15710,7 @@
       </p:sp>
       <p:sp>
         <p:nvSpPr>
-          <p:cNvPr id="31" name="TextBox 30"/>
+          <p:cNvPr id="30" name="TextBox 29"/>
           <p:cNvSpPr txBox="1"/>
           <p:nvPr/>
         </p:nvSpPr>
@@ -16475,7 +15757,7 @@
       </p:sp>
       <p:sp>
         <p:nvSpPr>
-          <p:cNvPr id="32" name="Rounded Rectangle 31"/>
+          <p:cNvPr id="31" name="Rounded Rectangle 30"/>
           <p:cNvSpPr/>
           <p:nvPr/>
         </p:nvSpPr>
@@ -16521,7 +15803,7 @@
       </p:sp>
       <p:sp>
         <p:nvSpPr>
-          <p:cNvPr id="33" name="TextBox 32"/>
+          <p:cNvPr id="32" name="TextBox 31"/>
           <p:cNvSpPr txBox="1"/>
           <p:nvPr/>
         </p:nvSpPr>
@@ -16568,7 +15850,7 @@
       </p:sp>
       <p:sp>
         <p:nvSpPr>
-          <p:cNvPr id="34" name="Rounded Rectangle 33"/>
+          <p:cNvPr id="33" name="Rounded Rectangle 32"/>
           <p:cNvSpPr/>
           <p:nvPr/>
         </p:nvSpPr>
@@ -16614,7 +15896,7 @@
       </p:sp>
       <p:sp>
         <p:nvSpPr>
-          <p:cNvPr id="35" name="TextBox 34"/>
+          <p:cNvPr id="34" name="TextBox 33"/>
           <p:cNvSpPr txBox="1"/>
           <p:nvPr/>
         </p:nvSpPr>
@@ -16661,7 +15943,7 @@
       </p:sp>
       <p:sp>
         <p:nvSpPr>
-          <p:cNvPr id="36" name="Rounded Rectangle 35"/>
+          <p:cNvPr id="35" name="Rounded Rectangle 34"/>
           <p:cNvSpPr/>
           <p:nvPr/>
         </p:nvSpPr>
@@ -16707,7 +15989,7 @@
       </p:sp>
       <p:sp>
         <p:nvSpPr>
-          <p:cNvPr id="37" name="TextBox 36"/>
+          <p:cNvPr id="36" name="TextBox 35"/>
           <p:cNvSpPr txBox="1"/>
           <p:nvPr/>
         </p:nvSpPr>
@@ -16754,7 +16036,7 @@
       </p:sp>
       <p:sp>
         <p:nvSpPr>
-          <p:cNvPr id="38" name="Rounded Rectangle 37"/>
+          <p:cNvPr id="37" name="Rounded Rectangle 36"/>
           <p:cNvSpPr/>
           <p:nvPr/>
         </p:nvSpPr>
@@ -16800,7 +16082,7 @@
       </p:sp>
       <p:sp>
         <p:nvSpPr>
-          <p:cNvPr id="39" name="TextBox 38"/>
+          <p:cNvPr id="38" name="TextBox 37"/>
           <p:cNvSpPr txBox="1"/>
           <p:nvPr/>
         </p:nvSpPr>
@@ -16847,7 +16129,7 @@
       </p:sp>
       <p:sp>
         <p:nvSpPr>
-          <p:cNvPr id="40" name="Rounded Rectangle 39"/>
+          <p:cNvPr id="39" name="Rounded Rectangle 38"/>
           <p:cNvSpPr/>
           <p:nvPr/>
         </p:nvSpPr>
@@ -17017,8 +16299,77 @@
         </p:nvSpPr>
         <p:spPr>
           <a:xfrm>
-            <a:off x="713232" y="6272784"/>
-            <a:ext cx="5597920" cy="219456"/>
+            <a:off x="8240677" y="6272784"/>
+            <a:ext cx="2651760" cy="219456"/>
+          </a:xfrm>
+          <a:prstGeom prst="rect">
+            <a:avLst/>
+          </a:prstGeom>
+          <a:noFill/>
+        </p:spPr>
+        <p:txBody>
+          <a:bodyPr wrap="square" lIns="0" rIns="0" tIns="0" bIns="0" anchor="t">
+            <a:spAutoFit/>
+          </a:bodyPr>
+          <a:lstStyle/>
+          <a:p>
+            <a:pPr algn="r">
+              <a:lnSpc>
+                <a:spcPct val="122000"/>
+              </a:lnSpc>
+              <a:spcBef>
+                <a:spcPts val="0"/>
+              </a:spcBef>
+              <a:spcAft>
+                <a:spcPts val="0"/>
+              </a:spcAft>
+            </a:pPr>
+            <a:r>
+              <a:rPr sz="900" b="0" i="0">
+                <a:solidFill>
+                  <a:srgbClr val="636E85"/>
+                </a:solidFill>
+                <a:latin typeface="Segoe UI"/>
+                <a:ea typeface="Segoe UI"/>
+                <a:cs typeface="Segoe UI"/>
+              </a:rPr>
+              <a:t>Lingesh K  ·  OSI2509030</a:t>
+            </a:r>
+            <a:r>
+              <a:rPr sz="900" b="0" i="0">
+                <a:solidFill>
+                  <a:srgbClr val="141C2E"/>
+                </a:solidFill>
+                <a:latin typeface="Segoe UI"/>
+                <a:ea typeface="Segoe UI"/>
+                <a:cs typeface="Segoe UI"/>
+              </a:rPr>
+              <a:t>     </a:t>
+            </a:r>
+            <a:r>
+              <a:rPr sz="900" b="1" i="0">
+                <a:solidFill>
+                  <a:srgbClr val="0E1E3C"/>
+                </a:solidFill>
+                <a:latin typeface="Segoe UI"/>
+                <a:ea typeface="Segoe UI"/>
+                <a:cs typeface="Segoe UI"/>
+              </a:rPr>
+              <a:t>02</a:t>
+            </a:r>
+          </a:p>
+        </p:txBody>
+      </p:sp>
+      <p:sp>
+        <p:nvSpPr>
+          <p:cNvPr id="5" name="TextBox 4"/>
+          <p:cNvSpPr txBox="1"/>
+          <p:nvPr/>
+        </p:nvSpPr>
+        <p:spPr>
+          <a:xfrm>
+            <a:off x="713232" y="566928"/>
+            <a:ext cx="10765231" cy="219456"/>
           </a:xfrm>
           <a:prstGeom prst="rect">
             <a:avLst/>
@@ -17043,106 +16394,15 @@
               </a:spcAft>
             </a:pPr>
             <a:r>
-              <a:rPr sz="900" b="1" i="0">
-                <a:solidFill>
-                  <a:srgbClr val="0E1E3C"/>
-                </a:solidFill>
-                <a:latin typeface="Segoe UI"/>
-                <a:ea typeface="Segoe UI"/>
-                <a:cs typeface="Segoe UI"/>
-              </a:rPr>
-              <a:t>Unit 3</a:t>
-            </a:r>
-            <a:r>
-              <a:rPr sz="900" b="0" i="0">
-                <a:solidFill>
-                  <a:srgbClr val="939EB3"/>
-                </a:solidFill>
-                <a:latin typeface="Segoe UI"/>
-                <a:ea typeface="Segoe UI"/>
-                <a:cs typeface="Segoe UI"/>
-              </a:rPr>
-              <a:t>  ·  </a:t>
-            </a:r>
-            <a:r>
-              <a:rPr sz="900" b="0" i="0">
-                <a:solidFill>
-                  <a:srgbClr val="636E85"/>
-                </a:solidFill>
-                <a:latin typeface="Segoe UI"/>
-                <a:ea typeface="Segoe UI"/>
-                <a:cs typeface="Segoe UI"/>
-              </a:rPr>
-              <a:t>Business Application in AI</a:t>
-            </a:r>
-          </a:p>
-        </p:txBody>
-      </p:sp>
-      <p:sp>
-        <p:nvSpPr>
-          <p:cNvPr id="5" name="TextBox 4"/>
-          <p:cNvSpPr txBox="1"/>
-          <p:nvPr/>
-        </p:nvSpPr>
-        <p:spPr>
-          <a:xfrm>
-            <a:off x="8240677" y="6272784"/>
-            <a:ext cx="2651760" cy="219456"/>
-          </a:xfrm>
-          <a:prstGeom prst="rect">
-            <a:avLst/>
-          </a:prstGeom>
-          <a:noFill/>
-        </p:spPr>
-        <p:txBody>
-          <a:bodyPr wrap="square" lIns="0" rIns="0" tIns="0" bIns="0" anchor="t">
-            <a:spAutoFit/>
-          </a:bodyPr>
-          <a:lstStyle/>
-          <a:p>
-            <a:pPr algn="r">
-              <a:lnSpc>
-                <a:spcPct val="122000"/>
-              </a:lnSpc>
-              <a:spcBef>
-                <a:spcPts val="0"/>
-              </a:spcBef>
-              <a:spcAft>
-                <a:spcPts val="0"/>
-              </a:spcAft>
-            </a:pPr>
-            <a:r>
-              <a:rPr sz="900" b="0" i="0">
-                <a:solidFill>
-                  <a:srgbClr val="636E85"/>
-                </a:solidFill>
-                <a:latin typeface="Segoe UI"/>
-                <a:ea typeface="Segoe UI"/>
-                <a:cs typeface="Segoe UI"/>
-              </a:rPr>
-              <a:t>Lingesh K  ·  OSI2509030</a:t>
-            </a:r>
-            <a:r>
-              <a:rPr sz="900" b="0" i="0">
-                <a:solidFill>
-                  <a:srgbClr val="141C2E"/>
-                </a:solidFill>
-                <a:latin typeface="Segoe UI"/>
-                <a:ea typeface="Segoe UI"/>
-                <a:cs typeface="Segoe UI"/>
-              </a:rPr>
-              <a:t>     </a:t>
-            </a:r>
-            <a:r>
-              <a:rPr sz="900" b="1" i="0">
-                <a:solidFill>
-                  <a:srgbClr val="0E1E3C"/>
-                </a:solidFill>
-                <a:latin typeface="Segoe UI"/>
-                <a:ea typeface="Segoe UI"/>
-                <a:cs typeface="Segoe UI"/>
-              </a:rPr>
-              <a:t>02</a:t>
+              <a:rPr sz="950" b="1" i="0" spc="160">
+                <a:solidFill>
+                  <a:srgbClr val="3B7AF7"/>
+                </a:solidFill>
+                <a:latin typeface="Segoe UI"/>
+                <a:ea typeface="Segoe UI"/>
+                <a:cs typeface="Segoe UI"/>
+              </a:rPr>
+              <a:t>AGENDA</a:t>
             </a:r>
           </a:p>
         </p:txBody>
@@ -17150,53 +16410,6 @@
       <p:sp>
         <p:nvSpPr>
           <p:cNvPr id="6" name="TextBox 5"/>
-          <p:cNvSpPr txBox="1"/>
-          <p:nvPr/>
-        </p:nvSpPr>
-        <p:spPr>
-          <a:xfrm>
-            <a:off x="713232" y="566928"/>
-            <a:ext cx="10765231" cy="219456"/>
-          </a:xfrm>
-          <a:prstGeom prst="rect">
-            <a:avLst/>
-          </a:prstGeom>
-          <a:noFill/>
-        </p:spPr>
-        <p:txBody>
-          <a:bodyPr wrap="square" lIns="0" rIns="0" tIns="0" bIns="0" anchor="t">
-            <a:spAutoFit/>
-          </a:bodyPr>
-          <a:lstStyle/>
-          <a:p>
-            <a:pPr algn="l">
-              <a:lnSpc>
-                <a:spcPct val="122000"/>
-              </a:lnSpc>
-              <a:spcBef>
-                <a:spcPts val="0"/>
-              </a:spcBef>
-              <a:spcAft>
-                <a:spcPts val="0"/>
-              </a:spcAft>
-            </a:pPr>
-            <a:r>
-              <a:rPr sz="950" b="1" i="0" spc="160">
-                <a:solidFill>
-                  <a:srgbClr val="3B7AF7"/>
-                </a:solidFill>
-                <a:latin typeface="Segoe UI"/>
-                <a:ea typeface="Segoe UI"/>
-                <a:cs typeface="Segoe UI"/>
-              </a:rPr>
-              <a:t>AGENDA</a:t>
-            </a:r>
-          </a:p>
-        </p:txBody>
-      </p:sp>
-      <p:sp>
-        <p:nvSpPr>
-          <p:cNvPr id="7" name="TextBox 6"/>
           <p:cNvSpPr txBox="1"/>
           <p:nvPr/>
         </p:nvSpPr>
@@ -17243,7 +16456,7 @@
       </p:sp>
       <p:sp>
         <p:nvSpPr>
-          <p:cNvPr id="8" name="Rectangle 7"/>
+          <p:cNvPr id="7" name="Rectangle 6"/>
           <p:cNvSpPr/>
           <p:nvPr/>
         </p:nvSpPr>
@@ -17287,7 +16500,7 @@
       </p:sp>
       <p:sp>
         <p:nvSpPr>
-          <p:cNvPr id="9" name="TextBox 8"/>
+          <p:cNvPr id="8" name="TextBox 7"/>
           <p:cNvSpPr txBox="1"/>
           <p:nvPr/>
         </p:nvSpPr>
@@ -17334,7 +16547,7 @@
       </p:sp>
       <p:sp>
         <p:nvSpPr>
-          <p:cNvPr id="10" name="Rectangle 9"/>
+          <p:cNvPr id="9" name="Rectangle 8"/>
           <p:cNvSpPr/>
           <p:nvPr/>
         </p:nvSpPr>
@@ -17378,7 +16591,7 @@
       </p:sp>
       <p:sp>
         <p:nvSpPr>
-          <p:cNvPr id="11" name="TextBox 10"/>
+          <p:cNvPr id="10" name="TextBox 9"/>
           <p:cNvSpPr txBox="1"/>
           <p:nvPr/>
         </p:nvSpPr>
@@ -17425,7 +16638,7 @@
       </p:sp>
       <p:sp>
         <p:nvSpPr>
-          <p:cNvPr id="12" name="TextBox 11"/>
+          <p:cNvPr id="11" name="TextBox 10"/>
           <p:cNvSpPr txBox="1"/>
           <p:nvPr/>
         </p:nvSpPr>
@@ -17496,7 +16709,7 @@
       </p:sp>
       <p:sp>
         <p:nvSpPr>
-          <p:cNvPr id="13" name="Rectangle 12"/>
+          <p:cNvPr id="12" name="Rectangle 11"/>
           <p:cNvSpPr/>
           <p:nvPr/>
         </p:nvSpPr>
@@ -17540,7 +16753,7 @@
       </p:sp>
       <p:sp>
         <p:nvSpPr>
-          <p:cNvPr id="14" name="TextBox 13"/>
+          <p:cNvPr id="13" name="TextBox 12"/>
           <p:cNvSpPr txBox="1"/>
           <p:nvPr/>
         </p:nvSpPr>
@@ -17587,7 +16800,7 @@
       </p:sp>
       <p:sp>
         <p:nvSpPr>
-          <p:cNvPr id="15" name="TextBox 14"/>
+          <p:cNvPr id="14" name="TextBox 13"/>
           <p:cNvSpPr txBox="1"/>
           <p:nvPr/>
         </p:nvSpPr>
@@ -17658,7 +16871,7 @@
       </p:sp>
       <p:sp>
         <p:nvSpPr>
-          <p:cNvPr id="16" name="Rectangle 15"/>
+          <p:cNvPr id="15" name="Rectangle 14"/>
           <p:cNvSpPr/>
           <p:nvPr/>
         </p:nvSpPr>
@@ -17702,7 +16915,7 @@
       </p:sp>
       <p:sp>
         <p:nvSpPr>
-          <p:cNvPr id="17" name="TextBox 16"/>
+          <p:cNvPr id="16" name="TextBox 15"/>
           <p:cNvSpPr txBox="1"/>
           <p:nvPr/>
         </p:nvSpPr>
@@ -17749,7 +16962,7 @@
       </p:sp>
       <p:sp>
         <p:nvSpPr>
-          <p:cNvPr id="18" name="TextBox 17"/>
+          <p:cNvPr id="17" name="TextBox 16"/>
           <p:cNvSpPr txBox="1"/>
           <p:nvPr/>
         </p:nvSpPr>
@@ -17820,7 +17033,7 @@
       </p:sp>
       <p:sp>
         <p:nvSpPr>
-          <p:cNvPr id="19" name="Rectangle 18"/>
+          <p:cNvPr id="18" name="Rectangle 17"/>
           <p:cNvSpPr/>
           <p:nvPr/>
         </p:nvSpPr>
@@ -17864,7 +17077,7 @@
       </p:sp>
       <p:sp>
         <p:nvSpPr>
-          <p:cNvPr id="20" name="TextBox 19"/>
+          <p:cNvPr id="19" name="TextBox 18"/>
           <p:cNvSpPr txBox="1"/>
           <p:nvPr/>
         </p:nvSpPr>
@@ -17911,7 +17124,7 @@
       </p:sp>
       <p:sp>
         <p:nvSpPr>
-          <p:cNvPr id="21" name="TextBox 20"/>
+          <p:cNvPr id="20" name="TextBox 19"/>
           <p:cNvSpPr txBox="1"/>
           <p:nvPr/>
         </p:nvSpPr>
@@ -17982,7 +17195,7 @@
       </p:sp>
       <p:sp>
         <p:nvSpPr>
-          <p:cNvPr id="22" name="Rectangle 21"/>
+          <p:cNvPr id="21" name="Rectangle 20"/>
           <p:cNvSpPr/>
           <p:nvPr/>
         </p:nvSpPr>
@@ -18026,7 +17239,7 @@
       </p:sp>
       <p:sp>
         <p:nvSpPr>
-          <p:cNvPr id="23" name="TextBox 22"/>
+          <p:cNvPr id="22" name="TextBox 21"/>
           <p:cNvSpPr txBox="1"/>
           <p:nvPr/>
         </p:nvSpPr>
@@ -18073,7 +17286,7 @@
       </p:sp>
       <p:sp>
         <p:nvSpPr>
-          <p:cNvPr id="24" name="TextBox 23"/>
+          <p:cNvPr id="23" name="TextBox 22"/>
           <p:cNvSpPr txBox="1"/>
           <p:nvPr/>
         </p:nvSpPr>
@@ -18144,7 +17357,7 @@
       </p:sp>
       <p:sp>
         <p:nvSpPr>
-          <p:cNvPr id="25" name="Rectangle 24"/>
+          <p:cNvPr id="24" name="Rectangle 23"/>
           <p:cNvSpPr/>
           <p:nvPr/>
         </p:nvSpPr>
@@ -18188,7 +17401,7 @@
       </p:sp>
       <p:sp>
         <p:nvSpPr>
-          <p:cNvPr id="26" name="TextBox 25"/>
+          <p:cNvPr id="25" name="TextBox 24"/>
           <p:cNvSpPr txBox="1"/>
           <p:nvPr/>
         </p:nvSpPr>
@@ -18235,7 +17448,7 @@
       </p:sp>
       <p:sp>
         <p:nvSpPr>
-          <p:cNvPr id="27" name="TextBox 26"/>
+          <p:cNvPr id="26" name="TextBox 25"/>
           <p:cNvSpPr txBox="1"/>
           <p:nvPr/>
         </p:nvSpPr>
@@ -18306,7 +17519,7 @@
       </p:sp>
       <p:sp>
         <p:nvSpPr>
-          <p:cNvPr id="28" name="Rectangle 27"/>
+          <p:cNvPr id="27" name="Rectangle 26"/>
           <p:cNvSpPr/>
           <p:nvPr/>
         </p:nvSpPr>
@@ -18350,7 +17563,7 @@
       </p:sp>
       <p:sp>
         <p:nvSpPr>
-          <p:cNvPr id="29" name="TextBox 28"/>
+          <p:cNvPr id="28" name="TextBox 27"/>
           <p:cNvSpPr txBox="1"/>
           <p:nvPr/>
         </p:nvSpPr>
@@ -18397,7 +17610,7 @@
       </p:sp>
       <p:sp>
         <p:nvSpPr>
-          <p:cNvPr id="30" name="TextBox 29"/>
+          <p:cNvPr id="29" name="TextBox 28"/>
           <p:cNvSpPr txBox="1"/>
           <p:nvPr/>
         </p:nvSpPr>
@@ -18468,7 +17681,7 @@
       </p:sp>
       <p:sp>
         <p:nvSpPr>
-          <p:cNvPr id="31" name="Rectangle 30"/>
+          <p:cNvPr id="30" name="Rectangle 29"/>
           <p:cNvSpPr/>
           <p:nvPr/>
         </p:nvSpPr>
@@ -18512,7 +17725,7 @@
       </p:sp>
       <p:sp>
         <p:nvSpPr>
-          <p:cNvPr id="32" name="TextBox 31"/>
+          <p:cNvPr id="31" name="TextBox 30"/>
           <p:cNvSpPr txBox="1"/>
           <p:nvPr/>
         </p:nvSpPr>
@@ -18559,7 +17772,7 @@
       </p:sp>
       <p:sp>
         <p:nvSpPr>
-          <p:cNvPr id="33" name="TextBox 32"/>
+          <p:cNvPr id="32" name="TextBox 31"/>
           <p:cNvSpPr txBox="1"/>
           <p:nvPr/>
         </p:nvSpPr>
@@ -18722,8 +17935,77 @@
         </p:nvSpPr>
         <p:spPr>
           <a:xfrm>
-            <a:off x="713232" y="6272784"/>
-            <a:ext cx="5597920" cy="219456"/>
+            <a:off x="8240677" y="6272784"/>
+            <a:ext cx="2651760" cy="219456"/>
+          </a:xfrm>
+          <a:prstGeom prst="rect">
+            <a:avLst/>
+          </a:prstGeom>
+          <a:noFill/>
+        </p:spPr>
+        <p:txBody>
+          <a:bodyPr wrap="square" lIns="0" rIns="0" tIns="0" bIns="0" anchor="t">
+            <a:spAutoFit/>
+          </a:bodyPr>
+          <a:lstStyle/>
+          <a:p>
+            <a:pPr algn="r">
+              <a:lnSpc>
+                <a:spcPct val="122000"/>
+              </a:lnSpc>
+              <a:spcBef>
+                <a:spcPts val="0"/>
+              </a:spcBef>
+              <a:spcAft>
+                <a:spcPts val="0"/>
+              </a:spcAft>
+            </a:pPr>
+            <a:r>
+              <a:rPr sz="900" b="0" i="0">
+                <a:solidFill>
+                  <a:srgbClr val="636E85"/>
+                </a:solidFill>
+                <a:latin typeface="Segoe UI"/>
+                <a:ea typeface="Segoe UI"/>
+                <a:cs typeface="Segoe UI"/>
+              </a:rPr>
+              <a:t>Lingesh K  ·  OSI2509030</a:t>
+            </a:r>
+            <a:r>
+              <a:rPr sz="900" b="0" i="0">
+                <a:solidFill>
+                  <a:srgbClr val="141C2E"/>
+                </a:solidFill>
+                <a:latin typeface="Segoe UI"/>
+                <a:ea typeface="Segoe UI"/>
+                <a:cs typeface="Segoe UI"/>
+              </a:rPr>
+              <a:t>     </a:t>
+            </a:r>
+            <a:r>
+              <a:rPr sz="900" b="1" i="0">
+                <a:solidFill>
+                  <a:srgbClr val="0E1E3C"/>
+                </a:solidFill>
+                <a:latin typeface="Segoe UI"/>
+                <a:ea typeface="Segoe UI"/>
+                <a:cs typeface="Segoe UI"/>
+              </a:rPr>
+              <a:t>20</a:t>
+            </a:r>
+          </a:p>
+        </p:txBody>
+      </p:sp>
+      <p:sp>
+        <p:nvSpPr>
+          <p:cNvPr id="5" name="TextBox 4"/>
+          <p:cNvSpPr txBox="1"/>
+          <p:nvPr/>
+        </p:nvSpPr>
+        <p:spPr>
+          <a:xfrm>
+            <a:off x="713232" y="566928"/>
+            <a:ext cx="10765231" cy="219456"/>
           </a:xfrm>
           <a:prstGeom prst="rect">
             <a:avLst/>
@@ -18748,106 +18030,15 @@
               </a:spcAft>
             </a:pPr>
             <a:r>
-              <a:rPr sz="900" b="1" i="0">
-                <a:solidFill>
-                  <a:srgbClr val="0E1E3C"/>
-                </a:solidFill>
-                <a:latin typeface="Segoe UI"/>
-                <a:ea typeface="Segoe UI"/>
-                <a:cs typeface="Segoe UI"/>
-              </a:rPr>
-              <a:t>Unit 3</a:t>
-            </a:r>
-            <a:r>
-              <a:rPr sz="900" b="0" i="0">
-                <a:solidFill>
-                  <a:srgbClr val="939EB3"/>
-                </a:solidFill>
-                <a:latin typeface="Segoe UI"/>
-                <a:ea typeface="Segoe UI"/>
-                <a:cs typeface="Segoe UI"/>
-              </a:rPr>
-              <a:t>  ·  </a:t>
-            </a:r>
-            <a:r>
-              <a:rPr sz="900" b="0" i="0">
-                <a:solidFill>
-                  <a:srgbClr val="636E85"/>
-                </a:solidFill>
-                <a:latin typeface="Segoe UI"/>
-                <a:ea typeface="Segoe UI"/>
-                <a:cs typeface="Segoe UI"/>
-              </a:rPr>
-              <a:t>Business Application in AI</a:t>
-            </a:r>
-          </a:p>
-        </p:txBody>
-      </p:sp>
-      <p:sp>
-        <p:nvSpPr>
-          <p:cNvPr id="5" name="TextBox 4"/>
-          <p:cNvSpPr txBox="1"/>
-          <p:nvPr/>
-        </p:nvSpPr>
-        <p:spPr>
-          <a:xfrm>
-            <a:off x="8240677" y="6272784"/>
-            <a:ext cx="2651760" cy="219456"/>
-          </a:xfrm>
-          <a:prstGeom prst="rect">
-            <a:avLst/>
-          </a:prstGeom>
-          <a:noFill/>
-        </p:spPr>
-        <p:txBody>
-          <a:bodyPr wrap="square" lIns="0" rIns="0" tIns="0" bIns="0" anchor="t">
-            <a:spAutoFit/>
-          </a:bodyPr>
-          <a:lstStyle/>
-          <a:p>
-            <a:pPr algn="r">
-              <a:lnSpc>
-                <a:spcPct val="122000"/>
-              </a:lnSpc>
-              <a:spcBef>
-                <a:spcPts val="0"/>
-              </a:spcBef>
-              <a:spcAft>
-                <a:spcPts val="0"/>
-              </a:spcAft>
-            </a:pPr>
-            <a:r>
-              <a:rPr sz="900" b="0" i="0">
-                <a:solidFill>
-                  <a:srgbClr val="636E85"/>
-                </a:solidFill>
-                <a:latin typeface="Segoe UI"/>
-                <a:ea typeface="Segoe UI"/>
-                <a:cs typeface="Segoe UI"/>
-              </a:rPr>
-              <a:t>Lingesh K  ·  OSI2509030</a:t>
-            </a:r>
-            <a:r>
-              <a:rPr sz="900" b="0" i="0">
-                <a:solidFill>
-                  <a:srgbClr val="141C2E"/>
-                </a:solidFill>
-                <a:latin typeface="Segoe UI"/>
-                <a:ea typeface="Segoe UI"/>
-                <a:cs typeface="Segoe UI"/>
-              </a:rPr>
-              <a:t>     </a:t>
-            </a:r>
-            <a:r>
-              <a:rPr sz="900" b="1" i="0">
-                <a:solidFill>
-                  <a:srgbClr val="0E1E3C"/>
-                </a:solidFill>
-                <a:latin typeface="Segoe UI"/>
-                <a:ea typeface="Segoe UI"/>
-                <a:cs typeface="Segoe UI"/>
-              </a:rPr>
-              <a:t>20</a:t>
+              <a:rPr sz="950" b="1" i="0" spc="160">
+                <a:solidFill>
+                  <a:srgbClr val="745CE0"/>
+                </a:solidFill>
+                <a:latin typeface="Segoe UI"/>
+                <a:ea typeface="Segoe UI"/>
+                <a:cs typeface="Segoe UI"/>
+              </a:rPr>
+              <a:t>TYPES OF AGENTS</a:t>
             </a:r>
           </a:p>
         </p:txBody>
@@ -18855,53 +18046,6 @@
       <p:sp>
         <p:nvSpPr>
           <p:cNvPr id="6" name="TextBox 5"/>
-          <p:cNvSpPr txBox="1"/>
-          <p:nvPr/>
-        </p:nvSpPr>
-        <p:spPr>
-          <a:xfrm>
-            <a:off x="713232" y="566928"/>
-            <a:ext cx="10765231" cy="219456"/>
-          </a:xfrm>
-          <a:prstGeom prst="rect">
-            <a:avLst/>
-          </a:prstGeom>
-          <a:noFill/>
-        </p:spPr>
-        <p:txBody>
-          <a:bodyPr wrap="square" lIns="0" rIns="0" tIns="0" bIns="0" anchor="t">
-            <a:spAutoFit/>
-          </a:bodyPr>
-          <a:lstStyle/>
-          <a:p>
-            <a:pPr algn="l">
-              <a:lnSpc>
-                <a:spcPct val="122000"/>
-              </a:lnSpc>
-              <a:spcBef>
-                <a:spcPts val="0"/>
-              </a:spcBef>
-              <a:spcAft>
-                <a:spcPts val="0"/>
-              </a:spcAft>
-            </a:pPr>
-            <a:r>
-              <a:rPr sz="950" b="1" i="0" spc="160">
-                <a:solidFill>
-                  <a:srgbClr val="745CE0"/>
-                </a:solidFill>
-                <a:latin typeface="Segoe UI"/>
-                <a:ea typeface="Segoe UI"/>
-                <a:cs typeface="Segoe UI"/>
-              </a:rPr>
-              <a:t>TYPES OF AGENTS</a:t>
-            </a:r>
-          </a:p>
-        </p:txBody>
-      </p:sp>
-      <p:sp>
-        <p:nvSpPr>
-          <p:cNvPr id="7" name="TextBox 6"/>
           <p:cNvSpPr txBox="1"/>
           <p:nvPr/>
         </p:nvSpPr>
@@ -18948,7 +18092,7 @@
       </p:sp>
       <p:sp>
         <p:nvSpPr>
-          <p:cNvPr id="8" name="Rectangle 7"/>
+          <p:cNvPr id="7" name="Rectangle 6"/>
           <p:cNvSpPr/>
           <p:nvPr/>
         </p:nvSpPr>
@@ -18992,7 +18136,7 @@
       </p:sp>
       <p:sp>
         <p:nvSpPr>
-          <p:cNvPr id="9" name="TextBox 8"/>
+          <p:cNvPr id="8" name="TextBox 7"/>
           <p:cNvSpPr txBox="1"/>
           <p:nvPr/>
         </p:nvSpPr>
@@ -19039,7 +18183,7 @@
       </p:sp>
       <p:sp>
         <p:nvSpPr>
-          <p:cNvPr id="10" name="Rounded Rectangle 9"/>
+          <p:cNvPr id="9" name="Rounded Rectangle 8"/>
           <p:cNvSpPr/>
           <p:nvPr/>
         </p:nvSpPr>
@@ -19093,7 +18237,7 @@
       </p:sp>
       <p:sp>
         <p:nvSpPr>
-          <p:cNvPr id="11" name="Rectangle 10"/>
+          <p:cNvPr id="10" name="Rectangle 9"/>
           <p:cNvSpPr/>
           <p:nvPr/>
         </p:nvSpPr>
@@ -19137,7 +18281,7 @@
       </p:sp>
       <p:sp>
         <p:nvSpPr>
-          <p:cNvPr id="12" name="Oval 11"/>
+          <p:cNvPr id="11" name="Oval 10"/>
           <p:cNvSpPr/>
           <p:nvPr/>
         </p:nvSpPr>
@@ -19181,7 +18325,7 @@
       </p:sp>
       <p:sp>
         <p:nvSpPr>
-          <p:cNvPr id="13" name="TextBox 12"/>
+          <p:cNvPr id="12" name="TextBox 11"/>
           <p:cNvSpPr txBox="1"/>
           <p:nvPr/>
         </p:nvSpPr>
@@ -19228,7 +18372,7 @@
       </p:sp>
       <p:sp>
         <p:nvSpPr>
-          <p:cNvPr id="14" name="TextBox 13"/>
+          <p:cNvPr id="13" name="TextBox 12"/>
           <p:cNvSpPr txBox="1"/>
           <p:nvPr/>
         </p:nvSpPr>
@@ -19275,7 +18419,7 @@
       </p:sp>
       <p:sp>
         <p:nvSpPr>
-          <p:cNvPr id="15" name="TextBox 14"/>
+          <p:cNvPr id="14" name="TextBox 13"/>
           <p:cNvSpPr txBox="1"/>
           <p:nvPr/>
         </p:nvSpPr>
@@ -19322,7 +18466,7 @@
       </p:sp>
       <p:sp>
         <p:nvSpPr>
-          <p:cNvPr id="16" name="Rounded Rectangle 15"/>
+          <p:cNvPr id="15" name="Rounded Rectangle 14"/>
           <p:cNvSpPr/>
           <p:nvPr/>
         </p:nvSpPr>
@@ -19376,7 +18520,7 @@
       </p:sp>
       <p:sp>
         <p:nvSpPr>
-          <p:cNvPr id="17" name="Rectangle 16"/>
+          <p:cNvPr id="16" name="Rectangle 15"/>
           <p:cNvSpPr/>
           <p:nvPr/>
         </p:nvSpPr>
@@ -19420,7 +18564,7 @@
       </p:sp>
       <p:sp>
         <p:nvSpPr>
-          <p:cNvPr id="18" name="Oval 17"/>
+          <p:cNvPr id="17" name="Oval 16"/>
           <p:cNvSpPr/>
           <p:nvPr/>
         </p:nvSpPr>
@@ -19464,7 +18608,7 @@
       </p:sp>
       <p:sp>
         <p:nvSpPr>
-          <p:cNvPr id="19" name="TextBox 18"/>
+          <p:cNvPr id="18" name="TextBox 17"/>
           <p:cNvSpPr txBox="1"/>
           <p:nvPr/>
         </p:nvSpPr>
@@ -19511,7 +18655,7 @@
       </p:sp>
       <p:sp>
         <p:nvSpPr>
-          <p:cNvPr id="20" name="TextBox 19"/>
+          <p:cNvPr id="19" name="TextBox 18"/>
           <p:cNvSpPr txBox="1"/>
           <p:nvPr/>
         </p:nvSpPr>
@@ -19558,7 +18702,7 @@
       </p:sp>
       <p:sp>
         <p:nvSpPr>
-          <p:cNvPr id="21" name="TextBox 20"/>
+          <p:cNvPr id="20" name="TextBox 19"/>
           <p:cNvSpPr txBox="1"/>
           <p:nvPr/>
         </p:nvSpPr>
@@ -19605,7 +18749,7 @@
       </p:sp>
       <p:sp>
         <p:nvSpPr>
-          <p:cNvPr id="22" name="Rounded Rectangle 21"/>
+          <p:cNvPr id="21" name="Rounded Rectangle 20"/>
           <p:cNvSpPr/>
           <p:nvPr/>
         </p:nvSpPr>
@@ -19659,7 +18803,7 @@
       </p:sp>
       <p:sp>
         <p:nvSpPr>
-          <p:cNvPr id="23" name="Rectangle 22"/>
+          <p:cNvPr id="22" name="Rectangle 21"/>
           <p:cNvSpPr/>
           <p:nvPr/>
         </p:nvSpPr>
@@ -19703,7 +18847,7 @@
       </p:sp>
       <p:sp>
         <p:nvSpPr>
-          <p:cNvPr id="24" name="Oval 23"/>
+          <p:cNvPr id="23" name="Oval 22"/>
           <p:cNvSpPr/>
           <p:nvPr/>
         </p:nvSpPr>
@@ -19747,7 +18891,7 @@
       </p:sp>
       <p:sp>
         <p:nvSpPr>
-          <p:cNvPr id="25" name="TextBox 24"/>
+          <p:cNvPr id="24" name="TextBox 23"/>
           <p:cNvSpPr txBox="1"/>
           <p:nvPr/>
         </p:nvSpPr>
@@ -19794,7 +18938,7 @@
       </p:sp>
       <p:sp>
         <p:nvSpPr>
-          <p:cNvPr id="26" name="TextBox 25"/>
+          <p:cNvPr id="25" name="TextBox 24"/>
           <p:cNvSpPr txBox="1"/>
           <p:nvPr/>
         </p:nvSpPr>
@@ -19841,7 +18985,7 @@
       </p:sp>
       <p:sp>
         <p:nvSpPr>
-          <p:cNvPr id="27" name="TextBox 26"/>
+          <p:cNvPr id="26" name="TextBox 25"/>
           <p:cNvSpPr txBox="1"/>
           <p:nvPr/>
         </p:nvSpPr>
@@ -19888,7 +19032,7 @@
       </p:sp>
       <p:sp>
         <p:nvSpPr>
-          <p:cNvPr id="28" name="Rounded Rectangle 27"/>
+          <p:cNvPr id="27" name="Rounded Rectangle 26"/>
           <p:cNvSpPr/>
           <p:nvPr/>
         </p:nvSpPr>
@@ -19942,7 +19086,7 @@
       </p:sp>
       <p:sp>
         <p:nvSpPr>
-          <p:cNvPr id="29" name="Rectangle 28"/>
+          <p:cNvPr id="28" name="Rectangle 27"/>
           <p:cNvSpPr/>
           <p:nvPr/>
         </p:nvSpPr>
@@ -19986,7 +19130,7 @@
       </p:sp>
       <p:sp>
         <p:nvSpPr>
-          <p:cNvPr id="30" name="Oval 29"/>
+          <p:cNvPr id="29" name="Oval 28"/>
           <p:cNvSpPr/>
           <p:nvPr/>
         </p:nvSpPr>
@@ -20030,7 +19174,7 @@
       </p:sp>
       <p:sp>
         <p:nvSpPr>
-          <p:cNvPr id="31" name="TextBox 30"/>
+          <p:cNvPr id="30" name="TextBox 29"/>
           <p:cNvSpPr txBox="1"/>
           <p:nvPr/>
         </p:nvSpPr>
@@ -20077,7 +19221,7 @@
       </p:sp>
       <p:sp>
         <p:nvSpPr>
-          <p:cNvPr id="32" name="TextBox 31"/>
+          <p:cNvPr id="31" name="TextBox 30"/>
           <p:cNvSpPr txBox="1"/>
           <p:nvPr/>
         </p:nvSpPr>
@@ -20124,7 +19268,7 @@
       </p:sp>
       <p:sp>
         <p:nvSpPr>
-          <p:cNvPr id="33" name="TextBox 32"/>
+          <p:cNvPr id="32" name="TextBox 31"/>
           <p:cNvSpPr txBox="1"/>
           <p:nvPr/>
         </p:nvSpPr>
@@ -20171,7 +19315,7 @@
       </p:sp>
       <p:sp>
         <p:nvSpPr>
-          <p:cNvPr id="34" name="Rounded Rectangle 33"/>
+          <p:cNvPr id="33" name="Rounded Rectangle 32"/>
           <p:cNvSpPr/>
           <p:nvPr/>
         </p:nvSpPr>
@@ -20225,7 +19369,7 @@
       </p:sp>
       <p:sp>
         <p:nvSpPr>
-          <p:cNvPr id="35" name="Rectangle 34"/>
+          <p:cNvPr id="34" name="Rectangle 33"/>
           <p:cNvSpPr/>
           <p:nvPr/>
         </p:nvSpPr>
@@ -20269,7 +19413,7 @@
       </p:sp>
       <p:sp>
         <p:nvSpPr>
-          <p:cNvPr id="36" name="Oval 35"/>
+          <p:cNvPr id="35" name="Oval 34"/>
           <p:cNvSpPr/>
           <p:nvPr/>
         </p:nvSpPr>
@@ -20313,7 +19457,7 @@
       </p:sp>
       <p:sp>
         <p:nvSpPr>
-          <p:cNvPr id="37" name="TextBox 36"/>
+          <p:cNvPr id="36" name="TextBox 35"/>
           <p:cNvSpPr txBox="1"/>
           <p:nvPr/>
         </p:nvSpPr>
@@ -20360,7 +19504,7 @@
       </p:sp>
       <p:sp>
         <p:nvSpPr>
-          <p:cNvPr id="38" name="TextBox 37"/>
+          <p:cNvPr id="37" name="TextBox 36"/>
           <p:cNvSpPr txBox="1"/>
           <p:nvPr/>
         </p:nvSpPr>
@@ -20407,7 +19551,7 @@
       </p:sp>
       <p:sp>
         <p:nvSpPr>
-          <p:cNvPr id="39" name="TextBox 38"/>
+          <p:cNvPr id="38" name="TextBox 37"/>
           <p:cNvSpPr txBox="1"/>
           <p:nvPr/>
         </p:nvSpPr>
@@ -20454,7 +19598,7 @@
       </p:sp>
       <p:sp>
         <p:nvSpPr>
-          <p:cNvPr id="40" name="Rounded Rectangle 39"/>
+          <p:cNvPr id="39" name="Rounded Rectangle 38"/>
           <p:cNvSpPr/>
           <p:nvPr/>
         </p:nvSpPr>
@@ -20508,7 +19652,7 @@
       </p:sp>
       <p:sp>
         <p:nvSpPr>
-          <p:cNvPr id="41" name="Rectangle 40"/>
+          <p:cNvPr id="40" name="Rectangle 39"/>
           <p:cNvSpPr/>
           <p:nvPr/>
         </p:nvSpPr>
@@ -20552,7 +19696,7 @@
       </p:sp>
       <p:sp>
         <p:nvSpPr>
-          <p:cNvPr id="42" name="Oval 41"/>
+          <p:cNvPr id="41" name="Oval 40"/>
           <p:cNvSpPr/>
           <p:nvPr/>
         </p:nvSpPr>
@@ -20596,7 +19740,7 @@
       </p:sp>
       <p:sp>
         <p:nvSpPr>
-          <p:cNvPr id="43" name="TextBox 42"/>
+          <p:cNvPr id="42" name="TextBox 41"/>
           <p:cNvSpPr txBox="1"/>
           <p:nvPr/>
         </p:nvSpPr>
@@ -20643,7 +19787,7 @@
       </p:sp>
       <p:sp>
         <p:nvSpPr>
-          <p:cNvPr id="44" name="TextBox 43"/>
+          <p:cNvPr id="43" name="TextBox 42"/>
           <p:cNvSpPr txBox="1"/>
           <p:nvPr/>
         </p:nvSpPr>
@@ -20690,7 +19834,7 @@
       </p:sp>
       <p:sp>
         <p:nvSpPr>
-          <p:cNvPr id="45" name="TextBox 44"/>
+          <p:cNvPr id="44" name="TextBox 43"/>
           <p:cNvSpPr txBox="1"/>
           <p:nvPr/>
         </p:nvSpPr>
@@ -20829,8 +19973,77 @@
         </p:nvSpPr>
         <p:spPr>
           <a:xfrm>
-            <a:off x="713232" y="6272784"/>
-            <a:ext cx="5597920" cy="219456"/>
+            <a:off x="8240677" y="6272784"/>
+            <a:ext cx="2651760" cy="219456"/>
+          </a:xfrm>
+          <a:prstGeom prst="rect">
+            <a:avLst/>
+          </a:prstGeom>
+          <a:noFill/>
+        </p:spPr>
+        <p:txBody>
+          <a:bodyPr wrap="square" lIns="0" rIns="0" tIns="0" bIns="0" anchor="t">
+            <a:spAutoFit/>
+          </a:bodyPr>
+          <a:lstStyle/>
+          <a:p>
+            <a:pPr algn="r">
+              <a:lnSpc>
+                <a:spcPct val="122000"/>
+              </a:lnSpc>
+              <a:spcBef>
+                <a:spcPts val="0"/>
+              </a:spcBef>
+              <a:spcAft>
+                <a:spcPts val="0"/>
+              </a:spcAft>
+            </a:pPr>
+            <a:r>
+              <a:rPr sz="900" b="0" i="0">
+                <a:solidFill>
+                  <a:srgbClr val="636E85"/>
+                </a:solidFill>
+                <a:latin typeface="Segoe UI"/>
+                <a:ea typeface="Segoe UI"/>
+                <a:cs typeface="Segoe UI"/>
+              </a:rPr>
+              <a:t>Lingesh K  ·  OSI2509030</a:t>
+            </a:r>
+            <a:r>
+              <a:rPr sz="900" b="0" i="0">
+                <a:solidFill>
+                  <a:srgbClr val="141C2E"/>
+                </a:solidFill>
+                <a:latin typeface="Segoe UI"/>
+                <a:ea typeface="Segoe UI"/>
+                <a:cs typeface="Segoe UI"/>
+              </a:rPr>
+              <a:t>     </a:t>
+            </a:r>
+            <a:r>
+              <a:rPr sz="900" b="1" i="0">
+                <a:solidFill>
+                  <a:srgbClr val="0E1E3C"/>
+                </a:solidFill>
+                <a:latin typeface="Segoe UI"/>
+                <a:ea typeface="Segoe UI"/>
+                <a:cs typeface="Segoe UI"/>
+              </a:rPr>
+              <a:t>21</a:t>
+            </a:r>
+          </a:p>
+        </p:txBody>
+      </p:sp>
+      <p:sp>
+        <p:nvSpPr>
+          <p:cNvPr id="5" name="TextBox 4"/>
+          <p:cNvSpPr txBox="1"/>
+          <p:nvPr/>
+        </p:nvSpPr>
+        <p:spPr>
+          <a:xfrm>
+            <a:off x="713232" y="566928"/>
+            <a:ext cx="10765231" cy="219456"/>
           </a:xfrm>
           <a:prstGeom prst="rect">
             <a:avLst/>
@@ -20855,106 +20068,15 @@
               </a:spcAft>
             </a:pPr>
             <a:r>
-              <a:rPr sz="900" b="1" i="0">
-                <a:solidFill>
-                  <a:srgbClr val="0E1E3C"/>
-                </a:solidFill>
-                <a:latin typeface="Segoe UI"/>
-                <a:ea typeface="Segoe UI"/>
-                <a:cs typeface="Segoe UI"/>
-              </a:rPr>
-              <a:t>Unit 3</a:t>
-            </a:r>
-            <a:r>
-              <a:rPr sz="900" b="0" i="0">
-                <a:solidFill>
-                  <a:srgbClr val="939EB3"/>
-                </a:solidFill>
-                <a:latin typeface="Segoe UI"/>
-                <a:ea typeface="Segoe UI"/>
-                <a:cs typeface="Segoe UI"/>
-              </a:rPr>
-              <a:t>  ·  </a:t>
-            </a:r>
-            <a:r>
-              <a:rPr sz="900" b="0" i="0">
-                <a:solidFill>
-                  <a:srgbClr val="636E85"/>
-                </a:solidFill>
-                <a:latin typeface="Segoe UI"/>
-                <a:ea typeface="Segoe UI"/>
-                <a:cs typeface="Segoe UI"/>
-              </a:rPr>
-              <a:t>Business Application in AI</a:t>
-            </a:r>
-          </a:p>
-        </p:txBody>
-      </p:sp>
-      <p:sp>
-        <p:nvSpPr>
-          <p:cNvPr id="5" name="TextBox 4"/>
-          <p:cNvSpPr txBox="1"/>
-          <p:nvPr/>
-        </p:nvSpPr>
-        <p:spPr>
-          <a:xfrm>
-            <a:off x="8240677" y="6272784"/>
-            <a:ext cx="2651760" cy="219456"/>
-          </a:xfrm>
-          <a:prstGeom prst="rect">
-            <a:avLst/>
-          </a:prstGeom>
-          <a:noFill/>
-        </p:spPr>
-        <p:txBody>
-          <a:bodyPr wrap="square" lIns="0" rIns="0" tIns="0" bIns="0" anchor="t">
-            <a:spAutoFit/>
-          </a:bodyPr>
-          <a:lstStyle/>
-          <a:p>
-            <a:pPr algn="r">
-              <a:lnSpc>
-                <a:spcPct val="122000"/>
-              </a:lnSpc>
-              <a:spcBef>
-                <a:spcPts val="0"/>
-              </a:spcBef>
-              <a:spcAft>
-                <a:spcPts val="0"/>
-              </a:spcAft>
-            </a:pPr>
-            <a:r>
-              <a:rPr sz="900" b="0" i="0">
-                <a:solidFill>
-                  <a:srgbClr val="636E85"/>
-                </a:solidFill>
-                <a:latin typeface="Segoe UI"/>
-                <a:ea typeface="Segoe UI"/>
-                <a:cs typeface="Segoe UI"/>
-              </a:rPr>
-              <a:t>Lingesh K  ·  OSI2509030</a:t>
-            </a:r>
-            <a:r>
-              <a:rPr sz="900" b="0" i="0">
-                <a:solidFill>
-                  <a:srgbClr val="141C2E"/>
-                </a:solidFill>
-                <a:latin typeface="Segoe UI"/>
-                <a:ea typeface="Segoe UI"/>
-                <a:cs typeface="Segoe UI"/>
-              </a:rPr>
-              <a:t>     </a:t>
-            </a:r>
-            <a:r>
-              <a:rPr sz="900" b="1" i="0">
-                <a:solidFill>
-                  <a:srgbClr val="0E1E3C"/>
-                </a:solidFill>
-                <a:latin typeface="Segoe UI"/>
-                <a:ea typeface="Segoe UI"/>
-                <a:cs typeface="Segoe UI"/>
-              </a:rPr>
-              <a:t>21</a:t>
+              <a:rPr sz="950" b="1" i="0" spc="160">
+                <a:solidFill>
+                  <a:srgbClr val="3B7AF7"/>
+                </a:solidFill>
+                <a:latin typeface="Segoe UI"/>
+                <a:ea typeface="Segoe UI"/>
+                <a:cs typeface="Segoe UI"/>
+              </a:rPr>
+              <a:t>HOW IT WORKS</a:t>
             </a:r>
           </a:p>
         </p:txBody>
@@ -20962,53 +20084,6 @@
       <p:sp>
         <p:nvSpPr>
           <p:cNvPr id="6" name="TextBox 5"/>
-          <p:cNvSpPr txBox="1"/>
-          <p:nvPr/>
-        </p:nvSpPr>
-        <p:spPr>
-          <a:xfrm>
-            <a:off x="713232" y="566928"/>
-            <a:ext cx="10765231" cy="219456"/>
-          </a:xfrm>
-          <a:prstGeom prst="rect">
-            <a:avLst/>
-          </a:prstGeom>
-          <a:noFill/>
-        </p:spPr>
-        <p:txBody>
-          <a:bodyPr wrap="square" lIns="0" rIns="0" tIns="0" bIns="0" anchor="t">
-            <a:spAutoFit/>
-          </a:bodyPr>
-          <a:lstStyle/>
-          <a:p>
-            <a:pPr algn="l">
-              <a:lnSpc>
-                <a:spcPct val="122000"/>
-              </a:lnSpc>
-              <a:spcBef>
-                <a:spcPts val="0"/>
-              </a:spcBef>
-              <a:spcAft>
-                <a:spcPts val="0"/>
-              </a:spcAft>
-            </a:pPr>
-            <a:r>
-              <a:rPr sz="950" b="1" i="0" spc="160">
-                <a:solidFill>
-                  <a:srgbClr val="3B7AF7"/>
-                </a:solidFill>
-                <a:latin typeface="Segoe UI"/>
-                <a:ea typeface="Segoe UI"/>
-                <a:cs typeface="Segoe UI"/>
-              </a:rPr>
-              <a:t>HOW IT WORKS</a:t>
-            </a:r>
-          </a:p>
-        </p:txBody>
-      </p:sp>
-      <p:sp>
-        <p:nvSpPr>
-          <p:cNvPr id="7" name="TextBox 6"/>
           <p:cNvSpPr txBox="1"/>
           <p:nvPr/>
         </p:nvSpPr>
@@ -21055,7 +20130,7 @@
       </p:sp>
       <p:sp>
         <p:nvSpPr>
-          <p:cNvPr id="8" name="Rectangle 7"/>
+          <p:cNvPr id="7" name="Rectangle 6"/>
           <p:cNvSpPr/>
           <p:nvPr/>
         </p:nvSpPr>
@@ -21099,7 +20174,7 @@
       </p:sp>
       <p:sp>
         <p:nvSpPr>
-          <p:cNvPr id="9" name="Rectangle 8"/>
+          <p:cNvPr id="8" name="Rectangle 7"/>
           <p:cNvSpPr/>
           <p:nvPr/>
         </p:nvSpPr>
@@ -21143,7 +20218,7 @@
       </p:sp>
       <p:sp>
         <p:nvSpPr>
-          <p:cNvPr id="10" name="Oval 9"/>
+          <p:cNvPr id="9" name="Oval 8"/>
           <p:cNvSpPr/>
           <p:nvPr/>
         </p:nvSpPr>
@@ -21187,7 +20262,7 @@
       </p:sp>
       <p:sp>
         <p:nvSpPr>
-          <p:cNvPr id="11" name="TextBox 10"/>
+          <p:cNvPr id="10" name="TextBox 9"/>
           <p:cNvSpPr txBox="1"/>
           <p:nvPr/>
         </p:nvSpPr>
@@ -21234,7 +20309,7 @@
       </p:sp>
       <p:sp>
         <p:nvSpPr>
-          <p:cNvPr id="12" name="Rounded Rectangle 11"/>
+          <p:cNvPr id="11" name="Rounded Rectangle 10"/>
           <p:cNvSpPr/>
           <p:nvPr/>
         </p:nvSpPr>
@@ -21282,7 +20357,7 @@
       </p:sp>
       <p:sp>
         <p:nvSpPr>
-          <p:cNvPr id="13" name="TextBox 12"/>
+          <p:cNvPr id="12" name="TextBox 11"/>
           <p:cNvSpPr txBox="1"/>
           <p:nvPr/>
         </p:nvSpPr>
@@ -21329,7 +20404,7 @@
       </p:sp>
       <p:sp>
         <p:nvSpPr>
-          <p:cNvPr id="14" name="TextBox 13"/>
+          <p:cNvPr id="13" name="TextBox 12"/>
           <p:cNvSpPr txBox="1"/>
           <p:nvPr/>
         </p:nvSpPr>
@@ -21376,7 +20451,7 @@
       </p:sp>
       <p:sp>
         <p:nvSpPr>
-          <p:cNvPr id="15" name="Oval 14"/>
+          <p:cNvPr id="14" name="Oval 13"/>
           <p:cNvSpPr/>
           <p:nvPr/>
         </p:nvSpPr>
@@ -21420,7 +20495,7 @@
       </p:sp>
       <p:sp>
         <p:nvSpPr>
-          <p:cNvPr id="16" name="TextBox 15"/>
+          <p:cNvPr id="15" name="TextBox 14"/>
           <p:cNvSpPr txBox="1"/>
           <p:nvPr/>
         </p:nvSpPr>
@@ -21467,7 +20542,7 @@
       </p:sp>
       <p:sp>
         <p:nvSpPr>
-          <p:cNvPr id="17" name="Rounded Rectangle 16"/>
+          <p:cNvPr id="16" name="Rounded Rectangle 15"/>
           <p:cNvSpPr/>
           <p:nvPr/>
         </p:nvSpPr>
@@ -21515,7 +20590,7 @@
       </p:sp>
       <p:sp>
         <p:nvSpPr>
-          <p:cNvPr id="18" name="TextBox 17"/>
+          <p:cNvPr id="17" name="TextBox 16"/>
           <p:cNvSpPr txBox="1"/>
           <p:nvPr/>
         </p:nvSpPr>
@@ -21562,7 +20637,7 @@
       </p:sp>
       <p:sp>
         <p:nvSpPr>
-          <p:cNvPr id="19" name="TextBox 18"/>
+          <p:cNvPr id="18" name="TextBox 17"/>
           <p:cNvSpPr txBox="1"/>
           <p:nvPr/>
         </p:nvSpPr>
@@ -21609,7 +20684,7 @@
       </p:sp>
       <p:sp>
         <p:nvSpPr>
-          <p:cNvPr id="20" name="Oval 19"/>
+          <p:cNvPr id="19" name="Oval 18"/>
           <p:cNvSpPr/>
           <p:nvPr/>
         </p:nvSpPr>
@@ -21653,7 +20728,7 @@
       </p:sp>
       <p:sp>
         <p:nvSpPr>
-          <p:cNvPr id="21" name="TextBox 20"/>
+          <p:cNvPr id="20" name="TextBox 19"/>
           <p:cNvSpPr txBox="1"/>
           <p:nvPr/>
         </p:nvSpPr>
@@ -21700,7 +20775,7 @@
       </p:sp>
       <p:sp>
         <p:nvSpPr>
-          <p:cNvPr id="22" name="Rounded Rectangle 21"/>
+          <p:cNvPr id="21" name="Rounded Rectangle 20"/>
           <p:cNvSpPr/>
           <p:nvPr/>
         </p:nvSpPr>
@@ -21748,7 +20823,7 @@
       </p:sp>
       <p:sp>
         <p:nvSpPr>
-          <p:cNvPr id="23" name="TextBox 22"/>
+          <p:cNvPr id="22" name="TextBox 21"/>
           <p:cNvSpPr txBox="1"/>
           <p:nvPr/>
         </p:nvSpPr>
@@ -21795,7 +20870,7 @@
       </p:sp>
       <p:sp>
         <p:nvSpPr>
-          <p:cNvPr id="24" name="TextBox 23"/>
+          <p:cNvPr id="23" name="TextBox 22"/>
           <p:cNvSpPr txBox="1"/>
           <p:nvPr/>
         </p:nvSpPr>
@@ -21842,7 +20917,7 @@
       </p:sp>
       <p:sp>
         <p:nvSpPr>
-          <p:cNvPr id="25" name="Oval 24"/>
+          <p:cNvPr id="24" name="Oval 23"/>
           <p:cNvSpPr/>
           <p:nvPr/>
         </p:nvSpPr>
@@ -21886,7 +20961,7 @@
       </p:sp>
       <p:sp>
         <p:nvSpPr>
-          <p:cNvPr id="26" name="TextBox 25"/>
+          <p:cNvPr id="25" name="TextBox 24"/>
           <p:cNvSpPr txBox="1"/>
           <p:nvPr/>
         </p:nvSpPr>
@@ -21933,7 +21008,7 @@
       </p:sp>
       <p:sp>
         <p:nvSpPr>
-          <p:cNvPr id="27" name="Rounded Rectangle 26"/>
+          <p:cNvPr id="26" name="Rounded Rectangle 25"/>
           <p:cNvSpPr/>
           <p:nvPr/>
         </p:nvSpPr>
@@ -21981,7 +21056,7 @@
       </p:sp>
       <p:sp>
         <p:nvSpPr>
-          <p:cNvPr id="28" name="TextBox 27"/>
+          <p:cNvPr id="27" name="TextBox 26"/>
           <p:cNvSpPr txBox="1"/>
           <p:nvPr/>
         </p:nvSpPr>
@@ -22028,7 +21103,7 @@
       </p:sp>
       <p:sp>
         <p:nvSpPr>
-          <p:cNvPr id="29" name="TextBox 28"/>
+          <p:cNvPr id="28" name="TextBox 27"/>
           <p:cNvSpPr txBox="1"/>
           <p:nvPr/>
         </p:nvSpPr>
@@ -22075,7 +21150,7 @@
       </p:sp>
       <p:sp>
         <p:nvSpPr>
-          <p:cNvPr id="30" name="Oval 29"/>
+          <p:cNvPr id="29" name="Oval 28"/>
           <p:cNvSpPr/>
           <p:nvPr/>
         </p:nvSpPr>
@@ -22119,7 +21194,7 @@
       </p:sp>
       <p:sp>
         <p:nvSpPr>
-          <p:cNvPr id="31" name="TextBox 30"/>
+          <p:cNvPr id="30" name="TextBox 29"/>
           <p:cNvSpPr txBox="1"/>
           <p:nvPr/>
         </p:nvSpPr>
@@ -22166,7 +21241,7 @@
       </p:sp>
       <p:sp>
         <p:nvSpPr>
-          <p:cNvPr id="32" name="Rounded Rectangle 31"/>
+          <p:cNvPr id="31" name="Rounded Rectangle 30"/>
           <p:cNvSpPr/>
           <p:nvPr/>
         </p:nvSpPr>
@@ -22214,7 +21289,7 @@
       </p:sp>
       <p:sp>
         <p:nvSpPr>
-          <p:cNvPr id="33" name="TextBox 32"/>
+          <p:cNvPr id="32" name="TextBox 31"/>
           <p:cNvSpPr txBox="1"/>
           <p:nvPr/>
         </p:nvSpPr>
@@ -22261,7 +21336,7 @@
       </p:sp>
       <p:sp>
         <p:nvSpPr>
-          <p:cNvPr id="34" name="TextBox 33"/>
+          <p:cNvPr id="33" name="TextBox 32"/>
           <p:cNvSpPr txBox="1"/>
           <p:nvPr/>
         </p:nvSpPr>
@@ -22308,7 +21383,7 @@
       </p:sp>
       <p:sp>
         <p:nvSpPr>
-          <p:cNvPr id="35" name="Oval 34"/>
+          <p:cNvPr id="34" name="Oval 33"/>
           <p:cNvSpPr/>
           <p:nvPr/>
         </p:nvSpPr>
@@ -22352,7 +21427,7 @@
       </p:sp>
       <p:sp>
         <p:nvSpPr>
-          <p:cNvPr id="36" name="TextBox 35"/>
+          <p:cNvPr id="35" name="TextBox 34"/>
           <p:cNvSpPr txBox="1"/>
           <p:nvPr/>
         </p:nvSpPr>
@@ -22399,7 +21474,7 @@
       </p:sp>
       <p:sp>
         <p:nvSpPr>
-          <p:cNvPr id="37" name="Rounded Rectangle 36"/>
+          <p:cNvPr id="36" name="Rounded Rectangle 35"/>
           <p:cNvSpPr/>
           <p:nvPr/>
         </p:nvSpPr>
@@ -22447,7 +21522,7 @@
       </p:sp>
       <p:sp>
         <p:nvSpPr>
-          <p:cNvPr id="38" name="TextBox 37"/>
+          <p:cNvPr id="37" name="TextBox 36"/>
           <p:cNvSpPr txBox="1"/>
           <p:nvPr/>
         </p:nvSpPr>
@@ -22494,7 +21569,7 @@
       </p:sp>
       <p:sp>
         <p:nvSpPr>
-          <p:cNvPr id="39" name="TextBox 38"/>
+          <p:cNvPr id="38" name="TextBox 37"/>
           <p:cNvSpPr txBox="1"/>
           <p:nvPr/>
         </p:nvSpPr>
@@ -22541,7 +21616,7 @@
       </p:sp>
       <p:sp>
         <p:nvSpPr>
-          <p:cNvPr id="40" name="Rounded Rectangle 39"/>
+          <p:cNvPr id="39" name="Rounded Rectangle 38"/>
           <p:cNvSpPr/>
           <p:nvPr/>
         </p:nvSpPr>
@@ -22608,7 +21683,7 @@
       </p:sp>
       <p:sp>
         <p:nvSpPr>
-          <p:cNvPr id="41" name="Rectangle 40"/>
+          <p:cNvPr id="40" name="Rectangle 39"/>
           <p:cNvSpPr/>
           <p:nvPr/>
         </p:nvSpPr>
@@ -22744,8 +21819,77 @@
         </p:nvSpPr>
         <p:spPr>
           <a:xfrm>
-            <a:off x="713232" y="6272784"/>
-            <a:ext cx="5597920" cy="219456"/>
+            <a:off x="8240677" y="6272784"/>
+            <a:ext cx="2651760" cy="219456"/>
+          </a:xfrm>
+          <a:prstGeom prst="rect">
+            <a:avLst/>
+          </a:prstGeom>
+          <a:noFill/>
+        </p:spPr>
+        <p:txBody>
+          <a:bodyPr wrap="square" lIns="0" rIns="0" tIns="0" bIns="0" anchor="t">
+            <a:spAutoFit/>
+          </a:bodyPr>
+          <a:lstStyle/>
+          <a:p>
+            <a:pPr algn="r">
+              <a:lnSpc>
+                <a:spcPct val="122000"/>
+              </a:lnSpc>
+              <a:spcBef>
+                <a:spcPts val="0"/>
+              </a:spcBef>
+              <a:spcAft>
+                <a:spcPts val="0"/>
+              </a:spcAft>
+            </a:pPr>
+            <a:r>
+              <a:rPr sz="900" b="0" i="0">
+                <a:solidFill>
+                  <a:srgbClr val="636E85"/>
+                </a:solidFill>
+                <a:latin typeface="Segoe UI"/>
+                <a:ea typeface="Segoe UI"/>
+                <a:cs typeface="Segoe UI"/>
+              </a:rPr>
+              <a:t>Lingesh K  ·  OSI2509030</a:t>
+            </a:r>
+            <a:r>
+              <a:rPr sz="900" b="0" i="0">
+                <a:solidFill>
+                  <a:srgbClr val="141C2E"/>
+                </a:solidFill>
+                <a:latin typeface="Segoe UI"/>
+                <a:ea typeface="Segoe UI"/>
+                <a:cs typeface="Segoe UI"/>
+              </a:rPr>
+              <a:t>     </a:t>
+            </a:r>
+            <a:r>
+              <a:rPr sz="900" b="1" i="0">
+                <a:solidFill>
+                  <a:srgbClr val="0E1E3C"/>
+                </a:solidFill>
+                <a:latin typeface="Segoe UI"/>
+                <a:ea typeface="Segoe UI"/>
+                <a:cs typeface="Segoe UI"/>
+              </a:rPr>
+              <a:t>22</a:t>
+            </a:r>
+          </a:p>
+        </p:txBody>
+      </p:sp>
+      <p:sp>
+        <p:nvSpPr>
+          <p:cNvPr id="5" name="TextBox 4"/>
+          <p:cNvSpPr txBox="1"/>
+          <p:nvPr/>
+        </p:nvSpPr>
+        <p:spPr>
+          <a:xfrm>
+            <a:off x="713232" y="566928"/>
+            <a:ext cx="10765231" cy="219456"/>
           </a:xfrm>
           <a:prstGeom prst="rect">
             <a:avLst/>
@@ -22770,106 +21914,15 @@
               </a:spcAft>
             </a:pPr>
             <a:r>
-              <a:rPr sz="900" b="1" i="0">
-                <a:solidFill>
-                  <a:srgbClr val="0E1E3C"/>
-                </a:solidFill>
-                <a:latin typeface="Segoe UI"/>
-                <a:ea typeface="Segoe UI"/>
-                <a:cs typeface="Segoe UI"/>
-              </a:rPr>
-              <a:t>Unit 3</a:t>
-            </a:r>
-            <a:r>
-              <a:rPr sz="900" b="0" i="0">
-                <a:solidFill>
-                  <a:srgbClr val="939EB3"/>
-                </a:solidFill>
-                <a:latin typeface="Segoe UI"/>
-                <a:ea typeface="Segoe UI"/>
-                <a:cs typeface="Segoe UI"/>
-              </a:rPr>
-              <a:t>  ·  </a:t>
-            </a:r>
-            <a:r>
-              <a:rPr sz="900" b="0" i="0">
-                <a:solidFill>
-                  <a:srgbClr val="636E85"/>
-                </a:solidFill>
-                <a:latin typeface="Segoe UI"/>
-                <a:ea typeface="Segoe UI"/>
-                <a:cs typeface="Segoe UI"/>
-              </a:rPr>
-              <a:t>Business Application in AI</a:t>
-            </a:r>
-          </a:p>
-        </p:txBody>
-      </p:sp>
-      <p:sp>
-        <p:nvSpPr>
-          <p:cNvPr id="5" name="TextBox 4"/>
-          <p:cNvSpPr txBox="1"/>
-          <p:nvPr/>
-        </p:nvSpPr>
-        <p:spPr>
-          <a:xfrm>
-            <a:off x="8240677" y="6272784"/>
-            <a:ext cx="2651760" cy="219456"/>
-          </a:xfrm>
-          <a:prstGeom prst="rect">
-            <a:avLst/>
-          </a:prstGeom>
-          <a:noFill/>
-        </p:spPr>
-        <p:txBody>
-          <a:bodyPr wrap="square" lIns="0" rIns="0" tIns="0" bIns="0" anchor="t">
-            <a:spAutoFit/>
-          </a:bodyPr>
-          <a:lstStyle/>
-          <a:p>
-            <a:pPr algn="r">
-              <a:lnSpc>
-                <a:spcPct val="122000"/>
-              </a:lnSpc>
-              <a:spcBef>
-                <a:spcPts val="0"/>
-              </a:spcBef>
-              <a:spcAft>
-                <a:spcPts val="0"/>
-              </a:spcAft>
-            </a:pPr>
-            <a:r>
-              <a:rPr sz="900" b="0" i="0">
-                <a:solidFill>
-                  <a:srgbClr val="636E85"/>
-                </a:solidFill>
-                <a:latin typeface="Segoe UI"/>
-                <a:ea typeface="Segoe UI"/>
-                <a:cs typeface="Segoe UI"/>
-              </a:rPr>
-              <a:t>Lingesh K  ·  OSI2509030</a:t>
-            </a:r>
-            <a:r>
-              <a:rPr sz="900" b="0" i="0">
-                <a:solidFill>
-                  <a:srgbClr val="141C2E"/>
-                </a:solidFill>
-                <a:latin typeface="Segoe UI"/>
-                <a:ea typeface="Segoe UI"/>
-                <a:cs typeface="Segoe UI"/>
-              </a:rPr>
-              <a:t>     </a:t>
-            </a:r>
-            <a:r>
-              <a:rPr sz="900" b="1" i="0">
-                <a:solidFill>
-                  <a:srgbClr val="0E1E3C"/>
-                </a:solidFill>
-                <a:latin typeface="Segoe UI"/>
-                <a:ea typeface="Segoe UI"/>
-                <a:cs typeface="Segoe UI"/>
-              </a:rPr>
-              <a:t>22</a:t>
+              <a:rPr sz="950" b="1" i="0" spc="160">
+                <a:solidFill>
+                  <a:srgbClr val="3B7AF7"/>
+                </a:solidFill>
+                <a:latin typeface="Segoe UI"/>
+                <a:ea typeface="Segoe UI"/>
+                <a:cs typeface="Segoe UI"/>
+              </a:rPr>
+              <a:t>IN PRACTICE</a:t>
             </a:r>
           </a:p>
         </p:txBody>
@@ -22877,53 +21930,6 @@
       <p:sp>
         <p:nvSpPr>
           <p:cNvPr id="6" name="TextBox 5"/>
-          <p:cNvSpPr txBox="1"/>
-          <p:nvPr/>
-        </p:nvSpPr>
-        <p:spPr>
-          <a:xfrm>
-            <a:off x="713232" y="566928"/>
-            <a:ext cx="10765231" cy="219456"/>
-          </a:xfrm>
-          <a:prstGeom prst="rect">
-            <a:avLst/>
-          </a:prstGeom>
-          <a:noFill/>
-        </p:spPr>
-        <p:txBody>
-          <a:bodyPr wrap="square" lIns="0" rIns="0" tIns="0" bIns="0" anchor="t">
-            <a:spAutoFit/>
-          </a:bodyPr>
-          <a:lstStyle/>
-          <a:p>
-            <a:pPr algn="l">
-              <a:lnSpc>
-                <a:spcPct val="122000"/>
-              </a:lnSpc>
-              <a:spcBef>
-                <a:spcPts val="0"/>
-              </a:spcBef>
-              <a:spcAft>
-                <a:spcPts val="0"/>
-              </a:spcAft>
-            </a:pPr>
-            <a:r>
-              <a:rPr sz="950" b="1" i="0" spc="160">
-                <a:solidFill>
-                  <a:srgbClr val="3B7AF7"/>
-                </a:solidFill>
-                <a:latin typeface="Segoe UI"/>
-                <a:ea typeface="Segoe UI"/>
-                <a:cs typeface="Segoe UI"/>
-              </a:rPr>
-              <a:t>IN PRACTICE</a:t>
-            </a:r>
-          </a:p>
-        </p:txBody>
-      </p:sp>
-      <p:sp>
-        <p:nvSpPr>
-          <p:cNvPr id="7" name="TextBox 6"/>
           <p:cNvSpPr txBox="1"/>
           <p:nvPr/>
         </p:nvSpPr>
@@ -22970,7 +21976,7 @@
       </p:sp>
       <p:sp>
         <p:nvSpPr>
-          <p:cNvPr id="8" name="Rectangle 7"/>
+          <p:cNvPr id="7" name="Rectangle 6"/>
           <p:cNvSpPr/>
           <p:nvPr/>
         </p:nvSpPr>
@@ -23014,7 +22020,7 @@
       </p:sp>
       <p:sp>
         <p:nvSpPr>
-          <p:cNvPr id="9" name="TextBox 8"/>
+          <p:cNvPr id="8" name="TextBox 7"/>
           <p:cNvSpPr txBox="1"/>
           <p:nvPr/>
         </p:nvSpPr>
@@ -23061,7 +22067,7 @@
       </p:sp>
       <p:sp>
         <p:nvSpPr>
-          <p:cNvPr id="10" name="Rectangle 9"/>
+          <p:cNvPr id="9" name="Rectangle 8"/>
           <p:cNvSpPr/>
           <p:nvPr/>
         </p:nvSpPr>
@@ -23105,7 +22111,7 @@
       </p:sp>
       <p:sp>
         <p:nvSpPr>
-          <p:cNvPr id="11" name="Rounded Rectangle 10"/>
+          <p:cNvPr id="10" name="Rounded Rectangle 9"/>
           <p:cNvSpPr/>
           <p:nvPr/>
         </p:nvSpPr>
@@ -23151,7 +22157,7 @@
       </p:sp>
       <p:sp>
         <p:nvSpPr>
-          <p:cNvPr id="12" name="TextBox 11"/>
+          <p:cNvPr id="11" name="TextBox 10"/>
           <p:cNvSpPr txBox="1"/>
           <p:nvPr/>
         </p:nvSpPr>
@@ -23198,7 +22204,7 @@
       </p:sp>
       <p:sp>
         <p:nvSpPr>
-          <p:cNvPr id="13" name="Rounded Rectangle 12"/>
+          <p:cNvPr id="12" name="Rounded Rectangle 11"/>
           <p:cNvSpPr/>
           <p:nvPr/>
         </p:nvSpPr>
@@ -23244,7 +22250,7 @@
       </p:sp>
       <p:sp>
         <p:nvSpPr>
-          <p:cNvPr id="14" name="TextBox 13"/>
+          <p:cNvPr id="13" name="TextBox 12"/>
           <p:cNvSpPr txBox="1"/>
           <p:nvPr/>
         </p:nvSpPr>
@@ -23291,7 +22297,7 @@
       </p:sp>
       <p:sp>
         <p:nvSpPr>
-          <p:cNvPr id="15" name="Rounded Rectangle 14"/>
+          <p:cNvPr id="14" name="Rounded Rectangle 13"/>
           <p:cNvSpPr/>
           <p:nvPr/>
         </p:nvSpPr>
@@ -23337,7 +22343,7 @@
       </p:sp>
       <p:sp>
         <p:nvSpPr>
-          <p:cNvPr id="16" name="TextBox 15"/>
+          <p:cNvPr id="15" name="TextBox 14"/>
           <p:cNvSpPr txBox="1"/>
           <p:nvPr/>
         </p:nvSpPr>
@@ -23384,7 +22390,7 @@
       </p:sp>
       <p:sp>
         <p:nvSpPr>
-          <p:cNvPr id="17" name="Rounded Rectangle 16"/>
+          <p:cNvPr id="16" name="Rounded Rectangle 15"/>
           <p:cNvSpPr/>
           <p:nvPr/>
         </p:nvSpPr>
@@ -23430,7 +22436,7 @@
       </p:sp>
       <p:sp>
         <p:nvSpPr>
-          <p:cNvPr id="18" name="TextBox 17"/>
+          <p:cNvPr id="17" name="TextBox 16"/>
           <p:cNvSpPr txBox="1"/>
           <p:nvPr/>
         </p:nvSpPr>
@@ -23477,7 +22483,7 @@
       </p:sp>
       <p:sp>
         <p:nvSpPr>
-          <p:cNvPr id="19" name="Rounded Rectangle 18"/>
+          <p:cNvPr id="18" name="Rounded Rectangle 17"/>
           <p:cNvSpPr/>
           <p:nvPr/>
         </p:nvSpPr>
@@ -23523,7 +22529,7 @@
       </p:sp>
       <p:sp>
         <p:nvSpPr>
-          <p:cNvPr id="20" name="TextBox 19"/>
+          <p:cNvPr id="19" name="TextBox 18"/>
           <p:cNvSpPr txBox="1"/>
           <p:nvPr/>
         </p:nvSpPr>
@@ -23570,7 +22576,7 @@
       </p:sp>
       <p:sp>
         <p:nvSpPr>
-          <p:cNvPr id="21" name="Rounded Rectangle 20"/>
+          <p:cNvPr id="20" name="Rounded Rectangle 19"/>
           <p:cNvSpPr/>
           <p:nvPr/>
         </p:nvSpPr>
@@ -23616,7 +22622,7 @@
       </p:sp>
       <p:sp>
         <p:nvSpPr>
-          <p:cNvPr id="22" name="TextBox 21"/>
+          <p:cNvPr id="21" name="TextBox 20"/>
           <p:cNvSpPr txBox="1"/>
           <p:nvPr/>
         </p:nvSpPr>
@@ -23663,7 +22669,7 @@
       </p:sp>
       <p:sp>
         <p:nvSpPr>
-          <p:cNvPr id="23" name="Rounded Rectangle 22"/>
+          <p:cNvPr id="22" name="Rounded Rectangle 21"/>
           <p:cNvSpPr/>
           <p:nvPr/>
         </p:nvSpPr>
@@ -23717,7 +22723,7 @@
       </p:sp>
       <p:sp>
         <p:nvSpPr>
-          <p:cNvPr id="24" name="Rectangle 23"/>
+          <p:cNvPr id="23" name="Rectangle 22"/>
           <p:cNvSpPr/>
           <p:nvPr/>
         </p:nvSpPr>
@@ -23761,7 +22767,7 @@
       </p:sp>
       <p:sp>
         <p:nvSpPr>
-          <p:cNvPr id="25" name="TextBox 24"/>
+          <p:cNvPr id="24" name="TextBox 23"/>
           <p:cNvSpPr txBox="1"/>
           <p:nvPr/>
         </p:nvSpPr>
@@ -23808,7 +22814,7 @@
       </p:sp>
       <p:sp>
         <p:nvSpPr>
-          <p:cNvPr id="26" name="TextBox 25"/>
+          <p:cNvPr id="25" name="TextBox 24"/>
           <p:cNvSpPr txBox="1"/>
           <p:nvPr/>
         </p:nvSpPr>
@@ -23855,7 +22861,7 @@
       </p:sp>
       <p:sp>
         <p:nvSpPr>
-          <p:cNvPr id="27" name="Rounded Rectangle 26"/>
+          <p:cNvPr id="26" name="Rounded Rectangle 25"/>
           <p:cNvSpPr/>
           <p:nvPr/>
         </p:nvSpPr>
@@ -23909,7 +22915,7 @@
       </p:sp>
       <p:sp>
         <p:nvSpPr>
-          <p:cNvPr id="28" name="Rectangle 27"/>
+          <p:cNvPr id="27" name="Rectangle 26"/>
           <p:cNvSpPr/>
           <p:nvPr/>
         </p:nvSpPr>
@@ -23953,7 +22959,7 @@
       </p:sp>
       <p:sp>
         <p:nvSpPr>
-          <p:cNvPr id="29" name="TextBox 28"/>
+          <p:cNvPr id="28" name="TextBox 27"/>
           <p:cNvSpPr txBox="1"/>
           <p:nvPr/>
         </p:nvSpPr>
@@ -24000,7 +23006,7 @@
       </p:sp>
       <p:sp>
         <p:nvSpPr>
-          <p:cNvPr id="30" name="TextBox 29"/>
+          <p:cNvPr id="29" name="TextBox 28"/>
           <p:cNvSpPr txBox="1"/>
           <p:nvPr/>
         </p:nvSpPr>
@@ -24047,7 +23053,7 @@
       </p:sp>
       <p:sp>
         <p:nvSpPr>
-          <p:cNvPr id="31" name="Rounded Rectangle 30"/>
+          <p:cNvPr id="30" name="Rounded Rectangle 29"/>
           <p:cNvSpPr/>
           <p:nvPr/>
         </p:nvSpPr>
@@ -24101,7 +23107,7 @@
       </p:sp>
       <p:sp>
         <p:nvSpPr>
-          <p:cNvPr id="32" name="Rectangle 31"/>
+          <p:cNvPr id="31" name="Rectangle 30"/>
           <p:cNvSpPr/>
           <p:nvPr/>
         </p:nvSpPr>
@@ -24145,7 +23151,7 @@
       </p:sp>
       <p:sp>
         <p:nvSpPr>
-          <p:cNvPr id="33" name="TextBox 32"/>
+          <p:cNvPr id="32" name="TextBox 31"/>
           <p:cNvSpPr txBox="1"/>
           <p:nvPr/>
         </p:nvSpPr>
@@ -24192,7 +23198,7 @@
       </p:sp>
       <p:sp>
         <p:nvSpPr>
-          <p:cNvPr id="34" name="TextBox 33"/>
+          <p:cNvPr id="33" name="TextBox 32"/>
           <p:cNvSpPr txBox="1"/>
           <p:nvPr/>
         </p:nvSpPr>
@@ -24331,8 +23337,77 @@
         </p:nvSpPr>
         <p:spPr>
           <a:xfrm>
-            <a:off x="713232" y="6272784"/>
-            <a:ext cx="5597920" cy="219456"/>
+            <a:off x="8240677" y="6272784"/>
+            <a:ext cx="2651760" cy="219456"/>
+          </a:xfrm>
+          <a:prstGeom prst="rect">
+            <a:avLst/>
+          </a:prstGeom>
+          <a:noFill/>
+        </p:spPr>
+        <p:txBody>
+          <a:bodyPr wrap="square" lIns="0" rIns="0" tIns="0" bIns="0" anchor="t">
+            <a:spAutoFit/>
+          </a:bodyPr>
+          <a:lstStyle/>
+          <a:p>
+            <a:pPr algn="r">
+              <a:lnSpc>
+                <a:spcPct val="122000"/>
+              </a:lnSpc>
+              <a:spcBef>
+                <a:spcPts val="0"/>
+              </a:spcBef>
+              <a:spcAft>
+                <a:spcPts val="0"/>
+              </a:spcAft>
+            </a:pPr>
+            <a:r>
+              <a:rPr sz="900" b="0" i="0">
+                <a:solidFill>
+                  <a:srgbClr val="636E85"/>
+                </a:solidFill>
+                <a:latin typeface="Segoe UI"/>
+                <a:ea typeface="Segoe UI"/>
+                <a:cs typeface="Segoe UI"/>
+              </a:rPr>
+              <a:t>Lingesh K  ·  OSI2509030</a:t>
+            </a:r>
+            <a:r>
+              <a:rPr sz="900" b="0" i="0">
+                <a:solidFill>
+                  <a:srgbClr val="141C2E"/>
+                </a:solidFill>
+                <a:latin typeface="Segoe UI"/>
+                <a:ea typeface="Segoe UI"/>
+                <a:cs typeface="Segoe UI"/>
+              </a:rPr>
+              <a:t>     </a:t>
+            </a:r>
+            <a:r>
+              <a:rPr sz="900" b="1" i="0">
+                <a:solidFill>
+                  <a:srgbClr val="0E1E3C"/>
+                </a:solidFill>
+                <a:latin typeface="Segoe UI"/>
+                <a:ea typeface="Segoe UI"/>
+                <a:cs typeface="Segoe UI"/>
+              </a:rPr>
+              <a:t>23</a:t>
+            </a:r>
+          </a:p>
+        </p:txBody>
+      </p:sp>
+      <p:sp>
+        <p:nvSpPr>
+          <p:cNvPr id="5" name="TextBox 4"/>
+          <p:cNvSpPr txBox="1"/>
+          <p:nvPr/>
+        </p:nvSpPr>
+        <p:spPr>
+          <a:xfrm>
+            <a:off x="713232" y="566928"/>
+            <a:ext cx="10765231" cy="219456"/>
           </a:xfrm>
           <a:prstGeom prst="rect">
             <a:avLst/>
@@ -24357,106 +23432,15 @@
               </a:spcAft>
             </a:pPr>
             <a:r>
-              <a:rPr sz="900" b="1" i="0">
-                <a:solidFill>
-                  <a:srgbClr val="0E1E3C"/>
-                </a:solidFill>
-                <a:latin typeface="Segoe UI"/>
-                <a:ea typeface="Segoe UI"/>
-                <a:cs typeface="Segoe UI"/>
-              </a:rPr>
-              <a:t>Unit 3</a:t>
-            </a:r>
-            <a:r>
-              <a:rPr sz="900" b="0" i="0">
-                <a:solidFill>
-                  <a:srgbClr val="939EB3"/>
-                </a:solidFill>
-                <a:latin typeface="Segoe UI"/>
-                <a:ea typeface="Segoe UI"/>
-                <a:cs typeface="Segoe UI"/>
-              </a:rPr>
-              <a:t>  ·  </a:t>
-            </a:r>
-            <a:r>
-              <a:rPr sz="900" b="0" i="0">
-                <a:solidFill>
-                  <a:srgbClr val="636E85"/>
-                </a:solidFill>
-                <a:latin typeface="Segoe UI"/>
-                <a:ea typeface="Segoe UI"/>
-                <a:cs typeface="Segoe UI"/>
-              </a:rPr>
-              <a:t>Business Application in AI</a:t>
-            </a:r>
-          </a:p>
-        </p:txBody>
-      </p:sp>
-      <p:sp>
-        <p:nvSpPr>
-          <p:cNvPr id="5" name="TextBox 4"/>
-          <p:cNvSpPr txBox="1"/>
-          <p:nvPr/>
-        </p:nvSpPr>
-        <p:spPr>
-          <a:xfrm>
-            <a:off x="8240677" y="6272784"/>
-            <a:ext cx="2651760" cy="219456"/>
-          </a:xfrm>
-          <a:prstGeom prst="rect">
-            <a:avLst/>
-          </a:prstGeom>
-          <a:noFill/>
-        </p:spPr>
-        <p:txBody>
-          <a:bodyPr wrap="square" lIns="0" rIns="0" tIns="0" bIns="0" anchor="t">
-            <a:spAutoFit/>
-          </a:bodyPr>
-          <a:lstStyle/>
-          <a:p>
-            <a:pPr algn="r">
-              <a:lnSpc>
-                <a:spcPct val="122000"/>
-              </a:lnSpc>
-              <a:spcBef>
-                <a:spcPts val="0"/>
-              </a:spcBef>
-              <a:spcAft>
-                <a:spcPts val="0"/>
-              </a:spcAft>
-            </a:pPr>
-            <a:r>
-              <a:rPr sz="900" b="0" i="0">
-                <a:solidFill>
-                  <a:srgbClr val="636E85"/>
-                </a:solidFill>
-                <a:latin typeface="Segoe UI"/>
-                <a:ea typeface="Segoe UI"/>
-                <a:cs typeface="Segoe UI"/>
-              </a:rPr>
-              <a:t>Lingesh K  ·  OSI2509030</a:t>
-            </a:r>
-            <a:r>
-              <a:rPr sz="900" b="0" i="0">
-                <a:solidFill>
-                  <a:srgbClr val="141C2E"/>
-                </a:solidFill>
-                <a:latin typeface="Segoe UI"/>
-                <a:ea typeface="Segoe UI"/>
-                <a:cs typeface="Segoe UI"/>
-              </a:rPr>
-              <a:t>     </a:t>
-            </a:r>
-            <a:r>
-              <a:rPr sz="900" b="1" i="0">
-                <a:solidFill>
-                  <a:srgbClr val="0E1E3C"/>
-                </a:solidFill>
-                <a:latin typeface="Segoe UI"/>
-                <a:ea typeface="Segoe UI"/>
-                <a:cs typeface="Segoe UI"/>
-              </a:rPr>
-              <a:t>23</a:t>
+              <a:rPr sz="950" b="1" i="0" spc="160">
+                <a:solidFill>
+                  <a:srgbClr val="E05151"/>
+                </a:solidFill>
+                <a:latin typeface="Segoe UI"/>
+                <a:ea typeface="Segoe UI"/>
+                <a:cs typeface="Segoe UI"/>
+              </a:rPr>
+              <a:t>BEFORE YOU DEPLOY</a:t>
             </a:r>
           </a:p>
         </p:txBody>
@@ -24464,53 +23448,6 @@
       <p:sp>
         <p:nvSpPr>
           <p:cNvPr id="6" name="TextBox 5"/>
-          <p:cNvSpPr txBox="1"/>
-          <p:nvPr/>
-        </p:nvSpPr>
-        <p:spPr>
-          <a:xfrm>
-            <a:off x="713232" y="566928"/>
-            <a:ext cx="10765231" cy="219456"/>
-          </a:xfrm>
-          <a:prstGeom prst="rect">
-            <a:avLst/>
-          </a:prstGeom>
-          <a:noFill/>
-        </p:spPr>
-        <p:txBody>
-          <a:bodyPr wrap="square" lIns="0" rIns="0" tIns="0" bIns="0" anchor="t">
-            <a:spAutoFit/>
-          </a:bodyPr>
-          <a:lstStyle/>
-          <a:p>
-            <a:pPr algn="l">
-              <a:lnSpc>
-                <a:spcPct val="122000"/>
-              </a:lnSpc>
-              <a:spcBef>
-                <a:spcPts val="0"/>
-              </a:spcBef>
-              <a:spcAft>
-                <a:spcPts val="0"/>
-              </a:spcAft>
-            </a:pPr>
-            <a:r>
-              <a:rPr sz="950" b="1" i="0" spc="160">
-                <a:solidFill>
-                  <a:srgbClr val="E05151"/>
-                </a:solidFill>
-                <a:latin typeface="Segoe UI"/>
-                <a:ea typeface="Segoe UI"/>
-                <a:cs typeface="Segoe UI"/>
-              </a:rPr>
-              <a:t>BEFORE YOU DEPLOY</a:t>
-            </a:r>
-          </a:p>
-        </p:txBody>
-      </p:sp>
-      <p:sp>
-        <p:nvSpPr>
-          <p:cNvPr id="7" name="TextBox 6"/>
           <p:cNvSpPr txBox="1"/>
           <p:nvPr/>
         </p:nvSpPr>
@@ -24557,7 +23494,7 @@
       </p:sp>
       <p:sp>
         <p:nvSpPr>
-          <p:cNvPr id="8" name="Rectangle 7"/>
+          <p:cNvPr id="7" name="Rectangle 6"/>
           <p:cNvSpPr/>
           <p:nvPr/>
         </p:nvSpPr>
@@ -24601,7 +23538,7 @@
       </p:sp>
       <p:sp>
         <p:nvSpPr>
-          <p:cNvPr id="9" name="TextBox 8"/>
+          <p:cNvPr id="8" name="TextBox 7"/>
           <p:cNvSpPr txBox="1"/>
           <p:nvPr/>
         </p:nvSpPr>
@@ -24648,7 +23585,7 @@
       </p:sp>
       <p:sp>
         <p:nvSpPr>
-          <p:cNvPr id="10" name="Rounded Rectangle 9"/>
+          <p:cNvPr id="9" name="Rounded Rectangle 8"/>
           <p:cNvSpPr/>
           <p:nvPr/>
         </p:nvSpPr>
@@ -24702,7 +23639,7 @@
       </p:sp>
       <p:sp>
         <p:nvSpPr>
-          <p:cNvPr id="11" name="Rectangle 10"/>
+          <p:cNvPr id="10" name="Rectangle 9"/>
           <p:cNvSpPr/>
           <p:nvPr/>
         </p:nvSpPr>
@@ -24746,7 +23683,7 @@
       </p:sp>
       <p:sp>
         <p:nvSpPr>
-          <p:cNvPr id="12" name="TextBox 11"/>
+          <p:cNvPr id="11" name="TextBox 10"/>
           <p:cNvSpPr txBox="1"/>
           <p:nvPr/>
         </p:nvSpPr>
@@ -24793,7 +23730,7 @@
       </p:sp>
       <p:sp>
         <p:nvSpPr>
-          <p:cNvPr id="13" name="Rounded Rectangle 12"/>
+          <p:cNvPr id="12" name="Rounded Rectangle 11"/>
           <p:cNvSpPr/>
           <p:nvPr/>
         </p:nvSpPr>
@@ -24839,7 +23776,7 @@
       </p:sp>
       <p:sp>
         <p:nvSpPr>
-          <p:cNvPr id="14" name="TextBox 13"/>
+          <p:cNvPr id="13" name="TextBox 12"/>
           <p:cNvSpPr txBox="1"/>
           <p:nvPr/>
         </p:nvSpPr>
@@ -24886,7 +23823,7 @@
       </p:sp>
       <p:sp>
         <p:nvSpPr>
-          <p:cNvPr id="15" name="Rounded Rectangle 14"/>
+          <p:cNvPr id="14" name="Rounded Rectangle 13"/>
           <p:cNvSpPr/>
           <p:nvPr/>
         </p:nvSpPr>
@@ -24932,7 +23869,7 @@
       </p:sp>
       <p:sp>
         <p:nvSpPr>
-          <p:cNvPr id="16" name="TextBox 15"/>
+          <p:cNvPr id="15" name="TextBox 14"/>
           <p:cNvSpPr txBox="1"/>
           <p:nvPr/>
         </p:nvSpPr>
@@ -24979,7 +23916,7 @@
       </p:sp>
       <p:sp>
         <p:nvSpPr>
-          <p:cNvPr id="17" name="Rounded Rectangle 16"/>
+          <p:cNvPr id="16" name="Rounded Rectangle 15"/>
           <p:cNvSpPr/>
           <p:nvPr/>
         </p:nvSpPr>
@@ -25025,7 +23962,7 @@
       </p:sp>
       <p:sp>
         <p:nvSpPr>
-          <p:cNvPr id="18" name="TextBox 17"/>
+          <p:cNvPr id="17" name="TextBox 16"/>
           <p:cNvSpPr txBox="1"/>
           <p:nvPr/>
         </p:nvSpPr>
@@ -25072,7 +24009,7 @@
       </p:sp>
       <p:sp>
         <p:nvSpPr>
-          <p:cNvPr id="19" name="Rounded Rectangle 18"/>
+          <p:cNvPr id="18" name="Rounded Rectangle 17"/>
           <p:cNvSpPr/>
           <p:nvPr/>
         </p:nvSpPr>
@@ -25126,7 +24063,7 @@
       </p:sp>
       <p:sp>
         <p:nvSpPr>
-          <p:cNvPr id="20" name="Rectangle 19"/>
+          <p:cNvPr id="19" name="Rectangle 18"/>
           <p:cNvSpPr/>
           <p:nvPr/>
         </p:nvSpPr>
@@ -25170,7 +24107,7 @@
       </p:sp>
       <p:sp>
         <p:nvSpPr>
-          <p:cNvPr id="21" name="TextBox 20"/>
+          <p:cNvPr id="20" name="TextBox 19"/>
           <p:cNvSpPr txBox="1"/>
           <p:nvPr/>
         </p:nvSpPr>
@@ -25217,7 +24154,7 @@
       </p:sp>
       <p:sp>
         <p:nvSpPr>
-          <p:cNvPr id="22" name="Rounded Rectangle 21"/>
+          <p:cNvPr id="21" name="Rounded Rectangle 20"/>
           <p:cNvSpPr/>
           <p:nvPr/>
         </p:nvSpPr>
@@ -25263,7 +24200,7 @@
       </p:sp>
       <p:sp>
         <p:nvSpPr>
-          <p:cNvPr id="23" name="TextBox 22"/>
+          <p:cNvPr id="22" name="TextBox 21"/>
           <p:cNvSpPr txBox="1"/>
           <p:nvPr/>
         </p:nvSpPr>
@@ -25310,7 +24247,7 @@
       </p:sp>
       <p:sp>
         <p:nvSpPr>
-          <p:cNvPr id="24" name="Rounded Rectangle 23"/>
+          <p:cNvPr id="23" name="Rounded Rectangle 22"/>
           <p:cNvSpPr/>
           <p:nvPr/>
         </p:nvSpPr>
@@ -25356,7 +24293,7 @@
       </p:sp>
       <p:sp>
         <p:nvSpPr>
-          <p:cNvPr id="25" name="TextBox 24"/>
+          <p:cNvPr id="24" name="TextBox 23"/>
           <p:cNvSpPr txBox="1"/>
           <p:nvPr/>
         </p:nvSpPr>
@@ -25403,7 +24340,7 @@
       </p:sp>
       <p:sp>
         <p:nvSpPr>
-          <p:cNvPr id="26" name="Rounded Rectangle 25"/>
+          <p:cNvPr id="25" name="Rounded Rectangle 24"/>
           <p:cNvSpPr/>
           <p:nvPr/>
         </p:nvSpPr>
@@ -25449,7 +24386,7 @@
       </p:sp>
       <p:sp>
         <p:nvSpPr>
-          <p:cNvPr id="27" name="TextBox 26"/>
+          <p:cNvPr id="26" name="TextBox 25"/>
           <p:cNvSpPr txBox="1"/>
           <p:nvPr/>
         </p:nvSpPr>
@@ -25496,7 +24433,7 @@
       </p:sp>
       <p:sp>
         <p:nvSpPr>
-          <p:cNvPr id="28" name="Rounded Rectangle 27"/>
+          <p:cNvPr id="27" name="Rounded Rectangle 26"/>
           <p:cNvSpPr/>
           <p:nvPr/>
         </p:nvSpPr>
@@ -25550,7 +24487,7 @@
       </p:sp>
       <p:sp>
         <p:nvSpPr>
-          <p:cNvPr id="29" name="Rectangle 28"/>
+          <p:cNvPr id="28" name="Rectangle 27"/>
           <p:cNvSpPr/>
           <p:nvPr/>
         </p:nvSpPr>
@@ -25594,7 +24531,7 @@
       </p:sp>
       <p:sp>
         <p:nvSpPr>
-          <p:cNvPr id="30" name="TextBox 29"/>
+          <p:cNvPr id="29" name="TextBox 28"/>
           <p:cNvSpPr txBox="1"/>
           <p:nvPr/>
         </p:nvSpPr>
@@ -25641,7 +24578,7 @@
       </p:sp>
       <p:sp>
         <p:nvSpPr>
-          <p:cNvPr id="31" name="Rounded Rectangle 30"/>
+          <p:cNvPr id="30" name="Rounded Rectangle 29"/>
           <p:cNvSpPr/>
           <p:nvPr/>
         </p:nvSpPr>
@@ -25687,7 +24624,7 @@
       </p:sp>
       <p:sp>
         <p:nvSpPr>
-          <p:cNvPr id="32" name="TextBox 31"/>
+          <p:cNvPr id="31" name="TextBox 30"/>
           <p:cNvSpPr txBox="1"/>
           <p:nvPr/>
         </p:nvSpPr>
@@ -25734,7 +24671,7 @@
       </p:sp>
       <p:sp>
         <p:nvSpPr>
-          <p:cNvPr id="33" name="Rounded Rectangle 32"/>
+          <p:cNvPr id="32" name="Rounded Rectangle 31"/>
           <p:cNvSpPr/>
           <p:nvPr/>
         </p:nvSpPr>
@@ -25780,7 +24717,7 @@
       </p:sp>
       <p:sp>
         <p:nvSpPr>
-          <p:cNvPr id="34" name="TextBox 33"/>
+          <p:cNvPr id="33" name="TextBox 32"/>
           <p:cNvSpPr txBox="1"/>
           <p:nvPr/>
         </p:nvSpPr>
@@ -25827,7 +24764,7 @@
       </p:sp>
       <p:sp>
         <p:nvSpPr>
-          <p:cNvPr id="35" name="Rounded Rectangle 34"/>
+          <p:cNvPr id="34" name="Rounded Rectangle 33"/>
           <p:cNvSpPr/>
           <p:nvPr/>
         </p:nvSpPr>
@@ -25873,7 +24810,7 @@
       </p:sp>
       <p:sp>
         <p:nvSpPr>
-          <p:cNvPr id="36" name="TextBox 35"/>
+          <p:cNvPr id="35" name="TextBox 34"/>
           <p:cNvSpPr txBox="1"/>
           <p:nvPr/>
         </p:nvSpPr>
@@ -25920,7 +24857,7 @@
       </p:sp>
       <p:sp>
         <p:nvSpPr>
-          <p:cNvPr id="37" name="Rounded Rectangle 36"/>
+          <p:cNvPr id="36" name="Rounded Rectangle 35"/>
           <p:cNvSpPr/>
           <p:nvPr/>
         </p:nvSpPr>
@@ -25974,7 +24911,7 @@
       </p:sp>
       <p:sp>
         <p:nvSpPr>
-          <p:cNvPr id="38" name="Rectangle 37"/>
+          <p:cNvPr id="37" name="Rectangle 36"/>
           <p:cNvSpPr/>
           <p:nvPr/>
         </p:nvSpPr>
@@ -26018,7 +24955,7 @@
       </p:sp>
       <p:sp>
         <p:nvSpPr>
-          <p:cNvPr id="39" name="TextBox 38"/>
+          <p:cNvPr id="38" name="TextBox 37"/>
           <p:cNvSpPr txBox="1"/>
           <p:nvPr/>
         </p:nvSpPr>
@@ -26065,7 +25002,7 @@
       </p:sp>
       <p:sp>
         <p:nvSpPr>
-          <p:cNvPr id="40" name="Rounded Rectangle 39"/>
+          <p:cNvPr id="39" name="Rounded Rectangle 38"/>
           <p:cNvSpPr/>
           <p:nvPr/>
         </p:nvSpPr>
@@ -26111,7 +25048,7 @@
       </p:sp>
       <p:sp>
         <p:nvSpPr>
-          <p:cNvPr id="41" name="TextBox 40"/>
+          <p:cNvPr id="40" name="TextBox 39"/>
           <p:cNvSpPr txBox="1"/>
           <p:nvPr/>
         </p:nvSpPr>
@@ -26158,7 +25095,7 @@
       </p:sp>
       <p:sp>
         <p:nvSpPr>
-          <p:cNvPr id="42" name="Rounded Rectangle 41"/>
+          <p:cNvPr id="41" name="Rounded Rectangle 40"/>
           <p:cNvSpPr/>
           <p:nvPr/>
         </p:nvSpPr>
@@ -26204,7 +25141,7 @@
       </p:sp>
       <p:sp>
         <p:nvSpPr>
-          <p:cNvPr id="43" name="TextBox 42"/>
+          <p:cNvPr id="42" name="TextBox 41"/>
           <p:cNvSpPr txBox="1"/>
           <p:nvPr/>
         </p:nvSpPr>
@@ -26251,7 +25188,7 @@
       </p:sp>
       <p:sp>
         <p:nvSpPr>
-          <p:cNvPr id="44" name="Rounded Rectangle 43"/>
+          <p:cNvPr id="43" name="Rounded Rectangle 42"/>
           <p:cNvSpPr/>
           <p:nvPr/>
         </p:nvSpPr>
@@ -26297,7 +25234,7 @@
       </p:sp>
       <p:sp>
         <p:nvSpPr>
-          <p:cNvPr id="45" name="TextBox 44"/>
+          <p:cNvPr id="44" name="TextBox 43"/>
           <p:cNvSpPr txBox="1"/>
           <p:nvPr/>
         </p:nvSpPr>
@@ -26436,8 +25373,77 @@
         </p:nvSpPr>
         <p:spPr>
           <a:xfrm>
-            <a:off x="713232" y="6272784"/>
-            <a:ext cx="5597920" cy="219456"/>
+            <a:off x="8240677" y="6272784"/>
+            <a:ext cx="2651760" cy="219456"/>
+          </a:xfrm>
+          <a:prstGeom prst="rect">
+            <a:avLst/>
+          </a:prstGeom>
+          <a:noFill/>
+        </p:spPr>
+        <p:txBody>
+          <a:bodyPr wrap="square" lIns="0" rIns="0" tIns="0" bIns="0" anchor="t">
+            <a:spAutoFit/>
+          </a:bodyPr>
+          <a:lstStyle/>
+          <a:p>
+            <a:pPr algn="r">
+              <a:lnSpc>
+                <a:spcPct val="122000"/>
+              </a:lnSpc>
+              <a:spcBef>
+                <a:spcPts val="0"/>
+              </a:spcBef>
+              <a:spcAft>
+                <a:spcPts val="0"/>
+              </a:spcAft>
+            </a:pPr>
+            <a:r>
+              <a:rPr sz="900" b="0" i="0">
+                <a:solidFill>
+                  <a:srgbClr val="636E85"/>
+                </a:solidFill>
+                <a:latin typeface="Segoe UI"/>
+                <a:ea typeface="Segoe UI"/>
+                <a:cs typeface="Segoe UI"/>
+              </a:rPr>
+              <a:t>Lingesh K  ·  OSI2509030</a:t>
+            </a:r>
+            <a:r>
+              <a:rPr sz="900" b="0" i="0">
+                <a:solidFill>
+                  <a:srgbClr val="141C2E"/>
+                </a:solidFill>
+                <a:latin typeface="Segoe UI"/>
+                <a:ea typeface="Segoe UI"/>
+                <a:cs typeface="Segoe UI"/>
+              </a:rPr>
+              <a:t>     </a:t>
+            </a:r>
+            <a:r>
+              <a:rPr sz="900" b="1" i="0">
+                <a:solidFill>
+                  <a:srgbClr val="0E1E3C"/>
+                </a:solidFill>
+                <a:latin typeface="Segoe UI"/>
+                <a:ea typeface="Segoe UI"/>
+                <a:cs typeface="Segoe UI"/>
+              </a:rPr>
+              <a:t>24</a:t>
+            </a:r>
+          </a:p>
+        </p:txBody>
+      </p:sp>
+      <p:sp>
+        <p:nvSpPr>
+          <p:cNvPr id="5" name="TextBox 4"/>
+          <p:cNvSpPr txBox="1"/>
+          <p:nvPr/>
+        </p:nvSpPr>
+        <p:spPr>
+          <a:xfrm>
+            <a:off x="713232" y="566928"/>
+            <a:ext cx="10765231" cy="219456"/>
           </a:xfrm>
           <a:prstGeom prst="rect">
             <a:avLst/>
@@ -26462,106 +25468,15 @@
               </a:spcAft>
             </a:pPr>
             <a:r>
-              <a:rPr sz="900" b="1" i="0">
-                <a:solidFill>
-                  <a:srgbClr val="0E1E3C"/>
-                </a:solidFill>
-                <a:latin typeface="Segoe UI"/>
-                <a:ea typeface="Segoe UI"/>
-                <a:cs typeface="Segoe UI"/>
-              </a:rPr>
-              <a:t>Unit 3</a:t>
-            </a:r>
-            <a:r>
-              <a:rPr sz="900" b="0" i="0">
-                <a:solidFill>
-                  <a:srgbClr val="939EB3"/>
-                </a:solidFill>
-                <a:latin typeface="Segoe UI"/>
-                <a:ea typeface="Segoe UI"/>
-                <a:cs typeface="Segoe UI"/>
-              </a:rPr>
-              <a:t>  ·  </a:t>
-            </a:r>
-            <a:r>
-              <a:rPr sz="900" b="0" i="0">
-                <a:solidFill>
-                  <a:srgbClr val="636E85"/>
-                </a:solidFill>
-                <a:latin typeface="Segoe UI"/>
-                <a:ea typeface="Segoe UI"/>
-                <a:cs typeface="Segoe UI"/>
-              </a:rPr>
-              <a:t>Business Application in AI</a:t>
-            </a:r>
-          </a:p>
-        </p:txBody>
-      </p:sp>
-      <p:sp>
-        <p:nvSpPr>
-          <p:cNvPr id="5" name="TextBox 4"/>
-          <p:cNvSpPr txBox="1"/>
-          <p:nvPr/>
-        </p:nvSpPr>
-        <p:spPr>
-          <a:xfrm>
-            <a:off x="8240677" y="6272784"/>
-            <a:ext cx="2651760" cy="219456"/>
-          </a:xfrm>
-          <a:prstGeom prst="rect">
-            <a:avLst/>
-          </a:prstGeom>
-          <a:noFill/>
-        </p:spPr>
-        <p:txBody>
-          <a:bodyPr wrap="square" lIns="0" rIns="0" tIns="0" bIns="0" anchor="t">
-            <a:spAutoFit/>
-          </a:bodyPr>
-          <a:lstStyle/>
-          <a:p>
-            <a:pPr algn="r">
-              <a:lnSpc>
-                <a:spcPct val="122000"/>
-              </a:lnSpc>
-              <a:spcBef>
-                <a:spcPts val="0"/>
-              </a:spcBef>
-              <a:spcAft>
-                <a:spcPts val="0"/>
-              </a:spcAft>
-            </a:pPr>
-            <a:r>
-              <a:rPr sz="900" b="0" i="0">
-                <a:solidFill>
-                  <a:srgbClr val="636E85"/>
-                </a:solidFill>
-                <a:latin typeface="Segoe UI"/>
-                <a:ea typeface="Segoe UI"/>
-                <a:cs typeface="Segoe UI"/>
-              </a:rPr>
-              <a:t>Lingesh K  ·  OSI2509030</a:t>
-            </a:r>
-            <a:r>
-              <a:rPr sz="900" b="0" i="0">
-                <a:solidFill>
-                  <a:srgbClr val="141C2E"/>
-                </a:solidFill>
-                <a:latin typeface="Segoe UI"/>
-                <a:ea typeface="Segoe UI"/>
-                <a:cs typeface="Segoe UI"/>
-              </a:rPr>
-              <a:t>     </a:t>
-            </a:r>
-            <a:r>
-              <a:rPr sz="900" b="1" i="0">
-                <a:solidFill>
-                  <a:srgbClr val="0E1E3C"/>
-                </a:solidFill>
-                <a:latin typeface="Segoe UI"/>
-                <a:ea typeface="Segoe UI"/>
-                <a:cs typeface="Segoe UI"/>
-              </a:rPr>
-              <a:t>24</a:t>
+              <a:rPr sz="950" b="1" i="0" spc="160">
+                <a:solidFill>
+                  <a:srgbClr val="00B3A4"/>
+                </a:solidFill>
+                <a:latin typeface="Segoe UI"/>
+                <a:ea typeface="Segoe UI"/>
+                <a:cs typeface="Segoe UI"/>
+              </a:rPr>
+              <a:t>RECAP</a:t>
             </a:r>
           </a:p>
         </p:txBody>
@@ -26569,53 +25484,6 @@
       <p:sp>
         <p:nvSpPr>
           <p:cNvPr id="6" name="TextBox 5"/>
-          <p:cNvSpPr txBox="1"/>
-          <p:nvPr/>
-        </p:nvSpPr>
-        <p:spPr>
-          <a:xfrm>
-            <a:off x="713232" y="566928"/>
-            <a:ext cx="10765231" cy="219456"/>
-          </a:xfrm>
-          <a:prstGeom prst="rect">
-            <a:avLst/>
-          </a:prstGeom>
-          <a:noFill/>
-        </p:spPr>
-        <p:txBody>
-          <a:bodyPr wrap="square" lIns="0" rIns="0" tIns="0" bIns="0" anchor="t">
-            <a:spAutoFit/>
-          </a:bodyPr>
-          <a:lstStyle/>
-          <a:p>
-            <a:pPr algn="l">
-              <a:lnSpc>
-                <a:spcPct val="122000"/>
-              </a:lnSpc>
-              <a:spcBef>
-                <a:spcPts val="0"/>
-              </a:spcBef>
-              <a:spcAft>
-                <a:spcPts val="0"/>
-              </a:spcAft>
-            </a:pPr>
-            <a:r>
-              <a:rPr sz="950" b="1" i="0" spc="160">
-                <a:solidFill>
-                  <a:srgbClr val="00B3A4"/>
-                </a:solidFill>
-                <a:latin typeface="Segoe UI"/>
-                <a:ea typeface="Segoe UI"/>
-                <a:cs typeface="Segoe UI"/>
-              </a:rPr>
-              <a:t>RECAP</a:t>
-            </a:r>
-          </a:p>
-        </p:txBody>
-      </p:sp>
-      <p:sp>
-        <p:nvSpPr>
-          <p:cNvPr id="7" name="TextBox 6"/>
           <p:cNvSpPr txBox="1"/>
           <p:nvPr/>
         </p:nvSpPr>
@@ -26662,7 +25530,7 @@
       </p:sp>
       <p:sp>
         <p:nvSpPr>
-          <p:cNvPr id="8" name="Rectangle 7"/>
+          <p:cNvPr id="7" name="Rectangle 6"/>
           <p:cNvSpPr/>
           <p:nvPr/>
         </p:nvSpPr>
@@ -26706,7 +25574,7 @@
       </p:sp>
       <p:sp>
         <p:nvSpPr>
-          <p:cNvPr id="9" name="TextBox 8"/>
+          <p:cNvPr id="8" name="TextBox 7"/>
           <p:cNvSpPr txBox="1"/>
           <p:nvPr/>
         </p:nvSpPr>
@@ -26753,7 +25621,7 @@
       </p:sp>
       <p:sp>
         <p:nvSpPr>
-          <p:cNvPr id="10" name="Rounded Rectangle 9"/>
+          <p:cNvPr id="9" name="Rounded Rectangle 8"/>
           <p:cNvSpPr/>
           <p:nvPr/>
         </p:nvSpPr>
@@ -26807,7 +25675,7 @@
       </p:sp>
       <p:sp>
         <p:nvSpPr>
-          <p:cNvPr id="11" name="Rectangle 10"/>
+          <p:cNvPr id="10" name="Rectangle 9"/>
           <p:cNvSpPr/>
           <p:nvPr/>
         </p:nvSpPr>
@@ -26851,7 +25719,7 @@
       </p:sp>
       <p:sp>
         <p:nvSpPr>
-          <p:cNvPr id="12" name="Oval 11"/>
+          <p:cNvPr id="11" name="Oval 10"/>
           <p:cNvSpPr/>
           <p:nvPr/>
         </p:nvSpPr>
@@ -26895,7 +25763,7 @@
       </p:sp>
       <p:sp>
         <p:nvSpPr>
-          <p:cNvPr id="13" name="TextBox 12"/>
+          <p:cNvPr id="12" name="TextBox 11"/>
           <p:cNvSpPr txBox="1"/>
           <p:nvPr/>
         </p:nvSpPr>
@@ -26942,7 +25810,7 @@
       </p:sp>
       <p:sp>
         <p:nvSpPr>
-          <p:cNvPr id="14" name="TextBox 13"/>
+          <p:cNvPr id="13" name="TextBox 12"/>
           <p:cNvSpPr txBox="1"/>
           <p:nvPr/>
         </p:nvSpPr>
@@ -27013,7 +25881,7 @@
       </p:sp>
       <p:sp>
         <p:nvSpPr>
-          <p:cNvPr id="15" name="Rounded Rectangle 14"/>
+          <p:cNvPr id="14" name="Rounded Rectangle 13"/>
           <p:cNvSpPr/>
           <p:nvPr/>
         </p:nvSpPr>
@@ -27067,7 +25935,7 @@
       </p:sp>
       <p:sp>
         <p:nvSpPr>
-          <p:cNvPr id="16" name="Rectangle 15"/>
+          <p:cNvPr id="15" name="Rectangle 14"/>
           <p:cNvSpPr/>
           <p:nvPr/>
         </p:nvSpPr>
@@ -27111,7 +25979,7 @@
       </p:sp>
       <p:sp>
         <p:nvSpPr>
-          <p:cNvPr id="17" name="Oval 16"/>
+          <p:cNvPr id="16" name="Oval 15"/>
           <p:cNvSpPr/>
           <p:nvPr/>
         </p:nvSpPr>
@@ -27155,7 +26023,7 @@
       </p:sp>
       <p:sp>
         <p:nvSpPr>
-          <p:cNvPr id="18" name="TextBox 17"/>
+          <p:cNvPr id="17" name="TextBox 16"/>
           <p:cNvSpPr txBox="1"/>
           <p:nvPr/>
         </p:nvSpPr>
@@ -27202,7 +26070,7 @@
       </p:sp>
       <p:sp>
         <p:nvSpPr>
-          <p:cNvPr id="19" name="TextBox 18"/>
+          <p:cNvPr id="18" name="TextBox 17"/>
           <p:cNvSpPr txBox="1"/>
           <p:nvPr/>
         </p:nvSpPr>
@@ -27273,7 +26141,7 @@
       </p:sp>
       <p:sp>
         <p:nvSpPr>
-          <p:cNvPr id="20" name="Rounded Rectangle 19"/>
+          <p:cNvPr id="19" name="Rounded Rectangle 18"/>
           <p:cNvSpPr/>
           <p:nvPr/>
         </p:nvSpPr>
@@ -27327,7 +26195,7 @@
       </p:sp>
       <p:sp>
         <p:nvSpPr>
-          <p:cNvPr id="21" name="Rectangle 20"/>
+          <p:cNvPr id="20" name="Rectangle 19"/>
           <p:cNvSpPr/>
           <p:nvPr/>
         </p:nvSpPr>
@@ -27371,7 +26239,7 @@
       </p:sp>
       <p:sp>
         <p:nvSpPr>
-          <p:cNvPr id="22" name="Oval 21"/>
+          <p:cNvPr id="21" name="Oval 20"/>
           <p:cNvSpPr/>
           <p:nvPr/>
         </p:nvSpPr>
@@ -27415,7 +26283,7 @@
       </p:sp>
       <p:sp>
         <p:nvSpPr>
-          <p:cNvPr id="23" name="TextBox 22"/>
+          <p:cNvPr id="22" name="TextBox 21"/>
           <p:cNvSpPr txBox="1"/>
           <p:nvPr/>
         </p:nvSpPr>
@@ -27462,7 +26330,7 @@
       </p:sp>
       <p:sp>
         <p:nvSpPr>
-          <p:cNvPr id="24" name="TextBox 23"/>
+          <p:cNvPr id="23" name="TextBox 22"/>
           <p:cNvSpPr txBox="1"/>
           <p:nvPr/>
         </p:nvSpPr>
@@ -27533,7 +26401,7 @@
       </p:sp>
       <p:sp>
         <p:nvSpPr>
-          <p:cNvPr id="25" name="Rounded Rectangle 24"/>
+          <p:cNvPr id="24" name="Rounded Rectangle 23"/>
           <p:cNvSpPr/>
           <p:nvPr/>
         </p:nvSpPr>
@@ -27587,7 +26455,7 @@
       </p:sp>
       <p:sp>
         <p:nvSpPr>
-          <p:cNvPr id="26" name="Rectangle 25"/>
+          <p:cNvPr id="25" name="Rectangle 24"/>
           <p:cNvSpPr/>
           <p:nvPr/>
         </p:nvSpPr>
@@ -27631,7 +26499,7 @@
       </p:sp>
       <p:sp>
         <p:nvSpPr>
-          <p:cNvPr id="27" name="Oval 26"/>
+          <p:cNvPr id="26" name="Oval 25"/>
           <p:cNvSpPr/>
           <p:nvPr/>
         </p:nvSpPr>
@@ -27675,7 +26543,7 @@
       </p:sp>
       <p:sp>
         <p:nvSpPr>
-          <p:cNvPr id="28" name="TextBox 27"/>
+          <p:cNvPr id="27" name="TextBox 26"/>
           <p:cNvSpPr txBox="1"/>
           <p:nvPr/>
         </p:nvSpPr>
@@ -27722,7 +26590,7 @@
       </p:sp>
       <p:sp>
         <p:nvSpPr>
-          <p:cNvPr id="29" name="TextBox 28"/>
+          <p:cNvPr id="28" name="TextBox 27"/>
           <p:cNvSpPr txBox="1"/>
           <p:nvPr/>
         </p:nvSpPr>
@@ -27793,7 +26661,7 @@
       </p:sp>
       <p:sp>
         <p:nvSpPr>
-          <p:cNvPr id="30" name="Rounded Rectangle 29"/>
+          <p:cNvPr id="29" name="Rounded Rectangle 28"/>
           <p:cNvSpPr/>
           <p:nvPr/>
         </p:nvSpPr>
@@ -27847,7 +26715,7 @@
       </p:sp>
       <p:sp>
         <p:nvSpPr>
-          <p:cNvPr id="31" name="Rectangle 30"/>
+          <p:cNvPr id="30" name="Rectangle 29"/>
           <p:cNvSpPr/>
           <p:nvPr/>
         </p:nvSpPr>
@@ -27891,7 +26759,7 @@
       </p:sp>
       <p:sp>
         <p:nvSpPr>
-          <p:cNvPr id="32" name="Oval 31"/>
+          <p:cNvPr id="31" name="Oval 30"/>
           <p:cNvSpPr/>
           <p:nvPr/>
         </p:nvSpPr>
@@ -27935,7 +26803,7 @@
       </p:sp>
       <p:sp>
         <p:nvSpPr>
-          <p:cNvPr id="33" name="TextBox 32"/>
+          <p:cNvPr id="32" name="TextBox 31"/>
           <p:cNvSpPr txBox="1"/>
           <p:nvPr/>
         </p:nvSpPr>
@@ -27982,7 +26850,7 @@
       </p:sp>
       <p:sp>
         <p:nvSpPr>
-          <p:cNvPr id="34" name="TextBox 33"/>
+          <p:cNvPr id="33" name="TextBox 32"/>
           <p:cNvSpPr txBox="1"/>
           <p:nvPr/>
         </p:nvSpPr>
@@ -28053,7 +26921,7 @@
       </p:sp>
       <p:sp>
         <p:nvSpPr>
-          <p:cNvPr id="35" name="Rounded Rectangle 34"/>
+          <p:cNvPr id="34" name="Rounded Rectangle 33"/>
           <p:cNvSpPr/>
           <p:nvPr/>
         </p:nvSpPr>
@@ -28107,7 +26975,7 @@
       </p:sp>
       <p:sp>
         <p:nvSpPr>
-          <p:cNvPr id="36" name="Rectangle 35"/>
+          <p:cNvPr id="35" name="Rectangle 34"/>
           <p:cNvSpPr/>
           <p:nvPr/>
         </p:nvSpPr>
@@ -28151,7 +27019,7 @@
       </p:sp>
       <p:sp>
         <p:nvSpPr>
-          <p:cNvPr id="37" name="Oval 36"/>
+          <p:cNvPr id="36" name="Oval 35"/>
           <p:cNvSpPr/>
           <p:nvPr/>
         </p:nvSpPr>
@@ -28195,7 +27063,7 @@
       </p:sp>
       <p:sp>
         <p:nvSpPr>
-          <p:cNvPr id="38" name="TextBox 37"/>
+          <p:cNvPr id="37" name="TextBox 36"/>
           <p:cNvSpPr txBox="1"/>
           <p:nvPr/>
         </p:nvSpPr>
@@ -28242,7 +27110,7 @@
       </p:sp>
       <p:sp>
         <p:nvSpPr>
-          <p:cNvPr id="39" name="TextBox 38"/>
+          <p:cNvPr id="38" name="TextBox 37"/>
           <p:cNvSpPr txBox="1"/>
           <p:nvPr/>
         </p:nvSpPr>
@@ -28525,53 +27393,6 @@
         </p:nvSpPr>
         <p:spPr>
           <a:xfrm>
-            <a:off x="987552" y="2157984"/>
-            <a:ext cx="6766560" cy="274320"/>
-          </a:xfrm>
-          <a:prstGeom prst="rect">
-            <a:avLst/>
-          </a:prstGeom>
-          <a:noFill/>
-        </p:spPr>
-        <p:txBody>
-          <a:bodyPr wrap="square" lIns="0" rIns="0" tIns="0" bIns="0" anchor="t">
-            <a:spAutoFit/>
-          </a:bodyPr>
-          <a:lstStyle/>
-          <a:p>
-            <a:pPr algn="l">
-              <a:lnSpc>
-                <a:spcPct val="122000"/>
-              </a:lnSpc>
-              <a:spcBef>
-                <a:spcPts val="0"/>
-              </a:spcBef>
-              <a:spcAft>
-                <a:spcPts val="0"/>
-              </a:spcAft>
-            </a:pPr>
-            <a:r>
-              <a:rPr sz="1000" b="1" i="0" spc="200">
-                <a:solidFill>
-                  <a:srgbClr val="00B3A4"/>
-                </a:solidFill>
-                <a:latin typeface="Segoe UI"/>
-                <a:ea typeface="Segoe UI"/>
-                <a:cs typeface="Segoe UI"/>
-              </a:rPr>
-              <a:t>UNIT 03  ·  BUSINESS APPLICATION IN AI</a:t>
-            </a:r>
-          </a:p>
-        </p:txBody>
-      </p:sp>
-      <p:sp>
-        <p:nvSpPr>
-          <p:cNvPr id="7" name="TextBox 6"/>
-          <p:cNvSpPr txBox="1"/>
-          <p:nvPr/>
-        </p:nvSpPr>
-        <p:spPr>
-          <a:xfrm>
             <a:off x="987552" y="2542032"/>
             <a:ext cx="7315200" cy="1005840"/>
           </a:xfrm>
@@ -28613,7 +27434,7 @@
       </p:sp>
       <p:sp>
         <p:nvSpPr>
-          <p:cNvPr id="8" name="Rectangle 7"/>
+          <p:cNvPr id="7" name="Rectangle 6"/>
           <p:cNvSpPr/>
           <p:nvPr/>
         </p:nvSpPr>
@@ -28657,7 +27478,7 @@
       </p:sp>
       <p:sp>
         <p:nvSpPr>
-          <p:cNvPr id="9" name="TextBox 8"/>
+          <p:cNvPr id="8" name="TextBox 7"/>
           <p:cNvSpPr txBox="1"/>
           <p:nvPr/>
         </p:nvSpPr>
@@ -28704,7 +27525,7 @@
       </p:sp>
       <p:sp>
         <p:nvSpPr>
-          <p:cNvPr id="10" name="TextBox 9"/>
+          <p:cNvPr id="9" name="TextBox 8"/>
           <p:cNvSpPr txBox="1"/>
           <p:nvPr/>
         </p:nvSpPr>
@@ -28823,7 +27644,7 @@
       </p:sp>
       <p:sp>
         <p:nvSpPr>
-          <p:cNvPr id="11" name="logo-plate"/>
+          <p:cNvPr id="10" name="logo-plate"/>
           <p:cNvSpPr/>
           <p:nvPr/>
         </p:nvSpPr>
@@ -28869,7 +27690,7 @@
       </p:sp>
       <p:pic>
         <p:nvPicPr>
-          <p:cNvPr id="12" name="college-logo" descr="logo-full.png"/>
+          <p:cNvPr id="11" name="college-logo" descr="logo-full.png"/>
           <p:cNvPicPr>
             <a:picLocks noChangeAspect="1"/>
           </p:cNvPicPr>
@@ -28893,7 +27714,7 @@
       </p:pic>
       <p:sp>
         <p:nvSpPr>
-          <p:cNvPr id="13" name="Rectangle 12"/>
+          <p:cNvPr id="12" name="Rectangle 11"/>
           <p:cNvSpPr/>
           <p:nvPr/>
         </p:nvSpPr>
@@ -28937,7 +27758,7 @@
       </p:sp>
       <p:sp>
         <p:nvSpPr>
-          <p:cNvPr id="14" name="TextBox 13"/>
+          <p:cNvPr id="13" name="TextBox 12"/>
           <p:cNvSpPr txBox="1"/>
           <p:nvPr/>
         </p:nvSpPr>
@@ -29000,28 +27821,6 @@
                 <a:cs typeface="Segoe UI"/>
               </a:rPr>
               <a:t>OSI2509030</a:t>
-            </a:r>
-            <a:r>
-              <a:rPr sz="1000" b="0" i="0">
-                <a:solidFill>
-                  <a:srgbClr val="4A5E86"/>
-                </a:solidFill>
-                <a:latin typeface="Segoe UI"/>
-                <a:ea typeface="Segoe UI"/>
-                <a:cs typeface="Segoe UI"/>
-              </a:rPr>
-              <a:t>   ·   </a:t>
-            </a:r>
-            <a:r>
-              <a:rPr sz="1000" b="0" i="0">
-                <a:solidFill>
-                  <a:srgbClr val="7E91B4"/>
-                </a:solidFill>
-                <a:latin typeface="Segoe UI"/>
-                <a:ea typeface="Segoe UI"/>
-                <a:cs typeface="Segoe UI"/>
-              </a:rPr>
-              <a:t>PGPM · Systems Specialisation</a:t>
             </a:r>
           </a:p>
         </p:txBody>
@@ -29419,54 +28218,7 @@
       </p:sp>
       <p:sp>
         <p:nvSpPr>
-          <p:cNvPr id="10" name="TextBox 9"/>
-          <p:cNvSpPr txBox="1"/>
-          <p:nvPr/>
-        </p:nvSpPr>
-        <p:spPr>
-          <a:xfrm>
-            <a:off x="987552" y="5943600"/>
-            <a:ext cx="6400800" cy="274320"/>
-          </a:xfrm>
-          <a:prstGeom prst="rect">
-            <a:avLst/>
-          </a:prstGeom>
-          <a:noFill/>
-        </p:spPr>
-        <p:txBody>
-          <a:bodyPr wrap="square" lIns="0" rIns="0" tIns="0" bIns="0" anchor="t">
-            <a:spAutoFit/>
-          </a:bodyPr>
-          <a:lstStyle/>
-          <a:p>
-            <a:pPr algn="l">
-              <a:lnSpc>
-                <a:spcPct val="122000"/>
-              </a:lnSpc>
-              <a:spcBef>
-                <a:spcPts val="0"/>
-              </a:spcBef>
-              <a:spcAft>
-                <a:spcPts val="0"/>
-              </a:spcAft>
-            </a:pPr>
-            <a:r>
-              <a:rPr sz="900" b="1" i="0" spc="160">
-                <a:solidFill>
-                  <a:srgbClr val="6B7FA6"/>
-                </a:solidFill>
-                <a:latin typeface="Segoe UI"/>
-                <a:ea typeface="Segoe UI"/>
-                <a:cs typeface="Segoe UI"/>
-              </a:rPr>
-              <a:t>UNIT 3  ·  BUSINESS APPLICATION IN AI</a:t>
-            </a:r>
-          </a:p>
-        </p:txBody>
-      </p:sp>
-      <p:sp>
-        <p:nvSpPr>
-          <p:cNvPr id="11" name="logo-plate"/>
+          <p:cNvPr id="10" name="logo-plate"/>
           <p:cNvSpPr/>
           <p:nvPr/>
         </p:nvSpPr>
@@ -29512,7 +28264,7 @@
       </p:sp>
       <p:pic>
         <p:nvPicPr>
-          <p:cNvPr id="12" name="college-logo" descr="logo-full.png"/>
+          <p:cNvPr id="11" name="college-logo" descr="logo-full.png"/>
           <p:cNvPicPr>
             <a:picLocks noChangeAspect="1"/>
           </p:cNvPicPr>
@@ -29628,8 +28380,77 @@
         </p:nvSpPr>
         <p:spPr>
           <a:xfrm>
-            <a:off x="713232" y="6272784"/>
-            <a:ext cx="5597920" cy="219456"/>
+            <a:off x="8240677" y="6272784"/>
+            <a:ext cx="2651760" cy="219456"/>
+          </a:xfrm>
+          <a:prstGeom prst="rect">
+            <a:avLst/>
+          </a:prstGeom>
+          <a:noFill/>
+        </p:spPr>
+        <p:txBody>
+          <a:bodyPr wrap="square" lIns="0" rIns="0" tIns="0" bIns="0" anchor="t">
+            <a:spAutoFit/>
+          </a:bodyPr>
+          <a:lstStyle/>
+          <a:p>
+            <a:pPr algn="r">
+              <a:lnSpc>
+                <a:spcPct val="122000"/>
+              </a:lnSpc>
+              <a:spcBef>
+                <a:spcPts val="0"/>
+              </a:spcBef>
+              <a:spcAft>
+                <a:spcPts val="0"/>
+              </a:spcAft>
+            </a:pPr>
+            <a:r>
+              <a:rPr sz="900" b="0" i="0">
+                <a:solidFill>
+                  <a:srgbClr val="636E85"/>
+                </a:solidFill>
+                <a:latin typeface="Segoe UI"/>
+                <a:ea typeface="Segoe UI"/>
+                <a:cs typeface="Segoe UI"/>
+              </a:rPr>
+              <a:t>Lingesh K  ·  OSI2509030</a:t>
+            </a:r>
+            <a:r>
+              <a:rPr sz="900" b="0" i="0">
+                <a:solidFill>
+                  <a:srgbClr val="141C2E"/>
+                </a:solidFill>
+                <a:latin typeface="Segoe UI"/>
+                <a:ea typeface="Segoe UI"/>
+                <a:cs typeface="Segoe UI"/>
+              </a:rPr>
+              <a:t>     </a:t>
+            </a:r>
+            <a:r>
+              <a:rPr sz="900" b="1" i="0">
+                <a:solidFill>
+                  <a:srgbClr val="0E1E3C"/>
+                </a:solidFill>
+                <a:latin typeface="Segoe UI"/>
+                <a:ea typeface="Segoe UI"/>
+                <a:cs typeface="Segoe UI"/>
+              </a:rPr>
+              <a:t>04</a:t>
+            </a:r>
+          </a:p>
+        </p:txBody>
+      </p:sp>
+      <p:sp>
+        <p:nvSpPr>
+          <p:cNvPr id="5" name="TextBox 4"/>
+          <p:cNvSpPr txBox="1"/>
+          <p:nvPr/>
+        </p:nvSpPr>
+        <p:spPr>
+          <a:xfrm>
+            <a:off x="713232" y="566928"/>
+            <a:ext cx="10765231" cy="219456"/>
           </a:xfrm>
           <a:prstGeom prst="rect">
             <a:avLst/>
@@ -29654,106 +28475,15 @@
               </a:spcAft>
             </a:pPr>
             <a:r>
-              <a:rPr sz="900" b="1" i="0">
-                <a:solidFill>
-                  <a:srgbClr val="0E1E3C"/>
-                </a:solidFill>
-                <a:latin typeface="Segoe UI"/>
-                <a:ea typeface="Segoe UI"/>
-                <a:cs typeface="Segoe UI"/>
-              </a:rPr>
-              <a:t>Unit 3</a:t>
-            </a:r>
-            <a:r>
-              <a:rPr sz="900" b="0" i="0">
-                <a:solidFill>
-                  <a:srgbClr val="939EB3"/>
-                </a:solidFill>
-                <a:latin typeface="Segoe UI"/>
-                <a:ea typeface="Segoe UI"/>
-                <a:cs typeface="Segoe UI"/>
-              </a:rPr>
-              <a:t>  ·  </a:t>
-            </a:r>
-            <a:r>
-              <a:rPr sz="900" b="0" i="0">
-                <a:solidFill>
-                  <a:srgbClr val="636E85"/>
-                </a:solidFill>
-                <a:latin typeface="Segoe UI"/>
-                <a:ea typeface="Segoe UI"/>
-                <a:cs typeface="Segoe UI"/>
-              </a:rPr>
-              <a:t>Business Application in AI</a:t>
-            </a:r>
-          </a:p>
-        </p:txBody>
-      </p:sp>
-      <p:sp>
-        <p:nvSpPr>
-          <p:cNvPr id="5" name="TextBox 4"/>
-          <p:cNvSpPr txBox="1"/>
-          <p:nvPr/>
-        </p:nvSpPr>
-        <p:spPr>
-          <a:xfrm>
-            <a:off x="8240677" y="6272784"/>
-            <a:ext cx="2651760" cy="219456"/>
-          </a:xfrm>
-          <a:prstGeom prst="rect">
-            <a:avLst/>
-          </a:prstGeom>
-          <a:noFill/>
-        </p:spPr>
-        <p:txBody>
-          <a:bodyPr wrap="square" lIns="0" rIns="0" tIns="0" bIns="0" anchor="t">
-            <a:spAutoFit/>
-          </a:bodyPr>
-          <a:lstStyle/>
-          <a:p>
-            <a:pPr algn="r">
-              <a:lnSpc>
-                <a:spcPct val="122000"/>
-              </a:lnSpc>
-              <a:spcBef>
-                <a:spcPts val="0"/>
-              </a:spcBef>
-              <a:spcAft>
-                <a:spcPts val="0"/>
-              </a:spcAft>
-            </a:pPr>
-            <a:r>
-              <a:rPr sz="900" b="0" i="0">
-                <a:solidFill>
-                  <a:srgbClr val="636E85"/>
-                </a:solidFill>
-                <a:latin typeface="Segoe UI"/>
-                <a:ea typeface="Segoe UI"/>
-                <a:cs typeface="Segoe UI"/>
-              </a:rPr>
-              <a:t>Lingesh K  ·  OSI2509030</a:t>
-            </a:r>
-            <a:r>
-              <a:rPr sz="900" b="0" i="0">
-                <a:solidFill>
-                  <a:srgbClr val="141C2E"/>
-                </a:solidFill>
-                <a:latin typeface="Segoe UI"/>
-                <a:ea typeface="Segoe UI"/>
-                <a:cs typeface="Segoe UI"/>
-              </a:rPr>
-              <a:t>     </a:t>
-            </a:r>
-            <a:r>
-              <a:rPr sz="900" b="1" i="0">
-                <a:solidFill>
-                  <a:srgbClr val="0E1E3C"/>
-                </a:solidFill>
-                <a:latin typeface="Segoe UI"/>
-                <a:ea typeface="Segoe UI"/>
-                <a:cs typeface="Segoe UI"/>
-              </a:rPr>
-              <a:t>04</a:t>
+              <a:rPr sz="950" b="1" i="0" spc="160">
+                <a:solidFill>
+                  <a:srgbClr val="3B7AF7"/>
+                </a:solidFill>
+                <a:latin typeface="Segoe UI"/>
+                <a:ea typeface="Segoe UI"/>
+                <a:cs typeface="Segoe UI"/>
+              </a:rPr>
+              <a:t>CHOOSING USE CASES</a:t>
             </a:r>
           </a:p>
         </p:txBody>
@@ -29761,53 +28491,6 @@
       <p:sp>
         <p:nvSpPr>
           <p:cNvPr id="6" name="TextBox 5"/>
-          <p:cNvSpPr txBox="1"/>
-          <p:nvPr/>
-        </p:nvSpPr>
-        <p:spPr>
-          <a:xfrm>
-            <a:off x="713232" y="566928"/>
-            <a:ext cx="10765231" cy="219456"/>
-          </a:xfrm>
-          <a:prstGeom prst="rect">
-            <a:avLst/>
-          </a:prstGeom>
-          <a:noFill/>
-        </p:spPr>
-        <p:txBody>
-          <a:bodyPr wrap="square" lIns="0" rIns="0" tIns="0" bIns="0" anchor="t">
-            <a:spAutoFit/>
-          </a:bodyPr>
-          <a:lstStyle/>
-          <a:p>
-            <a:pPr algn="l">
-              <a:lnSpc>
-                <a:spcPct val="122000"/>
-              </a:lnSpc>
-              <a:spcBef>
-                <a:spcPts val="0"/>
-              </a:spcBef>
-              <a:spcAft>
-                <a:spcPts val="0"/>
-              </a:spcAft>
-            </a:pPr>
-            <a:r>
-              <a:rPr sz="950" b="1" i="0" spc="160">
-                <a:solidFill>
-                  <a:srgbClr val="3B7AF7"/>
-                </a:solidFill>
-                <a:latin typeface="Segoe UI"/>
-                <a:ea typeface="Segoe UI"/>
-                <a:cs typeface="Segoe UI"/>
-              </a:rPr>
-              <a:t>CHOOSING USE CASES</a:t>
-            </a:r>
-          </a:p>
-        </p:txBody>
-      </p:sp>
-      <p:sp>
-        <p:nvSpPr>
-          <p:cNvPr id="7" name="TextBox 6"/>
           <p:cNvSpPr txBox="1"/>
           <p:nvPr/>
         </p:nvSpPr>
@@ -29854,7 +28537,7 @@
       </p:sp>
       <p:sp>
         <p:nvSpPr>
-          <p:cNvPr id="8" name="Rectangle 7"/>
+          <p:cNvPr id="7" name="Rectangle 6"/>
           <p:cNvSpPr/>
           <p:nvPr/>
         </p:nvSpPr>
@@ -29898,7 +28581,7 @@
       </p:sp>
       <p:sp>
         <p:nvSpPr>
-          <p:cNvPr id="9" name="TextBox 8"/>
+          <p:cNvPr id="8" name="TextBox 7"/>
           <p:cNvSpPr txBox="1"/>
           <p:nvPr/>
         </p:nvSpPr>
@@ -29945,7 +28628,7 @@
       </p:sp>
       <p:sp>
         <p:nvSpPr>
-          <p:cNvPr id="10" name="Rounded Rectangle 9"/>
+          <p:cNvPr id="9" name="Rounded Rectangle 8"/>
           <p:cNvSpPr/>
           <p:nvPr/>
         </p:nvSpPr>
@@ -29991,7 +28674,7 @@
       </p:sp>
       <p:sp>
         <p:nvSpPr>
-          <p:cNvPr id="11" name="Rectangle 10"/>
+          <p:cNvPr id="10" name="Rectangle 9"/>
           <p:cNvSpPr/>
           <p:nvPr/>
         </p:nvSpPr>
@@ -30035,7 +28718,7 @@
       </p:sp>
       <p:sp>
         <p:nvSpPr>
-          <p:cNvPr id="12" name="TextBox 11"/>
+          <p:cNvPr id="11" name="TextBox 10"/>
           <p:cNvSpPr txBox="1"/>
           <p:nvPr/>
         </p:nvSpPr>
@@ -30082,7 +28765,7 @@
       </p:sp>
       <p:sp>
         <p:nvSpPr>
-          <p:cNvPr id="13" name="TextBox 12"/>
+          <p:cNvPr id="12" name="TextBox 11"/>
           <p:cNvSpPr txBox="1"/>
           <p:nvPr/>
         </p:nvSpPr>
@@ -30129,7 +28812,7 @@
       </p:sp>
       <p:sp>
         <p:nvSpPr>
-          <p:cNvPr id="14" name="Rounded Rectangle 13"/>
+          <p:cNvPr id="13" name="Rounded Rectangle 12"/>
           <p:cNvSpPr/>
           <p:nvPr/>
         </p:nvSpPr>
@@ -30175,7 +28858,7 @@
       </p:sp>
       <p:sp>
         <p:nvSpPr>
-          <p:cNvPr id="15" name="Rectangle 14"/>
+          <p:cNvPr id="14" name="Rectangle 13"/>
           <p:cNvSpPr/>
           <p:nvPr/>
         </p:nvSpPr>
@@ -30219,7 +28902,7 @@
       </p:sp>
       <p:sp>
         <p:nvSpPr>
-          <p:cNvPr id="16" name="TextBox 15"/>
+          <p:cNvPr id="15" name="TextBox 14"/>
           <p:cNvSpPr txBox="1"/>
           <p:nvPr/>
         </p:nvSpPr>
@@ -30266,7 +28949,7 @@
       </p:sp>
       <p:sp>
         <p:nvSpPr>
-          <p:cNvPr id="17" name="TextBox 16"/>
+          <p:cNvPr id="16" name="TextBox 15"/>
           <p:cNvSpPr txBox="1"/>
           <p:nvPr/>
         </p:nvSpPr>
@@ -30313,7 +28996,7 @@
       </p:sp>
       <p:sp>
         <p:nvSpPr>
-          <p:cNvPr id="18" name="Rounded Rectangle 17"/>
+          <p:cNvPr id="17" name="Rounded Rectangle 16"/>
           <p:cNvSpPr/>
           <p:nvPr/>
         </p:nvSpPr>
@@ -30359,7 +29042,7 @@
       </p:sp>
       <p:sp>
         <p:nvSpPr>
-          <p:cNvPr id="19" name="Rectangle 18"/>
+          <p:cNvPr id="18" name="Rectangle 17"/>
           <p:cNvSpPr/>
           <p:nvPr/>
         </p:nvSpPr>
@@ -30403,7 +29086,7 @@
       </p:sp>
       <p:sp>
         <p:nvSpPr>
-          <p:cNvPr id="20" name="TextBox 19"/>
+          <p:cNvPr id="19" name="TextBox 18"/>
           <p:cNvSpPr txBox="1"/>
           <p:nvPr/>
         </p:nvSpPr>
@@ -30450,7 +29133,7 @@
       </p:sp>
       <p:sp>
         <p:nvSpPr>
-          <p:cNvPr id="21" name="TextBox 20"/>
+          <p:cNvPr id="20" name="TextBox 19"/>
           <p:cNvSpPr txBox="1"/>
           <p:nvPr/>
         </p:nvSpPr>
@@ -30497,7 +29180,7 @@
       </p:sp>
       <p:sp>
         <p:nvSpPr>
-          <p:cNvPr id="22" name="Rounded Rectangle 21"/>
+          <p:cNvPr id="21" name="Rounded Rectangle 20"/>
           <p:cNvSpPr/>
           <p:nvPr/>
         </p:nvSpPr>
@@ -30543,7 +29226,7 @@
       </p:sp>
       <p:sp>
         <p:nvSpPr>
-          <p:cNvPr id="23" name="Rectangle 22"/>
+          <p:cNvPr id="22" name="Rectangle 21"/>
           <p:cNvSpPr/>
           <p:nvPr/>
         </p:nvSpPr>
@@ -30587,7 +29270,7 @@
       </p:sp>
       <p:sp>
         <p:nvSpPr>
-          <p:cNvPr id="24" name="TextBox 23"/>
+          <p:cNvPr id="23" name="TextBox 22"/>
           <p:cNvSpPr txBox="1"/>
           <p:nvPr/>
         </p:nvSpPr>
@@ -30634,7 +29317,7 @@
       </p:sp>
       <p:sp>
         <p:nvSpPr>
-          <p:cNvPr id="25" name="TextBox 24"/>
+          <p:cNvPr id="24" name="TextBox 23"/>
           <p:cNvSpPr txBox="1"/>
           <p:nvPr/>
         </p:nvSpPr>
@@ -30773,8 +29456,77 @@
         </p:nvSpPr>
         <p:spPr>
           <a:xfrm>
-            <a:off x="713232" y="6272784"/>
-            <a:ext cx="5597920" cy="219456"/>
+            <a:off x="8240677" y="6272784"/>
+            <a:ext cx="2651760" cy="219456"/>
+          </a:xfrm>
+          <a:prstGeom prst="rect">
+            <a:avLst/>
+          </a:prstGeom>
+          <a:noFill/>
+        </p:spPr>
+        <p:txBody>
+          <a:bodyPr wrap="square" lIns="0" rIns="0" tIns="0" bIns="0" anchor="t">
+            <a:spAutoFit/>
+          </a:bodyPr>
+          <a:lstStyle/>
+          <a:p>
+            <a:pPr algn="r">
+              <a:lnSpc>
+                <a:spcPct val="122000"/>
+              </a:lnSpc>
+              <a:spcBef>
+                <a:spcPts val="0"/>
+              </a:spcBef>
+              <a:spcAft>
+                <a:spcPts val="0"/>
+              </a:spcAft>
+            </a:pPr>
+            <a:r>
+              <a:rPr sz="900" b="0" i="0">
+                <a:solidFill>
+                  <a:srgbClr val="636E85"/>
+                </a:solidFill>
+                <a:latin typeface="Segoe UI"/>
+                <a:ea typeface="Segoe UI"/>
+                <a:cs typeface="Segoe UI"/>
+              </a:rPr>
+              <a:t>Lingesh K  ·  OSI2509030</a:t>
+            </a:r>
+            <a:r>
+              <a:rPr sz="900" b="0" i="0">
+                <a:solidFill>
+                  <a:srgbClr val="141C2E"/>
+                </a:solidFill>
+                <a:latin typeface="Segoe UI"/>
+                <a:ea typeface="Segoe UI"/>
+                <a:cs typeface="Segoe UI"/>
+              </a:rPr>
+              <a:t>     </a:t>
+            </a:r>
+            <a:r>
+              <a:rPr sz="900" b="1" i="0">
+                <a:solidFill>
+                  <a:srgbClr val="0E1E3C"/>
+                </a:solidFill>
+                <a:latin typeface="Segoe UI"/>
+                <a:ea typeface="Segoe UI"/>
+                <a:cs typeface="Segoe UI"/>
+              </a:rPr>
+              <a:t>05</a:t>
+            </a:r>
+          </a:p>
+        </p:txBody>
+      </p:sp>
+      <p:sp>
+        <p:nvSpPr>
+          <p:cNvPr id="5" name="TextBox 4"/>
+          <p:cNvSpPr txBox="1"/>
+          <p:nvPr/>
+        </p:nvSpPr>
+        <p:spPr>
+          <a:xfrm>
+            <a:off x="713232" y="566928"/>
+            <a:ext cx="10765231" cy="219456"/>
           </a:xfrm>
           <a:prstGeom prst="rect">
             <a:avLst/>
@@ -30799,106 +29551,15 @@
               </a:spcAft>
             </a:pPr>
             <a:r>
-              <a:rPr sz="900" b="1" i="0">
-                <a:solidFill>
-                  <a:srgbClr val="0E1E3C"/>
-                </a:solidFill>
-                <a:latin typeface="Segoe UI"/>
-                <a:ea typeface="Segoe UI"/>
-                <a:cs typeface="Segoe UI"/>
-              </a:rPr>
-              <a:t>Unit 3</a:t>
-            </a:r>
-            <a:r>
-              <a:rPr sz="900" b="0" i="0">
-                <a:solidFill>
-                  <a:srgbClr val="939EB3"/>
-                </a:solidFill>
-                <a:latin typeface="Segoe UI"/>
-                <a:ea typeface="Segoe UI"/>
-                <a:cs typeface="Segoe UI"/>
-              </a:rPr>
-              <a:t>  ·  </a:t>
-            </a:r>
-            <a:r>
-              <a:rPr sz="900" b="0" i="0">
-                <a:solidFill>
-                  <a:srgbClr val="636E85"/>
-                </a:solidFill>
-                <a:latin typeface="Segoe UI"/>
-                <a:ea typeface="Segoe UI"/>
-                <a:cs typeface="Segoe UI"/>
-              </a:rPr>
-              <a:t>Business Application in AI</a:t>
-            </a:r>
-          </a:p>
-        </p:txBody>
-      </p:sp>
-      <p:sp>
-        <p:nvSpPr>
-          <p:cNvPr id="5" name="TextBox 4"/>
-          <p:cNvSpPr txBox="1"/>
-          <p:nvPr/>
-        </p:nvSpPr>
-        <p:spPr>
-          <a:xfrm>
-            <a:off x="8240677" y="6272784"/>
-            <a:ext cx="2651760" cy="219456"/>
-          </a:xfrm>
-          <a:prstGeom prst="rect">
-            <a:avLst/>
-          </a:prstGeom>
-          <a:noFill/>
-        </p:spPr>
-        <p:txBody>
-          <a:bodyPr wrap="square" lIns="0" rIns="0" tIns="0" bIns="0" anchor="t">
-            <a:spAutoFit/>
-          </a:bodyPr>
-          <a:lstStyle/>
-          <a:p>
-            <a:pPr algn="r">
-              <a:lnSpc>
-                <a:spcPct val="122000"/>
-              </a:lnSpc>
-              <a:spcBef>
-                <a:spcPts val="0"/>
-              </a:spcBef>
-              <a:spcAft>
-                <a:spcPts val="0"/>
-              </a:spcAft>
-            </a:pPr>
-            <a:r>
-              <a:rPr sz="900" b="0" i="0">
-                <a:solidFill>
-                  <a:srgbClr val="636E85"/>
-                </a:solidFill>
-                <a:latin typeface="Segoe UI"/>
-                <a:ea typeface="Segoe UI"/>
-                <a:cs typeface="Segoe UI"/>
-              </a:rPr>
-              <a:t>Lingesh K  ·  OSI2509030</a:t>
-            </a:r>
-            <a:r>
-              <a:rPr sz="900" b="0" i="0">
-                <a:solidFill>
-                  <a:srgbClr val="141C2E"/>
-                </a:solidFill>
-                <a:latin typeface="Segoe UI"/>
-                <a:ea typeface="Segoe UI"/>
-                <a:cs typeface="Segoe UI"/>
-              </a:rPr>
-              <a:t>     </a:t>
-            </a:r>
-            <a:r>
-              <a:rPr sz="900" b="1" i="0">
-                <a:solidFill>
-                  <a:srgbClr val="0E1E3C"/>
-                </a:solidFill>
-                <a:latin typeface="Segoe UI"/>
-                <a:ea typeface="Segoe UI"/>
-                <a:cs typeface="Segoe UI"/>
-              </a:rPr>
-              <a:t>05</a:t>
+              <a:rPr sz="950" b="1" i="0" spc="160">
+                <a:solidFill>
+                  <a:srgbClr val="3B7AF7"/>
+                </a:solidFill>
+                <a:latin typeface="Segoe UI"/>
+                <a:ea typeface="Segoe UI"/>
+                <a:cs typeface="Segoe UI"/>
+              </a:rPr>
+              <a:t>THE VALUE MODEL</a:t>
             </a:r>
           </a:p>
         </p:txBody>
@@ -30906,53 +29567,6 @@
       <p:sp>
         <p:nvSpPr>
           <p:cNvPr id="6" name="TextBox 5"/>
-          <p:cNvSpPr txBox="1"/>
-          <p:nvPr/>
-        </p:nvSpPr>
-        <p:spPr>
-          <a:xfrm>
-            <a:off x="713232" y="566928"/>
-            <a:ext cx="10765231" cy="219456"/>
-          </a:xfrm>
-          <a:prstGeom prst="rect">
-            <a:avLst/>
-          </a:prstGeom>
-          <a:noFill/>
-        </p:spPr>
-        <p:txBody>
-          <a:bodyPr wrap="square" lIns="0" rIns="0" tIns="0" bIns="0" anchor="t">
-            <a:spAutoFit/>
-          </a:bodyPr>
-          <a:lstStyle/>
-          <a:p>
-            <a:pPr algn="l">
-              <a:lnSpc>
-                <a:spcPct val="122000"/>
-              </a:lnSpc>
-              <a:spcBef>
-                <a:spcPts val="0"/>
-              </a:spcBef>
-              <a:spcAft>
-                <a:spcPts val="0"/>
-              </a:spcAft>
-            </a:pPr>
-            <a:r>
-              <a:rPr sz="950" b="1" i="0" spc="160">
-                <a:solidFill>
-                  <a:srgbClr val="3B7AF7"/>
-                </a:solidFill>
-                <a:latin typeface="Segoe UI"/>
-                <a:ea typeface="Segoe UI"/>
-                <a:cs typeface="Segoe UI"/>
-              </a:rPr>
-              <a:t>THE VALUE MODEL</a:t>
-            </a:r>
-          </a:p>
-        </p:txBody>
-      </p:sp>
-      <p:sp>
-        <p:nvSpPr>
-          <p:cNvPr id="7" name="TextBox 6"/>
           <p:cNvSpPr txBox="1"/>
           <p:nvPr/>
         </p:nvSpPr>
@@ -30999,7 +29613,7 @@
       </p:sp>
       <p:sp>
         <p:nvSpPr>
-          <p:cNvPr id="8" name="Rectangle 7"/>
+          <p:cNvPr id="7" name="Rectangle 6"/>
           <p:cNvSpPr/>
           <p:nvPr/>
         </p:nvSpPr>
@@ -31043,7 +29657,7 @@
       </p:sp>
       <p:sp>
         <p:nvSpPr>
-          <p:cNvPr id="9" name="TextBox 8"/>
+          <p:cNvPr id="8" name="TextBox 7"/>
           <p:cNvSpPr txBox="1"/>
           <p:nvPr/>
         </p:nvSpPr>
@@ -31090,7 +29704,7 @@
       </p:sp>
       <p:sp>
         <p:nvSpPr>
-          <p:cNvPr id="10" name="Rectangle 9"/>
+          <p:cNvPr id="9" name="Rectangle 8"/>
           <p:cNvSpPr/>
           <p:nvPr/>
         </p:nvSpPr>
@@ -31134,7 +29748,7 @@
       </p:sp>
       <p:sp>
         <p:nvSpPr>
-          <p:cNvPr id="11" name="Rounded Rectangle 10"/>
+          <p:cNvPr id="10" name="Rounded Rectangle 9"/>
           <p:cNvSpPr/>
           <p:nvPr/>
         </p:nvSpPr>
@@ -31180,7 +29794,7 @@
       </p:sp>
       <p:sp>
         <p:nvSpPr>
-          <p:cNvPr id="12" name="TextBox 11"/>
+          <p:cNvPr id="11" name="TextBox 10"/>
           <p:cNvSpPr txBox="1"/>
           <p:nvPr/>
         </p:nvSpPr>
@@ -31227,7 +29841,7 @@
       </p:sp>
       <p:sp>
         <p:nvSpPr>
-          <p:cNvPr id="13" name="Rounded Rectangle 12"/>
+          <p:cNvPr id="12" name="Rounded Rectangle 11"/>
           <p:cNvSpPr/>
           <p:nvPr/>
         </p:nvSpPr>
@@ -31273,7 +29887,7 @@
       </p:sp>
       <p:sp>
         <p:nvSpPr>
-          <p:cNvPr id="14" name="TextBox 13"/>
+          <p:cNvPr id="13" name="TextBox 12"/>
           <p:cNvSpPr txBox="1"/>
           <p:nvPr/>
         </p:nvSpPr>
@@ -31320,7 +29934,7 @@
       </p:sp>
       <p:sp>
         <p:nvSpPr>
-          <p:cNvPr id="15" name="Rounded Rectangle 14"/>
+          <p:cNvPr id="14" name="Rounded Rectangle 13"/>
           <p:cNvSpPr/>
           <p:nvPr/>
         </p:nvSpPr>
@@ -31366,7 +29980,7 @@
       </p:sp>
       <p:sp>
         <p:nvSpPr>
-          <p:cNvPr id="16" name="TextBox 15"/>
+          <p:cNvPr id="15" name="TextBox 14"/>
           <p:cNvSpPr txBox="1"/>
           <p:nvPr/>
         </p:nvSpPr>
@@ -31413,7 +30027,7 @@
       </p:sp>
       <p:sp>
         <p:nvSpPr>
-          <p:cNvPr id="17" name="Rounded Rectangle 16"/>
+          <p:cNvPr id="16" name="Rounded Rectangle 15"/>
           <p:cNvSpPr/>
           <p:nvPr/>
         </p:nvSpPr>
@@ -31459,7 +30073,7 @@
       </p:sp>
       <p:sp>
         <p:nvSpPr>
-          <p:cNvPr id="18" name="TextBox 17"/>
+          <p:cNvPr id="17" name="TextBox 16"/>
           <p:cNvSpPr txBox="1"/>
           <p:nvPr/>
         </p:nvSpPr>
@@ -31506,7 +30120,7 @@
       </p:sp>
       <p:sp>
         <p:nvSpPr>
-          <p:cNvPr id="19" name="Rounded Rectangle 18"/>
+          <p:cNvPr id="18" name="Rounded Rectangle 17"/>
           <p:cNvSpPr/>
           <p:nvPr/>
         </p:nvSpPr>
@@ -31560,7 +30174,7 @@
       </p:sp>
       <p:sp>
         <p:nvSpPr>
-          <p:cNvPr id="20" name="Rectangle 19"/>
+          <p:cNvPr id="19" name="Rectangle 18"/>
           <p:cNvSpPr/>
           <p:nvPr/>
         </p:nvSpPr>
@@ -31604,7 +30218,7 @@
       </p:sp>
       <p:sp>
         <p:nvSpPr>
-          <p:cNvPr id="21" name="TextBox 20"/>
+          <p:cNvPr id="20" name="TextBox 19"/>
           <p:cNvSpPr txBox="1"/>
           <p:nvPr/>
         </p:nvSpPr>
@@ -31651,7 +30265,7 @@
       </p:sp>
       <p:sp>
         <p:nvSpPr>
-          <p:cNvPr id="22" name="TextBox 21"/>
+          <p:cNvPr id="21" name="TextBox 20"/>
           <p:cNvSpPr txBox="1"/>
           <p:nvPr/>
         </p:nvSpPr>
@@ -31698,7 +30312,7 @@
       </p:sp>
       <p:sp>
         <p:nvSpPr>
-          <p:cNvPr id="23" name="Rounded Rectangle 22"/>
+          <p:cNvPr id="22" name="Rounded Rectangle 21"/>
           <p:cNvSpPr/>
           <p:nvPr/>
         </p:nvSpPr>
@@ -31752,7 +30366,7 @@
       </p:sp>
       <p:sp>
         <p:nvSpPr>
-          <p:cNvPr id="24" name="Rectangle 23"/>
+          <p:cNvPr id="23" name="Rectangle 22"/>
           <p:cNvSpPr/>
           <p:nvPr/>
         </p:nvSpPr>
@@ -31796,7 +30410,7 @@
       </p:sp>
       <p:sp>
         <p:nvSpPr>
-          <p:cNvPr id="25" name="TextBox 24"/>
+          <p:cNvPr id="24" name="TextBox 23"/>
           <p:cNvSpPr txBox="1"/>
           <p:nvPr/>
         </p:nvSpPr>
@@ -31843,7 +30457,7 @@
       </p:sp>
       <p:sp>
         <p:nvSpPr>
-          <p:cNvPr id="26" name="TextBox 25"/>
+          <p:cNvPr id="25" name="TextBox 24"/>
           <p:cNvSpPr txBox="1"/>
           <p:nvPr/>
         </p:nvSpPr>
@@ -31890,7 +30504,7 @@
       </p:sp>
       <p:sp>
         <p:nvSpPr>
-          <p:cNvPr id="27" name="Rounded Rectangle 26"/>
+          <p:cNvPr id="26" name="Rounded Rectangle 25"/>
           <p:cNvSpPr/>
           <p:nvPr/>
         </p:nvSpPr>
@@ -31944,7 +30558,7 @@
       </p:sp>
       <p:sp>
         <p:nvSpPr>
-          <p:cNvPr id="28" name="Rectangle 27"/>
+          <p:cNvPr id="27" name="Rectangle 26"/>
           <p:cNvSpPr/>
           <p:nvPr/>
         </p:nvSpPr>
@@ -31988,7 +30602,7 @@
       </p:sp>
       <p:sp>
         <p:nvSpPr>
-          <p:cNvPr id="29" name="TextBox 28"/>
+          <p:cNvPr id="28" name="TextBox 27"/>
           <p:cNvSpPr txBox="1"/>
           <p:nvPr/>
         </p:nvSpPr>
@@ -32035,7 +30649,7 @@
       </p:sp>
       <p:sp>
         <p:nvSpPr>
-          <p:cNvPr id="30" name="TextBox 29"/>
+          <p:cNvPr id="29" name="TextBox 28"/>
           <p:cNvSpPr txBox="1"/>
           <p:nvPr/>
         </p:nvSpPr>
@@ -32082,7 +30696,7 @@
       </p:sp>
       <p:sp>
         <p:nvSpPr>
-          <p:cNvPr id="31" name="Rounded Rectangle 30"/>
+          <p:cNvPr id="30" name="Rounded Rectangle 29"/>
           <p:cNvSpPr/>
           <p:nvPr/>
         </p:nvSpPr>
@@ -32136,7 +30750,7 @@
       </p:sp>
       <p:sp>
         <p:nvSpPr>
-          <p:cNvPr id="32" name="Rectangle 31"/>
+          <p:cNvPr id="31" name="Rectangle 30"/>
           <p:cNvSpPr/>
           <p:nvPr/>
         </p:nvSpPr>
@@ -32180,7 +30794,7 @@
       </p:sp>
       <p:sp>
         <p:nvSpPr>
-          <p:cNvPr id="33" name="TextBox 32"/>
+          <p:cNvPr id="32" name="TextBox 31"/>
           <p:cNvSpPr txBox="1"/>
           <p:nvPr/>
         </p:nvSpPr>
@@ -32227,7 +30841,7 @@
       </p:sp>
       <p:sp>
         <p:nvSpPr>
-          <p:cNvPr id="34" name="TextBox 33"/>
+          <p:cNvPr id="33" name="TextBox 32"/>
           <p:cNvSpPr txBox="1"/>
           <p:nvPr/>
         </p:nvSpPr>
@@ -32665,54 +31279,7 @@
       </p:sp>
       <p:sp>
         <p:nvSpPr>
-          <p:cNvPr id="10" name="TextBox 9"/>
-          <p:cNvSpPr txBox="1"/>
-          <p:nvPr/>
-        </p:nvSpPr>
-        <p:spPr>
-          <a:xfrm>
-            <a:off x="987552" y="5943600"/>
-            <a:ext cx="6400800" cy="274320"/>
-          </a:xfrm>
-          <a:prstGeom prst="rect">
-            <a:avLst/>
-          </a:prstGeom>
-          <a:noFill/>
-        </p:spPr>
-        <p:txBody>
-          <a:bodyPr wrap="square" lIns="0" rIns="0" tIns="0" bIns="0" anchor="t">
-            <a:spAutoFit/>
-          </a:bodyPr>
-          <a:lstStyle/>
-          <a:p>
-            <a:pPr algn="l">
-              <a:lnSpc>
-                <a:spcPct val="122000"/>
-              </a:lnSpc>
-              <a:spcBef>
-                <a:spcPts val="0"/>
-              </a:spcBef>
-              <a:spcAft>
-                <a:spcPts val="0"/>
-              </a:spcAft>
-            </a:pPr>
-            <a:r>
-              <a:rPr sz="900" b="1" i="0" spc="160">
-                <a:solidFill>
-                  <a:srgbClr val="6B7FA6"/>
-                </a:solidFill>
-                <a:latin typeface="Segoe UI"/>
-                <a:ea typeface="Segoe UI"/>
-                <a:cs typeface="Segoe UI"/>
-              </a:rPr>
-              <a:t>UNIT 3  ·  BUSINESS APPLICATION IN AI</a:t>
-            </a:r>
-          </a:p>
-        </p:txBody>
-      </p:sp>
-      <p:sp>
-        <p:nvSpPr>
-          <p:cNvPr id="11" name="logo-plate"/>
+          <p:cNvPr id="10" name="logo-plate"/>
           <p:cNvSpPr/>
           <p:nvPr/>
         </p:nvSpPr>
@@ -32758,7 +31325,7 @@
       </p:sp>
       <p:pic>
         <p:nvPicPr>
-          <p:cNvPr id="12" name="college-logo" descr="logo-full.png"/>
+          <p:cNvPr id="11" name="college-logo" descr="logo-full.png"/>
           <p:cNvPicPr>
             <a:picLocks noChangeAspect="1"/>
           </p:cNvPicPr>
@@ -32874,8 +31441,77 @@
         </p:nvSpPr>
         <p:spPr>
           <a:xfrm>
-            <a:off x="713232" y="6272784"/>
-            <a:ext cx="5597920" cy="219456"/>
+            <a:off x="8240677" y="6272784"/>
+            <a:ext cx="2651760" cy="219456"/>
+          </a:xfrm>
+          <a:prstGeom prst="rect">
+            <a:avLst/>
+          </a:prstGeom>
+          <a:noFill/>
+        </p:spPr>
+        <p:txBody>
+          <a:bodyPr wrap="square" lIns="0" rIns="0" tIns="0" bIns="0" anchor="t">
+            <a:spAutoFit/>
+          </a:bodyPr>
+          <a:lstStyle/>
+          <a:p>
+            <a:pPr algn="r">
+              <a:lnSpc>
+                <a:spcPct val="122000"/>
+              </a:lnSpc>
+              <a:spcBef>
+                <a:spcPts val="0"/>
+              </a:spcBef>
+              <a:spcAft>
+                <a:spcPts val="0"/>
+              </a:spcAft>
+            </a:pPr>
+            <a:r>
+              <a:rPr sz="900" b="0" i="0">
+                <a:solidFill>
+                  <a:srgbClr val="636E85"/>
+                </a:solidFill>
+                <a:latin typeface="Segoe UI"/>
+                <a:ea typeface="Segoe UI"/>
+                <a:cs typeface="Segoe UI"/>
+              </a:rPr>
+              <a:t>Lingesh K  ·  OSI2509030</a:t>
+            </a:r>
+            <a:r>
+              <a:rPr sz="900" b="0" i="0">
+                <a:solidFill>
+                  <a:srgbClr val="141C2E"/>
+                </a:solidFill>
+                <a:latin typeface="Segoe UI"/>
+                <a:ea typeface="Segoe UI"/>
+                <a:cs typeface="Segoe UI"/>
+              </a:rPr>
+              <a:t>     </a:t>
+            </a:r>
+            <a:r>
+              <a:rPr sz="900" b="1" i="0">
+                <a:solidFill>
+                  <a:srgbClr val="0E1E3C"/>
+                </a:solidFill>
+                <a:latin typeface="Segoe UI"/>
+                <a:ea typeface="Segoe UI"/>
+                <a:cs typeface="Segoe UI"/>
+              </a:rPr>
+              <a:t>07</a:t>
+            </a:r>
+          </a:p>
+        </p:txBody>
+      </p:sp>
+      <p:sp>
+        <p:nvSpPr>
+          <p:cNvPr id="5" name="TextBox 4"/>
+          <p:cNvSpPr txBox="1"/>
+          <p:nvPr/>
+        </p:nvSpPr>
+        <p:spPr>
+          <a:xfrm>
+            <a:off x="713232" y="566928"/>
+            <a:ext cx="10765231" cy="219456"/>
           </a:xfrm>
           <a:prstGeom prst="rect">
             <a:avLst/>
@@ -32900,106 +31536,15 @@
               </a:spcAft>
             </a:pPr>
             <a:r>
-              <a:rPr sz="900" b="1" i="0">
-                <a:solidFill>
-                  <a:srgbClr val="0E1E3C"/>
-                </a:solidFill>
-                <a:latin typeface="Segoe UI"/>
-                <a:ea typeface="Segoe UI"/>
-                <a:cs typeface="Segoe UI"/>
-              </a:rPr>
-              <a:t>Unit 3</a:t>
-            </a:r>
-            <a:r>
-              <a:rPr sz="900" b="0" i="0">
-                <a:solidFill>
-                  <a:srgbClr val="939EB3"/>
-                </a:solidFill>
-                <a:latin typeface="Segoe UI"/>
-                <a:ea typeface="Segoe UI"/>
-                <a:cs typeface="Segoe UI"/>
-              </a:rPr>
-              <a:t>  ·  </a:t>
-            </a:r>
-            <a:r>
-              <a:rPr sz="900" b="0" i="0">
-                <a:solidFill>
-                  <a:srgbClr val="636E85"/>
-                </a:solidFill>
-                <a:latin typeface="Segoe UI"/>
-                <a:ea typeface="Segoe UI"/>
-                <a:cs typeface="Segoe UI"/>
-              </a:rPr>
-              <a:t>Business Application in AI</a:t>
-            </a:r>
-          </a:p>
-        </p:txBody>
-      </p:sp>
-      <p:sp>
-        <p:nvSpPr>
-          <p:cNvPr id="5" name="TextBox 4"/>
-          <p:cNvSpPr txBox="1"/>
-          <p:nvPr/>
-        </p:nvSpPr>
-        <p:spPr>
-          <a:xfrm>
-            <a:off x="8240677" y="6272784"/>
-            <a:ext cx="2651760" cy="219456"/>
-          </a:xfrm>
-          <a:prstGeom prst="rect">
-            <a:avLst/>
-          </a:prstGeom>
-          <a:noFill/>
-        </p:spPr>
-        <p:txBody>
-          <a:bodyPr wrap="square" lIns="0" rIns="0" tIns="0" bIns="0" anchor="t">
-            <a:spAutoFit/>
-          </a:bodyPr>
-          <a:lstStyle/>
-          <a:p>
-            <a:pPr algn="r">
-              <a:lnSpc>
-                <a:spcPct val="122000"/>
-              </a:lnSpc>
-              <a:spcBef>
-                <a:spcPts val="0"/>
-              </a:spcBef>
-              <a:spcAft>
-                <a:spcPts val="0"/>
-              </a:spcAft>
-            </a:pPr>
-            <a:r>
-              <a:rPr sz="900" b="0" i="0">
-                <a:solidFill>
-                  <a:srgbClr val="636E85"/>
-                </a:solidFill>
-                <a:latin typeface="Segoe UI"/>
-                <a:ea typeface="Segoe UI"/>
-                <a:cs typeface="Segoe UI"/>
-              </a:rPr>
-              <a:t>Lingesh K  ·  OSI2509030</a:t>
-            </a:r>
-            <a:r>
-              <a:rPr sz="900" b="0" i="0">
-                <a:solidFill>
-                  <a:srgbClr val="141C2E"/>
-                </a:solidFill>
-                <a:latin typeface="Segoe UI"/>
-                <a:ea typeface="Segoe UI"/>
-                <a:cs typeface="Segoe UI"/>
-              </a:rPr>
-              <a:t>     </a:t>
-            </a:r>
-            <a:r>
-              <a:rPr sz="900" b="1" i="0">
-                <a:solidFill>
-                  <a:srgbClr val="0E1E3C"/>
-                </a:solidFill>
-                <a:latin typeface="Segoe UI"/>
-                <a:ea typeface="Segoe UI"/>
-                <a:cs typeface="Segoe UI"/>
-              </a:rPr>
-              <a:t>07</a:t>
+              <a:rPr sz="950" b="1" i="0" spc="160">
+                <a:solidFill>
+                  <a:srgbClr val="00B3A4"/>
+                </a:solidFill>
+                <a:latin typeface="Segoe UI"/>
+                <a:ea typeface="Segoe UI"/>
+                <a:cs typeface="Segoe UI"/>
+              </a:rPr>
+              <a:t>MARKETING</a:t>
             </a:r>
           </a:p>
         </p:txBody>
@@ -33007,53 +31552,6 @@
       <p:sp>
         <p:nvSpPr>
           <p:cNvPr id="6" name="TextBox 5"/>
-          <p:cNvSpPr txBox="1"/>
-          <p:nvPr/>
-        </p:nvSpPr>
-        <p:spPr>
-          <a:xfrm>
-            <a:off x="713232" y="566928"/>
-            <a:ext cx="10765231" cy="219456"/>
-          </a:xfrm>
-          <a:prstGeom prst="rect">
-            <a:avLst/>
-          </a:prstGeom>
-          <a:noFill/>
-        </p:spPr>
-        <p:txBody>
-          <a:bodyPr wrap="square" lIns="0" rIns="0" tIns="0" bIns="0" anchor="t">
-            <a:spAutoFit/>
-          </a:bodyPr>
-          <a:lstStyle/>
-          <a:p>
-            <a:pPr algn="l">
-              <a:lnSpc>
-                <a:spcPct val="122000"/>
-              </a:lnSpc>
-              <a:spcBef>
-                <a:spcPts val="0"/>
-              </a:spcBef>
-              <a:spcAft>
-                <a:spcPts val="0"/>
-              </a:spcAft>
-            </a:pPr>
-            <a:r>
-              <a:rPr sz="950" b="1" i="0" spc="160">
-                <a:solidFill>
-                  <a:srgbClr val="00B3A4"/>
-                </a:solidFill>
-                <a:latin typeface="Segoe UI"/>
-                <a:ea typeface="Segoe UI"/>
-                <a:cs typeface="Segoe UI"/>
-              </a:rPr>
-              <a:t>MARKETING</a:t>
-            </a:r>
-          </a:p>
-        </p:txBody>
-      </p:sp>
-      <p:sp>
-        <p:nvSpPr>
-          <p:cNvPr id="7" name="TextBox 6"/>
           <p:cNvSpPr txBox="1"/>
           <p:nvPr/>
         </p:nvSpPr>
@@ -33100,7 +31598,7 @@
       </p:sp>
       <p:sp>
         <p:nvSpPr>
-          <p:cNvPr id="8" name="Rectangle 7"/>
+          <p:cNvPr id="7" name="Rectangle 6"/>
           <p:cNvSpPr/>
           <p:nvPr/>
         </p:nvSpPr>
@@ -33144,7 +31642,7 @@
       </p:sp>
       <p:sp>
         <p:nvSpPr>
-          <p:cNvPr id="9" name="Rounded Rectangle 8"/>
+          <p:cNvPr id="8" name="Rounded Rectangle 7"/>
           <p:cNvSpPr/>
           <p:nvPr/>
         </p:nvSpPr>
@@ -33198,7 +31696,7 @@
       </p:sp>
       <p:sp>
         <p:nvSpPr>
-          <p:cNvPr id="10" name="Rectangle 9"/>
+          <p:cNvPr id="9" name="Rectangle 8"/>
           <p:cNvSpPr/>
           <p:nvPr/>
         </p:nvSpPr>
@@ -33242,7 +31740,7 @@
       </p:sp>
       <p:sp>
         <p:nvSpPr>
-          <p:cNvPr id="11" name="TextBox 10"/>
+          <p:cNvPr id="10" name="TextBox 9"/>
           <p:cNvSpPr txBox="1"/>
           <p:nvPr/>
         </p:nvSpPr>
@@ -33289,7 +31787,7 @@
       </p:sp>
       <p:sp>
         <p:nvSpPr>
-          <p:cNvPr id="12" name="TextBox 11"/>
+          <p:cNvPr id="11" name="TextBox 10"/>
           <p:cNvSpPr txBox="1"/>
           <p:nvPr/>
         </p:nvSpPr>
@@ -33336,7 +31834,7 @@
       </p:sp>
       <p:sp>
         <p:nvSpPr>
-          <p:cNvPr id="13" name="Rounded Rectangle 12"/>
+          <p:cNvPr id="12" name="Rounded Rectangle 11"/>
           <p:cNvSpPr/>
           <p:nvPr/>
         </p:nvSpPr>
@@ -33390,7 +31888,7 @@
       </p:sp>
       <p:sp>
         <p:nvSpPr>
-          <p:cNvPr id="14" name="Rectangle 13"/>
+          <p:cNvPr id="13" name="Rectangle 12"/>
           <p:cNvSpPr/>
           <p:nvPr/>
         </p:nvSpPr>
@@ -33434,7 +31932,7 @@
       </p:sp>
       <p:sp>
         <p:nvSpPr>
-          <p:cNvPr id="15" name="TextBox 14"/>
+          <p:cNvPr id="14" name="TextBox 13"/>
           <p:cNvSpPr txBox="1"/>
           <p:nvPr/>
         </p:nvSpPr>
@@ -33481,7 +31979,7 @@
       </p:sp>
       <p:sp>
         <p:nvSpPr>
-          <p:cNvPr id="16" name="TextBox 15"/>
+          <p:cNvPr id="15" name="TextBox 14"/>
           <p:cNvSpPr txBox="1"/>
           <p:nvPr/>
         </p:nvSpPr>
@@ -33528,7 +32026,7 @@
       </p:sp>
       <p:sp>
         <p:nvSpPr>
-          <p:cNvPr id="17" name="Rounded Rectangle 16"/>
+          <p:cNvPr id="16" name="Rounded Rectangle 15"/>
           <p:cNvSpPr/>
           <p:nvPr/>
         </p:nvSpPr>
@@ -33582,7 +32080,7 @@
       </p:sp>
       <p:sp>
         <p:nvSpPr>
-          <p:cNvPr id="18" name="Rectangle 17"/>
+          <p:cNvPr id="17" name="Rectangle 16"/>
           <p:cNvSpPr/>
           <p:nvPr/>
         </p:nvSpPr>
@@ -33626,7 +32124,7 @@
       </p:sp>
       <p:sp>
         <p:nvSpPr>
-          <p:cNvPr id="19" name="TextBox 18"/>
+          <p:cNvPr id="18" name="TextBox 17"/>
           <p:cNvSpPr txBox="1"/>
           <p:nvPr/>
         </p:nvSpPr>
@@ -33673,7 +32171,7 @@
       </p:sp>
       <p:sp>
         <p:nvSpPr>
-          <p:cNvPr id="20" name="TextBox 19"/>
+          <p:cNvPr id="19" name="TextBox 18"/>
           <p:cNvSpPr txBox="1"/>
           <p:nvPr/>
         </p:nvSpPr>
@@ -33720,7 +32218,7 @@
       </p:sp>
       <p:sp>
         <p:nvSpPr>
-          <p:cNvPr id="21" name="Rounded Rectangle 20"/>
+          <p:cNvPr id="20" name="Rounded Rectangle 19"/>
           <p:cNvSpPr/>
           <p:nvPr/>
         </p:nvSpPr>
@@ -33774,7 +32272,7 @@
       </p:sp>
       <p:sp>
         <p:nvSpPr>
-          <p:cNvPr id="22" name="Rectangle 21"/>
+          <p:cNvPr id="21" name="Rectangle 20"/>
           <p:cNvSpPr/>
           <p:nvPr/>
         </p:nvSpPr>
@@ -33818,7 +32316,7 @@
       </p:sp>
       <p:sp>
         <p:nvSpPr>
-          <p:cNvPr id="23" name="TextBox 22"/>
+          <p:cNvPr id="22" name="TextBox 21"/>
           <p:cNvSpPr txBox="1"/>
           <p:nvPr/>
         </p:nvSpPr>
@@ -33865,7 +32363,7 @@
       </p:sp>
       <p:sp>
         <p:nvSpPr>
-          <p:cNvPr id="24" name="TextBox 23"/>
+          <p:cNvPr id="23" name="TextBox 22"/>
           <p:cNvSpPr txBox="1"/>
           <p:nvPr/>
         </p:nvSpPr>
@@ -33912,7 +32410,7 @@
       </p:sp>
       <p:sp>
         <p:nvSpPr>
-          <p:cNvPr id="25" name="Rounded Rectangle 24"/>
+          <p:cNvPr id="24" name="Rounded Rectangle 23"/>
           <p:cNvSpPr/>
           <p:nvPr/>
         </p:nvSpPr>
@@ -33966,7 +32464,7 @@
       </p:sp>
       <p:sp>
         <p:nvSpPr>
-          <p:cNvPr id="26" name="Rectangle 25"/>
+          <p:cNvPr id="25" name="Rectangle 24"/>
           <p:cNvSpPr/>
           <p:nvPr/>
         </p:nvSpPr>
@@ -34010,7 +32508,7 @@
       </p:sp>
       <p:sp>
         <p:nvSpPr>
-          <p:cNvPr id="27" name="TextBox 26"/>
+          <p:cNvPr id="26" name="TextBox 25"/>
           <p:cNvSpPr txBox="1"/>
           <p:nvPr/>
         </p:nvSpPr>
@@ -34057,7 +32555,7 @@
       </p:sp>
       <p:sp>
         <p:nvSpPr>
-          <p:cNvPr id="28" name="TextBox 27"/>
+          <p:cNvPr id="27" name="TextBox 26"/>
           <p:cNvSpPr txBox="1"/>
           <p:nvPr/>
         </p:nvSpPr>
@@ -34104,7 +32602,7 @@
       </p:sp>
       <p:sp>
         <p:nvSpPr>
-          <p:cNvPr id="29" name="Rounded Rectangle 28"/>
+          <p:cNvPr id="28" name="Rounded Rectangle 27"/>
           <p:cNvSpPr/>
           <p:nvPr/>
         </p:nvSpPr>
@@ -34158,7 +32656,7 @@
       </p:sp>
       <p:sp>
         <p:nvSpPr>
-          <p:cNvPr id="30" name="Rectangle 29"/>
+          <p:cNvPr id="29" name="Rectangle 28"/>
           <p:cNvSpPr/>
           <p:nvPr/>
         </p:nvSpPr>
@@ -34202,7 +32700,7 @@
       </p:sp>
       <p:sp>
         <p:nvSpPr>
-          <p:cNvPr id="31" name="TextBox 30"/>
+          <p:cNvPr id="30" name="TextBox 29"/>
           <p:cNvSpPr txBox="1"/>
           <p:nvPr/>
         </p:nvSpPr>
@@ -34249,7 +32747,7 @@
       </p:sp>
       <p:sp>
         <p:nvSpPr>
-          <p:cNvPr id="32" name="TextBox 31"/>
+          <p:cNvPr id="31" name="TextBox 30"/>
           <p:cNvSpPr txBox="1"/>
           <p:nvPr/>
         </p:nvSpPr>
@@ -34388,8 +32886,77 @@
         </p:nvSpPr>
         <p:spPr>
           <a:xfrm>
-            <a:off x="713232" y="6272784"/>
-            <a:ext cx="5597920" cy="219456"/>
+            <a:off x="8240677" y="6272784"/>
+            <a:ext cx="2651760" cy="219456"/>
+          </a:xfrm>
+          <a:prstGeom prst="rect">
+            <a:avLst/>
+          </a:prstGeom>
+          <a:noFill/>
+        </p:spPr>
+        <p:txBody>
+          <a:bodyPr wrap="square" lIns="0" rIns="0" tIns="0" bIns="0" anchor="t">
+            <a:spAutoFit/>
+          </a:bodyPr>
+          <a:lstStyle/>
+          <a:p>
+            <a:pPr algn="r">
+              <a:lnSpc>
+                <a:spcPct val="122000"/>
+              </a:lnSpc>
+              <a:spcBef>
+                <a:spcPts val="0"/>
+              </a:spcBef>
+              <a:spcAft>
+                <a:spcPts val="0"/>
+              </a:spcAft>
+            </a:pPr>
+            <a:r>
+              <a:rPr sz="900" b="0" i="0">
+                <a:solidFill>
+                  <a:srgbClr val="636E85"/>
+                </a:solidFill>
+                <a:latin typeface="Segoe UI"/>
+                <a:ea typeface="Segoe UI"/>
+                <a:cs typeface="Segoe UI"/>
+              </a:rPr>
+              <a:t>Lingesh K  ·  OSI2509030</a:t>
+            </a:r>
+            <a:r>
+              <a:rPr sz="900" b="0" i="0">
+                <a:solidFill>
+                  <a:srgbClr val="141C2E"/>
+                </a:solidFill>
+                <a:latin typeface="Segoe UI"/>
+                <a:ea typeface="Segoe UI"/>
+                <a:cs typeface="Segoe UI"/>
+              </a:rPr>
+              <a:t>     </a:t>
+            </a:r>
+            <a:r>
+              <a:rPr sz="900" b="1" i="0">
+                <a:solidFill>
+                  <a:srgbClr val="0E1E3C"/>
+                </a:solidFill>
+                <a:latin typeface="Segoe UI"/>
+                <a:ea typeface="Segoe UI"/>
+                <a:cs typeface="Segoe UI"/>
+              </a:rPr>
+              <a:t>08</a:t>
+            </a:r>
+          </a:p>
+        </p:txBody>
+      </p:sp>
+      <p:sp>
+        <p:nvSpPr>
+          <p:cNvPr id="5" name="TextBox 4"/>
+          <p:cNvSpPr txBox="1"/>
+          <p:nvPr/>
+        </p:nvSpPr>
+        <p:spPr>
+          <a:xfrm>
+            <a:off x="713232" y="566928"/>
+            <a:ext cx="10765231" cy="219456"/>
           </a:xfrm>
           <a:prstGeom prst="rect">
             <a:avLst/>
@@ -34414,106 +32981,15 @@
               </a:spcAft>
             </a:pPr>
             <a:r>
-              <a:rPr sz="900" b="1" i="0">
-                <a:solidFill>
-                  <a:srgbClr val="0E1E3C"/>
-                </a:solidFill>
-                <a:latin typeface="Segoe UI"/>
-                <a:ea typeface="Segoe UI"/>
-                <a:cs typeface="Segoe UI"/>
-              </a:rPr>
-              <a:t>Unit 3</a:t>
-            </a:r>
-            <a:r>
-              <a:rPr sz="900" b="0" i="0">
-                <a:solidFill>
-                  <a:srgbClr val="939EB3"/>
-                </a:solidFill>
-                <a:latin typeface="Segoe UI"/>
-                <a:ea typeface="Segoe UI"/>
-                <a:cs typeface="Segoe UI"/>
-              </a:rPr>
-              <a:t>  ·  </a:t>
-            </a:r>
-            <a:r>
-              <a:rPr sz="900" b="0" i="0">
-                <a:solidFill>
-                  <a:srgbClr val="636E85"/>
-                </a:solidFill>
-                <a:latin typeface="Segoe UI"/>
-                <a:ea typeface="Segoe UI"/>
-                <a:cs typeface="Segoe UI"/>
-              </a:rPr>
-              <a:t>Business Application in AI</a:t>
-            </a:r>
-          </a:p>
-        </p:txBody>
-      </p:sp>
-      <p:sp>
-        <p:nvSpPr>
-          <p:cNvPr id="5" name="TextBox 4"/>
-          <p:cNvSpPr txBox="1"/>
-          <p:nvPr/>
-        </p:nvSpPr>
-        <p:spPr>
-          <a:xfrm>
-            <a:off x="8240677" y="6272784"/>
-            <a:ext cx="2651760" cy="219456"/>
-          </a:xfrm>
-          <a:prstGeom prst="rect">
-            <a:avLst/>
-          </a:prstGeom>
-          <a:noFill/>
-        </p:spPr>
-        <p:txBody>
-          <a:bodyPr wrap="square" lIns="0" rIns="0" tIns="0" bIns="0" anchor="t">
-            <a:spAutoFit/>
-          </a:bodyPr>
-          <a:lstStyle/>
-          <a:p>
-            <a:pPr algn="r">
-              <a:lnSpc>
-                <a:spcPct val="122000"/>
-              </a:lnSpc>
-              <a:spcBef>
-                <a:spcPts val="0"/>
-              </a:spcBef>
-              <a:spcAft>
-                <a:spcPts val="0"/>
-              </a:spcAft>
-            </a:pPr>
-            <a:r>
-              <a:rPr sz="900" b="0" i="0">
-                <a:solidFill>
-                  <a:srgbClr val="636E85"/>
-                </a:solidFill>
-                <a:latin typeface="Segoe UI"/>
-                <a:ea typeface="Segoe UI"/>
-                <a:cs typeface="Segoe UI"/>
-              </a:rPr>
-              <a:t>Lingesh K  ·  OSI2509030</a:t>
-            </a:r>
-            <a:r>
-              <a:rPr sz="900" b="0" i="0">
-                <a:solidFill>
-                  <a:srgbClr val="141C2E"/>
-                </a:solidFill>
-                <a:latin typeface="Segoe UI"/>
-                <a:ea typeface="Segoe UI"/>
-                <a:cs typeface="Segoe UI"/>
-              </a:rPr>
-              <a:t>     </a:t>
-            </a:r>
-            <a:r>
-              <a:rPr sz="900" b="1" i="0">
-                <a:solidFill>
-                  <a:srgbClr val="0E1E3C"/>
-                </a:solidFill>
-                <a:latin typeface="Segoe UI"/>
-                <a:ea typeface="Segoe UI"/>
-                <a:cs typeface="Segoe UI"/>
-              </a:rPr>
-              <a:t>08</a:t>
+              <a:rPr sz="950" b="1" i="0" spc="160">
+                <a:solidFill>
+                  <a:srgbClr val="00B3A4"/>
+                </a:solidFill>
+                <a:latin typeface="Segoe UI"/>
+                <a:ea typeface="Segoe UI"/>
+                <a:cs typeface="Segoe UI"/>
+              </a:rPr>
+              <a:t>MARKETING OUTCOMES</a:t>
             </a:r>
           </a:p>
         </p:txBody>
@@ -34521,53 +32997,6 @@
       <p:sp>
         <p:nvSpPr>
           <p:cNvPr id="6" name="TextBox 5"/>
-          <p:cNvSpPr txBox="1"/>
-          <p:nvPr/>
-        </p:nvSpPr>
-        <p:spPr>
-          <a:xfrm>
-            <a:off x="713232" y="566928"/>
-            <a:ext cx="10765231" cy="219456"/>
-          </a:xfrm>
-          <a:prstGeom prst="rect">
-            <a:avLst/>
-          </a:prstGeom>
-          <a:noFill/>
-        </p:spPr>
-        <p:txBody>
-          <a:bodyPr wrap="square" lIns="0" rIns="0" tIns="0" bIns="0" anchor="t">
-            <a:spAutoFit/>
-          </a:bodyPr>
-          <a:lstStyle/>
-          <a:p>
-            <a:pPr algn="l">
-              <a:lnSpc>
-                <a:spcPct val="122000"/>
-              </a:lnSpc>
-              <a:spcBef>
-                <a:spcPts val="0"/>
-              </a:spcBef>
-              <a:spcAft>
-                <a:spcPts val="0"/>
-              </a:spcAft>
-            </a:pPr>
-            <a:r>
-              <a:rPr sz="950" b="1" i="0" spc="160">
-                <a:solidFill>
-                  <a:srgbClr val="00B3A4"/>
-                </a:solidFill>
-                <a:latin typeface="Segoe UI"/>
-                <a:ea typeface="Segoe UI"/>
-                <a:cs typeface="Segoe UI"/>
-              </a:rPr>
-              <a:t>MARKETING OUTCOMES</a:t>
-            </a:r>
-          </a:p>
-        </p:txBody>
-      </p:sp>
-      <p:sp>
-        <p:nvSpPr>
-          <p:cNvPr id="7" name="TextBox 6"/>
           <p:cNvSpPr txBox="1"/>
           <p:nvPr/>
         </p:nvSpPr>
@@ -34614,7 +33043,7 @@
       </p:sp>
       <p:sp>
         <p:nvSpPr>
-          <p:cNvPr id="8" name="Rectangle 7"/>
+          <p:cNvPr id="7" name="Rectangle 6"/>
           <p:cNvSpPr/>
           <p:nvPr/>
         </p:nvSpPr>
@@ -34658,7 +33087,7 @@
       </p:sp>
       <p:sp>
         <p:nvSpPr>
-          <p:cNvPr id="9" name="TextBox 8"/>
+          <p:cNvPr id="8" name="TextBox 7"/>
           <p:cNvSpPr txBox="1"/>
           <p:nvPr/>
         </p:nvSpPr>
@@ -34705,7 +33134,7 @@
       </p:sp>
       <p:sp>
         <p:nvSpPr>
-          <p:cNvPr id="10" name="Rounded Rectangle 9"/>
+          <p:cNvPr id="9" name="Rounded Rectangle 8"/>
           <p:cNvSpPr/>
           <p:nvPr/>
         </p:nvSpPr>
@@ -34759,7 +33188,7 @@
       </p:sp>
       <p:sp>
         <p:nvSpPr>
-          <p:cNvPr id="11" name="TextBox 10"/>
+          <p:cNvPr id="10" name="TextBox 9"/>
           <p:cNvSpPr txBox="1"/>
           <p:nvPr/>
         </p:nvSpPr>
@@ -34806,7 +33235,7 @@
       </p:sp>
       <p:sp>
         <p:nvSpPr>
-          <p:cNvPr id="12" name="Rectangle 11"/>
+          <p:cNvPr id="11" name="Rectangle 10"/>
           <p:cNvSpPr/>
           <p:nvPr/>
         </p:nvSpPr>
@@ -34850,7 +33279,7 @@
       </p:sp>
       <p:sp>
         <p:nvSpPr>
-          <p:cNvPr id="13" name="TextBox 12"/>
+          <p:cNvPr id="12" name="TextBox 11"/>
           <p:cNvSpPr txBox="1"/>
           <p:nvPr/>
         </p:nvSpPr>
@@ -34897,7 +33326,7 @@
       </p:sp>
       <p:sp>
         <p:nvSpPr>
-          <p:cNvPr id="14" name="TextBox 13"/>
+          <p:cNvPr id="13" name="TextBox 12"/>
           <p:cNvSpPr txBox="1"/>
           <p:nvPr/>
         </p:nvSpPr>
@@ -34944,7 +33373,7 @@
       </p:sp>
       <p:sp>
         <p:nvSpPr>
-          <p:cNvPr id="15" name="Rounded Rectangle 14"/>
+          <p:cNvPr id="14" name="Rounded Rectangle 13"/>
           <p:cNvSpPr/>
           <p:nvPr/>
         </p:nvSpPr>
@@ -34998,7 +33427,7 @@
       </p:sp>
       <p:sp>
         <p:nvSpPr>
-          <p:cNvPr id="16" name="TextBox 15"/>
+          <p:cNvPr id="15" name="TextBox 14"/>
           <p:cNvSpPr txBox="1"/>
           <p:nvPr/>
         </p:nvSpPr>
@@ -35045,7 +33474,7 @@
       </p:sp>
       <p:sp>
         <p:nvSpPr>
-          <p:cNvPr id="17" name="Rectangle 16"/>
+          <p:cNvPr id="16" name="Rectangle 15"/>
           <p:cNvSpPr/>
           <p:nvPr/>
         </p:nvSpPr>
@@ -35089,7 +33518,7 @@
       </p:sp>
       <p:sp>
         <p:nvSpPr>
-          <p:cNvPr id="18" name="TextBox 17"/>
+          <p:cNvPr id="17" name="TextBox 16"/>
           <p:cNvSpPr txBox="1"/>
           <p:nvPr/>
         </p:nvSpPr>
@@ -35136,7 +33565,7 @@
       </p:sp>
       <p:sp>
         <p:nvSpPr>
-          <p:cNvPr id="19" name="TextBox 18"/>
+          <p:cNvPr id="18" name="TextBox 17"/>
           <p:cNvSpPr txBox="1"/>
           <p:nvPr/>
         </p:nvSpPr>
@@ -35183,7 +33612,7 @@
       </p:sp>
       <p:sp>
         <p:nvSpPr>
-          <p:cNvPr id="20" name="Rounded Rectangle 19"/>
+          <p:cNvPr id="19" name="Rounded Rectangle 18"/>
           <p:cNvSpPr/>
           <p:nvPr/>
         </p:nvSpPr>
@@ -35237,7 +33666,7 @@
       </p:sp>
       <p:sp>
         <p:nvSpPr>
-          <p:cNvPr id="21" name="TextBox 20"/>
+          <p:cNvPr id="20" name="TextBox 19"/>
           <p:cNvSpPr txBox="1"/>
           <p:nvPr/>
         </p:nvSpPr>
@@ -35284,7 +33713,7 @@
       </p:sp>
       <p:sp>
         <p:nvSpPr>
-          <p:cNvPr id="22" name="Rectangle 21"/>
+          <p:cNvPr id="21" name="Rectangle 20"/>
           <p:cNvSpPr/>
           <p:nvPr/>
         </p:nvSpPr>
@@ -35328,7 +33757,7 @@
       </p:sp>
       <p:sp>
         <p:nvSpPr>
-          <p:cNvPr id="23" name="TextBox 22"/>
+          <p:cNvPr id="22" name="TextBox 21"/>
           <p:cNvSpPr txBox="1"/>
           <p:nvPr/>
         </p:nvSpPr>
@@ -35375,7 +33804,7 @@
       </p:sp>
       <p:sp>
         <p:nvSpPr>
-          <p:cNvPr id="24" name="TextBox 23"/>
+          <p:cNvPr id="23" name="TextBox 22"/>
           <p:cNvSpPr txBox="1"/>
           <p:nvPr/>
         </p:nvSpPr>
@@ -35422,7 +33851,7 @@
       </p:sp>
       <p:sp>
         <p:nvSpPr>
-          <p:cNvPr id="25" name="Rounded Rectangle 24"/>
+          <p:cNvPr id="24" name="Rounded Rectangle 23"/>
           <p:cNvSpPr/>
           <p:nvPr/>
         </p:nvSpPr>
@@ -35880,54 +34309,7 @@
       </p:sp>
       <p:sp>
         <p:nvSpPr>
-          <p:cNvPr id="10" name="TextBox 9"/>
-          <p:cNvSpPr txBox="1"/>
-          <p:nvPr/>
-        </p:nvSpPr>
-        <p:spPr>
-          <a:xfrm>
-            <a:off x="987552" y="5943600"/>
-            <a:ext cx="6400800" cy="274320"/>
-          </a:xfrm>
-          <a:prstGeom prst="rect">
-            <a:avLst/>
-          </a:prstGeom>
-          <a:noFill/>
-        </p:spPr>
-        <p:txBody>
-          <a:bodyPr wrap="square" lIns="0" rIns="0" tIns="0" bIns="0" anchor="t">
-            <a:spAutoFit/>
-          </a:bodyPr>
-          <a:lstStyle/>
-          <a:p>
-            <a:pPr algn="l">
-              <a:lnSpc>
-                <a:spcPct val="122000"/>
-              </a:lnSpc>
-              <a:spcBef>
-                <a:spcPts val="0"/>
-              </a:spcBef>
-              <a:spcAft>
-                <a:spcPts val="0"/>
-              </a:spcAft>
-            </a:pPr>
-            <a:r>
-              <a:rPr sz="900" b="1" i="0" spc="160">
-                <a:solidFill>
-                  <a:srgbClr val="6B7FA6"/>
-                </a:solidFill>
-                <a:latin typeface="Segoe UI"/>
-                <a:ea typeface="Segoe UI"/>
-                <a:cs typeface="Segoe UI"/>
-              </a:rPr>
-              <a:t>UNIT 3  ·  BUSINESS APPLICATION IN AI</a:t>
-            </a:r>
-          </a:p>
-        </p:txBody>
-      </p:sp>
-      <p:sp>
-        <p:nvSpPr>
-          <p:cNvPr id="11" name="logo-plate"/>
+          <p:cNvPr id="10" name="logo-plate"/>
           <p:cNvSpPr/>
           <p:nvPr/>
         </p:nvSpPr>
@@ -35973,7 +34355,7 @@
       </p:sp>
       <p:pic>
         <p:nvPicPr>
-          <p:cNvPr id="12" name="college-logo" descr="logo-full.png"/>
+          <p:cNvPr id="11" name="college-logo" descr="logo-full.png"/>
           <p:cNvPicPr>
             <a:picLocks noChangeAspect="1"/>
           </p:cNvPicPr>

--- a/Unit 3 - Business Application in AI.pptx
+++ b/Unit 3 - Business Application in AI.pptx
@@ -3908,80 +3908,13 @@
       </p:pic>
       <p:sp>
         <p:nvSpPr>
-          <p:cNvPr id="9" name="Rounded Rectangle 8"/>
-          <p:cNvSpPr/>
-          <p:nvPr/>
-        </p:nvSpPr>
-        <p:spPr>
-          <a:xfrm>
-            <a:off x="932688" y="1572768"/>
-            <a:ext cx="1481328" cy="384048"/>
-          </a:xfrm>
-          <a:prstGeom prst="roundRect">
-            <a:avLst>
-              <a:gd name="adj" fmla="val 50000"/>
-            </a:avLst>
-          </a:prstGeom>
-          <a:noFill/>
-          <a:ln w="15875">
-            <a:solidFill>
-              <a:srgbClr val="3B7AF7"/>
-            </a:solidFill>
-          </a:ln>
-          <a:effectLst/>
-        </p:spPr>
-        <p:style>
-          <a:lnRef idx="1">
-            <a:schemeClr val="accent1"/>
-          </a:lnRef>
-          <a:fillRef idx="3">
-            <a:schemeClr val="accent1"/>
-          </a:fillRef>
-          <a:effectRef idx="2">
-            <a:schemeClr val="accent1"/>
-          </a:effectRef>
-          <a:fontRef idx="minor">
-            <a:schemeClr val="lt1"/>
-          </a:fontRef>
-        </p:style>
-        <p:txBody>
-          <a:bodyPr rtlCol="0" anchor="ctr" wrap="square"/>
-          <a:lstStyle/>
-          <a:p>
-            <a:pPr algn="ctr">
-              <a:lnSpc>
-                <a:spcPct val="122000"/>
-              </a:lnSpc>
-              <a:spcBef>
-                <a:spcPts val="0"/>
-              </a:spcBef>
-              <a:spcAft>
-                <a:spcPts val="0"/>
-              </a:spcAft>
-            </a:pPr>
-            <a:r>
-              <a:rPr sz="1050" b="1" i="0" spc="160">
-                <a:solidFill>
-                  <a:srgbClr val="FFFFFF"/>
-                </a:solidFill>
-                <a:latin typeface="Segoe UI"/>
-                <a:ea typeface="Segoe UI"/>
-                <a:cs typeface="Segoe UI"/>
-              </a:rPr>
-              <a:t>UNIT 03</a:t>
-            </a:r>
-          </a:p>
-        </p:txBody>
-      </p:sp>
-      <p:sp>
-        <p:nvSpPr>
-          <p:cNvPr id="10" name="TextBox 9"/>
+          <p:cNvPr id="9" name="TextBox 8"/>
           <p:cNvSpPr txBox="1"/>
           <p:nvPr/>
         </p:nvSpPr>
         <p:spPr>
           <a:xfrm>
-            <a:off x="932688" y="2304288"/>
+            <a:off x="932688" y="2414535"/>
             <a:ext cx="7406640" cy="880843"/>
           </a:xfrm>
           <a:prstGeom prst="rect">
@@ -4022,13 +3955,13 @@
       </p:sp>
       <p:sp>
         <p:nvSpPr>
-          <p:cNvPr id="11" name="Rectangle 10"/>
+          <p:cNvPr id="10" name="Rectangle 9"/>
           <p:cNvSpPr/>
           <p:nvPr/>
         </p:nvSpPr>
         <p:spPr>
           <a:xfrm>
-            <a:off x="932688" y="3203419"/>
+            <a:off x="932688" y="3313666"/>
             <a:ext cx="658368" cy="45720"/>
           </a:xfrm>
           <a:prstGeom prst="rect">
@@ -4066,14 +3999,14 @@
       </p:sp>
       <p:sp>
         <p:nvSpPr>
-          <p:cNvPr id="12" name="TextBox 11"/>
+          <p:cNvPr id="11" name="TextBox 10"/>
           <p:cNvSpPr txBox="1"/>
           <p:nvPr/>
         </p:nvSpPr>
         <p:spPr>
           <a:xfrm>
-            <a:off x="932688" y="3514315"/>
-            <a:ext cx="6766560" cy="960120"/>
+            <a:off x="932688" y="3624562"/>
+            <a:ext cx="6766560" cy="745750"/>
           </a:xfrm>
           <a:prstGeom prst="rect">
             <a:avLst/>
@@ -4113,13 +4046,13 @@
       </p:sp>
       <p:sp>
         <p:nvSpPr>
-          <p:cNvPr id="13" name="Rounded Rectangle 12"/>
+          <p:cNvPr id="12" name="Rounded Rectangle 11"/>
           <p:cNvSpPr/>
           <p:nvPr/>
         </p:nvSpPr>
         <p:spPr>
           <a:xfrm>
-            <a:off x="932688" y="4882896"/>
+            <a:off x="932688" y="4644632"/>
             <a:ext cx="974126" cy="329184"/>
           </a:xfrm>
           <a:prstGeom prst="roundRect">
@@ -4180,13 +4113,13 @@
       </p:sp>
       <p:sp>
         <p:nvSpPr>
-          <p:cNvPr id="14" name="Rounded Rectangle 13"/>
+          <p:cNvPr id="13" name="Rounded Rectangle 12"/>
           <p:cNvSpPr/>
           <p:nvPr/>
         </p:nvSpPr>
         <p:spPr>
           <a:xfrm>
-            <a:off x="2034830" y="4882896"/>
+            <a:off x="2034830" y="4644632"/>
             <a:ext cx="815178" cy="329184"/>
           </a:xfrm>
           <a:prstGeom prst="roundRect">
@@ -4247,13 +4180,13 @@
       </p:sp>
       <p:sp>
         <p:nvSpPr>
-          <p:cNvPr id="15" name="Rounded Rectangle 14"/>
+          <p:cNvPr id="14" name="Rounded Rectangle 13"/>
           <p:cNvSpPr/>
           <p:nvPr/>
         </p:nvSpPr>
         <p:spPr>
           <a:xfrm>
-            <a:off x="2978024" y="4882896"/>
+            <a:off x="2978024" y="4644632"/>
             <a:ext cx="555225" cy="329184"/>
           </a:xfrm>
           <a:prstGeom prst="roundRect">
@@ -4314,13 +4247,13 @@
       </p:sp>
       <p:sp>
         <p:nvSpPr>
-          <p:cNvPr id="16" name="Rounded Rectangle 15"/>
+          <p:cNvPr id="15" name="Rounded Rectangle 14"/>
           <p:cNvSpPr/>
           <p:nvPr/>
         </p:nvSpPr>
         <p:spPr>
           <a:xfrm>
-            <a:off x="3661266" y="4882896"/>
+            <a:off x="3661266" y="4644632"/>
             <a:ext cx="1009647" cy="329184"/>
           </a:xfrm>
           <a:prstGeom prst="roundRect">
@@ -4381,13 +4314,13 @@
       </p:sp>
       <p:sp>
         <p:nvSpPr>
-          <p:cNvPr id="17" name="Rounded Rectangle 16"/>
+          <p:cNvPr id="16" name="Rounded Rectangle 15"/>
           <p:cNvSpPr/>
           <p:nvPr/>
         </p:nvSpPr>
         <p:spPr>
           <a:xfrm>
-            <a:off x="4798929" y="4882896"/>
+            <a:off x="4798929" y="4644632"/>
             <a:ext cx="938259" cy="329184"/>
           </a:xfrm>
           <a:prstGeom prst="roundRect">
@@ -4448,7 +4381,7 @@
       </p:sp>
       <p:sp>
         <p:nvSpPr>
-          <p:cNvPr id="18" name="Rectangle 17"/>
+          <p:cNvPr id="17" name="Rectangle 16"/>
           <p:cNvSpPr/>
           <p:nvPr/>
         </p:nvSpPr>
@@ -4492,7 +4425,7 @@
       </p:sp>
       <p:sp>
         <p:nvSpPr>
-          <p:cNvPr id="19" name="TextBox 18"/>
+          <p:cNvPr id="18" name="TextBox 17"/>
           <p:cNvSpPr txBox="1"/>
           <p:nvPr/>
         </p:nvSpPr>
